--- a/ポートフォリオ_秋池.pptx
+++ b/ポートフォリオ_秋池.pptx
@@ -212,7 +212,7 @@
           <a:p>
             <a:fld id="{7DBB8152-7813-4DD7-8C30-6943339385CA}" type="datetimeFigureOut">
               <a:rPr kumimoji="1" lang="ja-JP" altLang="en-US" smtClean="0"/>
-              <a:t>2025/11/19</a:t>
+              <a:t>2025/11/26</a:t>
             </a:fld>
             <a:endParaRPr kumimoji="1" lang="ja-JP" altLang="en-US"/>
           </a:p>
@@ -941,7 +941,7 @@
           <a:p>
             <a:fld id="{48522A55-22D5-47DA-B376-12D74840BD06}" type="datetime1">
               <a:rPr kumimoji="1" lang="ja-JP" altLang="en-US" smtClean="0"/>
-              <a:t>2025/11/19</a:t>
+              <a:t>2025/11/26</a:t>
             </a:fld>
             <a:endParaRPr kumimoji="1" lang="ja-JP" altLang="en-US"/>
           </a:p>
@@ -1136,7 +1136,7 @@
           <a:p>
             <a:fld id="{E1847F1A-3080-4AE7-9245-F405EDE1DDF3}" type="datetime1">
               <a:rPr lang="ja-JP" altLang="en-US" smtClean="0"/>
-              <a:t>2025/11/19</a:t>
+              <a:t>2025/11/26</a:t>
             </a:fld>
             <a:endParaRPr lang="ja-JP" altLang="en-US"/>
           </a:p>
@@ -1506,7 +1506,7 @@
           <a:p>
             <a:fld id="{F1FA71E0-FC87-437A-9C14-FB30BE460721}" type="datetime1">
               <a:rPr lang="ja-JP" altLang="en-US" smtClean="0"/>
-              <a:t>2025/11/19</a:t>
+              <a:t>2025/11/26</a:t>
             </a:fld>
             <a:endParaRPr lang="ja-JP" altLang="en-US"/>
           </a:p>
@@ -2541,7 +2541,7 @@
                   <a:latin typeface="游ゴシック"/>
                   <a:ea typeface="游ゴシック"/>
                 </a:rPr>
-                <a:t>17</a:t>
+                <a:t>26</a:t>
               </a:r>
               <a:r>
                 <a:rPr lang="ja-JP" altLang="en-US" sz="1800" b="0" dirty="0">
@@ -4930,317 +4930,6 @@
       </p:sp>
       <p:sp>
         <p:nvSpPr>
-          <p:cNvPr id="17" name="テキスト ボックス 13">
-            <a:extLst>
-              <a:ext uri="{FF2B5EF4-FFF2-40B4-BE49-F238E27FC236}">
-                <a16:creationId xmlns:a16="http://schemas.microsoft.com/office/drawing/2014/main" id="{F2064A51-C22E-EAAA-4166-6B1DB9DB9000}"/>
-              </a:ext>
-            </a:extLst>
-          </p:cNvPr>
-          <p:cNvSpPr txBox="1"/>
-          <p:nvPr/>
-        </p:nvSpPr>
-        <p:spPr>
-          <a:xfrm>
-            <a:off x="3163182" y="2846895"/>
-            <a:ext cx="2568797" cy="307777"/>
-          </a:xfrm>
-          <a:prstGeom prst="rect">
-            <a:avLst/>
-          </a:prstGeom>
-          <a:noFill/>
-          <a:ln>
-            <a:noFill/>
-          </a:ln>
-        </p:spPr>
-        <p:txBody>
-          <a:bodyPr wrap="square" lIns="91440" tIns="45720" rIns="91440" bIns="45720" anchor="t">
-            <a:spAutoFit/>
-          </a:bodyPr>
-          <a:lstStyle>
-            <a:defPPr>
-              <a:defRPr lang="ja-JP"/>
-            </a:defPPr>
-            <a:lvl1pPr marL="0" algn="l" defTabSz="914400" rtl="0" eaLnBrk="1" latinLnBrk="0" hangingPunct="1">
-              <a:defRPr kumimoji="1" sz="1800" kern="1200">
-                <a:solidFill>
-                  <a:schemeClr val="tx1"/>
-                </a:solidFill>
-                <a:latin typeface="+mn-lt"/>
-                <a:ea typeface="+mn-ea"/>
-                <a:cs typeface="+mn-cs"/>
-              </a:defRPr>
-            </a:lvl1pPr>
-            <a:lvl2pPr marL="457200" algn="l" defTabSz="914400" rtl="0" eaLnBrk="1" latinLnBrk="0" hangingPunct="1">
-              <a:defRPr kumimoji="1" sz="1800" kern="1200">
-                <a:solidFill>
-                  <a:schemeClr val="tx1"/>
-                </a:solidFill>
-                <a:latin typeface="+mn-lt"/>
-                <a:ea typeface="+mn-ea"/>
-                <a:cs typeface="+mn-cs"/>
-              </a:defRPr>
-            </a:lvl2pPr>
-            <a:lvl3pPr marL="914400" algn="l" defTabSz="914400" rtl="0" eaLnBrk="1" latinLnBrk="0" hangingPunct="1">
-              <a:defRPr kumimoji="1" sz="1800" kern="1200">
-                <a:solidFill>
-                  <a:schemeClr val="tx1"/>
-                </a:solidFill>
-                <a:latin typeface="+mn-lt"/>
-                <a:ea typeface="+mn-ea"/>
-                <a:cs typeface="+mn-cs"/>
-              </a:defRPr>
-            </a:lvl3pPr>
-            <a:lvl4pPr marL="1371600" algn="l" defTabSz="914400" rtl="0" eaLnBrk="1" latinLnBrk="0" hangingPunct="1">
-              <a:defRPr kumimoji="1" sz="1800" kern="1200">
-                <a:solidFill>
-                  <a:schemeClr val="tx1"/>
-                </a:solidFill>
-                <a:latin typeface="+mn-lt"/>
-                <a:ea typeface="+mn-ea"/>
-                <a:cs typeface="+mn-cs"/>
-              </a:defRPr>
-            </a:lvl4pPr>
-            <a:lvl5pPr marL="1828800" algn="l" defTabSz="914400" rtl="0" eaLnBrk="1" latinLnBrk="0" hangingPunct="1">
-              <a:defRPr kumimoji="1" sz="1800" kern="1200">
-                <a:solidFill>
-                  <a:schemeClr val="tx1"/>
-                </a:solidFill>
-                <a:latin typeface="+mn-lt"/>
-                <a:ea typeface="+mn-ea"/>
-                <a:cs typeface="+mn-cs"/>
-              </a:defRPr>
-            </a:lvl5pPr>
-            <a:lvl6pPr marL="2286000" algn="l" defTabSz="914400" rtl="0" eaLnBrk="1" latinLnBrk="0" hangingPunct="1">
-              <a:defRPr kumimoji="1" sz="1800" kern="1200">
-                <a:solidFill>
-                  <a:schemeClr val="tx1"/>
-                </a:solidFill>
-                <a:latin typeface="+mn-lt"/>
-                <a:ea typeface="+mn-ea"/>
-                <a:cs typeface="+mn-cs"/>
-              </a:defRPr>
-            </a:lvl6pPr>
-            <a:lvl7pPr marL="2743200" algn="l" defTabSz="914400" rtl="0" eaLnBrk="1" latinLnBrk="0" hangingPunct="1">
-              <a:defRPr kumimoji="1" sz="1800" kern="1200">
-                <a:solidFill>
-                  <a:schemeClr val="tx1"/>
-                </a:solidFill>
-                <a:latin typeface="+mn-lt"/>
-                <a:ea typeface="+mn-ea"/>
-                <a:cs typeface="+mn-cs"/>
-              </a:defRPr>
-            </a:lvl7pPr>
-            <a:lvl8pPr marL="3200400" algn="l" defTabSz="914400" rtl="0" eaLnBrk="1" latinLnBrk="0" hangingPunct="1">
-              <a:defRPr kumimoji="1" sz="1800" kern="1200">
-                <a:solidFill>
-                  <a:schemeClr val="tx1"/>
-                </a:solidFill>
-                <a:latin typeface="+mn-lt"/>
-                <a:ea typeface="+mn-ea"/>
-                <a:cs typeface="+mn-cs"/>
-              </a:defRPr>
-            </a:lvl8pPr>
-            <a:lvl9pPr marL="3657600" algn="l" defTabSz="914400" rtl="0" eaLnBrk="1" latinLnBrk="0" hangingPunct="1">
-              <a:defRPr kumimoji="1" sz="1800" kern="1200">
-                <a:solidFill>
-                  <a:schemeClr val="tx1"/>
-                </a:solidFill>
-                <a:latin typeface="+mn-lt"/>
-                <a:ea typeface="+mn-ea"/>
-                <a:cs typeface="+mn-cs"/>
-              </a:defRPr>
-            </a:lvl9pPr>
-          </a:lstStyle>
-          <a:p>
-            <a:r>
-              <a:rPr lang="en-US" sz="1400" b="1" dirty="0">
-                <a:solidFill>
-                  <a:srgbClr val="000000"/>
-                </a:solidFill>
-                <a:ea typeface="+mn-lt"/>
-                <a:cs typeface="+mn-lt"/>
-              </a:rPr>
-              <a:t>WordPress</a:t>
-            </a:r>
-            <a:r>
-              <a:rPr lang="ja-JP" altLang="en-US" sz="1400" b="1" dirty="0">
-                <a:solidFill>
-                  <a:srgbClr val="000000"/>
-                </a:solidFill>
-                <a:ea typeface="+mn-lt"/>
-                <a:cs typeface="+mn-lt"/>
-              </a:rPr>
-              <a:t>の構築/運用</a:t>
-            </a:r>
-            <a:endParaRPr lang="ja-JP" altLang="en-US" sz="1400" b="1" dirty="0">
-              <a:ea typeface="游ゴシック"/>
-            </a:endParaRPr>
-          </a:p>
-        </p:txBody>
-      </p:sp>
-      <p:sp>
-        <p:nvSpPr>
-          <p:cNvPr id="18" name="テキスト ボックス 17">
-            <a:extLst>
-              <a:ext uri="{FF2B5EF4-FFF2-40B4-BE49-F238E27FC236}">
-                <a16:creationId xmlns:a16="http://schemas.microsoft.com/office/drawing/2014/main" id="{4EE94C7D-2EF2-F4E6-0A00-1AE41AF4E71D}"/>
-              </a:ext>
-            </a:extLst>
-          </p:cNvPr>
-          <p:cNvSpPr txBox="1"/>
-          <p:nvPr/>
-        </p:nvSpPr>
-        <p:spPr>
-          <a:xfrm>
-            <a:off x="3187468" y="3154180"/>
-            <a:ext cx="3959590" cy="523220"/>
-          </a:xfrm>
-          <a:prstGeom prst="rect">
-            <a:avLst/>
-          </a:prstGeom>
-          <a:noFill/>
-          <a:ln>
-            <a:noFill/>
-          </a:ln>
-        </p:spPr>
-        <p:txBody>
-          <a:bodyPr wrap="square" lIns="91440" tIns="45720" rIns="91440" bIns="45720" anchor="t">
-            <a:spAutoFit/>
-          </a:bodyPr>
-          <a:lstStyle>
-            <a:defPPr>
-              <a:defRPr lang="ja-JP"/>
-            </a:defPPr>
-            <a:lvl1pPr marL="0" algn="l" defTabSz="914400" rtl="0" eaLnBrk="1" latinLnBrk="0" hangingPunct="1">
-              <a:defRPr kumimoji="1" sz="1800" kern="1200">
-                <a:solidFill>
-                  <a:schemeClr val="tx1"/>
-                </a:solidFill>
-                <a:latin typeface="+mn-lt"/>
-                <a:ea typeface="+mn-ea"/>
-                <a:cs typeface="+mn-cs"/>
-              </a:defRPr>
-            </a:lvl1pPr>
-            <a:lvl2pPr marL="457200" algn="l" defTabSz="914400" rtl="0" eaLnBrk="1" latinLnBrk="0" hangingPunct="1">
-              <a:defRPr kumimoji="1" sz="1800" kern="1200">
-                <a:solidFill>
-                  <a:schemeClr val="tx1"/>
-                </a:solidFill>
-                <a:latin typeface="+mn-lt"/>
-                <a:ea typeface="+mn-ea"/>
-                <a:cs typeface="+mn-cs"/>
-              </a:defRPr>
-            </a:lvl2pPr>
-            <a:lvl3pPr marL="914400" algn="l" defTabSz="914400" rtl="0" eaLnBrk="1" latinLnBrk="0" hangingPunct="1">
-              <a:defRPr kumimoji="1" sz="1800" kern="1200">
-                <a:solidFill>
-                  <a:schemeClr val="tx1"/>
-                </a:solidFill>
-                <a:latin typeface="+mn-lt"/>
-                <a:ea typeface="+mn-ea"/>
-                <a:cs typeface="+mn-cs"/>
-              </a:defRPr>
-            </a:lvl3pPr>
-            <a:lvl4pPr marL="1371600" algn="l" defTabSz="914400" rtl="0" eaLnBrk="1" latinLnBrk="0" hangingPunct="1">
-              <a:defRPr kumimoji="1" sz="1800" kern="1200">
-                <a:solidFill>
-                  <a:schemeClr val="tx1"/>
-                </a:solidFill>
-                <a:latin typeface="+mn-lt"/>
-                <a:ea typeface="+mn-ea"/>
-                <a:cs typeface="+mn-cs"/>
-              </a:defRPr>
-            </a:lvl4pPr>
-            <a:lvl5pPr marL="1828800" algn="l" defTabSz="914400" rtl="0" eaLnBrk="1" latinLnBrk="0" hangingPunct="1">
-              <a:defRPr kumimoji="1" sz="1800" kern="1200">
-                <a:solidFill>
-                  <a:schemeClr val="tx1"/>
-                </a:solidFill>
-                <a:latin typeface="+mn-lt"/>
-                <a:ea typeface="+mn-ea"/>
-                <a:cs typeface="+mn-cs"/>
-              </a:defRPr>
-            </a:lvl5pPr>
-            <a:lvl6pPr marL="2286000" algn="l" defTabSz="914400" rtl="0" eaLnBrk="1" latinLnBrk="0" hangingPunct="1">
-              <a:defRPr kumimoji="1" sz="1800" kern="1200">
-                <a:solidFill>
-                  <a:schemeClr val="tx1"/>
-                </a:solidFill>
-                <a:latin typeface="+mn-lt"/>
-                <a:ea typeface="+mn-ea"/>
-                <a:cs typeface="+mn-cs"/>
-              </a:defRPr>
-            </a:lvl6pPr>
-            <a:lvl7pPr marL="2743200" algn="l" defTabSz="914400" rtl="0" eaLnBrk="1" latinLnBrk="0" hangingPunct="1">
-              <a:defRPr kumimoji="1" sz="1800" kern="1200">
-                <a:solidFill>
-                  <a:schemeClr val="tx1"/>
-                </a:solidFill>
-                <a:latin typeface="+mn-lt"/>
-                <a:ea typeface="+mn-ea"/>
-                <a:cs typeface="+mn-cs"/>
-              </a:defRPr>
-            </a:lvl7pPr>
-            <a:lvl8pPr marL="3200400" algn="l" defTabSz="914400" rtl="0" eaLnBrk="1" latinLnBrk="0" hangingPunct="1">
-              <a:defRPr kumimoji="1" sz="1800" kern="1200">
-                <a:solidFill>
-                  <a:schemeClr val="tx1"/>
-                </a:solidFill>
-                <a:latin typeface="+mn-lt"/>
-                <a:ea typeface="+mn-ea"/>
-                <a:cs typeface="+mn-cs"/>
-              </a:defRPr>
-            </a:lvl8pPr>
-            <a:lvl9pPr marL="3657600" algn="l" defTabSz="914400" rtl="0" eaLnBrk="1" latinLnBrk="0" hangingPunct="1">
-              <a:defRPr kumimoji="1" sz="1800" kern="1200">
-                <a:solidFill>
-                  <a:schemeClr val="tx1"/>
-                </a:solidFill>
-                <a:latin typeface="+mn-lt"/>
-                <a:ea typeface="+mn-ea"/>
-                <a:cs typeface="+mn-cs"/>
-              </a:defRPr>
-            </a:lvl9pPr>
-          </a:lstStyle>
-          <a:p>
-            <a:r>
-              <a:rPr lang="ja-JP" sz="1400" dirty="0">
-                <a:solidFill>
-                  <a:srgbClr val="000000"/>
-                </a:solidFill>
-                <a:ea typeface="+mn-lt"/>
-                <a:cs typeface="+mn-lt"/>
-              </a:rPr>
-              <a:t>テーマ・プラグイン管理、セキュリティ対策、</a:t>
-            </a:r>
-            <a:endParaRPr lang="ja-JP" altLang="en-US" sz="1400" dirty="0">
-              <a:solidFill>
-                <a:srgbClr val="000000"/>
-              </a:solidFill>
-              <a:ea typeface="+mn-lt"/>
-              <a:cs typeface="+mn-lt"/>
-            </a:endParaRPr>
-          </a:p>
-          <a:p>
-            <a:r>
-              <a:rPr lang="ja-JP" sz="1400" dirty="0">
-                <a:solidFill>
-                  <a:srgbClr val="000000"/>
-                </a:solidFill>
-                <a:ea typeface="+mn-lt"/>
-                <a:cs typeface="+mn-lt"/>
-              </a:rPr>
-              <a:t>パフォーマンス最適化</a:t>
-            </a:r>
-            <a:endParaRPr lang="ja-JP" altLang="en-US" sz="1400" dirty="0">
-              <a:ea typeface="游ゴシック"/>
-            </a:endParaRPr>
-          </a:p>
-        </p:txBody>
-      </p:sp>
-      <p:sp>
-        <p:nvSpPr>
           <p:cNvPr id="19" name="テキスト ボックス 13">
             <a:extLst>
               <a:ext uri="{FF2B5EF4-FFF2-40B4-BE49-F238E27FC236}">
@@ -5526,7 +5215,7 @@
               <a:t>TCP/IP</a:t>
             </a:r>
             <a:r>
-              <a:rPr lang="ja-JP" sz="1400">
+              <a:rPr lang="ja-JP" sz="1400" dirty="0">
                 <a:solidFill>
                   <a:srgbClr val="000000"/>
                 </a:solidFill>
@@ -5535,13 +5224,13 @@
               </a:rPr>
               <a:t>、サブネット、ファイアウォール、</a:t>
             </a:r>
-            <a:endParaRPr lang="ja-JP" altLang="en-US" sz="1400">
+            <a:endParaRPr lang="ja-JP" altLang="en-US" sz="1400" dirty="0">
               <a:ea typeface="游ゴシック"/>
             </a:endParaRPr>
           </a:p>
           <a:p>
             <a:r>
-              <a:rPr lang="ja-JP" sz="1400">
+              <a:rPr lang="ja-JP" sz="1400" dirty="0">
                 <a:solidFill>
                   <a:srgbClr val="000000"/>
                 </a:solidFill>
@@ -5550,334 +5239,7 @@
               </a:rPr>
               <a:t>ロードバランサーなど</a:t>
             </a:r>
-            <a:endParaRPr lang="ja-JP" sz="1400"/>
-          </a:p>
-        </p:txBody>
-      </p:sp>
-      <p:sp>
-        <p:nvSpPr>
-          <p:cNvPr id="21" name="テキスト ボックス 13">
-            <a:extLst>
-              <a:ext uri="{FF2B5EF4-FFF2-40B4-BE49-F238E27FC236}">
-                <a16:creationId xmlns:a16="http://schemas.microsoft.com/office/drawing/2014/main" id="{67F5B4A0-7F32-C300-64E9-A926E4F7FDD6}"/>
-              </a:ext>
-            </a:extLst>
-          </p:cNvPr>
-          <p:cNvSpPr txBox="1"/>
-          <p:nvPr/>
-        </p:nvSpPr>
-        <p:spPr>
-          <a:xfrm>
-            <a:off x="7801296" y="2996622"/>
-            <a:ext cx="1429717" cy="307777"/>
-          </a:xfrm>
-          <a:prstGeom prst="rect">
-            <a:avLst/>
-          </a:prstGeom>
-          <a:noFill/>
-          <a:ln>
-            <a:noFill/>
-          </a:ln>
-        </p:spPr>
-        <p:txBody>
-          <a:bodyPr wrap="square" lIns="91440" tIns="45720" rIns="91440" bIns="45720" anchor="t">
-            <a:spAutoFit/>
-          </a:bodyPr>
-          <a:lstStyle>
-            <a:defPPr>
-              <a:defRPr lang="ja-JP"/>
-            </a:defPPr>
-            <a:lvl1pPr marL="0" algn="l" defTabSz="914400" rtl="0" eaLnBrk="1" latinLnBrk="0" hangingPunct="1">
-              <a:defRPr kumimoji="1" sz="1800" kern="1200">
-                <a:solidFill>
-                  <a:schemeClr val="tx1"/>
-                </a:solidFill>
-                <a:latin typeface="+mn-lt"/>
-                <a:ea typeface="+mn-ea"/>
-                <a:cs typeface="+mn-cs"/>
-              </a:defRPr>
-            </a:lvl1pPr>
-            <a:lvl2pPr marL="457200" algn="l" defTabSz="914400" rtl="0" eaLnBrk="1" latinLnBrk="0" hangingPunct="1">
-              <a:defRPr kumimoji="1" sz="1800" kern="1200">
-                <a:solidFill>
-                  <a:schemeClr val="tx1"/>
-                </a:solidFill>
-                <a:latin typeface="+mn-lt"/>
-                <a:ea typeface="+mn-ea"/>
-                <a:cs typeface="+mn-cs"/>
-              </a:defRPr>
-            </a:lvl2pPr>
-            <a:lvl3pPr marL="914400" algn="l" defTabSz="914400" rtl="0" eaLnBrk="1" latinLnBrk="0" hangingPunct="1">
-              <a:defRPr kumimoji="1" sz="1800" kern="1200">
-                <a:solidFill>
-                  <a:schemeClr val="tx1"/>
-                </a:solidFill>
-                <a:latin typeface="+mn-lt"/>
-                <a:ea typeface="+mn-ea"/>
-                <a:cs typeface="+mn-cs"/>
-              </a:defRPr>
-            </a:lvl3pPr>
-            <a:lvl4pPr marL="1371600" algn="l" defTabSz="914400" rtl="0" eaLnBrk="1" latinLnBrk="0" hangingPunct="1">
-              <a:defRPr kumimoji="1" sz="1800" kern="1200">
-                <a:solidFill>
-                  <a:schemeClr val="tx1"/>
-                </a:solidFill>
-                <a:latin typeface="+mn-lt"/>
-                <a:ea typeface="+mn-ea"/>
-                <a:cs typeface="+mn-cs"/>
-              </a:defRPr>
-            </a:lvl4pPr>
-            <a:lvl5pPr marL="1828800" algn="l" defTabSz="914400" rtl="0" eaLnBrk="1" latinLnBrk="0" hangingPunct="1">
-              <a:defRPr kumimoji="1" sz="1800" kern="1200">
-                <a:solidFill>
-                  <a:schemeClr val="tx1"/>
-                </a:solidFill>
-                <a:latin typeface="+mn-lt"/>
-                <a:ea typeface="+mn-ea"/>
-                <a:cs typeface="+mn-cs"/>
-              </a:defRPr>
-            </a:lvl5pPr>
-            <a:lvl6pPr marL="2286000" algn="l" defTabSz="914400" rtl="0" eaLnBrk="1" latinLnBrk="0" hangingPunct="1">
-              <a:defRPr kumimoji="1" sz="1800" kern="1200">
-                <a:solidFill>
-                  <a:schemeClr val="tx1"/>
-                </a:solidFill>
-                <a:latin typeface="+mn-lt"/>
-                <a:ea typeface="+mn-ea"/>
-                <a:cs typeface="+mn-cs"/>
-              </a:defRPr>
-            </a:lvl6pPr>
-            <a:lvl7pPr marL="2743200" algn="l" defTabSz="914400" rtl="0" eaLnBrk="1" latinLnBrk="0" hangingPunct="1">
-              <a:defRPr kumimoji="1" sz="1800" kern="1200">
-                <a:solidFill>
-                  <a:schemeClr val="tx1"/>
-                </a:solidFill>
-                <a:latin typeface="+mn-lt"/>
-                <a:ea typeface="+mn-ea"/>
-                <a:cs typeface="+mn-cs"/>
-              </a:defRPr>
-            </a:lvl7pPr>
-            <a:lvl8pPr marL="3200400" algn="l" defTabSz="914400" rtl="0" eaLnBrk="1" latinLnBrk="0" hangingPunct="1">
-              <a:defRPr kumimoji="1" sz="1800" kern="1200">
-                <a:solidFill>
-                  <a:schemeClr val="tx1"/>
-                </a:solidFill>
-                <a:latin typeface="+mn-lt"/>
-                <a:ea typeface="+mn-ea"/>
-                <a:cs typeface="+mn-cs"/>
-              </a:defRPr>
-            </a:lvl8pPr>
-            <a:lvl9pPr marL="3657600" algn="l" defTabSz="914400" rtl="0" eaLnBrk="1" latinLnBrk="0" hangingPunct="1">
-              <a:defRPr kumimoji="1" sz="1800" kern="1200">
-                <a:solidFill>
-                  <a:schemeClr val="tx1"/>
-                </a:solidFill>
-                <a:latin typeface="+mn-lt"/>
-                <a:ea typeface="+mn-ea"/>
-                <a:cs typeface="+mn-cs"/>
-              </a:defRPr>
-            </a:lvl9pPr>
-          </a:lstStyle>
-          <a:p>
-            <a:r>
-              <a:rPr lang="en-US" altLang="ja-JP" sz="1400" b="1">
-                <a:solidFill>
-                  <a:srgbClr val="000000"/>
-                </a:solidFill>
-                <a:ea typeface="+mn-lt"/>
-                <a:cs typeface="+mn-lt"/>
-              </a:rPr>
-              <a:t>G</a:t>
-            </a:r>
-            <a:r>
-              <a:rPr lang="ja-JP" sz="1400" b="1">
-                <a:solidFill>
-                  <a:srgbClr val="000000"/>
-                </a:solidFill>
-                <a:ea typeface="+mn-lt"/>
-                <a:cs typeface="+mn-lt"/>
-              </a:rPr>
-              <a:t>it/GitHub</a:t>
-            </a:r>
-            <a:endParaRPr lang="ja-JP" sz="1400" b="1"/>
-          </a:p>
-        </p:txBody>
-      </p:sp>
-      <p:sp>
-        <p:nvSpPr>
-          <p:cNvPr id="22" name="テキスト ボックス 21">
-            <a:extLst>
-              <a:ext uri="{FF2B5EF4-FFF2-40B4-BE49-F238E27FC236}">
-                <a16:creationId xmlns:a16="http://schemas.microsoft.com/office/drawing/2014/main" id="{B6DFCD2D-DC02-7CA4-2852-03BD69AFCE7F}"/>
-              </a:ext>
-            </a:extLst>
-          </p:cNvPr>
-          <p:cNvSpPr txBox="1"/>
-          <p:nvPr/>
-        </p:nvSpPr>
-        <p:spPr>
-          <a:xfrm>
-            <a:off x="7804432" y="3303904"/>
-            <a:ext cx="4300627" cy="307777"/>
-          </a:xfrm>
-          <a:prstGeom prst="rect">
-            <a:avLst/>
-          </a:prstGeom>
-          <a:noFill/>
-          <a:ln>
-            <a:noFill/>
-          </a:ln>
-        </p:spPr>
-        <p:txBody>
-          <a:bodyPr wrap="square" lIns="91440" tIns="45720" rIns="91440" bIns="45720" anchor="t">
-            <a:spAutoFit/>
-          </a:bodyPr>
-          <a:lstStyle>
-            <a:defPPr>
-              <a:defRPr lang="ja-JP"/>
-            </a:defPPr>
-            <a:lvl1pPr marL="0" algn="l" defTabSz="914400" rtl="0" eaLnBrk="1" latinLnBrk="0" hangingPunct="1">
-              <a:defRPr kumimoji="1" sz="1800" kern="1200">
-                <a:solidFill>
-                  <a:schemeClr val="tx1"/>
-                </a:solidFill>
-                <a:latin typeface="+mn-lt"/>
-                <a:ea typeface="+mn-ea"/>
-                <a:cs typeface="+mn-cs"/>
-              </a:defRPr>
-            </a:lvl1pPr>
-            <a:lvl2pPr marL="457200" algn="l" defTabSz="914400" rtl="0" eaLnBrk="1" latinLnBrk="0" hangingPunct="1">
-              <a:defRPr kumimoji="1" sz="1800" kern="1200">
-                <a:solidFill>
-                  <a:schemeClr val="tx1"/>
-                </a:solidFill>
-                <a:latin typeface="+mn-lt"/>
-                <a:ea typeface="+mn-ea"/>
-                <a:cs typeface="+mn-cs"/>
-              </a:defRPr>
-            </a:lvl2pPr>
-            <a:lvl3pPr marL="914400" algn="l" defTabSz="914400" rtl="0" eaLnBrk="1" latinLnBrk="0" hangingPunct="1">
-              <a:defRPr kumimoji="1" sz="1800" kern="1200">
-                <a:solidFill>
-                  <a:schemeClr val="tx1"/>
-                </a:solidFill>
-                <a:latin typeface="+mn-lt"/>
-                <a:ea typeface="+mn-ea"/>
-                <a:cs typeface="+mn-cs"/>
-              </a:defRPr>
-            </a:lvl3pPr>
-            <a:lvl4pPr marL="1371600" algn="l" defTabSz="914400" rtl="0" eaLnBrk="1" latinLnBrk="0" hangingPunct="1">
-              <a:defRPr kumimoji="1" sz="1800" kern="1200">
-                <a:solidFill>
-                  <a:schemeClr val="tx1"/>
-                </a:solidFill>
-                <a:latin typeface="+mn-lt"/>
-                <a:ea typeface="+mn-ea"/>
-                <a:cs typeface="+mn-cs"/>
-              </a:defRPr>
-            </a:lvl4pPr>
-            <a:lvl5pPr marL="1828800" algn="l" defTabSz="914400" rtl="0" eaLnBrk="1" latinLnBrk="0" hangingPunct="1">
-              <a:defRPr kumimoji="1" sz="1800" kern="1200">
-                <a:solidFill>
-                  <a:schemeClr val="tx1"/>
-                </a:solidFill>
-                <a:latin typeface="+mn-lt"/>
-                <a:ea typeface="+mn-ea"/>
-                <a:cs typeface="+mn-cs"/>
-              </a:defRPr>
-            </a:lvl5pPr>
-            <a:lvl6pPr marL="2286000" algn="l" defTabSz="914400" rtl="0" eaLnBrk="1" latinLnBrk="0" hangingPunct="1">
-              <a:defRPr kumimoji="1" sz="1800" kern="1200">
-                <a:solidFill>
-                  <a:schemeClr val="tx1"/>
-                </a:solidFill>
-                <a:latin typeface="+mn-lt"/>
-                <a:ea typeface="+mn-ea"/>
-                <a:cs typeface="+mn-cs"/>
-              </a:defRPr>
-            </a:lvl6pPr>
-            <a:lvl7pPr marL="2743200" algn="l" defTabSz="914400" rtl="0" eaLnBrk="1" latinLnBrk="0" hangingPunct="1">
-              <a:defRPr kumimoji="1" sz="1800" kern="1200">
-                <a:solidFill>
-                  <a:schemeClr val="tx1"/>
-                </a:solidFill>
-                <a:latin typeface="+mn-lt"/>
-                <a:ea typeface="+mn-ea"/>
-                <a:cs typeface="+mn-cs"/>
-              </a:defRPr>
-            </a:lvl7pPr>
-            <a:lvl8pPr marL="3200400" algn="l" defTabSz="914400" rtl="0" eaLnBrk="1" latinLnBrk="0" hangingPunct="1">
-              <a:defRPr kumimoji="1" sz="1800" kern="1200">
-                <a:solidFill>
-                  <a:schemeClr val="tx1"/>
-                </a:solidFill>
-                <a:latin typeface="+mn-lt"/>
-                <a:ea typeface="+mn-ea"/>
-                <a:cs typeface="+mn-cs"/>
-              </a:defRPr>
-            </a:lvl8pPr>
-            <a:lvl9pPr marL="3657600" algn="l" defTabSz="914400" rtl="0" eaLnBrk="1" latinLnBrk="0" hangingPunct="1">
-              <a:defRPr kumimoji="1" sz="1800" kern="1200">
-                <a:solidFill>
-                  <a:schemeClr val="tx1"/>
-                </a:solidFill>
-                <a:latin typeface="+mn-lt"/>
-                <a:ea typeface="+mn-ea"/>
-                <a:cs typeface="+mn-cs"/>
-              </a:defRPr>
-            </a:lvl9pPr>
-          </a:lstStyle>
-          <a:p>
-            <a:r>
-              <a:rPr lang="ja-JP" altLang="en-US" sz="1400">
-                <a:solidFill>
-                  <a:srgbClr val="000000"/>
-                </a:solidFill>
-                <a:ea typeface="+mn-lt"/>
-                <a:cs typeface="+mn-lt"/>
-              </a:rPr>
-              <a:t>リポジトリ作成</a:t>
-            </a:r>
-            <a:r>
-              <a:rPr lang="ja-JP" sz="1400">
-                <a:solidFill>
-                  <a:srgbClr val="000000"/>
-                </a:solidFill>
-                <a:ea typeface="+mn-lt"/>
-                <a:cs typeface="+mn-lt"/>
-              </a:rPr>
-              <a:t>、</a:t>
-            </a:r>
-            <a:r>
-              <a:rPr lang="en-US" altLang="ja-JP" sz="1400" dirty="0">
-                <a:solidFill>
-                  <a:srgbClr val="000000"/>
-                </a:solidFill>
-                <a:ea typeface="+mn-lt"/>
-                <a:cs typeface="+mn-lt"/>
-              </a:rPr>
-              <a:t>commit</a:t>
-            </a:r>
-            <a:r>
-              <a:rPr lang="ja-JP" sz="1400">
-                <a:solidFill>
-                  <a:srgbClr val="000000"/>
-                </a:solidFill>
-                <a:ea typeface="+mn-lt"/>
-                <a:cs typeface="+mn-lt"/>
-              </a:rPr>
-              <a:t>、</a:t>
-            </a:r>
-            <a:r>
-              <a:rPr lang="ja-JP" altLang="en-US" sz="1400">
-                <a:solidFill>
-                  <a:srgbClr val="000000"/>
-                </a:solidFill>
-                <a:ea typeface="+mn-lt"/>
-                <a:cs typeface="+mn-lt"/>
-              </a:rPr>
-              <a:t>push、pull request</a:t>
-            </a:r>
+            <a:endParaRPr lang="ja-JP" sz="1400" dirty="0"/>
           </a:p>
         </p:txBody>
       </p:sp>
@@ -8086,21 +7448,26 @@
           <a:lstStyle/>
           <a:p>
             <a:r>
-              <a:rPr lang="ja-JP" altLang="en-US">
-                <a:latin typeface="游ゴシック"/>
-                <a:ea typeface="游ゴシック"/>
-              </a:rPr>
-              <a:t>構築プロジェクト例：</a:t>
-            </a:r>
-            <a:r>
-              <a:rPr lang="ja-JP">
-                <a:latin typeface="游ゴシック"/>
-                <a:ea typeface="游ゴシック"/>
-                <a:cs typeface="+mn-ea"/>
-              </a:rPr>
-              <a:t>金融取引システムの構築</a:t>
-            </a:r>
-            <a:endParaRPr kumimoji="1" lang="ja-JP" altLang="en-US">
+              <a:rPr lang="ja-JP" altLang="en-US" dirty="0"/>
+              <a:t>対応ケース①：</a:t>
+            </a:r>
+            <a:r>
+              <a:rPr lang="en-US" altLang="ja-JP" dirty="0"/>
+              <a:t>S3 </a:t>
+            </a:r>
+            <a:r>
+              <a:rPr lang="ja-JP" altLang="en-US" dirty="0"/>
+              <a:t>アップロード制御に関する </a:t>
+            </a:r>
+            <a:r>
+              <a:rPr lang="en-US" altLang="ja-JP" dirty="0"/>
+              <a:t>IAM </a:t>
+            </a:r>
+            <a:r>
+              <a:rPr lang="ja-JP" altLang="en-US" dirty="0"/>
+              <a:t>設計</a:t>
+            </a:r>
+            <a:endParaRPr kumimoji="1" lang="ja-JP" altLang="en-US" dirty="0">
               <a:latin typeface="游ゴシック"/>
               <a:ea typeface="游ゴシック"/>
             </a:endParaRPr>
@@ -8142,4032 +7509,31 @@
           </a:p>
         </p:txBody>
       </p:sp>
-      <p:grpSp>
-        <p:nvGrpSpPr>
-          <p:cNvPr id="54" name="グループ化 53">
+      <p:sp>
+        <p:nvSpPr>
+          <p:cNvPr id="11" name="コンテンツ プレースホルダー 10">
             <a:extLst>
               <a:ext uri="{FF2B5EF4-FFF2-40B4-BE49-F238E27FC236}">
-                <a16:creationId xmlns:a16="http://schemas.microsoft.com/office/drawing/2014/main" id="{2E8543DA-A9F4-EB24-7C9C-C7142EAC329A}"/>
+                <a16:creationId xmlns:a16="http://schemas.microsoft.com/office/drawing/2014/main" id="{17A6A31E-96C1-3CDD-BEBD-02B43BA902FA}"/>
               </a:ext>
             </a:extLst>
           </p:cNvPr>
-          <p:cNvGrpSpPr/>
-          <p:nvPr/>
-        </p:nvGrpSpPr>
-        <p:grpSpPr>
-          <a:xfrm>
-            <a:off x="471523" y="1665625"/>
-            <a:ext cx="4583723" cy="4897310"/>
-            <a:chOff x="471523" y="849583"/>
-            <a:chExt cx="5329509" cy="5713352"/>
-          </a:xfrm>
-        </p:grpSpPr>
-        <p:sp>
-          <p:nvSpPr>
-            <p:cNvPr id="5" name="Rectangle 4">
-              <a:extLst>
-                <a:ext uri="{FF2B5EF4-FFF2-40B4-BE49-F238E27FC236}">
-                  <a16:creationId xmlns:a16="http://schemas.microsoft.com/office/drawing/2014/main" id="{EBD78DDC-6CA6-8B4C-8030-D09C702BCE2A}"/>
-                </a:ext>
-              </a:extLst>
-            </p:cNvPr>
-            <p:cNvSpPr/>
-            <p:nvPr/>
-          </p:nvSpPr>
-          <p:spPr bwMode="auto">
-            <a:xfrm>
-              <a:off x="471523" y="1685953"/>
-              <a:ext cx="5329509" cy="4876982"/>
-            </a:xfrm>
-            <a:prstGeom prst="rect">
-              <a:avLst/>
-            </a:prstGeom>
-            <a:noFill/>
-            <a:ln w="15875">
-              <a:solidFill>
-                <a:schemeClr val="tx1"/>
-              </a:solidFill>
-            </a:ln>
-          </p:spPr>
-          <p:style>
-            <a:lnRef idx="2">
-              <a:schemeClr val="accent1">
-                <a:shade val="50000"/>
-              </a:schemeClr>
-            </a:lnRef>
-            <a:fillRef idx="1">
-              <a:schemeClr val="accent1"/>
-            </a:fillRef>
-            <a:effectRef idx="0">
-              <a:schemeClr val="accent1"/>
-            </a:effectRef>
-            <a:fontRef idx="minor">
-              <a:schemeClr val="lt1"/>
-            </a:fontRef>
-          </p:style>
-          <p:txBody>
-            <a:bodyPr lIns="502920" tIns="91440"/>
-            <a:lstStyle>
-              <a:defPPr>
-                <a:defRPr lang="en-US"/>
-              </a:defPPr>
-              <a:lvl1pPr algn="l" rtl="0" eaLnBrk="0" fontAlgn="base" hangingPunct="0">
-                <a:spcBef>
-                  <a:spcPct val="0"/>
-                </a:spcBef>
-                <a:spcAft>
-                  <a:spcPct val="0"/>
-                </a:spcAft>
-                <a:defRPr kern="1200">
-                  <a:solidFill>
-                    <a:schemeClr val="lt1"/>
-                  </a:solidFill>
-                  <a:latin typeface="+mn-lt"/>
-                  <a:ea typeface="+mn-ea"/>
-                  <a:cs typeface="+mn-cs"/>
-                </a:defRPr>
-              </a:lvl1pPr>
-              <a:lvl2pPr marL="457200" algn="l" rtl="0" eaLnBrk="0" fontAlgn="base" hangingPunct="0">
-                <a:spcBef>
-                  <a:spcPct val="0"/>
-                </a:spcBef>
-                <a:spcAft>
-                  <a:spcPct val="0"/>
-                </a:spcAft>
-                <a:defRPr kern="1200">
-                  <a:solidFill>
-                    <a:schemeClr val="lt1"/>
-                  </a:solidFill>
-                  <a:latin typeface="+mn-lt"/>
-                  <a:ea typeface="+mn-ea"/>
-                  <a:cs typeface="+mn-cs"/>
-                </a:defRPr>
-              </a:lvl2pPr>
-              <a:lvl3pPr marL="914400" algn="l" rtl="0" eaLnBrk="0" fontAlgn="base" hangingPunct="0">
-                <a:spcBef>
-                  <a:spcPct val="0"/>
-                </a:spcBef>
-                <a:spcAft>
-                  <a:spcPct val="0"/>
-                </a:spcAft>
-                <a:defRPr kern="1200">
-                  <a:solidFill>
-                    <a:schemeClr val="lt1"/>
-                  </a:solidFill>
-                  <a:latin typeface="+mn-lt"/>
-                  <a:ea typeface="+mn-ea"/>
-                  <a:cs typeface="+mn-cs"/>
-                </a:defRPr>
-              </a:lvl3pPr>
-              <a:lvl4pPr marL="1371600" algn="l" rtl="0" eaLnBrk="0" fontAlgn="base" hangingPunct="0">
-                <a:spcBef>
-                  <a:spcPct val="0"/>
-                </a:spcBef>
-                <a:spcAft>
-                  <a:spcPct val="0"/>
-                </a:spcAft>
-                <a:defRPr kern="1200">
-                  <a:solidFill>
-                    <a:schemeClr val="lt1"/>
-                  </a:solidFill>
-                  <a:latin typeface="+mn-lt"/>
-                  <a:ea typeface="+mn-ea"/>
-                  <a:cs typeface="+mn-cs"/>
-                </a:defRPr>
-              </a:lvl4pPr>
-              <a:lvl5pPr marL="1828800" algn="l" rtl="0" eaLnBrk="0" fontAlgn="base" hangingPunct="0">
-                <a:spcBef>
-                  <a:spcPct val="0"/>
-                </a:spcBef>
-                <a:spcAft>
-                  <a:spcPct val="0"/>
-                </a:spcAft>
-                <a:defRPr kern="1200">
-                  <a:solidFill>
-                    <a:schemeClr val="lt1"/>
-                  </a:solidFill>
-                  <a:latin typeface="+mn-lt"/>
-                  <a:ea typeface="+mn-ea"/>
-                  <a:cs typeface="+mn-cs"/>
-                </a:defRPr>
-              </a:lvl5pPr>
-              <a:lvl6pPr marL="2286000" algn="l" defTabSz="914400" rtl="0" eaLnBrk="1" latinLnBrk="0" hangingPunct="1">
-                <a:defRPr kern="1200">
-                  <a:solidFill>
-                    <a:schemeClr val="lt1"/>
-                  </a:solidFill>
-                  <a:latin typeface="+mn-lt"/>
-                  <a:ea typeface="+mn-ea"/>
-                  <a:cs typeface="+mn-cs"/>
-                </a:defRPr>
-              </a:lvl6pPr>
-              <a:lvl7pPr marL="2743200" algn="l" defTabSz="914400" rtl="0" eaLnBrk="1" latinLnBrk="0" hangingPunct="1">
-                <a:defRPr kern="1200">
-                  <a:solidFill>
-                    <a:schemeClr val="lt1"/>
-                  </a:solidFill>
-                  <a:latin typeface="+mn-lt"/>
-                  <a:ea typeface="+mn-ea"/>
-                  <a:cs typeface="+mn-cs"/>
-                </a:defRPr>
-              </a:lvl7pPr>
-              <a:lvl8pPr marL="3200400" algn="l" defTabSz="914400" rtl="0" eaLnBrk="1" latinLnBrk="0" hangingPunct="1">
-                <a:defRPr kern="1200">
-                  <a:solidFill>
-                    <a:schemeClr val="lt1"/>
-                  </a:solidFill>
-                  <a:latin typeface="+mn-lt"/>
-                  <a:ea typeface="+mn-ea"/>
-                  <a:cs typeface="+mn-cs"/>
-                </a:defRPr>
-              </a:lvl8pPr>
-              <a:lvl9pPr marL="3657600" algn="l" defTabSz="914400" rtl="0" eaLnBrk="1" latinLnBrk="0" hangingPunct="1">
-                <a:defRPr kern="1200">
-                  <a:solidFill>
-                    <a:schemeClr val="lt1"/>
-                  </a:solidFill>
-                  <a:latin typeface="+mn-lt"/>
-                  <a:ea typeface="+mn-ea"/>
-                  <a:cs typeface="+mn-cs"/>
-                </a:defRPr>
-              </a:lvl9pPr>
-            </a:lstStyle>
-            <a:p>
-              <a:pPr eaLnBrk="1" fontAlgn="auto" hangingPunct="1">
-                <a:spcBef>
-                  <a:spcPts val="0"/>
-                </a:spcBef>
-                <a:spcAft>
-                  <a:spcPts val="0"/>
-                </a:spcAft>
-                <a:defRPr/>
-              </a:pPr>
-              <a:r>
-                <a:rPr lang="en-US" sz="1200">
-                  <a:solidFill>
-                    <a:schemeClr val="tx1"/>
-                  </a:solidFill>
-                  <a:latin typeface="Arial" panose="020B0604020202020204" pitchFamily="34" charset="0"/>
-                  <a:cs typeface="Arial" panose="020B0604020202020204" pitchFamily="34" charset="0"/>
-                </a:rPr>
-                <a:t>AWS Cloud</a:t>
-              </a:r>
-            </a:p>
-          </p:txBody>
-        </p:sp>
-        <p:pic>
-          <p:nvPicPr>
-            <p:cNvPr id="6" name="Graphic 37">
-              <a:extLst>
-                <a:ext uri="{FF2B5EF4-FFF2-40B4-BE49-F238E27FC236}">
-                  <a16:creationId xmlns:a16="http://schemas.microsoft.com/office/drawing/2014/main" id="{D78ED6D3-1731-8249-BC37-43C145C98833}"/>
-                </a:ext>
-                <a:ext uri="{C183D7F6-B498-43B3-948B-1728B52AA6E4}">
-                  <adec:decorative xmlns:adec="http://schemas.microsoft.com/office/drawing/2017/decorative" val="1"/>
-                </a:ext>
-              </a:extLst>
-            </p:cNvPr>
-            <p:cNvPicPr>
-              <a:picLocks noChangeAspect="1"/>
-            </p:cNvPicPr>
-            <p:nvPr/>
-          </p:nvPicPr>
-          <p:blipFill>
-            <a:blip r:embed="rId3">
-              <a:extLst>
-                <a:ext uri="{96DAC541-7B7A-43D3-8B79-37D633B846F1}">
-                  <asvg:svgBlip xmlns:asvg="http://schemas.microsoft.com/office/drawing/2016/SVG/main" r:embed="rId4"/>
-                </a:ext>
-              </a:extLst>
-            </a:blip>
-            <a:srcRect/>
-            <a:stretch/>
-          </p:blipFill>
-          <p:spPr>
-            <a:xfrm>
-              <a:off x="471523" y="1684384"/>
-              <a:ext cx="381000" cy="381000"/>
-            </a:xfrm>
-            <a:prstGeom prst="rect">
-              <a:avLst/>
-            </a:prstGeom>
-          </p:spPr>
-        </p:pic>
-        <p:sp>
-          <p:nvSpPr>
-            <p:cNvPr id="12" name="Rectangle 3">
-              <a:extLst>
-                <a:ext uri="{FF2B5EF4-FFF2-40B4-BE49-F238E27FC236}">
-                  <a16:creationId xmlns:a16="http://schemas.microsoft.com/office/drawing/2014/main" id="{AE0DCB38-C38F-3E45-91A5-BC77EA90215A}"/>
-                </a:ext>
-                <a:ext uri="{C183D7F6-B498-43B3-948B-1728B52AA6E4}">
-                  <adec:decorative xmlns:adec="http://schemas.microsoft.com/office/drawing/2017/decorative" val="1"/>
-                </a:ext>
-              </a:extLst>
-            </p:cNvPr>
-            <p:cNvSpPr/>
-            <p:nvPr/>
-          </p:nvSpPr>
-          <p:spPr bwMode="auto">
-            <a:xfrm>
-              <a:off x="852523" y="2805251"/>
-              <a:ext cx="4535554" cy="3586023"/>
-            </a:xfrm>
-            <a:prstGeom prst="rect">
-              <a:avLst/>
-            </a:prstGeom>
-            <a:noFill/>
-            <a:ln w="15875">
-              <a:solidFill>
-                <a:srgbClr val="8C4FFF"/>
-              </a:solidFill>
-            </a:ln>
-          </p:spPr>
-          <p:style>
-            <a:lnRef idx="2">
-              <a:schemeClr val="accent1">
-                <a:shade val="50000"/>
-              </a:schemeClr>
-            </a:lnRef>
-            <a:fillRef idx="1">
-              <a:schemeClr val="accent1"/>
-            </a:fillRef>
-            <a:effectRef idx="0">
-              <a:schemeClr val="accent1"/>
-            </a:effectRef>
-            <a:fontRef idx="minor">
-              <a:schemeClr val="lt1"/>
-            </a:fontRef>
-          </p:style>
-          <p:txBody>
-            <a:bodyPr lIns="502920" tIns="91440"/>
-            <a:lstStyle>
-              <a:defPPr>
-                <a:defRPr lang="en-US"/>
-              </a:defPPr>
-              <a:lvl1pPr algn="l" rtl="0" eaLnBrk="0" fontAlgn="base" hangingPunct="0">
-                <a:spcBef>
-                  <a:spcPct val="0"/>
-                </a:spcBef>
-                <a:spcAft>
-                  <a:spcPct val="0"/>
-                </a:spcAft>
-                <a:defRPr kern="1200">
-                  <a:solidFill>
-                    <a:schemeClr val="lt1"/>
-                  </a:solidFill>
-                  <a:latin typeface="+mn-lt"/>
-                  <a:ea typeface="+mn-ea"/>
-                  <a:cs typeface="+mn-cs"/>
-                </a:defRPr>
-              </a:lvl1pPr>
-              <a:lvl2pPr marL="457200" algn="l" rtl="0" eaLnBrk="0" fontAlgn="base" hangingPunct="0">
-                <a:spcBef>
-                  <a:spcPct val="0"/>
-                </a:spcBef>
-                <a:spcAft>
-                  <a:spcPct val="0"/>
-                </a:spcAft>
-                <a:defRPr kern="1200">
-                  <a:solidFill>
-                    <a:schemeClr val="lt1"/>
-                  </a:solidFill>
-                  <a:latin typeface="+mn-lt"/>
-                  <a:ea typeface="+mn-ea"/>
-                  <a:cs typeface="+mn-cs"/>
-                </a:defRPr>
-              </a:lvl2pPr>
-              <a:lvl3pPr marL="914400" algn="l" rtl="0" eaLnBrk="0" fontAlgn="base" hangingPunct="0">
-                <a:spcBef>
-                  <a:spcPct val="0"/>
-                </a:spcBef>
-                <a:spcAft>
-                  <a:spcPct val="0"/>
-                </a:spcAft>
-                <a:defRPr kern="1200">
-                  <a:solidFill>
-                    <a:schemeClr val="lt1"/>
-                  </a:solidFill>
-                  <a:latin typeface="+mn-lt"/>
-                  <a:ea typeface="+mn-ea"/>
-                  <a:cs typeface="+mn-cs"/>
-                </a:defRPr>
-              </a:lvl3pPr>
-              <a:lvl4pPr marL="1371600" algn="l" rtl="0" eaLnBrk="0" fontAlgn="base" hangingPunct="0">
-                <a:spcBef>
-                  <a:spcPct val="0"/>
-                </a:spcBef>
-                <a:spcAft>
-                  <a:spcPct val="0"/>
-                </a:spcAft>
-                <a:defRPr kern="1200">
-                  <a:solidFill>
-                    <a:schemeClr val="lt1"/>
-                  </a:solidFill>
-                  <a:latin typeface="+mn-lt"/>
-                  <a:ea typeface="+mn-ea"/>
-                  <a:cs typeface="+mn-cs"/>
-                </a:defRPr>
-              </a:lvl4pPr>
-              <a:lvl5pPr marL="1828800" algn="l" rtl="0" eaLnBrk="0" fontAlgn="base" hangingPunct="0">
-                <a:spcBef>
-                  <a:spcPct val="0"/>
-                </a:spcBef>
-                <a:spcAft>
-                  <a:spcPct val="0"/>
-                </a:spcAft>
-                <a:defRPr kern="1200">
-                  <a:solidFill>
-                    <a:schemeClr val="lt1"/>
-                  </a:solidFill>
-                  <a:latin typeface="+mn-lt"/>
-                  <a:ea typeface="+mn-ea"/>
-                  <a:cs typeface="+mn-cs"/>
-                </a:defRPr>
-              </a:lvl5pPr>
-              <a:lvl6pPr marL="2286000" algn="l" defTabSz="914400" rtl="0" eaLnBrk="1" latinLnBrk="0" hangingPunct="1">
-                <a:defRPr kern="1200">
-                  <a:solidFill>
-                    <a:schemeClr val="lt1"/>
-                  </a:solidFill>
-                  <a:latin typeface="+mn-lt"/>
-                  <a:ea typeface="+mn-ea"/>
-                  <a:cs typeface="+mn-cs"/>
-                </a:defRPr>
-              </a:lvl6pPr>
-              <a:lvl7pPr marL="2743200" algn="l" defTabSz="914400" rtl="0" eaLnBrk="1" latinLnBrk="0" hangingPunct="1">
-                <a:defRPr kern="1200">
-                  <a:solidFill>
-                    <a:schemeClr val="lt1"/>
-                  </a:solidFill>
-                  <a:latin typeface="+mn-lt"/>
-                  <a:ea typeface="+mn-ea"/>
-                  <a:cs typeface="+mn-cs"/>
-                </a:defRPr>
-              </a:lvl7pPr>
-              <a:lvl8pPr marL="3200400" algn="l" defTabSz="914400" rtl="0" eaLnBrk="1" latinLnBrk="0" hangingPunct="1">
-                <a:defRPr kern="1200">
-                  <a:solidFill>
-                    <a:schemeClr val="lt1"/>
-                  </a:solidFill>
-                  <a:latin typeface="+mn-lt"/>
-                  <a:ea typeface="+mn-ea"/>
-                  <a:cs typeface="+mn-cs"/>
-                </a:defRPr>
-              </a:lvl8pPr>
-              <a:lvl9pPr marL="3657600" algn="l" defTabSz="914400" rtl="0" eaLnBrk="1" latinLnBrk="0" hangingPunct="1">
-                <a:defRPr kern="1200">
-                  <a:solidFill>
-                    <a:schemeClr val="lt1"/>
-                  </a:solidFill>
-                  <a:latin typeface="+mn-lt"/>
-                  <a:ea typeface="+mn-ea"/>
-                  <a:cs typeface="+mn-cs"/>
-                </a:defRPr>
-              </a:lvl9pPr>
-            </a:lstStyle>
-            <a:p>
-              <a:pPr eaLnBrk="1" fontAlgn="auto" hangingPunct="1">
-                <a:spcBef>
-                  <a:spcPts val="0"/>
-                </a:spcBef>
-                <a:spcAft>
-                  <a:spcPts val="0"/>
-                </a:spcAft>
-                <a:defRPr/>
-              </a:pPr>
-              <a:r>
-                <a:rPr lang="en-US" sz="1200">
-                  <a:ln w="0"/>
-                  <a:solidFill>
-                    <a:schemeClr val="tx1"/>
-                  </a:solidFill>
-                  <a:latin typeface="Arial" panose="020B0604020202020204" pitchFamily="34" charset="0"/>
-                  <a:cs typeface="Arial" panose="020B0604020202020204" pitchFamily="34" charset="0"/>
-                </a:rPr>
-                <a:t>VPC</a:t>
-              </a:r>
-            </a:p>
-          </p:txBody>
-        </p:sp>
-        <p:pic>
-          <p:nvPicPr>
-            <p:cNvPr id="13" name="Graphic 38" descr="VPC group icon.">
-              <a:extLst>
-                <a:ext uri="{FF2B5EF4-FFF2-40B4-BE49-F238E27FC236}">
-                  <a16:creationId xmlns:a16="http://schemas.microsoft.com/office/drawing/2014/main" id="{ED425F82-30BD-E14D-A2A7-09E58EE65749}"/>
-                </a:ext>
-              </a:extLst>
-            </p:cNvPr>
-            <p:cNvPicPr>
-              <a:picLocks noChangeAspect="1"/>
-            </p:cNvPicPr>
-            <p:nvPr/>
-          </p:nvPicPr>
-          <p:blipFill>
-            <a:blip r:embed="rId5">
-              <a:extLst>
-                <a:ext uri="{96DAC541-7B7A-43D3-8B79-37D633B846F1}">
-                  <asvg:svgBlip xmlns:asvg="http://schemas.microsoft.com/office/drawing/2016/SVG/main" r:embed="rId6"/>
-                </a:ext>
-              </a:extLst>
-            </a:blip>
-            <a:srcRect/>
-            <a:stretch/>
-          </p:blipFill>
-          <p:spPr>
-            <a:xfrm>
-              <a:off x="852523" y="2804361"/>
-              <a:ext cx="381000" cy="381000"/>
-            </a:xfrm>
-            <a:prstGeom prst="rect">
-              <a:avLst/>
-            </a:prstGeom>
-          </p:spPr>
-        </p:pic>
-        <p:pic>
-          <p:nvPicPr>
-            <p:cNvPr id="14" name="Graphic 91" descr="Internet resource icon for the General Icons category.">
-              <a:extLst>
-                <a:ext uri="{FF2B5EF4-FFF2-40B4-BE49-F238E27FC236}">
-                  <a16:creationId xmlns:a16="http://schemas.microsoft.com/office/drawing/2014/main" id="{0EEE1E7F-10A5-44F1-8084-ABE8C48FFBBD}"/>
-                </a:ext>
-              </a:extLst>
-            </p:cNvPr>
-            <p:cNvPicPr>
-              <a:picLocks noChangeAspect="1"/>
-            </p:cNvPicPr>
-            <p:nvPr/>
-          </p:nvPicPr>
-          <p:blipFill>
-            <a:blip r:embed="rId7">
-              <a:extLst>
-                <a:ext uri="{96DAC541-7B7A-43D3-8B79-37D633B846F1}">
-                  <asvg:svgBlip xmlns:asvg="http://schemas.microsoft.com/office/drawing/2016/SVG/main" r:embed="rId8"/>
-                </a:ext>
-              </a:extLst>
-            </a:blip>
-            <a:stretch>
-              <a:fillRect/>
-            </a:stretch>
-          </p:blipFill>
-          <p:spPr>
-            <a:xfrm>
-              <a:off x="2796626" y="849583"/>
-              <a:ext cx="457200" cy="457200"/>
-            </a:xfrm>
-            <a:prstGeom prst="rect">
-              <a:avLst/>
-            </a:prstGeom>
-          </p:spPr>
-        </p:pic>
-        <p:sp>
-          <p:nvSpPr>
-            <p:cNvPr id="15" name="TextBox 29">
-              <a:extLst>
-                <a:ext uri="{FF2B5EF4-FFF2-40B4-BE49-F238E27FC236}">
-                  <a16:creationId xmlns:a16="http://schemas.microsoft.com/office/drawing/2014/main" id="{39619346-3854-4095-907E-2F3C8D53CA42}"/>
-                </a:ext>
-              </a:extLst>
-            </p:cNvPr>
-            <p:cNvSpPr txBox="1">
-              <a:spLocks noChangeArrowheads="1"/>
-            </p:cNvSpPr>
-            <p:nvPr/>
-          </p:nvSpPr>
-          <p:spPr bwMode="auto">
-            <a:xfrm>
-              <a:off x="2491746" y="1235005"/>
-              <a:ext cx="1073150" cy="276999"/>
-            </a:xfrm>
-            <a:prstGeom prst="rect">
-              <a:avLst/>
-            </a:prstGeom>
-            <a:noFill/>
-            <a:ln>
-              <a:noFill/>
-            </a:ln>
-            <a:extLst>
-              <a:ext uri="{909E8E84-426E-40DD-AFC4-6F175D3DCCD1}">
-                <a14:hiddenFill xmlns:a14="http://schemas.microsoft.com/office/drawing/2010/main">
-                  <a:solidFill>
-                    <a:srgbClr val="FFFFFF"/>
-                  </a:solidFill>
-                </a14:hiddenFill>
-              </a:ext>
-              <a:ext uri="{91240B29-F687-4F45-9708-019B960494DF}">
-                <a14:hiddenLine xmlns:a14="http://schemas.microsoft.com/office/drawing/2010/main" w="9525">
-                  <a:solidFill>
-                    <a:srgbClr val="000000"/>
-                  </a:solidFill>
-                  <a:miter lim="800000"/>
-                  <a:headEnd/>
-                  <a:tailEnd/>
-                </a14:hiddenLine>
-              </a:ext>
-            </a:extLst>
-          </p:spPr>
-          <p:txBody>
-            <a:bodyPr>
-              <a:spAutoFit/>
-            </a:bodyPr>
-            <a:lstStyle>
-              <a:defPPr>
-                <a:defRPr lang="en-US"/>
-              </a:defPPr>
-              <a:lvl1pPr algn="l" rtl="0" eaLnBrk="0" fontAlgn="base" hangingPunct="0">
-                <a:spcBef>
-                  <a:spcPct val="0"/>
-                </a:spcBef>
-                <a:spcAft>
-                  <a:spcPct val="0"/>
-                </a:spcAft>
-                <a:defRPr kern="1200">
-                  <a:solidFill>
-                    <a:schemeClr val="tx1"/>
-                  </a:solidFill>
-                  <a:latin typeface="Calibri" panose="020F0502020204030204" pitchFamily="34" charset="0"/>
-                  <a:ea typeface="+mn-ea"/>
-                  <a:cs typeface="+mn-cs"/>
-                </a:defRPr>
-              </a:lvl1pPr>
-              <a:lvl2pPr marL="457200" algn="l" rtl="0" eaLnBrk="0" fontAlgn="base" hangingPunct="0">
-                <a:spcBef>
-                  <a:spcPct val="0"/>
-                </a:spcBef>
-                <a:spcAft>
-                  <a:spcPct val="0"/>
-                </a:spcAft>
-                <a:defRPr kern="1200">
-                  <a:solidFill>
-                    <a:schemeClr val="tx1"/>
-                  </a:solidFill>
-                  <a:latin typeface="Calibri" panose="020F0502020204030204" pitchFamily="34" charset="0"/>
-                  <a:ea typeface="+mn-ea"/>
-                  <a:cs typeface="+mn-cs"/>
-                </a:defRPr>
-              </a:lvl2pPr>
-              <a:lvl3pPr marL="914400" algn="l" rtl="0" eaLnBrk="0" fontAlgn="base" hangingPunct="0">
-                <a:spcBef>
-                  <a:spcPct val="0"/>
-                </a:spcBef>
-                <a:spcAft>
-                  <a:spcPct val="0"/>
-                </a:spcAft>
-                <a:defRPr kern="1200">
-                  <a:solidFill>
-                    <a:schemeClr val="tx1"/>
-                  </a:solidFill>
-                  <a:latin typeface="Calibri" panose="020F0502020204030204" pitchFamily="34" charset="0"/>
-                  <a:ea typeface="+mn-ea"/>
-                  <a:cs typeface="+mn-cs"/>
-                </a:defRPr>
-              </a:lvl3pPr>
-              <a:lvl4pPr marL="1371600" algn="l" rtl="0" eaLnBrk="0" fontAlgn="base" hangingPunct="0">
-                <a:spcBef>
-                  <a:spcPct val="0"/>
-                </a:spcBef>
-                <a:spcAft>
-                  <a:spcPct val="0"/>
-                </a:spcAft>
-                <a:defRPr kern="1200">
-                  <a:solidFill>
-                    <a:schemeClr val="tx1"/>
-                  </a:solidFill>
-                  <a:latin typeface="Calibri" panose="020F0502020204030204" pitchFamily="34" charset="0"/>
-                  <a:ea typeface="+mn-ea"/>
-                  <a:cs typeface="+mn-cs"/>
-                </a:defRPr>
-              </a:lvl4pPr>
-              <a:lvl5pPr marL="1828800" algn="l" rtl="0" eaLnBrk="0" fontAlgn="base" hangingPunct="0">
-                <a:spcBef>
-                  <a:spcPct val="0"/>
-                </a:spcBef>
-                <a:spcAft>
-                  <a:spcPct val="0"/>
-                </a:spcAft>
-                <a:defRPr kern="1200">
-                  <a:solidFill>
-                    <a:schemeClr val="tx1"/>
-                  </a:solidFill>
-                  <a:latin typeface="Calibri" panose="020F0502020204030204" pitchFamily="34" charset="0"/>
-                  <a:ea typeface="+mn-ea"/>
-                  <a:cs typeface="+mn-cs"/>
-                </a:defRPr>
-              </a:lvl5pPr>
-              <a:lvl6pPr marL="2286000" algn="l" defTabSz="914400" rtl="0" eaLnBrk="1" latinLnBrk="0" hangingPunct="1">
-                <a:defRPr kern="1200">
-                  <a:solidFill>
-                    <a:schemeClr val="tx1"/>
-                  </a:solidFill>
-                  <a:latin typeface="Calibri" panose="020F0502020204030204" pitchFamily="34" charset="0"/>
-                  <a:ea typeface="+mn-ea"/>
-                  <a:cs typeface="+mn-cs"/>
-                </a:defRPr>
-              </a:lvl6pPr>
-              <a:lvl7pPr marL="2743200" algn="l" defTabSz="914400" rtl="0" eaLnBrk="1" latinLnBrk="0" hangingPunct="1">
-                <a:defRPr kern="1200">
-                  <a:solidFill>
-                    <a:schemeClr val="tx1"/>
-                  </a:solidFill>
-                  <a:latin typeface="Calibri" panose="020F0502020204030204" pitchFamily="34" charset="0"/>
-                  <a:ea typeface="+mn-ea"/>
-                  <a:cs typeface="+mn-cs"/>
-                </a:defRPr>
-              </a:lvl7pPr>
-              <a:lvl8pPr marL="3200400" algn="l" defTabSz="914400" rtl="0" eaLnBrk="1" latinLnBrk="0" hangingPunct="1">
-                <a:defRPr kern="1200">
-                  <a:solidFill>
-                    <a:schemeClr val="tx1"/>
-                  </a:solidFill>
-                  <a:latin typeface="Calibri" panose="020F0502020204030204" pitchFamily="34" charset="0"/>
-                  <a:ea typeface="+mn-ea"/>
-                  <a:cs typeface="+mn-cs"/>
-                </a:defRPr>
-              </a:lvl8pPr>
-              <a:lvl9pPr marL="3657600" algn="l" defTabSz="914400" rtl="0" eaLnBrk="1" latinLnBrk="0" hangingPunct="1">
-                <a:defRPr kern="1200">
-                  <a:solidFill>
-                    <a:schemeClr val="tx1"/>
-                  </a:solidFill>
-                  <a:latin typeface="Calibri" panose="020F0502020204030204" pitchFamily="34" charset="0"/>
-                  <a:ea typeface="+mn-ea"/>
-                  <a:cs typeface="+mn-cs"/>
-                </a:defRPr>
-              </a:lvl9pPr>
-            </a:lstStyle>
-            <a:p>
-              <a:pPr algn="ctr" eaLnBrk="1" hangingPunct="1"/>
-              <a:r>
-                <a:rPr lang="en-US" altLang="en-US" sz="1200">
-                  <a:latin typeface="Arial" panose="020B0604020202020204" pitchFamily="34" charset="0"/>
-                  <a:cs typeface="Arial" panose="020B0604020202020204" pitchFamily="34" charset="0"/>
-                </a:rPr>
-                <a:t>Internet</a:t>
-              </a:r>
-            </a:p>
-          </p:txBody>
-        </p:sp>
-        <p:pic>
-          <p:nvPicPr>
-            <p:cNvPr id="16" name="Graphic 21" descr="Amazon Route 53 service icon.">
-              <a:extLst>
-                <a:ext uri="{FF2B5EF4-FFF2-40B4-BE49-F238E27FC236}">
-                  <a16:creationId xmlns:a16="http://schemas.microsoft.com/office/drawing/2014/main" id="{4B6B7262-A401-4545-BE78-5138448DE1FA}"/>
-                </a:ext>
-              </a:extLst>
-            </p:cNvPr>
-            <p:cNvPicPr>
-              <a:picLocks noChangeAspect="1" noChangeArrowheads="1"/>
-            </p:cNvPicPr>
-            <p:nvPr/>
-          </p:nvPicPr>
-          <p:blipFill>
-            <a:blip r:embed="rId9">
-              <a:extLst>
-                <a:ext uri="{96DAC541-7B7A-43D3-8B79-37D633B846F1}">
-                  <asvg:svgBlip xmlns:asvg="http://schemas.microsoft.com/office/drawing/2016/SVG/main" r:embed="rId10"/>
-                </a:ext>
-              </a:extLst>
-            </a:blip>
-            <a:srcRect/>
-            <a:stretch/>
-          </p:blipFill>
-          <p:spPr bwMode="auto">
-            <a:xfrm>
-              <a:off x="4913971" y="1835207"/>
-              <a:ext cx="396000" cy="396000"/>
-            </a:xfrm>
-            <a:prstGeom prst="rect">
-              <a:avLst/>
-            </a:prstGeom>
-            <a:noFill/>
-            <a:ln>
-              <a:noFill/>
-            </a:ln>
-            <a:extLst>
-              <a:ext uri="{909E8E84-426E-40DD-AFC4-6F175D3DCCD1}">
-                <a14:hiddenFill xmlns:a14="http://schemas.microsoft.com/office/drawing/2010/main">
-                  <a:solidFill>
-                    <a:srgbClr val="FFFFFF"/>
-                  </a:solidFill>
-                </a14:hiddenFill>
-              </a:ext>
-              <a:ext uri="{91240B29-F687-4F45-9708-019B960494DF}">
-                <a14:hiddenLine xmlns:a14="http://schemas.microsoft.com/office/drawing/2010/main" w="9525">
-                  <a:solidFill>
-                    <a:srgbClr val="000000"/>
-                  </a:solidFill>
-                  <a:miter lim="800000"/>
-                  <a:headEnd/>
-                  <a:tailEnd/>
-                </a14:hiddenLine>
-              </a:ext>
-            </a:extLst>
-          </p:spPr>
-        </p:pic>
-        <p:pic>
-          <p:nvPicPr>
-            <p:cNvPr id="17" name="Graphic 8" descr="Amazon Simple Storage Service (Amazon S3) service icon.">
-              <a:extLst>
-                <a:ext uri="{FF2B5EF4-FFF2-40B4-BE49-F238E27FC236}">
-                  <a16:creationId xmlns:a16="http://schemas.microsoft.com/office/drawing/2014/main" id="{503A6B4D-DEE3-46F9-B451-2A59ED89EBA9}"/>
-                </a:ext>
-              </a:extLst>
-            </p:cNvPr>
-            <p:cNvPicPr>
-              <a:picLocks noChangeAspect="1" noChangeArrowheads="1"/>
-            </p:cNvPicPr>
-            <p:nvPr/>
-          </p:nvPicPr>
-          <p:blipFill>
-            <a:blip r:embed="rId11">
-              <a:extLst>
-                <a:ext uri="{96DAC541-7B7A-43D3-8B79-37D633B846F1}">
-                  <asvg:svgBlip xmlns:asvg="http://schemas.microsoft.com/office/drawing/2016/SVG/main" r:embed="rId12"/>
-                </a:ext>
-              </a:extLst>
-            </a:blip>
-            <a:srcRect/>
-            <a:stretch/>
-          </p:blipFill>
-          <p:spPr bwMode="auto">
-            <a:xfrm>
-              <a:off x="3876216" y="1837352"/>
-              <a:ext cx="396000" cy="396000"/>
-            </a:xfrm>
-            <a:prstGeom prst="rect">
-              <a:avLst/>
-            </a:prstGeom>
-            <a:noFill/>
-            <a:ln>
-              <a:noFill/>
-            </a:ln>
-            <a:extLst>
-              <a:ext uri="{909E8E84-426E-40DD-AFC4-6F175D3DCCD1}">
-                <a14:hiddenFill xmlns:a14="http://schemas.microsoft.com/office/drawing/2010/main">
-                  <a:solidFill>
-                    <a:srgbClr val="FFFFFF"/>
-                  </a:solidFill>
-                </a14:hiddenFill>
-              </a:ext>
-              <a:ext uri="{91240B29-F687-4F45-9708-019B960494DF}">
-                <a14:hiddenLine xmlns:a14="http://schemas.microsoft.com/office/drawing/2010/main" w="9525">
-                  <a:solidFill>
-                    <a:srgbClr val="000000"/>
-                  </a:solidFill>
-                  <a:miter lim="800000"/>
-                  <a:headEnd/>
-                  <a:tailEnd/>
-                </a14:hiddenLine>
-              </a:ext>
-            </a:extLst>
-          </p:spPr>
-        </p:pic>
-        <p:sp>
-          <p:nvSpPr>
-            <p:cNvPr id="18" name="TextBox 62">
-              <a:extLst>
-                <a:ext uri="{FF2B5EF4-FFF2-40B4-BE49-F238E27FC236}">
-                  <a16:creationId xmlns:a16="http://schemas.microsoft.com/office/drawing/2014/main" id="{03BDFE94-8CD7-4905-A7A8-A1ADD3FD6F55}"/>
-                </a:ext>
-              </a:extLst>
-            </p:cNvPr>
-            <p:cNvSpPr txBox="1">
-              <a:spLocks noChangeArrowheads="1"/>
-            </p:cNvSpPr>
-            <p:nvPr/>
-          </p:nvSpPr>
-          <p:spPr bwMode="auto">
-            <a:xfrm>
-              <a:off x="3980440" y="2251070"/>
-              <a:ext cx="187551" cy="184666"/>
-            </a:xfrm>
-            <a:prstGeom prst="rect">
-              <a:avLst/>
-            </a:prstGeom>
-            <a:noFill/>
-            <a:ln>
-              <a:noFill/>
-            </a:ln>
-            <a:extLst>
-              <a:ext uri="{909E8E84-426E-40DD-AFC4-6F175D3DCCD1}">
-                <a14:hiddenFill xmlns:a14="http://schemas.microsoft.com/office/drawing/2010/main">
-                  <a:solidFill>
-                    <a:srgbClr val="FFFFFF"/>
-                  </a:solidFill>
-                </a14:hiddenFill>
-              </a:ext>
-              <a:ext uri="{91240B29-F687-4F45-9708-019B960494DF}">
-                <a14:hiddenLine xmlns:a14="http://schemas.microsoft.com/office/drawing/2010/main" w="9525">
-                  <a:solidFill>
-                    <a:srgbClr val="000000"/>
-                  </a:solidFill>
-                  <a:miter lim="800000"/>
-                  <a:headEnd/>
-                  <a:tailEnd/>
-                </a14:hiddenLine>
-              </a:ext>
-            </a:extLst>
-          </p:spPr>
-          <p:txBody>
-            <a:bodyPr wrap="none" lIns="0" tIns="0" rIns="0" bIns="0">
-              <a:spAutoFit/>
-            </a:bodyPr>
-            <a:lstStyle>
-              <a:defPPr>
-                <a:defRPr lang="en-US"/>
-              </a:defPPr>
-              <a:lvl1pPr algn="l" rtl="0" eaLnBrk="0" fontAlgn="base" hangingPunct="0">
-                <a:spcBef>
-                  <a:spcPct val="0"/>
-                </a:spcBef>
-                <a:spcAft>
-                  <a:spcPct val="0"/>
-                </a:spcAft>
-                <a:defRPr kern="1200">
-                  <a:solidFill>
-                    <a:schemeClr val="tx1"/>
-                  </a:solidFill>
-                  <a:latin typeface="Calibri" panose="020F0502020204030204" pitchFamily="34" charset="0"/>
-                  <a:ea typeface="+mn-ea"/>
-                  <a:cs typeface="+mn-cs"/>
-                </a:defRPr>
-              </a:lvl1pPr>
-              <a:lvl2pPr marL="457200" algn="l" rtl="0" eaLnBrk="0" fontAlgn="base" hangingPunct="0">
-                <a:spcBef>
-                  <a:spcPct val="0"/>
-                </a:spcBef>
-                <a:spcAft>
-                  <a:spcPct val="0"/>
-                </a:spcAft>
-                <a:defRPr kern="1200">
-                  <a:solidFill>
-                    <a:schemeClr val="tx1"/>
-                  </a:solidFill>
-                  <a:latin typeface="Calibri" panose="020F0502020204030204" pitchFamily="34" charset="0"/>
-                  <a:ea typeface="+mn-ea"/>
-                  <a:cs typeface="+mn-cs"/>
-                </a:defRPr>
-              </a:lvl2pPr>
-              <a:lvl3pPr marL="914400" algn="l" rtl="0" eaLnBrk="0" fontAlgn="base" hangingPunct="0">
-                <a:spcBef>
-                  <a:spcPct val="0"/>
-                </a:spcBef>
-                <a:spcAft>
-                  <a:spcPct val="0"/>
-                </a:spcAft>
-                <a:defRPr kern="1200">
-                  <a:solidFill>
-                    <a:schemeClr val="tx1"/>
-                  </a:solidFill>
-                  <a:latin typeface="Calibri" panose="020F0502020204030204" pitchFamily="34" charset="0"/>
-                  <a:ea typeface="+mn-ea"/>
-                  <a:cs typeface="+mn-cs"/>
-                </a:defRPr>
-              </a:lvl3pPr>
-              <a:lvl4pPr marL="1371600" algn="l" rtl="0" eaLnBrk="0" fontAlgn="base" hangingPunct="0">
-                <a:spcBef>
-                  <a:spcPct val="0"/>
-                </a:spcBef>
-                <a:spcAft>
-                  <a:spcPct val="0"/>
-                </a:spcAft>
-                <a:defRPr kern="1200">
-                  <a:solidFill>
-                    <a:schemeClr val="tx1"/>
-                  </a:solidFill>
-                  <a:latin typeface="Calibri" panose="020F0502020204030204" pitchFamily="34" charset="0"/>
-                  <a:ea typeface="+mn-ea"/>
-                  <a:cs typeface="+mn-cs"/>
-                </a:defRPr>
-              </a:lvl4pPr>
-              <a:lvl5pPr marL="1828800" algn="l" rtl="0" eaLnBrk="0" fontAlgn="base" hangingPunct="0">
-                <a:spcBef>
-                  <a:spcPct val="0"/>
-                </a:spcBef>
-                <a:spcAft>
-                  <a:spcPct val="0"/>
-                </a:spcAft>
-                <a:defRPr kern="1200">
-                  <a:solidFill>
-                    <a:schemeClr val="tx1"/>
-                  </a:solidFill>
-                  <a:latin typeface="Calibri" panose="020F0502020204030204" pitchFamily="34" charset="0"/>
-                  <a:ea typeface="+mn-ea"/>
-                  <a:cs typeface="+mn-cs"/>
-                </a:defRPr>
-              </a:lvl5pPr>
-              <a:lvl6pPr marL="2286000" algn="l" defTabSz="914400" rtl="0" eaLnBrk="1" latinLnBrk="0" hangingPunct="1">
-                <a:defRPr kern="1200">
-                  <a:solidFill>
-                    <a:schemeClr val="tx1"/>
-                  </a:solidFill>
-                  <a:latin typeface="Calibri" panose="020F0502020204030204" pitchFamily="34" charset="0"/>
-                  <a:ea typeface="+mn-ea"/>
-                  <a:cs typeface="+mn-cs"/>
-                </a:defRPr>
-              </a:lvl6pPr>
-              <a:lvl7pPr marL="2743200" algn="l" defTabSz="914400" rtl="0" eaLnBrk="1" latinLnBrk="0" hangingPunct="1">
-                <a:defRPr kern="1200">
-                  <a:solidFill>
-                    <a:schemeClr val="tx1"/>
-                  </a:solidFill>
-                  <a:latin typeface="Calibri" panose="020F0502020204030204" pitchFamily="34" charset="0"/>
-                  <a:ea typeface="+mn-ea"/>
-                  <a:cs typeface="+mn-cs"/>
-                </a:defRPr>
-              </a:lvl7pPr>
-              <a:lvl8pPr marL="3200400" algn="l" defTabSz="914400" rtl="0" eaLnBrk="1" latinLnBrk="0" hangingPunct="1">
-                <a:defRPr kern="1200">
-                  <a:solidFill>
-                    <a:schemeClr val="tx1"/>
-                  </a:solidFill>
-                  <a:latin typeface="Calibri" panose="020F0502020204030204" pitchFamily="34" charset="0"/>
-                  <a:ea typeface="+mn-ea"/>
-                  <a:cs typeface="+mn-cs"/>
-                </a:defRPr>
-              </a:lvl8pPr>
-              <a:lvl9pPr marL="3657600" algn="l" defTabSz="914400" rtl="0" eaLnBrk="1" latinLnBrk="0" hangingPunct="1">
-                <a:defRPr kern="1200">
-                  <a:solidFill>
-                    <a:schemeClr val="tx1"/>
-                  </a:solidFill>
-                  <a:latin typeface="Calibri" panose="020F0502020204030204" pitchFamily="34" charset="0"/>
-                  <a:ea typeface="+mn-ea"/>
-                  <a:cs typeface="+mn-cs"/>
-                </a:defRPr>
-              </a:lvl9pPr>
-            </a:lstStyle>
-            <a:p>
-              <a:pPr algn="ctr" eaLnBrk="1" hangingPunct="1"/>
-              <a:r>
-                <a:rPr lang="en-US" altLang="en-US" sz="1200">
-                  <a:latin typeface="Arial" panose="020B0604020202020204" pitchFamily="34" charset="0"/>
-                  <a:ea typeface="Amazon Ember" panose="020B0603020204020204" pitchFamily="34" charset="0"/>
-                  <a:cs typeface="Arial" panose="020B0604020202020204" pitchFamily="34" charset="0"/>
-                </a:rPr>
-                <a:t>S3</a:t>
-              </a:r>
-            </a:p>
-          </p:txBody>
-        </p:sp>
-        <p:sp>
-          <p:nvSpPr>
-            <p:cNvPr id="21" name="TextBox 62">
-              <a:extLst>
-                <a:ext uri="{FF2B5EF4-FFF2-40B4-BE49-F238E27FC236}">
-                  <a16:creationId xmlns:a16="http://schemas.microsoft.com/office/drawing/2014/main" id="{D0D93BA2-E2D0-96DA-20E7-CC18187C36B4}"/>
-                </a:ext>
-              </a:extLst>
-            </p:cNvPr>
-            <p:cNvSpPr txBox="1">
-              <a:spLocks noChangeArrowheads="1"/>
-            </p:cNvSpPr>
-            <p:nvPr/>
-          </p:nvSpPr>
-          <p:spPr bwMode="auto">
-            <a:xfrm>
-              <a:off x="4822628" y="2271296"/>
-              <a:ext cx="578685" cy="184666"/>
-            </a:xfrm>
-            <a:prstGeom prst="rect">
-              <a:avLst/>
-            </a:prstGeom>
-            <a:noFill/>
-            <a:ln>
-              <a:noFill/>
-            </a:ln>
-            <a:extLst>
-              <a:ext uri="{909E8E84-426E-40DD-AFC4-6F175D3DCCD1}">
-                <a14:hiddenFill xmlns:a14="http://schemas.microsoft.com/office/drawing/2010/main">
-                  <a:solidFill>
-                    <a:srgbClr val="FFFFFF"/>
-                  </a:solidFill>
-                </a14:hiddenFill>
-              </a:ext>
-              <a:ext uri="{91240B29-F687-4F45-9708-019B960494DF}">
-                <a14:hiddenLine xmlns:a14="http://schemas.microsoft.com/office/drawing/2010/main" w="9525">
-                  <a:solidFill>
-                    <a:srgbClr val="000000"/>
-                  </a:solidFill>
-                  <a:miter lim="800000"/>
-                  <a:headEnd/>
-                  <a:tailEnd/>
-                </a14:hiddenLine>
-              </a:ext>
-            </a:extLst>
-          </p:spPr>
-          <p:txBody>
-            <a:bodyPr wrap="none" lIns="0" tIns="0" rIns="0" bIns="0">
-              <a:spAutoFit/>
-            </a:bodyPr>
-            <a:lstStyle>
-              <a:defPPr>
-                <a:defRPr lang="en-US"/>
-              </a:defPPr>
-              <a:lvl1pPr algn="l" rtl="0" eaLnBrk="0" fontAlgn="base" hangingPunct="0">
-                <a:spcBef>
-                  <a:spcPct val="0"/>
-                </a:spcBef>
-                <a:spcAft>
-                  <a:spcPct val="0"/>
-                </a:spcAft>
-                <a:defRPr kern="1200">
-                  <a:solidFill>
-                    <a:schemeClr val="tx1"/>
-                  </a:solidFill>
-                  <a:latin typeface="Calibri" panose="020F0502020204030204" pitchFamily="34" charset="0"/>
-                  <a:ea typeface="+mn-ea"/>
-                  <a:cs typeface="+mn-cs"/>
-                </a:defRPr>
-              </a:lvl1pPr>
-              <a:lvl2pPr marL="457200" algn="l" rtl="0" eaLnBrk="0" fontAlgn="base" hangingPunct="0">
-                <a:spcBef>
-                  <a:spcPct val="0"/>
-                </a:spcBef>
-                <a:spcAft>
-                  <a:spcPct val="0"/>
-                </a:spcAft>
-                <a:defRPr kern="1200">
-                  <a:solidFill>
-                    <a:schemeClr val="tx1"/>
-                  </a:solidFill>
-                  <a:latin typeface="Calibri" panose="020F0502020204030204" pitchFamily="34" charset="0"/>
-                  <a:ea typeface="+mn-ea"/>
-                  <a:cs typeface="+mn-cs"/>
-                </a:defRPr>
-              </a:lvl2pPr>
-              <a:lvl3pPr marL="914400" algn="l" rtl="0" eaLnBrk="0" fontAlgn="base" hangingPunct="0">
-                <a:spcBef>
-                  <a:spcPct val="0"/>
-                </a:spcBef>
-                <a:spcAft>
-                  <a:spcPct val="0"/>
-                </a:spcAft>
-                <a:defRPr kern="1200">
-                  <a:solidFill>
-                    <a:schemeClr val="tx1"/>
-                  </a:solidFill>
-                  <a:latin typeface="Calibri" panose="020F0502020204030204" pitchFamily="34" charset="0"/>
-                  <a:ea typeface="+mn-ea"/>
-                  <a:cs typeface="+mn-cs"/>
-                </a:defRPr>
-              </a:lvl3pPr>
-              <a:lvl4pPr marL="1371600" algn="l" rtl="0" eaLnBrk="0" fontAlgn="base" hangingPunct="0">
-                <a:spcBef>
-                  <a:spcPct val="0"/>
-                </a:spcBef>
-                <a:spcAft>
-                  <a:spcPct val="0"/>
-                </a:spcAft>
-                <a:defRPr kern="1200">
-                  <a:solidFill>
-                    <a:schemeClr val="tx1"/>
-                  </a:solidFill>
-                  <a:latin typeface="Calibri" panose="020F0502020204030204" pitchFamily="34" charset="0"/>
-                  <a:ea typeface="+mn-ea"/>
-                  <a:cs typeface="+mn-cs"/>
-                </a:defRPr>
-              </a:lvl4pPr>
-              <a:lvl5pPr marL="1828800" algn="l" rtl="0" eaLnBrk="0" fontAlgn="base" hangingPunct="0">
-                <a:spcBef>
-                  <a:spcPct val="0"/>
-                </a:spcBef>
-                <a:spcAft>
-                  <a:spcPct val="0"/>
-                </a:spcAft>
-                <a:defRPr kern="1200">
-                  <a:solidFill>
-                    <a:schemeClr val="tx1"/>
-                  </a:solidFill>
-                  <a:latin typeface="Calibri" panose="020F0502020204030204" pitchFamily="34" charset="0"/>
-                  <a:ea typeface="+mn-ea"/>
-                  <a:cs typeface="+mn-cs"/>
-                </a:defRPr>
-              </a:lvl5pPr>
-              <a:lvl6pPr marL="2286000" algn="l" defTabSz="914400" rtl="0" eaLnBrk="1" latinLnBrk="0" hangingPunct="1">
-                <a:defRPr kern="1200">
-                  <a:solidFill>
-                    <a:schemeClr val="tx1"/>
-                  </a:solidFill>
-                  <a:latin typeface="Calibri" panose="020F0502020204030204" pitchFamily="34" charset="0"/>
-                  <a:ea typeface="+mn-ea"/>
-                  <a:cs typeface="+mn-cs"/>
-                </a:defRPr>
-              </a:lvl6pPr>
-              <a:lvl7pPr marL="2743200" algn="l" defTabSz="914400" rtl="0" eaLnBrk="1" latinLnBrk="0" hangingPunct="1">
-                <a:defRPr kern="1200">
-                  <a:solidFill>
-                    <a:schemeClr val="tx1"/>
-                  </a:solidFill>
-                  <a:latin typeface="Calibri" panose="020F0502020204030204" pitchFamily="34" charset="0"/>
-                  <a:ea typeface="+mn-ea"/>
-                  <a:cs typeface="+mn-cs"/>
-                </a:defRPr>
-              </a:lvl7pPr>
-              <a:lvl8pPr marL="3200400" algn="l" defTabSz="914400" rtl="0" eaLnBrk="1" latinLnBrk="0" hangingPunct="1">
-                <a:defRPr kern="1200">
-                  <a:solidFill>
-                    <a:schemeClr val="tx1"/>
-                  </a:solidFill>
-                  <a:latin typeface="Calibri" panose="020F0502020204030204" pitchFamily="34" charset="0"/>
-                  <a:ea typeface="+mn-ea"/>
-                  <a:cs typeface="+mn-cs"/>
-                </a:defRPr>
-              </a:lvl8pPr>
-              <a:lvl9pPr marL="3657600" algn="l" defTabSz="914400" rtl="0" eaLnBrk="1" latinLnBrk="0" hangingPunct="1">
-                <a:defRPr kern="1200">
-                  <a:solidFill>
-                    <a:schemeClr val="tx1"/>
-                  </a:solidFill>
-                  <a:latin typeface="Calibri" panose="020F0502020204030204" pitchFamily="34" charset="0"/>
-                  <a:ea typeface="+mn-ea"/>
-                  <a:cs typeface="+mn-cs"/>
-                </a:defRPr>
-              </a:lvl9pPr>
-            </a:lstStyle>
-            <a:p>
-              <a:pPr algn="ctr" eaLnBrk="1" hangingPunct="1"/>
-              <a:r>
-                <a:rPr lang="en-US" altLang="en-US" sz="1200">
-                  <a:latin typeface="Arial" panose="020B0604020202020204" pitchFamily="34" charset="0"/>
-                  <a:ea typeface="Amazon Ember" panose="020B0603020204020204" pitchFamily="34" charset="0"/>
-                  <a:cs typeface="Arial" panose="020B0604020202020204" pitchFamily="34" charset="0"/>
-                </a:rPr>
-                <a:t>Route53</a:t>
-              </a:r>
-            </a:p>
-          </p:txBody>
-        </p:sp>
-        <p:pic>
-          <p:nvPicPr>
-            <p:cNvPr id="22" name="Graphic 19" descr="Amazon CloudFront service icon.">
-              <a:extLst>
-                <a:ext uri="{FF2B5EF4-FFF2-40B4-BE49-F238E27FC236}">
-                  <a16:creationId xmlns:a16="http://schemas.microsoft.com/office/drawing/2014/main" id="{3F641843-3240-4E7A-A6BF-5E7369657F2B}"/>
-                </a:ext>
-              </a:extLst>
-            </p:cNvPr>
-            <p:cNvPicPr>
-              <a:picLocks noChangeAspect="1" noChangeArrowheads="1"/>
-            </p:cNvPicPr>
-            <p:nvPr/>
-          </p:nvPicPr>
-          <p:blipFill>
-            <a:blip r:embed="rId13">
-              <a:extLst>
-                <a:ext uri="{96DAC541-7B7A-43D3-8B79-37D633B846F1}">
-                  <asvg:svgBlip xmlns:asvg="http://schemas.microsoft.com/office/drawing/2016/SVG/main" r:embed="rId14"/>
-                </a:ext>
-              </a:extLst>
-            </a:blip>
-            <a:srcRect/>
-            <a:stretch/>
-          </p:blipFill>
-          <p:spPr bwMode="auto">
-            <a:xfrm>
-              <a:off x="2827226" y="1838582"/>
-              <a:ext cx="396000" cy="396000"/>
-            </a:xfrm>
-            <a:prstGeom prst="rect">
-              <a:avLst/>
-            </a:prstGeom>
-            <a:noFill/>
-            <a:ln>
-              <a:noFill/>
-            </a:ln>
-            <a:extLst>
-              <a:ext uri="{909E8E84-426E-40DD-AFC4-6F175D3DCCD1}">
-                <a14:hiddenFill xmlns:a14="http://schemas.microsoft.com/office/drawing/2010/main">
-                  <a:solidFill>
-                    <a:srgbClr val="FFFFFF"/>
-                  </a:solidFill>
-                </a14:hiddenFill>
-              </a:ext>
-              <a:ext uri="{91240B29-F687-4F45-9708-019B960494DF}">
-                <a14:hiddenLine xmlns:a14="http://schemas.microsoft.com/office/drawing/2010/main" w="9525">
-                  <a:solidFill>
-                    <a:srgbClr val="000000"/>
-                  </a:solidFill>
-                  <a:miter lim="800000"/>
-                  <a:headEnd/>
-                  <a:tailEnd/>
-                </a14:hiddenLine>
-              </a:ext>
-            </a:extLst>
-          </p:spPr>
-        </p:pic>
-        <p:sp>
-          <p:nvSpPr>
-            <p:cNvPr id="23" name="TextBox 62">
-              <a:extLst>
-                <a:ext uri="{FF2B5EF4-FFF2-40B4-BE49-F238E27FC236}">
-                  <a16:creationId xmlns:a16="http://schemas.microsoft.com/office/drawing/2014/main" id="{AC2E830E-8494-4BCC-5706-07BA080B2465}"/>
-                </a:ext>
-              </a:extLst>
-            </p:cNvPr>
-            <p:cNvSpPr txBox="1">
-              <a:spLocks noChangeArrowheads="1"/>
-            </p:cNvSpPr>
-            <p:nvPr/>
-          </p:nvSpPr>
-          <p:spPr bwMode="auto">
-            <a:xfrm>
-              <a:off x="2651782" y="2225755"/>
-              <a:ext cx="758221" cy="184666"/>
-            </a:xfrm>
-            <a:prstGeom prst="rect">
-              <a:avLst/>
-            </a:prstGeom>
-            <a:noFill/>
-            <a:ln>
-              <a:noFill/>
-            </a:ln>
-            <a:extLst>
-              <a:ext uri="{909E8E84-426E-40DD-AFC4-6F175D3DCCD1}">
-                <a14:hiddenFill xmlns:a14="http://schemas.microsoft.com/office/drawing/2010/main">
-                  <a:solidFill>
-                    <a:srgbClr val="FFFFFF"/>
-                  </a:solidFill>
-                </a14:hiddenFill>
-              </a:ext>
-              <a:ext uri="{91240B29-F687-4F45-9708-019B960494DF}">
-                <a14:hiddenLine xmlns:a14="http://schemas.microsoft.com/office/drawing/2010/main" w="9525">
-                  <a:solidFill>
-                    <a:srgbClr val="000000"/>
-                  </a:solidFill>
-                  <a:miter lim="800000"/>
-                  <a:headEnd/>
-                  <a:tailEnd/>
-                </a14:hiddenLine>
-              </a:ext>
-            </a:extLst>
-          </p:spPr>
-          <p:txBody>
-            <a:bodyPr wrap="none" lIns="0" tIns="0" rIns="0" bIns="0">
-              <a:spAutoFit/>
-            </a:bodyPr>
-            <a:lstStyle>
-              <a:defPPr>
-                <a:defRPr lang="en-US"/>
-              </a:defPPr>
-              <a:lvl1pPr algn="l" rtl="0" eaLnBrk="0" fontAlgn="base" hangingPunct="0">
-                <a:spcBef>
-                  <a:spcPct val="0"/>
-                </a:spcBef>
-                <a:spcAft>
-                  <a:spcPct val="0"/>
-                </a:spcAft>
-                <a:defRPr kern="1200">
-                  <a:solidFill>
-                    <a:schemeClr val="tx1"/>
-                  </a:solidFill>
-                  <a:latin typeface="Calibri" panose="020F0502020204030204" pitchFamily="34" charset="0"/>
-                  <a:ea typeface="+mn-ea"/>
-                  <a:cs typeface="+mn-cs"/>
-                </a:defRPr>
-              </a:lvl1pPr>
-              <a:lvl2pPr marL="457200" algn="l" rtl="0" eaLnBrk="0" fontAlgn="base" hangingPunct="0">
-                <a:spcBef>
-                  <a:spcPct val="0"/>
-                </a:spcBef>
-                <a:spcAft>
-                  <a:spcPct val="0"/>
-                </a:spcAft>
-                <a:defRPr kern="1200">
-                  <a:solidFill>
-                    <a:schemeClr val="tx1"/>
-                  </a:solidFill>
-                  <a:latin typeface="Calibri" panose="020F0502020204030204" pitchFamily="34" charset="0"/>
-                  <a:ea typeface="+mn-ea"/>
-                  <a:cs typeface="+mn-cs"/>
-                </a:defRPr>
-              </a:lvl2pPr>
-              <a:lvl3pPr marL="914400" algn="l" rtl="0" eaLnBrk="0" fontAlgn="base" hangingPunct="0">
-                <a:spcBef>
-                  <a:spcPct val="0"/>
-                </a:spcBef>
-                <a:spcAft>
-                  <a:spcPct val="0"/>
-                </a:spcAft>
-                <a:defRPr kern="1200">
-                  <a:solidFill>
-                    <a:schemeClr val="tx1"/>
-                  </a:solidFill>
-                  <a:latin typeface="Calibri" panose="020F0502020204030204" pitchFamily="34" charset="0"/>
-                  <a:ea typeface="+mn-ea"/>
-                  <a:cs typeface="+mn-cs"/>
-                </a:defRPr>
-              </a:lvl3pPr>
-              <a:lvl4pPr marL="1371600" algn="l" rtl="0" eaLnBrk="0" fontAlgn="base" hangingPunct="0">
-                <a:spcBef>
-                  <a:spcPct val="0"/>
-                </a:spcBef>
-                <a:spcAft>
-                  <a:spcPct val="0"/>
-                </a:spcAft>
-                <a:defRPr kern="1200">
-                  <a:solidFill>
-                    <a:schemeClr val="tx1"/>
-                  </a:solidFill>
-                  <a:latin typeface="Calibri" panose="020F0502020204030204" pitchFamily="34" charset="0"/>
-                  <a:ea typeface="+mn-ea"/>
-                  <a:cs typeface="+mn-cs"/>
-                </a:defRPr>
-              </a:lvl4pPr>
-              <a:lvl5pPr marL="1828800" algn="l" rtl="0" eaLnBrk="0" fontAlgn="base" hangingPunct="0">
-                <a:spcBef>
-                  <a:spcPct val="0"/>
-                </a:spcBef>
-                <a:spcAft>
-                  <a:spcPct val="0"/>
-                </a:spcAft>
-                <a:defRPr kern="1200">
-                  <a:solidFill>
-                    <a:schemeClr val="tx1"/>
-                  </a:solidFill>
-                  <a:latin typeface="Calibri" panose="020F0502020204030204" pitchFamily="34" charset="0"/>
-                  <a:ea typeface="+mn-ea"/>
-                  <a:cs typeface="+mn-cs"/>
-                </a:defRPr>
-              </a:lvl5pPr>
-              <a:lvl6pPr marL="2286000" algn="l" defTabSz="914400" rtl="0" eaLnBrk="1" latinLnBrk="0" hangingPunct="1">
-                <a:defRPr kern="1200">
-                  <a:solidFill>
-                    <a:schemeClr val="tx1"/>
-                  </a:solidFill>
-                  <a:latin typeface="Calibri" panose="020F0502020204030204" pitchFamily="34" charset="0"/>
-                  <a:ea typeface="+mn-ea"/>
-                  <a:cs typeface="+mn-cs"/>
-                </a:defRPr>
-              </a:lvl6pPr>
-              <a:lvl7pPr marL="2743200" algn="l" defTabSz="914400" rtl="0" eaLnBrk="1" latinLnBrk="0" hangingPunct="1">
-                <a:defRPr kern="1200">
-                  <a:solidFill>
-                    <a:schemeClr val="tx1"/>
-                  </a:solidFill>
-                  <a:latin typeface="Calibri" panose="020F0502020204030204" pitchFamily="34" charset="0"/>
-                  <a:ea typeface="+mn-ea"/>
-                  <a:cs typeface="+mn-cs"/>
-                </a:defRPr>
-              </a:lvl7pPr>
-              <a:lvl8pPr marL="3200400" algn="l" defTabSz="914400" rtl="0" eaLnBrk="1" latinLnBrk="0" hangingPunct="1">
-                <a:defRPr kern="1200">
-                  <a:solidFill>
-                    <a:schemeClr val="tx1"/>
-                  </a:solidFill>
-                  <a:latin typeface="Calibri" panose="020F0502020204030204" pitchFamily="34" charset="0"/>
-                  <a:ea typeface="+mn-ea"/>
-                  <a:cs typeface="+mn-cs"/>
-                </a:defRPr>
-              </a:lvl8pPr>
-              <a:lvl9pPr marL="3657600" algn="l" defTabSz="914400" rtl="0" eaLnBrk="1" latinLnBrk="0" hangingPunct="1">
-                <a:defRPr kern="1200">
-                  <a:solidFill>
-                    <a:schemeClr val="tx1"/>
-                  </a:solidFill>
-                  <a:latin typeface="Calibri" panose="020F0502020204030204" pitchFamily="34" charset="0"/>
-                  <a:ea typeface="+mn-ea"/>
-                  <a:cs typeface="+mn-cs"/>
-                </a:defRPr>
-              </a:lvl9pPr>
-            </a:lstStyle>
-            <a:p>
-              <a:pPr algn="ctr" eaLnBrk="1" hangingPunct="1"/>
-              <a:r>
-                <a:rPr lang="en-US" altLang="en-US" sz="1200">
-                  <a:latin typeface="Arial" panose="020B0604020202020204" pitchFamily="34" charset="0"/>
-                  <a:ea typeface="Amazon Ember" panose="020B0603020204020204" pitchFamily="34" charset="0"/>
-                  <a:cs typeface="Arial" panose="020B0604020202020204" pitchFamily="34" charset="0"/>
-                </a:rPr>
-                <a:t>CloudFront</a:t>
-              </a:r>
-            </a:p>
-          </p:txBody>
-        </p:sp>
-        <p:pic>
-          <p:nvPicPr>
-            <p:cNvPr id="24" name="Graphic 36" descr="Application Load Balancer resource icon for the Elastic Load Balancing service.">
-              <a:extLst>
-                <a:ext uri="{FF2B5EF4-FFF2-40B4-BE49-F238E27FC236}">
-                  <a16:creationId xmlns:a16="http://schemas.microsoft.com/office/drawing/2014/main" id="{2C2D838C-4431-4882-B79B-8B5260020082}"/>
-                </a:ext>
-              </a:extLst>
-            </p:cNvPr>
-            <p:cNvPicPr>
-              <a:picLocks noChangeAspect="1"/>
-            </p:cNvPicPr>
-            <p:nvPr/>
-          </p:nvPicPr>
-          <p:blipFill>
-            <a:blip r:embed="rId15">
-              <a:extLst>
-                <a:ext uri="{96DAC541-7B7A-43D3-8B79-37D633B846F1}">
-                  <asvg:svgBlip xmlns:asvg="http://schemas.microsoft.com/office/drawing/2016/SVG/main" r:embed="rId16"/>
-                </a:ext>
-              </a:extLst>
-            </a:blip>
-            <a:stretch>
-              <a:fillRect/>
-            </a:stretch>
-          </p:blipFill>
-          <p:spPr>
-            <a:xfrm>
-              <a:off x="1720687" y="3610888"/>
-              <a:ext cx="457200" cy="457200"/>
-            </a:xfrm>
-            <a:prstGeom prst="rect">
-              <a:avLst/>
-            </a:prstGeom>
-          </p:spPr>
-        </p:pic>
-        <p:sp>
-          <p:nvSpPr>
-            <p:cNvPr id="25" name="TextBox 62">
-              <a:extLst>
-                <a:ext uri="{FF2B5EF4-FFF2-40B4-BE49-F238E27FC236}">
-                  <a16:creationId xmlns:a16="http://schemas.microsoft.com/office/drawing/2014/main" id="{B47BC988-2487-F3CE-509E-5734B39A7B10}"/>
-                </a:ext>
-              </a:extLst>
-            </p:cNvPr>
-            <p:cNvSpPr txBox="1">
-              <a:spLocks noChangeArrowheads="1"/>
-            </p:cNvSpPr>
-            <p:nvPr/>
-          </p:nvSpPr>
-          <p:spPr bwMode="auto">
-            <a:xfrm>
-              <a:off x="1831005" y="4059661"/>
-              <a:ext cx="290144" cy="184666"/>
-            </a:xfrm>
-            <a:prstGeom prst="rect">
-              <a:avLst/>
-            </a:prstGeom>
-            <a:noFill/>
-            <a:ln>
-              <a:noFill/>
-            </a:ln>
-            <a:extLst>
-              <a:ext uri="{909E8E84-426E-40DD-AFC4-6F175D3DCCD1}">
-                <a14:hiddenFill xmlns:a14="http://schemas.microsoft.com/office/drawing/2010/main">
-                  <a:solidFill>
-                    <a:srgbClr val="FFFFFF"/>
-                  </a:solidFill>
-                </a14:hiddenFill>
-              </a:ext>
-              <a:ext uri="{91240B29-F687-4F45-9708-019B960494DF}">
-                <a14:hiddenLine xmlns:a14="http://schemas.microsoft.com/office/drawing/2010/main" w="9525">
-                  <a:solidFill>
-                    <a:srgbClr val="000000"/>
-                  </a:solidFill>
-                  <a:miter lim="800000"/>
-                  <a:headEnd/>
-                  <a:tailEnd/>
-                </a14:hiddenLine>
-              </a:ext>
-            </a:extLst>
-          </p:spPr>
-          <p:txBody>
-            <a:bodyPr wrap="none" lIns="0" tIns="0" rIns="0" bIns="0">
-              <a:spAutoFit/>
-            </a:bodyPr>
-            <a:lstStyle>
-              <a:defPPr>
-                <a:defRPr lang="en-US"/>
-              </a:defPPr>
-              <a:lvl1pPr algn="l" rtl="0" eaLnBrk="0" fontAlgn="base" hangingPunct="0">
-                <a:spcBef>
-                  <a:spcPct val="0"/>
-                </a:spcBef>
-                <a:spcAft>
-                  <a:spcPct val="0"/>
-                </a:spcAft>
-                <a:defRPr kern="1200">
-                  <a:solidFill>
-                    <a:schemeClr val="tx1"/>
-                  </a:solidFill>
-                  <a:latin typeface="Calibri" panose="020F0502020204030204" pitchFamily="34" charset="0"/>
-                  <a:ea typeface="+mn-ea"/>
-                  <a:cs typeface="+mn-cs"/>
-                </a:defRPr>
-              </a:lvl1pPr>
-              <a:lvl2pPr marL="457200" algn="l" rtl="0" eaLnBrk="0" fontAlgn="base" hangingPunct="0">
-                <a:spcBef>
-                  <a:spcPct val="0"/>
-                </a:spcBef>
-                <a:spcAft>
-                  <a:spcPct val="0"/>
-                </a:spcAft>
-                <a:defRPr kern="1200">
-                  <a:solidFill>
-                    <a:schemeClr val="tx1"/>
-                  </a:solidFill>
-                  <a:latin typeface="Calibri" panose="020F0502020204030204" pitchFamily="34" charset="0"/>
-                  <a:ea typeface="+mn-ea"/>
-                  <a:cs typeface="+mn-cs"/>
-                </a:defRPr>
-              </a:lvl2pPr>
-              <a:lvl3pPr marL="914400" algn="l" rtl="0" eaLnBrk="0" fontAlgn="base" hangingPunct="0">
-                <a:spcBef>
-                  <a:spcPct val="0"/>
-                </a:spcBef>
-                <a:spcAft>
-                  <a:spcPct val="0"/>
-                </a:spcAft>
-                <a:defRPr kern="1200">
-                  <a:solidFill>
-                    <a:schemeClr val="tx1"/>
-                  </a:solidFill>
-                  <a:latin typeface="Calibri" panose="020F0502020204030204" pitchFamily="34" charset="0"/>
-                  <a:ea typeface="+mn-ea"/>
-                  <a:cs typeface="+mn-cs"/>
-                </a:defRPr>
-              </a:lvl3pPr>
-              <a:lvl4pPr marL="1371600" algn="l" rtl="0" eaLnBrk="0" fontAlgn="base" hangingPunct="0">
-                <a:spcBef>
-                  <a:spcPct val="0"/>
-                </a:spcBef>
-                <a:spcAft>
-                  <a:spcPct val="0"/>
-                </a:spcAft>
-                <a:defRPr kern="1200">
-                  <a:solidFill>
-                    <a:schemeClr val="tx1"/>
-                  </a:solidFill>
-                  <a:latin typeface="Calibri" panose="020F0502020204030204" pitchFamily="34" charset="0"/>
-                  <a:ea typeface="+mn-ea"/>
-                  <a:cs typeface="+mn-cs"/>
-                </a:defRPr>
-              </a:lvl4pPr>
-              <a:lvl5pPr marL="1828800" algn="l" rtl="0" eaLnBrk="0" fontAlgn="base" hangingPunct="0">
-                <a:spcBef>
-                  <a:spcPct val="0"/>
-                </a:spcBef>
-                <a:spcAft>
-                  <a:spcPct val="0"/>
-                </a:spcAft>
-                <a:defRPr kern="1200">
-                  <a:solidFill>
-                    <a:schemeClr val="tx1"/>
-                  </a:solidFill>
-                  <a:latin typeface="Calibri" panose="020F0502020204030204" pitchFamily="34" charset="0"/>
-                  <a:ea typeface="+mn-ea"/>
-                  <a:cs typeface="+mn-cs"/>
-                </a:defRPr>
-              </a:lvl5pPr>
-              <a:lvl6pPr marL="2286000" algn="l" defTabSz="914400" rtl="0" eaLnBrk="1" latinLnBrk="0" hangingPunct="1">
-                <a:defRPr kern="1200">
-                  <a:solidFill>
-                    <a:schemeClr val="tx1"/>
-                  </a:solidFill>
-                  <a:latin typeface="Calibri" panose="020F0502020204030204" pitchFamily="34" charset="0"/>
-                  <a:ea typeface="+mn-ea"/>
-                  <a:cs typeface="+mn-cs"/>
-                </a:defRPr>
-              </a:lvl6pPr>
-              <a:lvl7pPr marL="2743200" algn="l" defTabSz="914400" rtl="0" eaLnBrk="1" latinLnBrk="0" hangingPunct="1">
-                <a:defRPr kern="1200">
-                  <a:solidFill>
-                    <a:schemeClr val="tx1"/>
-                  </a:solidFill>
-                  <a:latin typeface="Calibri" panose="020F0502020204030204" pitchFamily="34" charset="0"/>
-                  <a:ea typeface="+mn-ea"/>
-                  <a:cs typeface="+mn-cs"/>
-                </a:defRPr>
-              </a:lvl7pPr>
-              <a:lvl8pPr marL="3200400" algn="l" defTabSz="914400" rtl="0" eaLnBrk="1" latinLnBrk="0" hangingPunct="1">
-                <a:defRPr kern="1200">
-                  <a:solidFill>
-                    <a:schemeClr val="tx1"/>
-                  </a:solidFill>
-                  <a:latin typeface="Calibri" panose="020F0502020204030204" pitchFamily="34" charset="0"/>
-                  <a:ea typeface="+mn-ea"/>
-                  <a:cs typeface="+mn-cs"/>
-                </a:defRPr>
-              </a:lvl8pPr>
-              <a:lvl9pPr marL="3657600" algn="l" defTabSz="914400" rtl="0" eaLnBrk="1" latinLnBrk="0" hangingPunct="1">
-                <a:defRPr kern="1200">
-                  <a:solidFill>
-                    <a:schemeClr val="tx1"/>
-                  </a:solidFill>
-                  <a:latin typeface="Calibri" panose="020F0502020204030204" pitchFamily="34" charset="0"/>
-                  <a:ea typeface="+mn-ea"/>
-                  <a:cs typeface="+mn-cs"/>
-                </a:defRPr>
-              </a:lvl9pPr>
-            </a:lstStyle>
-            <a:p>
-              <a:pPr algn="ctr" eaLnBrk="1" hangingPunct="1"/>
-              <a:r>
-                <a:rPr lang="en-US" altLang="en-US" sz="1200">
-                  <a:latin typeface="Arial" panose="020B0604020202020204" pitchFamily="34" charset="0"/>
-                  <a:ea typeface="Amazon Ember" panose="020B0603020204020204" pitchFamily="34" charset="0"/>
-                  <a:cs typeface="Arial" panose="020B0604020202020204" pitchFamily="34" charset="0"/>
-                </a:rPr>
-                <a:t>ALB</a:t>
-              </a:r>
-            </a:p>
-          </p:txBody>
-        </p:sp>
-        <p:sp>
-          <p:nvSpPr>
-            <p:cNvPr id="27" name="TextBox 62">
-              <a:extLst>
-                <a:ext uri="{FF2B5EF4-FFF2-40B4-BE49-F238E27FC236}">
-                  <a16:creationId xmlns:a16="http://schemas.microsoft.com/office/drawing/2014/main" id="{3CC57F9B-B75F-F290-8C63-D967D79551C9}"/>
-                </a:ext>
-              </a:extLst>
-            </p:cNvPr>
-            <p:cNvSpPr txBox="1">
-              <a:spLocks noChangeArrowheads="1"/>
-            </p:cNvSpPr>
-            <p:nvPr/>
-          </p:nvSpPr>
-          <p:spPr bwMode="auto">
-            <a:xfrm>
-              <a:off x="2714911" y="4070582"/>
-              <a:ext cx="1295227" cy="184666"/>
-            </a:xfrm>
-            <a:prstGeom prst="rect">
-              <a:avLst/>
-            </a:prstGeom>
-            <a:noFill/>
-            <a:ln>
-              <a:noFill/>
-            </a:ln>
-            <a:extLst>
-              <a:ext uri="{909E8E84-426E-40DD-AFC4-6F175D3DCCD1}">
-                <a14:hiddenFill xmlns:a14="http://schemas.microsoft.com/office/drawing/2010/main">
-                  <a:solidFill>
-                    <a:srgbClr val="FFFFFF"/>
-                  </a:solidFill>
-                </a14:hiddenFill>
-              </a:ext>
-              <a:ext uri="{91240B29-F687-4F45-9708-019B960494DF}">
-                <a14:hiddenLine xmlns:a14="http://schemas.microsoft.com/office/drawing/2010/main" w="9525">
-                  <a:solidFill>
-                    <a:srgbClr val="000000"/>
-                  </a:solidFill>
-                  <a:miter lim="800000"/>
-                  <a:headEnd/>
-                  <a:tailEnd/>
-                </a14:hiddenLine>
-              </a:ext>
-            </a:extLst>
-          </p:spPr>
-          <p:txBody>
-            <a:bodyPr wrap="none" lIns="0" tIns="0" rIns="0" bIns="0">
-              <a:spAutoFit/>
-            </a:bodyPr>
-            <a:lstStyle>
-              <a:defPPr>
-                <a:defRPr lang="en-US"/>
-              </a:defPPr>
-              <a:lvl1pPr algn="l" rtl="0" eaLnBrk="0" fontAlgn="base" hangingPunct="0">
-                <a:spcBef>
-                  <a:spcPct val="0"/>
-                </a:spcBef>
-                <a:spcAft>
-                  <a:spcPct val="0"/>
-                </a:spcAft>
-                <a:defRPr kern="1200">
-                  <a:solidFill>
-                    <a:schemeClr val="tx1"/>
-                  </a:solidFill>
-                  <a:latin typeface="Calibri" panose="020F0502020204030204" pitchFamily="34" charset="0"/>
-                  <a:ea typeface="+mn-ea"/>
-                  <a:cs typeface="+mn-cs"/>
-                </a:defRPr>
-              </a:lvl1pPr>
-              <a:lvl2pPr marL="457200" algn="l" rtl="0" eaLnBrk="0" fontAlgn="base" hangingPunct="0">
-                <a:spcBef>
-                  <a:spcPct val="0"/>
-                </a:spcBef>
-                <a:spcAft>
-                  <a:spcPct val="0"/>
-                </a:spcAft>
-                <a:defRPr kern="1200">
-                  <a:solidFill>
-                    <a:schemeClr val="tx1"/>
-                  </a:solidFill>
-                  <a:latin typeface="Calibri" panose="020F0502020204030204" pitchFamily="34" charset="0"/>
-                  <a:ea typeface="+mn-ea"/>
-                  <a:cs typeface="+mn-cs"/>
-                </a:defRPr>
-              </a:lvl2pPr>
-              <a:lvl3pPr marL="914400" algn="l" rtl="0" eaLnBrk="0" fontAlgn="base" hangingPunct="0">
-                <a:spcBef>
-                  <a:spcPct val="0"/>
-                </a:spcBef>
-                <a:spcAft>
-                  <a:spcPct val="0"/>
-                </a:spcAft>
-                <a:defRPr kern="1200">
-                  <a:solidFill>
-                    <a:schemeClr val="tx1"/>
-                  </a:solidFill>
-                  <a:latin typeface="Calibri" panose="020F0502020204030204" pitchFamily="34" charset="0"/>
-                  <a:ea typeface="+mn-ea"/>
-                  <a:cs typeface="+mn-cs"/>
-                </a:defRPr>
-              </a:lvl3pPr>
-              <a:lvl4pPr marL="1371600" algn="l" rtl="0" eaLnBrk="0" fontAlgn="base" hangingPunct="0">
-                <a:spcBef>
-                  <a:spcPct val="0"/>
-                </a:spcBef>
-                <a:spcAft>
-                  <a:spcPct val="0"/>
-                </a:spcAft>
-                <a:defRPr kern="1200">
-                  <a:solidFill>
-                    <a:schemeClr val="tx1"/>
-                  </a:solidFill>
-                  <a:latin typeface="Calibri" panose="020F0502020204030204" pitchFamily="34" charset="0"/>
-                  <a:ea typeface="+mn-ea"/>
-                  <a:cs typeface="+mn-cs"/>
-                </a:defRPr>
-              </a:lvl4pPr>
-              <a:lvl5pPr marL="1828800" algn="l" rtl="0" eaLnBrk="0" fontAlgn="base" hangingPunct="0">
-                <a:spcBef>
-                  <a:spcPct val="0"/>
-                </a:spcBef>
-                <a:spcAft>
-                  <a:spcPct val="0"/>
-                </a:spcAft>
-                <a:defRPr kern="1200">
-                  <a:solidFill>
-                    <a:schemeClr val="tx1"/>
-                  </a:solidFill>
-                  <a:latin typeface="Calibri" panose="020F0502020204030204" pitchFamily="34" charset="0"/>
-                  <a:ea typeface="+mn-ea"/>
-                  <a:cs typeface="+mn-cs"/>
-                </a:defRPr>
-              </a:lvl5pPr>
-              <a:lvl6pPr marL="2286000" algn="l" defTabSz="914400" rtl="0" eaLnBrk="1" latinLnBrk="0" hangingPunct="1">
-                <a:defRPr kern="1200">
-                  <a:solidFill>
-                    <a:schemeClr val="tx1"/>
-                  </a:solidFill>
-                  <a:latin typeface="Calibri" panose="020F0502020204030204" pitchFamily="34" charset="0"/>
-                  <a:ea typeface="+mn-ea"/>
-                  <a:cs typeface="+mn-cs"/>
-                </a:defRPr>
-              </a:lvl6pPr>
-              <a:lvl7pPr marL="2743200" algn="l" defTabSz="914400" rtl="0" eaLnBrk="1" latinLnBrk="0" hangingPunct="1">
-                <a:defRPr kern="1200">
-                  <a:solidFill>
-                    <a:schemeClr val="tx1"/>
-                  </a:solidFill>
-                  <a:latin typeface="Calibri" panose="020F0502020204030204" pitchFamily="34" charset="0"/>
-                  <a:ea typeface="+mn-ea"/>
-                  <a:cs typeface="+mn-cs"/>
-                </a:defRPr>
-              </a:lvl7pPr>
-              <a:lvl8pPr marL="3200400" algn="l" defTabSz="914400" rtl="0" eaLnBrk="1" latinLnBrk="0" hangingPunct="1">
-                <a:defRPr kern="1200">
-                  <a:solidFill>
-                    <a:schemeClr val="tx1"/>
-                  </a:solidFill>
-                  <a:latin typeface="Calibri" panose="020F0502020204030204" pitchFamily="34" charset="0"/>
-                  <a:ea typeface="+mn-ea"/>
-                  <a:cs typeface="+mn-cs"/>
-                </a:defRPr>
-              </a:lvl8pPr>
-              <a:lvl9pPr marL="3657600" algn="l" defTabSz="914400" rtl="0" eaLnBrk="1" latinLnBrk="0" hangingPunct="1">
-                <a:defRPr kern="1200">
-                  <a:solidFill>
-                    <a:schemeClr val="tx1"/>
-                  </a:solidFill>
-                  <a:latin typeface="Calibri" panose="020F0502020204030204" pitchFamily="34" charset="0"/>
-                  <a:ea typeface="+mn-ea"/>
-                  <a:cs typeface="+mn-cs"/>
-                </a:defRPr>
-              </a:lvl9pPr>
-            </a:lstStyle>
-            <a:p>
-              <a:pPr algn="ctr" eaLnBrk="1" hangingPunct="1"/>
-              <a:r>
-                <a:rPr lang="en-US" altLang="en-US" sz="1200">
-                  <a:latin typeface="Arial" panose="020B0604020202020204" pitchFamily="34" charset="0"/>
-                  <a:ea typeface="Amazon Ember" panose="020B0603020204020204" pitchFamily="34" charset="0"/>
-                  <a:cs typeface="Arial" panose="020B0604020202020204" pitchFamily="34" charset="0"/>
-                </a:rPr>
-                <a:t>Auto Scaling</a:t>
-              </a:r>
-              <a:r>
-                <a:rPr lang="ja-JP" altLang="en-US" sz="1200">
-                  <a:latin typeface="Arial" panose="020B0604020202020204" pitchFamily="34" charset="0"/>
-                  <a:ea typeface="Amazon Ember" panose="020B0603020204020204" pitchFamily="34" charset="0"/>
-                  <a:cs typeface="Arial" panose="020B0604020202020204" pitchFamily="34" charset="0"/>
-                </a:rPr>
-                <a:t> </a:t>
-              </a:r>
-              <a:r>
-                <a:rPr lang="en-US" altLang="ja-JP" sz="1200">
-                  <a:latin typeface="Arial" panose="020B0604020202020204" pitchFamily="34" charset="0"/>
-                  <a:ea typeface="Amazon Ember" panose="020B0603020204020204" pitchFamily="34" charset="0"/>
-                  <a:cs typeface="Arial" panose="020B0604020202020204" pitchFamily="34" charset="0"/>
-                </a:rPr>
-                <a:t>group</a:t>
-              </a:r>
-              <a:endParaRPr lang="en-US" altLang="en-US" sz="1200">
-                <a:latin typeface="Arial" panose="020B0604020202020204" pitchFamily="34" charset="0"/>
-                <a:ea typeface="Amazon Ember" panose="020B0603020204020204" pitchFamily="34" charset="0"/>
-                <a:cs typeface="Arial" panose="020B0604020202020204" pitchFamily="34" charset="0"/>
-              </a:endParaRPr>
-            </a:p>
-          </p:txBody>
-        </p:sp>
-        <p:pic>
-          <p:nvPicPr>
-            <p:cNvPr id="28" name="Graphic 17" descr="Amazon CloudWatch service icon.">
-              <a:extLst>
-                <a:ext uri="{FF2B5EF4-FFF2-40B4-BE49-F238E27FC236}">
-                  <a16:creationId xmlns:a16="http://schemas.microsoft.com/office/drawing/2014/main" id="{F0F27D85-8B1B-4E60-9EC1-12AB8A2FBCC5}"/>
-                </a:ext>
-              </a:extLst>
-            </p:cNvPr>
-            <p:cNvPicPr>
-              <a:picLocks noChangeAspect="1" noChangeArrowheads="1"/>
-            </p:cNvPicPr>
-            <p:nvPr/>
-          </p:nvPicPr>
-          <p:blipFill>
-            <a:blip r:embed="rId17">
-              <a:extLst>
-                <a:ext uri="{96DAC541-7B7A-43D3-8B79-37D633B846F1}">
-                  <asvg:svgBlip xmlns:asvg="http://schemas.microsoft.com/office/drawing/2016/SVG/main" r:embed="rId18"/>
-                </a:ext>
-              </a:extLst>
-            </a:blip>
-            <a:srcRect/>
-            <a:stretch/>
-          </p:blipFill>
-          <p:spPr bwMode="auto">
-            <a:xfrm>
-              <a:off x="1362886" y="4747217"/>
-              <a:ext cx="396000" cy="396000"/>
-            </a:xfrm>
-            <a:prstGeom prst="rect">
-              <a:avLst/>
-            </a:prstGeom>
-            <a:noFill/>
-            <a:ln>
-              <a:noFill/>
-            </a:ln>
-            <a:extLst>
-              <a:ext uri="{909E8E84-426E-40DD-AFC4-6F175D3DCCD1}">
-                <a14:hiddenFill xmlns:a14="http://schemas.microsoft.com/office/drawing/2010/main">
-                  <a:solidFill>
-                    <a:srgbClr val="FFFFFF"/>
-                  </a:solidFill>
-                </a14:hiddenFill>
-              </a:ext>
-              <a:ext uri="{91240B29-F687-4F45-9708-019B960494DF}">
-                <a14:hiddenLine xmlns:a14="http://schemas.microsoft.com/office/drawing/2010/main" w="9525">
-                  <a:solidFill>
-                    <a:srgbClr val="000000"/>
-                  </a:solidFill>
-                  <a:miter lim="800000"/>
-                  <a:headEnd/>
-                  <a:tailEnd/>
-                </a14:hiddenLine>
-              </a:ext>
-            </a:extLst>
-          </p:spPr>
-        </p:pic>
-        <p:sp>
-          <p:nvSpPr>
-            <p:cNvPr id="29" name="TextBox 62">
-              <a:extLst>
-                <a:ext uri="{FF2B5EF4-FFF2-40B4-BE49-F238E27FC236}">
-                  <a16:creationId xmlns:a16="http://schemas.microsoft.com/office/drawing/2014/main" id="{2D34CAAF-A159-335F-B7D1-B924C8FEEF0B}"/>
-                </a:ext>
-              </a:extLst>
-            </p:cNvPr>
-            <p:cNvSpPr txBox="1">
-              <a:spLocks noChangeArrowheads="1"/>
-            </p:cNvSpPr>
-            <p:nvPr/>
-          </p:nvSpPr>
-          <p:spPr bwMode="auto">
-            <a:xfrm>
-              <a:off x="1171924" y="5145906"/>
-              <a:ext cx="829458" cy="184666"/>
-            </a:xfrm>
-            <a:prstGeom prst="rect">
-              <a:avLst/>
-            </a:prstGeom>
-            <a:noFill/>
-            <a:ln>
-              <a:noFill/>
-            </a:ln>
-            <a:extLst>
-              <a:ext uri="{909E8E84-426E-40DD-AFC4-6F175D3DCCD1}">
-                <a14:hiddenFill xmlns:a14="http://schemas.microsoft.com/office/drawing/2010/main">
-                  <a:solidFill>
-                    <a:srgbClr val="FFFFFF"/>
-                  </a:solidFill>
-                </a14:hiddenFill>
-              </a:ext>
-              <a:ext uri="{91240B29-F687-4F45-9708-019B960494DF}">
-                <a14:hiddenLine xmlns:a14="http://schemas.microsoft.com/office/drawing/2010/main" w="9525">
-                  <a:solidFill>
-                    <a:srgbClr val="000000"/>
-                  </a:solidFill>
-                  <a:miter lim="800000"/>
-                  <a:headEnd/>
-                  <a:tailEnd/>
-                </a14:hiddenLine>
-              </a:ext>
-            </a:extLst>
-          </p:spPr>
-          <p:txBody>
-            <a:bodyPr wrap="none" lIns="0" tIns="0" rIns="0" bIns="0">
-              <a:spAutoFit/>
-            </a:bodyPr>
-            <a:lstStyle>
-              <a:defPPr>
-                <a:defRPr lang="en-US"/>
-              </a:defPPr>
-              <a:lvl1pPr algn="l" rtl="0" eaLnBrk="0" fontAlgn="base" hangingPunct="0">
-                <a:spcBef>
-                  <a:spcPct val="0"/>
-                </a:spcBef>
-                <a:spcAft>
-                  <a:spcPct val="0"/>
-                </a:spcAft>
-                <a:defRPr kern="1200">
-                  <a:solidFill>
-                    <a:schemeClr val="tx1"/>
-                  </a:solidFill>
-                  <a:latin typeface="Calibri" panose="020F0502020204030204" pitchFamily="34" charset="0"/>
-                  <a:ea typeface="+mn-ea"/>
-                  <a:cs typeface="+mn-cs"/>
-                </a:defRPr>
-              </a:lvl1pPr>
-              <a:lvl2pPr marL="457200" algn="l" rtl="0" eaLnBrk="0" fontAlgn="base" hangingPunct="0">
-                <a:spcBef>
-                  <a:spcPct val="0"/>
-                </a:spcBef>
-                <a:spcAft>
-                  <a:spcPct val="0"/>
-                </a:spcAft>
-                <a:defRPr kern="1200">
-                  <a:solidFill>
-                    <a:schemeClr val="tx1"/>
-                  </a:solidFill>
-                  <a:latin typeface="Calibri" panose="020F0502020204030204" pitchFamily="34" charset="0"/>
-                  <a:ea typeface="+mn-ea"/>
-                  <a:cs typeface="+mn-cs"/>
-                </a:defRPr>
-              </a:lvl2pPr>
-              <a:lvl3pPr marL="914400" algn="l" rtl="0" eaLnBrk="0" fontAlgn="base" hangingPunct="0">
-                <a:spcBef>
-                  <a:spcPct val="0"/>
-                </a:spcBef>
-                <a:spcAft>
-                  <a:spcPct val="0"/>
-                </a:spcAft>
-                <a:defRPr kern="1200">
-                  <a:solidFill>
-                    <a:schemeClr val="tx1"/>
-                  </a:solidFill>
-                  <a:latin typeface="Calibri" panose="020F0502020204030204" pitchFamily="34" charset="0"/>
-                  <a:ea typeface="+mn-ea"/>
-                  <a:cs typeface="+mn-cs"/>
-                </a:defRPr>
-              </a:lvl3pPr>
-              <a:lvl4pPr marL="1371600" algn="l" rtl="0" eaLnBrk="0" fontAlgn="base" hangingPunct="0">
-                <a:spcBef>
-                  <a:spcPct val="0"/>
-                </a:spcBef>
-                <a:spcAft>
-                  <a:spcPct val="0"/>
-                </a:spcAft>
-                <a:defRPr kern="1200">
-                  <a:solidFill>
-                    <a:schemeClr val="tx1"/>
-                  </a:solidFill>
-                  <a:latin typeface="Calibri" panose="020F0502020204030204" pitchFamily="34" charset="0"/>
-                  <a:ea typeface="+mn-ea"/>
-                  <a:cs typeface="+mn-cs"/>
-                </a:defRPr>
-              </a:lvl4pPr>
-              <a:lvl5pPr marL="1828800" algn="l" rtl="0" eaLnBrk="0" fontAlgn="base" hangingPunct="0">
-                <a:spcBef>
-                  <a:spcPct val="0"/>
-                </a:spcBef>
-                <a:spcAft>
-                  <a:spcPct val="0"/>
-                </a:spcAft>
-                <a:defRPr kern="1200">
-                  <a:solidFill>
-                    <a:schemeClr val="tx1"/>
-                  </a:solidFill>
-                  <a:latin typeface="Calibri" panose="020F0502020204030204" pitchFamily="34" charset="0"/>
-                  <a:ea typeface="+mn-ea"/>
-                  <a:cs typeface="+mn-cs"/>
-                </a:defRPr>
-              </a:lvl5pPr>
-              <a:lvl6pPr marL="2286000" algn="l" defTabSz="914400" rtl="0" eaLnBrk="1" latinLnBrk="0" hangingPunct="1">
-                <a:defRPr kern="1200">
-                  <a:solidFill>
-                    <a:schemeClr val="tx1"/>
-                  </a:solidFill>
-                  <a:latin typeface="Calibri" panose="020F0502020204030204" pitchFamily="34" charset="0"/>
-                  <a:ea typeface="+mn-ea"/>
-                  <a:cs typeface="+mn-cs"/>
-                </a:defRPr>
-              </a:lvl6pPr>
-              <a:lvl7pPr marL="2743200" algn="l" defTabSz="914400" rtl="0" eaLnBrk="1" latinLnBrk="0" hangingPunct="1">
-                <a:defRPr kern="1200">
-                  <a:solidFill>
-                    <a:schemeClr val="tx1"/>
-                  </a:solidFill>
-                  <a:latin typeface="Calibri" panose="020F0502020204030204" pitchFamily="34" charset="0"/>
-                  <a:ea typeface="+mn-ea"/>
-                  <a:cs typeface="+mn-cs"/>
-                </a:defRPr>
-              </a:lvl7pPr>
-              <a:lvl8pPr marL="3200400" algn="l" defTabSz="914400" rtl="0" eaLnBrk="1" latinLnBrk="0" hangingPunct="1">
-                <a:defRPr kern="1200">
-                  <a:solidFill>
-                    <a:schemeClr val="tx1"/>
-                  </a:solidFill>
-                  <a:latin typeface="Calibri" panose="020F0502020204030204" pitchFamily="34" charset="0"/>
-                  <a:ea typeface="+mn-ea"/>
-                  <a:cs typeface="+mn-cs"/>
-                </a:defRPr>
-              </a:lvl8pPr>
-              <a:lvl9pPr marL="3657600" algn="l" defTabSz="914400" rtl="0" eaLnBrk="1" latinLnBrk="0" hangingPunct="1">
-                <a:defRPr kern="1200">
-                  <a:solidFill>
-                    <a:schemeClr val="tx1"/>
-                  </a:solidFill>
-                  <a:latin typeface="Calibri" panose="020F0502020204030204" pitchFamily="34" charset="0"/>
-                  <a:ea typeface="+mn-ea"/>
-                  <a:cs typeface="+mn-cs"/>
-                </a:defRPr>
-              </a:lvl9pPr>
-            </a:lstStyle>
-            <a:p>
-              <a:pPr algn="ctr" eaLnBrk="1" hangingPunct="1"/>
-              <a:r>
-                <a:rPr lang="en-US" altLang="en-US" sz="1200">
-                  <a:latin typeface="Arial" panose="020B0604020202020204" pitchFamily="34" charset="0"/>
-                  <a:ea typeface="Amazon Ember" panose="020B0603020204020204" pitchFamily="34" charset="0"/>
-                  <a:cs typeface="Arial" panose="020B0604020202020204" pitchFamily="34" charset="0"/>
-                </a:rPr>
-                <a:t>CloudWatch</a:t>
-              </a:r>
-            </a:p>
-          </p:txBody>
-        </p:sp>
-        <p:sp>
-          <p:nvSpPr>
-            <p:cNvPr id="31" name="TextBox 62">
-              <a:extLst>
-                <a:ext uri="{FF2B5EF4-FFF2-40B4-BE49-F238E27FC236}">
-                  <a16:creationId xmlns:a16="http://schemas.microsoft.com/office/drawing/2014/main" id="{8C9E014C-6BA4-3794-3509-0532C59F7273}"/>
-                </a:ext>
-              </a:extLst>
-            </p:cNvPr>
-            <p:cNvSpPr txBox="1">
-              <a:spLocks noChangeArrowheads="1"/>
-            </p:cNvSpPr>
-            <p:nvPr/>
-          </p:nvSpPr>
-          <p:spPr bwMode="auto">
-            <a:xfrm>
-              <a:off x="1121387" y="6026089"/>
-              <a:ext cx="939360" cy="184666"/>
-            </a:xfrm>
-            <a:prstGeom prst="rect">
-              <a:avLst/>
-            </a:prstGeom>
-            <a:noFill/>
-            <a:ln>
-              <a:noFill/>
-            </a:ln>
-            <a:extLst>
-              <a:ext uri="{909E8E84-426E-40DD-AFC4-6F175D3DCCD1}">
-                <a14:hiddenFill xmlns:a14="http://schemas.microsoft.com/office/drawing/2010/main">
-                  <a:solidFill>
-                    <a:srgbClr val="FFFFFF"/>
-                  </a:solidFill>
-                </a14:hiddenFill>
-              </a:ext>
-              <a:ext uri="{91240B29-F687-4F45-9708-019B960494DF}">
-                <a14:hiddenLine xmlns:a14="http://schemas.microsoft.com/office/drawing/2010/main" w="9525">
-                  <a:solidFill>
-                    <a:srgbClr val="000000"/>
-                  </a:solidFill>
-                  <a:miter lim="800000"/>
-                  <a:headEnd/>
-                  <a:tailEnd/>
-                </a14:hiddenLine>
-              </a:ext>
-            </a:extLst>
-          </p:spPr>
-          <p:txBody>
-            <a:bodyPr wrap="none" lIns="0" tIns="0" rIns="0" bIns="0">
-              <a:spAutoFit/>
-            </a:bodyPr>
-            <a:lstStyle>
-              <a:defPPr>
-                <a:defRPr lang="en-US"/>
-              </a:defPPr>
-              <a:lvl1pPr algn="l" rtl="0" eaLnBrk="0" fontAlgn="base" hangingPunct="0">
-                <a:spcBef>
-                  <a:spcPct val="0"/>
-                </a:spcBef>
-                <a:spcAft>
-                  <a:spcPct val="0"/>
-                </a:spcAft>
-                <a:defRPr kern="1200">
-                  <a:solidFill>
-                    <a:schemeClr val="tx1"/>
-                  </a:solidFill>
-                  <a:latin typeface="Calibri" panose="020F0502020204030204" pitchFamily="34" charset="0"/>
-                  <a:ea typeface="+mn-ea"/>
-                  <a:cs typeface="+mn-cs"/>
-                </a:defRPr>
-              </a:lvl1pPr>
-              <a:lvl2pPr marL="457200" algn="l" rtl="0" eaLnBrk="0" fontAlgn="base" hangingPunct="0">
-                <a:spcBef>
-                  <a:spcPct val="0"/>
-                </a:spcBef>
-                <a:spcAft>
-                  <a:spcPct val="0"/>
-                </a:spcAft>
-                <a:defRPr kern="1200">
-                  <a:solidFill>
-                    <a:schemeClr val="tx1"/>
-                  </a:solidFill>
-                  <a:latin typeface="Calibri" panose="020F0502020204030204" pitchFamily="34" charset="0"/>
-                  <a:ea typeface="+mn-ea"/>
-                  <a:cs typeface="+mn-cs"/>
-                </a:defRPr>
-              </a:lvl2pPr>
-              <a:lvl3pPr marL="914400" algn="l" rtl="0" eaLnBrk="0" fontAlgn="base" hangingPunct="0">
-                <a:spcBef>
-                  <a:spcPct val="0"/>
-                </a:spcBef>
-                <a:spcAft>
-                  <a:spcPct val="0"/>
-                </a:spcAft>
-                <a:defRPr kern="1200">
-                  <a:solidFill>
-                    <a:schemeClr val="tx1"/>
-                  </a:solidFill>
-                  <a:latin typeface="Calibri" panose="020F0502020204030204" pitchFamily="34" charset="0"/>
-                  <a:ea typeface="+mn-ea"/>
-                  <a:cs typeface="+mn-cs"/>
-                </a:defRPr>
-              </a:lvl3pPr>
-              <a:lvl4pPr marL="1371600" algn="l" rtl="0" eaLnBrk="0" fontAlgn="base" hangingPunct="0">
-                <a:spcBef>
-                  <a:spcPct val="0"/>
-                </a:spcBef>
-                <a:spcAft>
-                  <a:spcPct val="0"/>
-                </a:spcAft>
-                <a:defRPr kern="1200">
-                  <a:solidFill>
-                    <a:schemeClr val="tx1"/>
-                  </a:solidFill>
-                  <a:latin typeface="Calibri" panose="020F0502020204030204" pitchFamily="34" charset="0"/>
-                  <a:ea typeface="+mn-ea"/>
-                  <a:cs typeface="+mn-cs"/>
-                </a:defRPr>
-              </a:lvl4pPr>
-              <a:lvl5pPr marL="1828800" algn="l" rtl="0" eaLnBrk="0" fontAlgn="base" hangingPunct="0">
-                <a:spcBef>
-                  <a:spcPct val="0"/>
-                </a:spcBef>
-                <a:spcAft>
-                  <a:spcPct val="0"/>
-                </a:spcAft>
-                <a:defRPr kern="1200">
-                  <a:solidFill>
-                    <a:schemeClr val="tx1"/>
-                  </a:solidFill>
-                  <a:latin typeface="Calibri" panose="020F0502020204030204" pitchFamily="34" charset="0"/>
-                  <a:ea typeface="+mn-ea"/>
-                  <a:cs typeface="+mn-cs"/>
-                </a:defRPr>
-              </a:lvl5pPr>
-              <a:lvl6pPr marL="2286000" algn="l" defTabSz="914400" rtl="0" eaLnBrk="1" latinLnBrk="0" hangingPunct="1">
-                <a:defRPr kern="1200">
-                  <a:solidFill>
-                    <a:schemeClr val="tx1"/>
-                  </a:solidFill>
-                  <a:latin typeface="Calibri" panose="020F0502020204030204" pitchFamily="34" charset="0"/>
-                  <a:ea typeface="+mn-ea"/>
-                  <a:cs typeface="+mn-cs"/>
-                </a:defRPr>
-              </a:lvl6pPr>
-              <a:lvl7pPr marL="2743200" algn="l" defTabSz="914400" rtl="0" eaLnBrk="1" latinLnBrk="0" hangingPunct="1">
-                <a:defRPr kern="1200">
-                  <a:solidFill>
-                    <a:schemeClr val="tx1"/>
-                  </a:solidFill>
-                  <a:latin typeface="Calibri" panose="020F0502020204030204" pitchFamily="34" charset="0"/>
-                  <a:ea typeface="+mn-ea"/>
-                  <a:cs typeface="+mn-cs"/>
-                </a:defRPr>
-              </a:lvl7pPr>
-              <a:lvl8pPr marL="3200400" algn="l" defTabSz="914400" rtl="0" eaLnBrk="1" latinLnBrk="0" hangingPunct="1">
-                <a:defRPr kern="1200">
-                  <a:solidFill>
-                    <a:schemeClr val="tx1"/>
-                  </a:solidFill>
-                  <a:latin typeface="Calibri" panose="020F0502020204030204" pitchFamily="34" charset="0"/>
-                  <a:ea typeface="+mn-ea"/>
-                  <a:cs typeface="+mn-cs"/>
-                </a:defRPr>
-              </a:lvl8pPr>
-              <a:lvl9pPr marL="3657600" algn="l" defTabSz="914400" rtl="0" eaLnBrk="1" latinLnBrk="0" hangingPunct="1">
-                <a:defRPr kern="1200">
-                  <a:solidFill>
-                    <a:schemeClr val="tx1"/>
-                  </a:solidFill>
-                  <a:latin typeface="Calibri" panose="020F0502020204030204" pitchFamily="34" charset="0"/>
-                  <a:ea typeface="+mn-ea"/>
-                  <a:cs typeface="+mn-cs"/>
-                </a:defRPr>
-              </a:lvl9pPr>
-            </a:lstStyle>
-            <a:p>
-              <a:pPr algn="ctr" eaLnBrk="1" hangingPunct="1"/>
-              <a:r>
-                <a:rPr lang="en-US" altLang="en-US" sz="1200">
-                  <a:latin typeface="Arial" panose="020B0604020202020204" pitchFamily="34" charset="0"/>
-                  <a:ea typeface="Amazon Ember" panose="020B0603020204020204" pitchFamily="34" charset="0"/>
-                  <a:cs typeface="Arial" panose="020B0604020202020204" pitchFamily="34" charset="0"/>
-                </a:rPr>
-                <a:t>RDS Multi-AZ</a:t>
-              </a:r>
-            </a:p>
-          </p:txBody>
-        </p:sp>
-        <p:pic>
-          <p:nvPicPr>
-            <p:cNvPr id="32" name="Graphic 39" descr="Multi-AZ DB cluster resource icon for the Amazon RDS service.">
-              <a:extLst>
-                <a:ext uri="{FF2B5EF4-FFF2-40B4-BE49-F238E27FC236}">
-                  <a16:creationId xmlns:a16="http://schemas.microsoft.com/office/drawing/2014/main" id="{B81DBAD0-386B-452C-9817-999CB8D8927D}"/>
-                </a:ext>
-              </a:extLst>
-            </p:cNvPr>
-            <p:cNvPicPr>
-              <a:picLocks noChangeAspect="1"/>
-            </p:cNvPicPr>
-            <p:nvPr/>
-          </p:nvPicPr>
-          <p:blipFill>
-            <a:blip r:embed="rId19">
-              <a:extLst>
-                <a:ext uri="{96DAC541-7B7A-43D3-8B79-37D633B846F1}">
-                  <asvg:svgBlip xmlns:asvg="http://schemas.microsoft.com/office/drawing/2016/SVG/main" r:embed="rId20"/>
-                </a:ext>
-              </a:extLst>
-            </a:blip>
-            <a:stretch>
-              <a:fillRect/>
-            </a:stretch>
-          </p:blipFill>
-          <p:spPr>
-            <a:xfrm>
-              <a:off x="1393067" y="5640941"/>
-              <a:ext cx="396000" cy="396000"/>
-            </a:xfrm>
-            <a:prstGeom prst="rect">
-              <a:avLst/>
-            </a:prstGeom>
-          </p:spPr>
-        </p:pic>
-        <p:pic>
-          <p:nvPicPr>
-            <p:cNvPr id="33" name="Graphic 21" descr="Amazon ElastiCache service icon.">
-              <a:extLst>
-                <a:ext uri="{FF2B5EF4-FFF2-40B4-BE49-F238E27FC236}">
-                  <a16:creationId xmlns:a16="http://schemas.microsoft.com/office/drawing/2014/main" id="{89F4225D-E527-627A-7FB0-BAEED26247C6}"/>
-                </a:ext>
-              </a:extLst>
-            </p:cNvPr>
-            <p:cNvPicPr>
-              <a:picLocks noChangeAspect="1" noChangeArrowheads="1"/>
-            </p:cNvPicPr>
-            <p:nvPr/>
-          </p:nvPicPr>
-          <p:blipFill>
-            <a:blip r:embed="rId21">
-              <a:extLst>
-                <a:ext uri="{96DAC541-7B7A-43D3-8B79-37D633B846F1}">
-                  <asvg:svgBlip xmlns:asvg="http://schemas.microsoft.com/office/drawing/2016/SVG/main" r:embed="rId22"/>
-                </a:ext>
-              </a:extLst>
-            </a:blip>
-            <a:srcRect/>
-            <a:stretch/>
-          </p:blipFill>
-          <p:spPr bwMode="auto">
-            <a:xfrm>
-              <a:off x="3231812" y="5647752"/>
-              <a:ext cx="396000" cy="396000"/>
-            </a:xfrm>
-            <a:prstGeom prst="rect">
-              <a:avLst/>
-            </a:prstGeom>
-            <a:noFill/>
-            <a:ln>
-              <a:noFill/>
-            </a:ln>
-            <a:extLst>
-              <a:ext uri="{909E8E84-426E-40DD-AFC4-6F175D3DCCD1}">
-                <a14:hiddenFill xmlns:a14="http://schemas.microsoft.com/office/drawing/2010/main">
-                  <a:solidFill>
-                    <a:srgbClr val="FFFFFF"/>
-                  </a:solidFill>
-                </a14:hiddenFill>
-              </a:ext>
-              <a:ext uri="{91240B29-F687-4F45-9708-019B960494DF}">
-                <a14:hiddenLine xmlns:a14="http://schemas.microsoft.com/office/drawing/2010/main" w="9525">
-                  <a:solidFill>
-                    <a:srgbClr val="000000"/>
-                  </a:solidFill>
-                  <a:miter lim="800000"/>
-                  <a:headEnd/>
-                  <a:tailEnd/>
-                </a14:hiddenLine>
-              </a:ext>
-            </a:extLst>
-          </p:spPr>
-        </p:pic>
-        <p:sp>
-          <p:nvSpPr>
-            <p:cNvPr id="34" name="TextBox 62">
-              <a:extLst>
-                <a:ext uri="{FF2B5EF4-FFF2-40B4-BE49-F238E27FC236}">
-                  <a16:creationId xmlns:a16="http://schemas.microsoft.com/office/drawing/2014/main" id="{AA34CC5A-6C8F-67A6-D408-61CFD46AE03F}"/>
-                </a:ext>
-              </a:extLst>
-            </p:cNvPr>
-            <p:cNvSpPr txBox="1">
-              <a:spLocks noChangeArrowheads="1"/>
-            </p:cNvSpPr>
-            <p:nvPr/>
-          </p:nvSpPr>
-          <p:spPr bwMode="auto">
-            <a:xfrm>
-              <a:off x="3015606" y="6089747"/>
-              <a:ext cx="852798" cy="184666"/>
-            </a:xfrm>
-            <a:prstGeom prst="rect">
-              <a:avLst/>
-            </a:prstGeom>
-            <a:noFill/>
-            <a:ln>
-              <a:noFill/>
-            </a:ln>
-            <a:extLst>
-              <a:ext uri="{909E8E84-426E-40DD-AFC4-6F175D3DCCD1}">
-                <a14:hiddenFill xmlns:a14="http://schemas.microsoft.com/office/drawing/2010/main">
-                  <a:solidFill>
-                    <a:srgbClr val="FFFFFF"/>
-                  </a:solidFill>
-                </a14:hiddenFill>
-              </a:ext>
-              <a:ext uri="{91240B29-F687-4F45-9708-019B960494DF}">
-                <a14:hiddenLine xmlns:a14="http://schemas.microsoft.com/office/drawing/2010/main" w="9525">
-                  <a:solidFill>
-                    <a:srgbClr val="000000"/>
-                  </a:solidFill>
-                  <a:miter lim="800000"/>
-                  <a:headEnd/>
-                  <a:tailEnd/>
-                </a14:hiddenLine>
-              </a:ext>
-            </a:extLst>
-          </p:spPr>
-          <p:txBody>
-            <a:bodyPr wrap="none" lIns="0" tIns="0" rIns="0" bIns="0">
-              <a:spAutoFit/>
-            </a:bodyPr>
-            <a:lstStyle>
-              <a:defPPr>
-                <a:defRPr lang="en-US"/>
-              </a:defPPr>
-              <a:lvl1pPr algn="l" rtl="0" eaLnBrk="0" fontAlgn="base" hangingPunct="0">
-                <a:spcBef>
-                  <a:spcPct val="0"/>
-                </a:spcBef>
-                <a:spcAft>
-                  <a:spcPct val="0"/>
-                </a:spcAft>
-                <a:defRPr kern="1200">
-                  <a:solidFill>
-                    <a:schemeClr val="tx1"/>
-                  </a:solidFill>
-                  <a:latin typeface="Calibri" panose="020F0502020204030204" pitchFamily="34" charset="0"/>
-                  <a:ea typeface="+mn-ea"/>
-                  <a:cs typeface="+mn-cs"/>
-                </a:defRPr>
-              </a:lvl1pPr>
-              <a:lvl2pPr marL="457200" algn="l" rtl="0" eaLnBrk="0" fontAlgn="base" hangingPunct="0">
-                <a:spcBef>
-                  <a:spcPct val="0"/>
-                </a:spcBef>
-                <a:spcAft>
-                  <a:spcPct val="0"/>
-                </a:spcAft>
-                <a:defRPr kern="1200">
-                  <a:solidFill>
-                    <a:schemeClr val="tx1"/>
-                  </a:solidFill>
-                  <a:latin typeface="Calibri" panose="020F0502020204030204" pitchFamily="34" charset="0"/>
-                  <a:ea typeface="+mn-ea"/>
-                  <a:cs typeface="+mn-cs"/>
-                </a:defRPr>
-              </a:lvl2pPr>
-              <a:lvl3pPr marL="914400" algn="l" rtl="0" eaLnBrk="0" fontAlgn="base" hangingPunct="0">
-                <a:spcBef>
-                  <a:spcPct val="0"/>
-                </a:spcBef>
-                <a:spcAft>
-                  <a:spcPct val="0"/>
-                </a:spcAft>
-                <a:defRPr kern="1200">
-                  <a:solidFill>
-                    <a:schemeClr val="tx1"/>
-                  </a:solidFill>
-                  <a:latin typeface="Calibri" panose="020F0502020204030204" pitchFamily="34" charset="0"/>
-                  <a:ea typeface="+mn-ea"/>
-                  <a:cs typeface="+mn-cs"/>
-                </a:defRPr>
-              </a:lvl3pPr>
-              <a:lvl4pPr marL="1371600" algn="l" rtl="0" eaLnBrk="0" fontAlgn="base" hangingPunct="0">
-                <a:spcBef>
-                  <a:spcPct val="0"/>
-                </a:spcBef>
-                <a:spcAft>
-                  <a:spcPct val="0"/>
-                </a:spcAft>
-                <a:defRPr kern="1200">
-                  <a:solidFill>
-                    <a:schemeClr val="tx1"/>
-                  </a:solidFill>
-                  <a:latin typeface="Calibri" panose="020F0502020204030204" pitchFamily="34" charset="0"/>
-                  <a:ea typeface="+mn-ea"/>
-                  <a:cs typeface="+mn-cs"/>
-                </a:defRPr>
-              </a:lvl4pPr>
-              <a:lvl5pPr marL="1828800" algn="l" rtl="0" eaLnBrk="0" fontAlgn="base" hangingPunct="0">
-                <a:spcBef>
-                  <a:spcPct val="0"/>
-                </a:spcBef>
-                <a:spcAft>
-                  <a:spcPct val="0"/>
-                </a:spcAft>
-                <a:defRPr kern="1200">
-                  <a:solidFill>
-                    <a:schemeClr val="tx1"/>
-                  </a:solidFill>
-                  <a:latin typeface="Calibri" panose="020F0502020204030204" pitchFamily="34" charset="0"/>
-                  <a:ea typeface="+mn-ea"/>
-                  <a:cs typeface="+mn-cs"/>
-                </a:defRPr>
-              </a:lvl5pPr>
-              <a:lvl6pPr marL="2286000" algn="l" defTabSz="914400" rtl="0" eaLnBrk="1" latinLnBrk="0" hangingPunct="1">
-                <a:defRPr kern="1200">
-                  <a:solidFill>
-                    <a:schemeClr val="tx1"/>
-                  </a:solidFill>
-                  <a:latin typeface="Calibri" panose="020F0502020204030204" pitchFamily="34" charset="0"/>
-                  <a:ea typeface="+mn-ea"/>
-                  <a:cs typeface="+mn-cs"/>
-                </a:defRPr>
-              </a:lvl6pPr>
-              <a:lvl7pPr marL="2743200" algn="l" defTabSz="914400" rtl="0" eaLnBrk="1" latinLnBrk="0" hangingPunct="1">
-                <a:defRPr kern="1200">
-                  <a:solidFill>
-                    <a:schemeClr val="tx1"/>
-                  </a:solidFill>
-                  <a:latin typeface="Calibri" panose="020F0502020204030204" pitchFamily="34" charset="0"/>
-                  <a:ea typeface="+mn-ea"/>
-                  <a:cs typeface="+mn-cs"/>
-                </a:defRPr>
-              </a:lvl7pPr>
-              <a:lvl8pPr marL="3200400" algn="l" defTabSz="914400" rtl="0" eaLnBrk="1" latinLnBrk="0" hangingPunct="1">
-                <a:defRPr kern="1200">
-                  <a:solidFill>
-                    <a:schemeClr val="tx1"/>
-                  </a:solidFill>
-                  <a:latin typeface="Calibri" panose="020F0502020204030204" pitchFamily="34" charset="0"/>
-                  <a:ea typeface="+mn-ea"/>
-                  <a:cs typeface="+mn-cs"/>
-                </a:defRPr>
-              </a:lvl8pPr>
-              <a:lvl9pPr marL="3657600" algn="l" defTabSz="914400" rtl="0" eaLnBrk="1" latinLnBrk="0" hangingPunct="1">
-                <a:defRPr kern="1200">
-                  <a:solidFill>
-                    <a:schemeClr val="tx1"/>
-                  </a:solidFill>
-                  <a:latin typeface="Calibri" panose="020F0502020204030204" pitchFamily="34" charset="0"/>
-                  <a:ea typeface="+mn-ea"/>
-                  <a:cs typeface="+mn-cs"/>
-                </a:defRPr>
-              </a:lvl9pPr>
-            </a:lstStyle>
-            <a:p>
-              <a:pPr algn="ctr" eaLnBrk="1" hangingPunct="1"/>
-              <a:r>
-                <a:rPr lang="en-US" altLang="en-US" sz="1200">
-                  <a:latin typeface="Arial" panose="020B0604020202020204" pitchFamily="34" charset="0"/>
-                  <a:ea typeface="Amazon Ember" panose="020B0603020204020204" pitchFamily="34" charset="0"/>
-                  <a:cs typeface="Arial" panose="020B0604020202020204" pitchFamily="34" charset="0"/>
-                </a:rPr>
-                <a:t>Elastic Cash</a:t>
-              </a:r>
-            </a:p>
-          </p:txBody>
-        </p:sp>
-        <p:pic>
-          <p:nvPicPr>
-            <p:cNvPr id="35" name="Graphic 67" descr="Auto Scaling group icon.">
-              <a:extLst>
-                <a:ext uri="{FF2B5EF4-FFF2-40B4-BE49-F238E27FC236}">
-                  <a16:creationId xmlns:a16="http://schemas.microsoft.com/office/drawing/2014/main" id="{1ECE5F9D-8443-48DD-BB53-72DDFA75A563}"/>
-                </a:ext>
-              </a:extLst>
-            </p:cNvPr>
-            <p:cNvPicPr>
-              <a:picLocks noChangeAspect="1"/>
-            </p:cNvPicPr>
-            <p:nvPr/>
-          </p:nvPicPr>
-          <p:blipFill>
-            <a:blip r:embed="rId23">
-              <a:extLst>
-                <a:ext uri="{96DAC541-7B7A-43D3-8B79-37D633B846F1}">
-                  <asvg:svgBlip xmlns:asvg="http://schemas.microsoft.com/office/drawing/2016/SVG/main" r:embed="rId24"/>
-                </a:ext>
-              </a:extLst>
-            </a:blip>
-            <a:srcRect/>
-            <a:stretch/>
-          </p:blipFill>
-          <p:spPr>
-            <a:xfrm>
-              <a:off x="3082823" y="3686176"/>
-              <a:ext cx="396000" cy="396000"/>
-            </a:xfrm>
-            <a:prstGeom prst="rect">
-              <a:avLst/>
-            </a:prstGeom>
-          </p:spPr>
-        </p:pic>
-        <p:sp>
-          <p:nvSpPr>
-            <p:cNvPr id="36" name="Rectangle 66">
-              <a:extLst>
-                <a:ext uri="{FF2B5EF4-FFF2-40B4-BE49-F238E27FC236}">
-                  <a16:creationId xmlns:a16="http://schemas.microsoft.com/office/drawing/2014/main" id="{15D6B773-1DB4-474A-BEF2-EC37AF610557}"/>
-                </a:ext>
-              </a:extLst>
-            </p:cNvPr>
-            <p:cNvSpPr/>
-            <p:nvPr/>
-          </p:nvSpPr>
-          <p:spPr>
-            <a:xfrm>
-              <a:off x="2449840" y="3697769"/>
-              <a:ext cx="1765300" cy="1848150"/>
-            </a:xfrm>
-            <a:prstGeom prst="rect">
-              <a:avLst/>
-            </a:prstGeom>
-            <a:noFill/>
-            <a:ln w="15875">
-              <a:solidFill>
-                <a:srgbClr val="ED7100"/>
-              </a:solidFill>
-              <a:prstDash val="dash"/>
-            </a:ln>
-          </p:spPr>
-          <p:style>
-            <a:lnRef idx="2">
-              <a:schemeClr val="accent1">
-                <a:shade val="50000"/>
-              </a:schemeClr>
-            </a:lnRef>
-            <a:fillRef idx="1">
-              <a:schemeClr val="accent1"/>
-            </a:fillRef>
-            <a:effectRef idx="0">
-              <a:schemeClr val="accent1"/>
-            </a:effectRef>
-            <a:fontRef idx="minor">
-              <a:schemeClr val="lt1"/>
-            </a:fontRef>
-          </p:style>
-          <p:txBody>
-            <a:bodyPr tIns="91440"/>
-            <a:lstStyle>
-              <a:defPPr>
-                <a:defRPr lang="en-US"/>
-              </a:defPPr>
-              <a:lvl1pPr algn="l" rtl="0" eaLnBrk="0" fontAlgn="base" hangingPunct="0">
-                <a:spcBef>
-                  <a:spcPct val="0"/>
-                </a:spcBef>
-                <a:spcAft>
-                  <a:spcPct val="0"/>
-                </a:spcAft>
-                <a:defRPr kern="1200">
-                  <a:solidFill>
-                    <a:schemeClr val="lt1"/>
-                  </a:solidFill>
-                  <a:latin typeface="+mn-lt"/>
-                  <a:ea typeface="+mn-ea"/>
-                  <a:cs typeface="+mn-cs"/>
-                </a:defRPr>
-              </a:lvl1pPr>
-              <a:lvl2pPr marL="457200" algn="l" rtl="0" eaLnBrk="0" fontAlgn="base" hangingPunct="0">
-                <a:spcBef>
-                  <a:spcPct val="0"/>
-                </a:spcBef>
-                <a:spcAft>
-                  <a:spcPct val="0"/>
-                </a:spcAft>
-                <a:defRPr kern="1200">
-                  <a:solidFill>
-                    <a:schemeClr val="lt1"/>
-                  </a:solidFill>
-                  <a:latin typeface="+mn-lt"/>
-                  <a:ea typeface="+mn-ea"/>
-                  <a:cs typeface="+mn-cs"/>
-                </a:defRPr>
-              </a:lvl2pPr>
-              <a:lvl3pPr marL="914400" algn="l" rtl="0" eaLnBrk="0" fontAlgn="base" hangingPunct="0">
-                <a:spcBef>
-                  <a:spcPct val="0"/>
-                </a:spcBef>
-                <a:spcAft>
-                  <a:spcPct val="0"/>
-                </a:spcAft>
-                <a:defRPr kern="1200">
-                  <a:solidFill>
-                    <a:schemeClr val="lt1"/>
-                  </a:solidFill>
-                  <a:latin typeface="+mn-lt"/>
-                  <a:ea typeface="+mn-ea"/>
-                  <a:cs typeface="+mn-cs"/>
-                </a:defRPr>
-              </a:lvl3pPr>
-              <a:lvl4pPr marL="1371600" algn="l" rtl="0" eaLnBrk="0" fontAlgn="base" hangingPunct="0">
-                <a:spcBef>
-                  <a:spcPct val="0"/>
-                </a:spcBef>
-                <a:spcAft>
-                  <a:spcPct val="0"/>
-                </a:spcAft>
-                <a:defRPr kern="1200">
-                  <a:solidFill>
-                    <a:schemeClr val="lt1"/>
-                  </a:solidFill>
-                  <a:latin typeface="+mn-lt"/>
-                  <a:ea typeface="+mn-ea"/>
-                  <a:cs typeface="+mn-cs"/>
-                </a:defRPr>
-              </a:lvl4pPr>
-              <a:lvl5pPr marL="1828800" algn="l" rtl="0" eaLnBrk="0" fontAlgn="base" hangingPunct="0">
-                <a:spcBef>
-                  <a:spcPct val="0"/>
-                </a:spcBef>
-                <a:spcAft>
-                  <a:spcPct val="0"/>
-                </a:spcAft>
-                <a:defRPr kern="1200">
-                  <a:solidFill>
-                    <a:schemeClr val="lt1"/>
-                  </a:solidFill>
-                  <a:latin typeface="+mn-lt"/>
-                  <a:ea typeface="+mn-ea"/>
-                  <a:cs typeface="+mn-cs"/>
-                </a:defRPr>
-              </a:lvl5pPr>
-              <a:lvl6pPr marL="2286000" algn="l" defTabSz="914400" rtl="0" eaLnBrk="1" latinLnBrk="0" hangingPunct="1">
-                <a:defRPr kern="1200">
-                  <a:solidFill>
-                    <a:schemeClr val="lt1"/>
-                  </a:solidFill>
-                  <a:latin typeface="+mn-lt"/>
-                  <a:ea typeface="+mn-ea"/>
-                  <a:cs typeface="+mn-cs"/>
-                </a:defRPr>
-              </a:lvl6pPr>
-              <a:lvl7pPr marL="2743200" algn="l" defTabSz="914400" rtl="0" eaLnBrk="1" latinLnBrk="0" hangingPunct="1">
-                <a:defRPr kern="1200">
-                  <a:solidFill>
-                    <a:schemeClr val="lt1"/>
-                  </a:solidFill>
-                  <a:latin typeface="+mn-lt"/>
-                  <a:ea typeface="+mn-ea"/>
-                  <a:cs typeface="+mn-cs"/>
-                </a:defRPr>
-              </a:lvl7pPr>
-              <a:lvl8pPr marL="3200400" algn="l" defTabSz="914400" rtl="0" eaLnBrk="1" latinLnBrk="0" hangingPunct="1">
-                <a:defRPr kern="1200">
-                  <a:solidFill>
-                    <a:schemeClr val="lt1"/>
-                  </a:solidFill>
-                  <a:latin typeface="+mn-lt"/>
-                  <a:ea typeface="+mn-ea"/>
-                  <a:cs typeface="+mn-cs"/>
-                </a:defRPr>
-              </a:lvl8pPr>
-              <a:lvl9pPr marL="3657600" algn="l" defTabSz="914400" rtl="0" eaLnBrk="1" latinLnBrk="0" hangingPunct="1">
-                <a:defRPr kern="1200">
-                  <a:solidFill>
-                    <a:schemeClr val="lt1"/>
-                  </a:solidFill>
-                  <a:latin typeface="+mn-lt"/>
-                  <a:ea typeface="+mn-ea"/>
-                  <a:cs typeface="+mn-cs"/>
-                </a:defRPr>
-              </a:lvl9pPr>
-            </a:lstStyle>
-            <a:p>
-              <a:pPr algn="ctr" eaLnBrk="1" fontAlgn="auto" hangingPunct="1">
-                <a:spcBef>
-                  <a:spcPts val="0"/>
-                </a:spcBef>
-                <a:spcAft>
-                  <a:spcPts val="0"/>
-                </a:spcAft>
-                <a:defRPr/>
-              </a:pPr>
-              <a:endParaRPr lang="en-US" sz="1200">
-                <a:solidFill>
-                  <a:schemeClr val="tx1"/>
-                </a:solidFill>
-                <a:latin typeface="Arial" panose="020B0604020202020204" pitchFamily="34" charset="0"/>
-                <a:cs typeface="Arial" panose="020B0604020202020204" pitchFamily="34" charset="0"/>
-              </a:endParaRPr>
-            </a:p>
-            <a:p>
-              <a:pPr algn="ctr" eaLnBrk="1" fontAlgn="auto" hangingPunct="1">
-                <a:spcBef>
-                  <a:spcPts val="0"/>
-                </a:spcBef>
-                <a:spcAft>
-                  <a:spcPts val="0"/>
-                </a:spcAft>
-                <a:defRPr/>
-              </a:pPr>
-              <a:endParaRPr lang="en-US" sz="1200">
-                <a:solidFill>
-                  <a:schemeClr val="tx1"/>
-                </a:solidFill>
-                <a:latin typeface="Arial" panose="020B0604020202020204" pitchFamily="34" charset="0"/>
-                <a:cs typeface="Arial" panose="020B0604020202020204" pitchFamily="34" charset="0"/>
-              </a:endParaRPr>
-            </a:p>
-          </p:txBody>
-        </p:sp>
-        <p:pic>
-          <p:nvPicPr>
-            <p:cNvPr id="37" name="Graphic 44" descr="Instances instance icon for the Amazon EC2 service.">
-              <a:extLst>
-                <a:ext uri="{FF2B5EF4-FFF2-40B4-BE49-F238E27FC236}">
-                  <a16:creationId xmlns:a16="http://schemas.microsoft.com/office/drawing/2014/main" id="{14CFE7B6-AE77-5B5D-3B12-8D37A134D506}"/>
-                </a:ext>
-              </a:extLst>
-            </p:cNvPr>
-            <p:cNvPicPr>
-              <a:picLocks noChangeAspect="1"/>
-            </p:cNvPicPr>
-            <p:nvPr/>
-          </p:nvPicPr>
-          <p:blipFill>
-            <a:blip r:embed="rId25">
-              <a:extLst>
-                <a:ext uri="{96DAC541-7B7A-43D3-8B79-37D633B846F1}">
-                  <asvg:svgBlip xmlns:asvg="http://schemas.microsoft.com/office/drawing/2016/SVG/main" r:embed="rId26"/>
-                </a:ext>
-              </a:extLst>
-            </a:blip>
-            <a:stretch>
-              <a:fillRect/>
-            </a:stretch>
-          </p:blipFill>
-          <p:spPr>
-            <a:xfrm>
-              <a:off x="3130217" y="4506598"/>
-              <a:ext cx="396000" cy="396000"/>
-            </a:xfrm>
-            <a:prstGeom prst="rect">
-              <a:avLst/>
-            </a:prstGeom>
-          </p:spPr>
-        </p:pic>
-        <p:sp>
-          <p:nvSpPr>
-            <p:cNvPr id="38" name="TextBox 62">
-              <a:extLst>
-                <a:ext uri="{FF2B5EF4-FFF2-40B4-BE49-F238E27FC236}">
-                  <a16:creationId xmlns:a16="http://schemas.microsoft.com/office/drawing/2014/main" id="{725953BE-4BDA-EE4B-16A7-047767D8C3FB}"/>
-                </a:ext>
-              </a:extLst>
-            </p:cNvPr>
-            <p:cNvSpPr txBox="1">
-              <a:spLocks noChangeArrowheads="1"/>
-            </p:cNvSpPr>
-            <p:nvPr/>
-          </p:nvSpPr>
-          <p:spPr bwMode="auto">
-            <a:xfrm>
-              <a:off x="2867357" y="4858098"/>
-              <a:ext cx="921727" cy="184666"/>
-            </a:xfrm>
-            <a:prstGeom prst="rect">
-              <a:avLst/>
-            </a:prstGeom>
-            <a:noFill/>
-            <a:ln>
-              <a:noFill/>
-            </a:ln>
-            <a:extLst>
-              <a:ext uri="{909E8E84-426E-40DD-AFC4-6F175D3DCCD1}">
-                <a14:hiddenFill xmlns:a14="http://schemas.microsoft.com/office/drawing/2010/main">
-                  <a:solidFill>
-                    <a:srgbClr val="FFFFFF"/>
-                  </a:solidFill>
-                </a14:hiddenFill>
-              </a:ext>
-              <a:ext uri="{91240B29-F687-4F45-9708-019B960494DF}">
-                <a14:hiddenLine xmlns:a14="http://schemas.microsoft.com/office/drawing/2010/main" w="9525">
-                  <a:solidFill>
-                    <a:srgbClr val="000000"/>
-                  </a:solidFill>
-                  <a:miter lim="800000"/>
-                  <a:headEnd/>
-                  <a:tailEnd/>
-                </a14:hiddenLine>
-              </a:ext>
-            </a:extLst>
-          </p:spPr>
-          <p:txBody>
-            <a:bodyPr wrap="none" lIns="0" tIns="0" rIns="0" bIns="0">
-              <a:spAutoFit/>
-            </a:bodyPr>
-            <a:lstStyle>
-              <a:defPPr>
-                <a:defRPr lang="en-US"/>
-              </a:defPPr>
-              <a:lvl1pPr algn="l" rtl="0" eaLnBrk="0" fontAlgn="base" hangingPunct="0">
-                <a:spcBef>
-                  <a:spcPct val="0"/>
-                </a:spcBef>
-                <a:spcAft>
-                  <a:spcPct val="0"/>
-                </a:spcAft>
-                <a:defRPr kern="1200">
-                  <a:solidFill>
-                    <a:schemeClr val="tx1"/>
-                  </a:solidFill>
-                  <a:latin typeface="Calibri" panose="020F0502020204030204" pitchFamily="34" charset="0"/>
-                  <a:ea typeface="+mn-ea"/>
-                  <a:cs typeface="+mn-cs"/>
-                </a:defRPr>
-              </a:lvl1pPr>
-              <a:lvl2pPr marL="457200" algn="l" rtl="0" eaLnBrk="0" fontAlgn="base" hangingPunct="0">
-                <a:spcBef>
-                  <a:spcPct val="0"/>
-                </a:spcBef>
-                <a:spcAft>
-                  <a:spcPct val="0"/>
-                </a:spcAft>
-                <a:defRPr kern="1200">
-                  <a:solidFill>
-                    <a:schemeClr val="tx1"/>
-                  </a:solidFill>
-                  <a:latin typeface="Calibri" panose="020F0502020204030204" pitchFamily="34" charset="0"/>
-                  <a:ea typeface="+mn-ea"/>
-                  <a:cs typeface="+mn-cs"/>
-                </a:defRPr>
-              </a:lvl2pPr>
-              <a:lvl3pPr marL="914400" algn="l" rtl="0" eaLnBrk="0" fontAlgn="base" hangingPunct="0">
-                <a:spcBef>
-                  <a:spcPct val="0"/>
-                </a:spcBef>
-                <a:spcAft>
-                  <a:spcPct val="0"/>
-                </a:spcAft>
-                <a:defRPr kern="1200">
-                  <a:solidFill>
-                    <a:schemeClr val="tx1"/>
-                  </a:solidFill>
-                  <a:latin typeface="Calibri" panose="020F0502020204030204" pitchFamily="34" charset="0"/>
-                  <a:ea typeface="+mn-ea"/>
-                  <a:cs typeface="+mn-cs"/>
-                </a:defRPr>
-              </a:lvl3pPr>
-              <a:lvl4pPr marL="1371600" algn="l" rtl="0" eaLnBrk="0" fontAlgn="base" hangingPunct="0">
-                <a:spcBef>
-                  <a:spcPct val="0"/>
-                </a:spcBef>
-                <a:spcAft>
-                  <a:spcPct val="0"/>
-                </a:spcAft>
-                <a:defRPr kern="1200">
-                  <a:solidFill>
-                    <a:schemeClr val="tx1"/>
-                  </a:solidFill>
-                  <a:latin typeface="Calibri" panose="020F0502020204030204" pitchFamily="34" charset="0"/>
-                  <a:ea typeface="+mn-ea"/>
-                  <a:cs typeface="+mn-cs"/>
-                </a:defRPr>
-              </a:lvl4pPr>
-              <a:lvl5pPr marL="1828800" algn="l" rtl="0" eaLnBrk="0" fontAlgn="base" hangingPunct="0">
-                <a:spcBef>
-                  <a:spcPct val="0"/>
-                </a:spcBef>
-                <a:spcAft>
-                  <a:spcPct val="0"/>
-                </a:spcAft>
-                <a:defRPr kern="1200">
-                  <a:solidFill>
-                    <a:schemeClr val="tx1"/>
-                  </a:solidFill>
-                  <a:latin typeface="Calibri" panose="020F0502020204030204" pitchFamily="34" charset="0"/>
-                  <a:ea typeface="+mn-ea"/>
-                  <a:cs typeface="+mn-cs"/>
-                </a:defRPr>
-              </a:lvl5pPr>
-              <a:lvl6pPr marL="2286000" algn="l" defTabSz="914400" rtl="0" eaLnBrk="1" latinLnBrk="0" hangingPunct="1">
-                <a:defRPr kern="1200">
-                  <a:solidFill>
-                    <a:schemeClr val="tx1"/>
-                  </a:solidFill>
-                  <a:latin typeface="Calibri" panose="020F0502020204030204" pitchFamily="34" charset="0"/>
-                  <a:ea typeface="+mn-ea"/>
-                  <a:cs typeface="+mn-cs"/>
-                </a:defRPr>
-              </a:lvl6pPr>
-              <a:lvl7pPr marL="2743200" algn="l" defTabSz="914400" rtl="0" eaLnBrk="1" latinLnBrk="0" hangingPunct="1">
-                <a:defRPr kern="1200">
-                  <a:solidFill>
-                    <a:schemeClr val="tx1"/>
-                  </a:solidFill>
-                  <a:latin typeface="Calibri" panose="020F0502020204030204" pitchFamily="34" charset="0"/>
-                  <a:ea typeface="+mn-ea"/>
-                  <a:cs typeface="+mn-cs"/>
-                </a:defRPr>
-              </a:lvl7pPr>
-              <a:lvl8pPr marL="3200400" algn="l" defTabSz="914400" rtl="0" eaLnBrk="1" latinLnBrk="0" hangingPunct="1">
-                <a:defRPr kern="1200">
-                  <a:solidFill>
-                    <a:schemeClr val="tx1"/>
-                  </a:solidFill>
-                  <a:latin typeface="Calibri" panose="020F0502020204030204" pitchFamily="34" charset="0"/>
-                  <a:ea typeface="+mn-ea"/>
-                  <a:cs typeface="+mn-cs"/>
-                </a:defRPr>
-              </a:lvl8pPr>
-              <a:lvl9pPr marL="3657600" algn="l" defTabSz="914400" rtl="0" eaLnBrk="1" latinLnBrk="0" hangingPunct="1">
-                <a:defRPr kern="1200">
-                  <a:solidFill>
-                    <a:schemeClr val="tx1"/>
-                  </a:solidFill>
-                  <a:latin typeface="Calibri" panose="020F0502020204030204" pitchFamily="34" charset="0"/>
-                  <a:ea typeface="+mn-ea"/>
-                  <a:cs typeface="+mn-cs"/>
-                </a:defRPr>
-              </a:lvl9pPr>
-            </a:lstStyle>
-            <a:p>
-              <a:pPr algn="ctr" eaLnBrk="1" hangingPunct="1"/>
-              <a:r>
-                <a:rPr lang="en-US" altLang="en-US" sz="1200">
-                  <a:latin typeface="Arial" panose="020B0604020202020204" pitchFamily="34" charset="0"/>
-                  <a:ea typeface="Amazon Ember" panose="020B0603020204020204" pitchFamily="34" charset="0"/>
-                  <a:cs typeface="Arial" panose="020B0604020202020204" pitchFamily="34" charset="0"/>
-                </a:rPr>
-                <a:t>EC2 Instance</a:t>
-              </a:r>
-            </a:p>
-          </p:txBody>
-        </p:sp>
-        <p:cxnSp>
-          <p:nvCxnSpPr>
-            <p:cNvPr id="40" name="直線矢印コネクタ 39">
-              <a:extLst>
-                <a:ext uri="{FF2B5EF4-FFF2-40B4-BE49-F238E27FC236}">
-                  <a16:creationId xmlns:a16="http://schemas.microsoft.com/office/drawing/2014/main" id="{2C48120F-E7CA-FC2E-0F2B-3EF814F8FCC8}"/>
-                </a:ext>
-              </a:extLst>
-            </p:cNvPr>
-            <p:cNvCxnSpPr>
-              <a:cxnSpLocks/>
-              <a:stCxn id="25" idx="2"/>
-              <a:endCxn id="37" idx="1"/>
-            </p:cNvCxnSpPr>
-            <p:nvPr/>
-          </p:nvCxnSpPr>
-          <p:spPr>
-            <a:xfrm rot="16200000" flipH="1">
-              <a:off x="2323012" y="3897392"/>
-              <a:ext cx="460271" cy="1154140"/>
-            </a:xfrm>
-            <a:prstGeom prst="bentConnector2">
-              <a:avLst/>
-            </a:prstGeom>
-            <a:ln>
-              <a:solidFill>
-                <a:schemeClr val="tx1"/>
-              </a:solidFill>
-              <a:tailEnd type="triangle"/>
-            </a:ln>
-          </p:spPr>
-          <p:style>
-            <a:lnRef idx="1">
-              <a:schemeClr val="accent1"/>
-            </a:lnRef>
-            <a:fillRef idx="0">
-              <a:schemeClr val="accent1"/>
-            </a:fillRef>
-            <a:effectRef idx="0">
-              <a:schemeClr val="accent1"/>
-            </a:effectRef>
-            <a:fontRef idx="minor">
-              <a:schemeClr val="tx1"/>
-            </a:fontRef>
-          </p:style>
-        </p:cxnSp>
-        <p:cxnSp>
-          <p:nvCxnSpPr>
-            <p:cNvPr id="41" name="直線矢印コネクタ 40">
-              <a:extLst>
-                <a:ext uri="{FF2B5EF4-FFF2-40B4-BE49-F238E27FC236}">
-                  <a16:creationId xmlns:a16="http://schemas.microsoft.com/office/drawing/2014/main" id="{EABC1F95-FAEF-F402-6DA9-04F814F48D28}"/>
-                </a:ext>
-              </a:extLst>
-            </p:cNvPr>
-            <p:cNvCxnSpPr>
-              <a:cxnSpLocks/>
-              <a:stCxn id="15" idx="2"/>
-              <a:endCxn id="22" idx="0"/>
-            </p:cNvCxnSpPr>
-            <p:nvPr/>
-          </p:nvCxnSpPr>
-          <p:spPr>
-            <a:xfrm flipH="1">
-              <a:off x="3025226" y="1512004"/>
-              <a:ext cx="3095" cy="326578"/>
-            </a:xfrm>
-            <a:prstGeom prst="straightConnector1">
-              <a:avLst/>
-            </a:prstGeom>
-            <a:ln>
-              <a:solidFill>
-                <a:schemeClr val="tx1"/>
-              </a:solidFill>
-              <a:tailEnd type="triangle"/>
-            </a:ln>
-          </p:spPr>
-          <p:style>
-            <a:lnRef idx="1">
-              <a:schemeClr val="accent1"/>
-            </a:lnRef>
-            <a:fillRef idx="0">
-              <a:schemeClr val="accent1"/>
-            </a:fillRef>
-            <a:effectRef idx="0">
-              <a:schemeClr val="accent1"/>
-            </a:effectRef>
-            <a:fontRef idx="minor">
-              <a:schemeClr val="tx1"/>
-            </a:fontRef>
-          </p:style>
-        </p:cxnSp>
-        <p:sp>
-          <p:nvSpPr>
-            <p:cNvPr id="45" name="TextBox 12">
-              <a:extLst>
-                <a:ext uri="{FF2B5EF4-FFF2-40B4-BE49-F238E27FC236}">
-                  <a16:creationId xmlns:a16="http://schemas.microsoft.com/office/drawing/2014/main" id="{122FBE61-7164-40C3-A6A9-06C6341D4BBB}"/>
-                </a:ext>
-              </a:extLst>
-            </p:cNvPr>
-            <p:cNvSpPr txBox="1">
-              <a:spLocks noChangeArrowheads="1"/>
-            </p:cNvSpPr>
-            <p:nvPr/>
-          </p:nvSpPr>
-          <p:spPr bwMode="auto">
-            <a:xfrm>
-              <a:off x="2355138" y="2987936"/>
-              <a:ext cx="1403350" cy="276999"/>
-            </a:xfrm>
-            <a:prstGeom prst="rect">
-              <a:avLst/>
-            </a:prstGeom>
-            <a:noFill/>
-            <a:ln>
-              <a:noFill/>
-            </a:ln>
-            <a:extLst>
-              <a:ext uri="{909E8E84-426E-40DD-AFC4-6F175D3DCCD1}">
-                <a14:hiddenFill xmlns:a14="http://schemas.microsoft.com/office/drawing/2010/main">
-                  <a:solidFill>
-                    <a:srgbClr val="FFFFFF"/>
-                  </a:solidFill>
-                </a14:hiddenFill>
-              </a:ext>
-              <a:ext uri="{91240B29-F687-4F45-9708-019B960494DF}">
-                <a14:hiddenLine xmlns:a14="http://schemas.microsoft.com/office/drawing/2010/main" w="9525">
-                  <a:solidFill>
-                    <a:srgbClr val="000000"/>
-                  </a:solidFill>
-                  <a:miter lim="800000"/>
-                  <a:headEnd/>
-                  <a:tailEnd/>
-                </a14:hiddenLine>
-              </a:ext>
-            </a:extLst>
-          </p:spPr>
-          <p:txBody>
-            <a:bodyPr>
-              <a:spAutoFit/>
-            </a:bodyPr>
-            <a:lstStyle>
-              <a:defPPr>
-                <a:defRPr lang="en-US"/>
-              </a:defPPr>
-              <a:lvl1pPr algn="l" rtl="0" eaLnBrk="0" fontAlgn="base" hangingPunct="0">
-                <a:spcBef>
-                  <a:spcPct val="0"/>
-                </a:spcBef>
-                <a:spcAft>
-                  <a:spcPct val="0"/>
-                </a:spcAft>
-                <a:defRPr kern="1200">
-                  <a:solidFill>
-                    <a:schemeClr val="tx1"/>
-                  </a:solidFill>
-                  <a:latin typeface="Calibri" panose="020F0502020204030204" pitchFamily="34" charset="0"/>
-                  <a:ea typeface="+mn-ea"/>
-                  <a:cs typeface="+mn-cs"/>
-                </a:defRPr>
-              </a:lvl1pPr>
-              <a:lvl2pPr marL="457200" algn="l" rtl="0" eaLnBrk="0" fontAlgn="base" hangingPunct="0">
-                <a:spcBef>
-                  <a:spcPct val="0"/>
-                </a:spcBef>
-                <a:spcAft>
-                  <a:spcPct val="0"/>
-                </a:spcAft>
-                <a:defRPr kern="1200">
-                  <a:solidFill>
-                    <a:schemeClr val="tx1"/>
-                  </a:solidFill>
-                  <a:latin typeface="Calibri" panose="020F0502020204030204" pitchFamily="34" charset="0"/>
-                  <a:ea typeface="+mn-ea"/>
-                  <a:cs typeface="+mn-cs"/>
-                </a:defRPr>
-              </a:lvl2pPr>
-              <a:lvl3pPr marL="914400" algn="l" rtl="0" eaLnBrk="0" fontAlgn="base" hangingPunct="0">
-                <a:spcBef>
-                  <a:spcPct val="0"/>
-                </a:spcBef>
-                <a:spcAft>
-                  <a:spcPct val="0"/>
-                </a:spcAft>
-                <a:defRPr kern="1200">
-                  <a:solidFill>
-                    <a:schemeClr val="tx1"/>
-                  </a:solidFill>
-                  <a:latin typeface="Calibri" panose="020F0502020204030204" pitchFamily="34" charset="0"/>
-                  <a:ea typeface="+mn-ea"/>
-                  <a:cs typeface="+mn-cs"/>
-                </a:defRPr>
-              </a:lvl3pPr>
-              <a:lvl4pPr marL="1371600" algn="l" rtl="0" eaLnBrk="0" fontAlgn="base" hangingPunct="0">
-                <a:spcBef>
-                  <a:spcPct val="0"/>
-                </a:spcBef>
-                <a:spcAft>
-                  <a:spcPct val="0"/>
-                </a:spcAft>
-                <a:defRPr kern="1200">
-                  <a:solidFill>
-                    <a:schemeClr val="tx1"/>
-                  </a:solidFill>
-                  <a:latin typeface="Calibri" panose="020F0502020204030204" pitchFamily="34" charset="0"/>
-                  <a:ea typeface="+mn-ea"/>
-                  <a:cs typeface="+mn-cs"/>
-                </a:defRPr>
-              </a:lvl4pPr>
-              <a:lvl5pPr marL="1828800" algn="l" rtl="0" eaLnBrk="0" fontAlgn="base" hangingPunct="0">
-                <a:spcBef>
-                  <a:spcPct val="0"/>
-                </a:spcBef>
-                <a:spcAft>
-                  <a:spcPct val="0"/>
-                </a:spcAft>
-                <a:defRPr kern="1200">
-                  <a:solidFill>
-                    <a:schemeClr val="tx1"/>
-                  </a:solidFill>
-                  <a:latin typeface="Calibri" panose="020F0502020204030204" pitchFamily="34" charset="0"/>
-                  <a:ea typeface="+mn-ea"/>
-                  <a:cs typeface="+mn-cs"/>
-                </a:defRPr>
-              </a:lvl5pPr>
-              <a:lvl6pPr marL="2286000" algn="l" defTabSz="914400" rtl="0" eaLnBrk="1" latinLnBrk="0" hangingPunct="1">
-                <a:defRPr kern="1200">
-                  <a:solidFill>
-                    <a:schemeClr val="tx1"/>
-                  </a:solidFill>
-                  <a:latin typeface="Calibri" panose="020F0502020204030204" pitchFamily="34" charset="0"/>
-                  <a:ea typeface="+mn-ea"/>
-                  <a:cs typeface="+mn-cs"/>
-                </a:defRPr>
-              </a:lvl6pPr>
-              <a:lvl7pPr marL="2743200" algn="l" defTabSz="914400" rtl="0" eaLnBrk="1" latinLnBrk="0" hangingPunct="1">
-                <a:defRPr kern="1200">
-                  <a:solidFill>
-                    <a:schemeClr val="tx1"/>
-                  </a:solidFill>
-                  <a:latin typeface="Calibri" panose="020F0502020204030204" pitchFamily="34" charset="0"/>
-                  <a:ea typeface="+mn-ea"/>
-                  <a:cs typeface="+mn-cs"/>
-                </a:defRPr>
-              </a:lvl7pPr>
-              <a:lvl8pPr marL="3200400" algn="l" defTabSz="914400" rtl="0" eaLnBrk="1" latinLnBrk="0" hangingPunct="1">
-                <a:defRPr kern="1200">
-                  <a:solidFill>
-                    <a:schemeClr val="tx1"/>
-                  </a:solidFill>
-                  <a:latin typeface="Calibri" panose="020F0502020204030204" pitchFamily="34" charset="0"/>
-                  <a:ea typeface="+mn-ea"/>
-                  <a:cs typeface="+mn-cs"/>
-                </a:defRPr>
-              </a:lvl8pPr>
-              <a:lvl9pPr marL="3657600" algn="l" defTabSz="914400" rtl="0" eaLnBrk="1" latinLnBrk="0" hangingPunct="1">
-                <a:defRPr kern="1200">
-                  <a:solidFill>
-                    <a:schemeClr val="tx1"/>
-                  </a:solidFill>
-                  <a:latin typeface="Calibri" panose="020F0502020204030204" pitchFamily="34" charset="0"/>
-                  <a:ea typeface="+mn-ea"/>
-                  <a:cs typeface="+mn-cs"/>
-                </a:defRPr>
-              </a:lvl9pPr>
-            </a:lstStyle>
-            <a:p>
-              <a:pPr algn="ctr" eaLnBrk="1" hangingPunct="1"/>
-              <a:r>
-                <a:rPr lang="en-US" altLang="en-US" sz="1200">
-                  <a:latin typeface="Arial" panose="020B0604020202020204" pitchFamily="34" charset="0"/>
-                  <a:ea typeface="Amazon Ember" panose="020B0603020204020204" pitchFamily="34" charset="0"/>
-                  <a:cs typeface="Arial" panose="020B0604020202020204" pitchFamily="34" charset="0"/>
-                </a:rPr>
-                <a:t>Internet gateway</a:t>
-              </a:r>
-            </a:p>
-          </p:txBody>
-        </p:sp>
-        <p:grpSp>
-          <p:nvGrpSpPr>
-            <p:cNvPr id="53" name="グループ化 52">
-              <a:extLst>
-                <a:ext uri="{FF2B5EF4-FFF2-40B4-BE49-F238E27FC236}">
-                  <a16:creationId xmlns:a16="http://schemas.microsoft.com/office/drawing/2014/main" id="{6B87C676-BE09-C916-D03C-A35A0225D853}"/>
-                </a:ext>
-              </a:extLst>
-            </p:cNvPr>
-            <p:cNvGrpSpPr/>
-            <p:nvPr/>
-          </p:nvGrpSpPr>
-          <p:grpSpPr>
-            <a:xfrm>
-              <a:off x="2828863" y="2601623"/>
-              <a:ext cx="413413" cy="421496"/>
-              <a:chOff x="4181152" y="1113480"/>
-              <a:chExt cx="413413" cy="421496"/>
-            </a:xfrm>
-          </p:grpSpPr>
-          <p:sp>
-            <p:nvSpPr>
-              <p:cNvPr id="46" name="background">
-                <a:extLst>
-                  <a:ext uri="{FF2B5EF4-FFF2-40B4-BE49-F238E27FC236}">
-                    <a16:creationId xmlns:a16="http://schemas.microsoft.com/office/drawing/2014/main" id="{C5CBFBAF-913C-0729-4522-48E44F732BE3}"/>
-                  </a:ext>
-                  <a:ext uri="{C183D7F6-B498-43B3-948B-1728B52AA6E4}">
-                    <adec:decorative xmlns:adec="http://schemas.microsoft.com/office/drawing/2017/decorative" val="1"/>
-                  </a:ext>
-                </a:extLst>
-              </p:cNvPr>
-              <p:cNvSpPr/>
-              <p:nvPr/>
-            </p:nvSpPr>
-            <p:spPr>
-              <a:xfrm>
-                <a:off x="4181152" y="1113480"/>
-                <a:ext cx="413413" cy="421496"/>
-              </a:xfrm>
-              <a:prstGeom prst="ellipse">
-                <a:avLst/>
-              </a:prstGeom>
-              <a:solidFill>
-                <a:schemeClr val="bg1"/>
-              </a:solidFill>
-              <a:ln>
-                <a:noFill/>
-              </a:ln>
-            </p:spPr>
-            <p:style>
-              <a:lnRef idx="2">
-                <a:schemeClr val="accent1">
-                  <a:shade val="50000"/>
-                </a:schemeClr>
-              </a:lnRef>
-              <a:fillRef idx="1">
-                <a:schemeClr val="accent1"/>
-              </a:fillRef>
-              <a:effectRef idx="0">
-                <a:schemeClr val="accent1"/>
-              </a:effectRef>
-              <a:fontRef idx="minor">
-                <a:schemeClr val="lt1"/>
-              </a:fontRef>
-            </p:style>
-            <p:txBody>
-              <a:bodyPr rtlCol="0" anchor="ctr"/>
-              <a:lstStyle>
-                <a:defPPr>
-                  <a:defRPr lang="en-US"/>
-                </a:defPPr>
-                <a:lvl1pPr algn="l" rtl="0" eaLnBrk="0" fontAlgn="base" hangingPunct="0">
-                  <a:spcBef>
-                    <a:spcPct val="0"/>
-                  </a:spcBef>
-                  <a:spcAft>
-                    <a:spcPct val="0"/>
-                  </a:spcAft>
-                  <a:defRPr kern="1200">
-                    <a:solidFill>
-                      <a:schemeClr val="lt1"/>
-                    </a:solidFill>
-                    <a:latin typeface="+mn-lt"/>
-                    <a:ea typeface="+mn-ea"/>
-                    <a:cs typeface="+mn-cs"/>
-                  </a:defRPr>
-                </a:lvl1pPr>
-                <a:lvl2pPr marL="457200" algn="l" rtl="0" eaLnBrk="0" fontAlgn="base" hangingPunct="0">
-                  <a:spcBef>
-                    <a:spcPct val="0"/>
-                  </a:spcBef>
-                  <a:spcAft>
-                    <a:spcPct val="0"/>
-                  </a:spcAft>
-                  <a:defRPr kern="1200">
-                    <a:solidFill>
-                      <a:schemeClr val="lt1"/>
-                    </a:solidFill>
-                    <a:latin typeface="+mn-lt"/>
-                    <a:ea typeface="+mn-ea"/>
-                    <a:cs typeface="+mn-cs"/>
-                  </a:defRPr>
-                </a:lvl2pPr>
-                <a:lvl3pPr marL="914400" algn="l" rtl="0" eaLnBrk="0" fontAlgn="base" hangingPunct="0">
-                  <a:spcBef>
-                    <a:spcPct val="0"/>
-                  </a:spcBef>
-                  <a:spcAft>
-                    <a:spcPct val="0"/>
-                  </a:spcAft>
-                  <a:defRPr kern="1200">
-                    <a:solidFill>
-                      <a:schemeClr val="lt1"/>
-                    </a:solidFill>
-                    <a:latin typeface="+mn-lt"/>
-                    <a:ea typeface="+mn-ea"/>
-                    <a:cs typeface="+mn-cs"/>
-                  </a:defRPr>
-                </a:lvl3pPr>
-                <a:lvl4pPr marL="1371600" algn="l" rtl="0" eaLnBrk="0" fontAlgn="base" hangingPunct="0">
-                  <a:spcBef>
-                    <a:spcPct val="0"/>
-                  </a:spcBef>
-                  <a:spcAft>
-                    <a:spcPct val="0"/>
-                  </a:spcAft>
-                  <a:defRPr kern="1200">
-                    <a:solidFill>
-                      <a:schemeClr val="lt1"/>
-                    </a:solidFill>
-                    <a:latin typeface="+mn-lt"/>
-                    <a:ea typeface="+mn-ea"/>
-                    <a:cs typeface="+mn-cs"/>
-                  </a:defRPr>
-                </a:lvl4pPr>
-                <a:lvl5pPr marL="1828800" algn="l" rtl="0" eaLnBrk="0" fontAlgn="base" hangingPunct="0">
-                  <a:spcBef>
-                    <a:spcPct val="0"/>
-                  </a:spcBef>
-                  <a:spcAft>
-                    <a:spcPct val="0"/>
-                  </a:spcAft>
-                  <a:defRPr kern="1200">
-                    <a:solidFill>
-                      <a:schemeClr val="lt1"/>
-                    </a:solidFill>
-                    <a:latin typeface="+mn-lt"/>
-                    <a:ea typeface="+mn-ea"/>
-                    <a:cs typeface="+mn-cs"/>
-                  </a:defRPr>
-                </a:lvl5pPr>
-                <a:lvl6pPr marL="2286000" algn="l" defTabSz="914400" rtl="0" eaLnBrk="1" latinLnBrk="0" hangingPunct="1">
-                  <a:defRPr kern="1200">
-                    <a:solidFill>
-                      <a:schemeClr val="lt1"/>
-                    </a:solidFill>
-                    <a:latin typeface="+mn-lt"/>
-                    <a:ea typeface="+mn-ea"/>
-                    <a:cs typeface="+mn-cs"/>
-                  </a:defRPr>
-                </a:lvl6pPr>
-                <a:lvl7pPr marL="2743200" algn="l" defTabSz="914400" rtl="0" eaLnBrk="1" latinLnBrk="0" hangingPunct="1">
-                  <a:defRPr kern="1200">
-                    <a:solidFill>
-                      <a:schemeClr val="lt1"/>
-                    </a:solidFill>
-                    <a:latin typeface="+mn-lt"/>
-                    <a:ea typeface="+mn-ea"/>
-                    <a:cs typeface="+mn-cs"/>
-                  </a:defRPr>
-                </a:lvl7pPr>
-                <a:lvl8pPr marL="3200400" algn="l" defTabSz="914400" rtl="0" eaLnBrk="1" latinLnBrk="0" hangingPunct="1">
-                  <a:defRPr kern="1200">
-                    <a:solidFill>
-                      <a:schemeClr val="lt1"/>
-                    </a:solidFill>
-                    <a:latin typeface="+mn-lt"/>
-                    <a:ea typeface="+mn-ea"/>
-                    <a:cs typeface="+mn-cs"/>
-                  </a:defRPr>
-                </a:lvl8pPr>
-                <a:lvl9pPr marL="3657600" algn="l" defTabSz="914400" rtl="0" eaLnBrk="1" latinLnBrk="0" hangingPunct="1">
-                  <a:defRPr kern="1200">
-                    <a:solidFill>
-                      <a:schemeClr val="lt1"/>
-                    </a:solidFill>
-                    <a:latin typeface="+mn-lt"/>
-                    <a:ea typeface="+mn-ea"/>
-                    <a:cs typeface="+mn-cs"/>
-                  </a:defRPr>
-                </a:lvl9pPr>
-              </a:lstStyle>
-              <a:p>
-                <a:pPr algn="ctr"/>
-                <a:endParaRPr lang="en-US"/>
-              </a:p>
-            </p:txBody>
-          </p:sp>
-          <p:pic>
-            <p:nvPicPr>
-              <p:cNvPr id="44" name="Graphic 63" descr="Internet gateway resource icon for the Amazon VPC service.&#10;">
-                <a:extLst>
-                  <a:ext uri="{FF2B5EF4-FFF2-40B4-BE49-F238E27FC236}">
-                    <a16:creationId xmlns:a16="http://schemas.microsoft.com/office/drawing/2014/main" id="{45FAF6D6-2DA9-426A-9915-308E7974365F}"/>
-                  </a:ext>
-                </a:extLst>
-              </p:cNvPr>
-              <p:cNvPicPr>
-                <a:picLocks noChangeAspect="1"/>
-              </p:cNvPicPr>
-              <p:nvPr/>
-            </p:nvPicPr>
-            <p:blipFill>
-              <a:blip r:embed="rId27">
-                <a:extLst>
-                  <a:ext uri="{96DAC541-7B7A-43D3-8B79-37D633B846F1}">
-                    <asvg:svgBlip xmlns:asvg="http://schemas.microsoft.com/office/drawing/2016/SVG/main" r:embed="rId28"/>
-                  </a:ext>
-                </a:extLst>
-              </a:blip>
-              <a:stretch>
-                <a:fillRect/>
-              </a:stretch>
-            </p:blipFill>
-            <p:spPr>
-              <a:xfrm>
-                <a:off x="4188101" y="1131614"/>
-                <a:ext cx="396000" cy="396000"/>
-              </a:xfrm>
-              <a:prstGeom prst="rect">
-                <a:avLst/>
-              </a:prstGeom>
-            </p:spPr>
-          </p:pic>
-        </p:grpSp>
-        <p:cxnSp>
-          <p:nvCxnSpPr>
-            <p:cNvPr id="47" name="直線矢印コネクタ 46">
-              <a:extLst>
-                <a:ext uri="{FF2B5EF4-FFF2-40B4-BE49-F238E27FC236}">
-                  <a16:creationId xmlns:a16="http://schemas.microsoft.com/office/drawing/2014/main" id="{A8260CFD-41DE-A660-D4E6-BB8A331C1B8E}"/>
-                </a:ext>
-              </a:extLst>
-            </p:cNvPr>
-            <p:cNvCxnSpPr>
-              <a:cxnSpLocks/>
-              <a:stCxn id="23" idx="2"/>
-              <a:endCxn id="46" idx="0"/>
-            </p:cNvCxnSpPr>
-            <p:nvPr/>
-          </p:nvCxnSpPr>
-          <p:spPr>
-            <a:xfrm>
-              <a:off x="3030893" y="2410421"/>
-              <a:ext cx="4677" cy="191202"/>
-            </a:xfrm>
-            <a:prstGeom prst="straightConnector1">
-              <a:avLst/>
-            </a:prstGeom>
-            <a:ln>
-              <a:solidFill>
-                <a:schemeClr val="tx1"/>
-              </a:solidFill>
-              <a:tailEnd type="triangle"/>
-            </a:ln>
-          </p:spPr>
-          <p:style>
-            <a:lnRef idx="1">
-              <a:schemeClr val="accent1"/>
-            </a:lnRef>
-            <a:fillRef idx="0">
-              <a:schemeClr val="accent1"/>
-            </a:fillRef>
-            <a:effectRef idx="0">
-              <a:schemeClr val="accent1"/>
-            </a:effectRef>
-            <a:fontRef idx="minor">
-              <a:schemeClr val="tx1"/>
-            </a:fontRef>
-          </p:style>
-        </p:cxnSp>
-        <p:cxnSp>
-          <p:nvCxnSpPr>
-            <p:cNvPr id="55" name="直線矢印コネクタ 54">
-              <a:extLst>
-                <a:ext uri="{FF2B5EF4-FFF2-40B4-BE49-F238E27FC236}">
-                  <a16:creationId xmlns:a16="http://schemas.microsoft.com/office/drawing/2014/main" id="{31A83AF6-0CD4-107E-0988-5B3592B4AD66}"/>
-                </a:ext>
-              </a:extLst>
-            </p:cNvPr>
-            <p:cNvCxnSpPr>
-              <a:cxnSpLocks/>
-              <a:stCxn id="22" idx="3"/>
-              <a:endCxn id="17" idx="1"/>
-            </p:cNvCxnSpPr>
-            <p:nvPr/>
-          </p:nvCxnSpPr>
-          <p:spPr>
-            <a:xfrm flipV="1">
-              <a:off x="3223226" y="2035352"/>
-              <a:ext cx="652990" cy="1230"/>
-            </a:xfrm>
-            <a:prstGeom prst="straightConnector1">
-              <a:avLst/>
-            </a:prstGeom>
-            <a:ln>
-              <a:solidFill>
-                <a:schemeClr val="tx1"/>
-              </a:solidFill>
-              <a:tailEnd type="triangle"/>
-            </a:ln>
-          </p:spPr>
-          <p:style>
-            <a:lnRef idx="1">
-              <a:schemeClr val="accent1"/>
-            </a:lnRef>
-            <a:fillRef idx="0">
-              <a:schemeClr val="accent1"/>
-            </a:fillRef>
-            <a:effectRef idx="0">
-              <a:schemeClr val="accent1"/>
-            </a:effectRef>
-            <a:fontRef idx="minor">
-              <a:schemeClr val="tx1"/>
-            </a:fontRef>
-          </p:style>
-        </p:cxnSp>
-        <p:cxnSp>
-          <p:nvCxnSpPr>
-            <p:cNvPr id="58" name="直線矢印コネクタ 57">
-              <a:extLst>
-                <a:ext uri="{FF2B5EF4-FFF2-40B4-BE49-F238E27FC236}">
-                  <a16:creationId xmlns:a16="http://schemas.microsoft.com/office/drawing/2014/main" id="{7C4000AF-235A-0535-E095-121C3E5FB371}"/>
-                </a:ext>
-              </a:extLst>
-            </p:cNvPr>
-            <p:cNvCxnSpPr>
-              <a:cxnSpLocks/>
-              <a:stCxn id="45" idx="2"/>
-              <a:endCxn id="24" idx="0"/>
-            </p:cNvCxnSpPr>
-            <p:nvPr/>
-          </p:nvCxnSpPr>
-          <p:spPr>
-            <a:xfrm rot="5400000">
-              <a:off x="2330074" y="2884148"/>
-              <a:ext cx="345953" cy="1107526"/>
-            </a:xfrm>
-            <a:prstGeom prst="bentConnector3">
-              <a:avLst>
-                <a:gd name="adj1" fmla="val 50000"/>
-              </a:avLst>
-            </a:prstGeom>
-            <a:ln>
-              <a:solidFill>
-                <a:schemeClr val="tx1"/>
-              </a:solidFill>
-              <a:tailEnd type="triangle"/>
-            </a:ln>
-          </p:spPr>
-          <p:style>
-            <a:lnRef idx="1">
-              <a:schemeClr val="accent1"/>
-            </a:lnRef>
-            <a:fillRef idx="0">
-              <a:schemeClr val="accent1"/>
-            </a:fillRef>
-            <a:effectRef idx="0">
-              <a:schemeClr val="accent1"/>
-            </a:effectRef>
-            <a:fontRef idx="minor">
-              <a:schemeClr val="tx1"/>
-            </a:fontRef>
-          </p:style>
-        </p:cxnSp>
-        <p:cxnSp>
-          <p:nvCxnSpPr>
-            <p:cNvPr id="61" name="直線矢印コネクタ 60">
-              <a:extLst>
-                <a:ext uri="{FF2B5EF4-FFF2-40B4-BE49-F238E27FC236}">
-                  <a16:creationId xmlns:a16="http://schemas.microsoft.com/office/drawing/2014/main" id="{8E0B15A6-D6D1-84D7-12B5-BB0CCBCAA5DE}"/>
-                </a:ext>
-              </a:extLst>
-            </p:cNvPr>
-            <p:cNvCxnSpPr>
-              <a:cxnSpLocks/>
-              <a:stCxn id="28" idx="3"/>
-              <a:endCxn id="38" idx="1"/>
-            </p:cNvCxnSpPr>
-            <p:nvPr/>
-          </p:nvCxnSpPr>
-          <p:spPr>
-            <a:xfrm>
-              <a:off x="1758886" y="4945217"/>
-              <a:ext cx="1108471" cy="5214"/>
-            </a:xfrm>
-            <a:prstGeom prst="straightConnector1">
-              <a:avLst/>
-            </a:prstGeom>
-            <a:ln>
-              <a:solidFill>
-                <a:schemeClr val="tx1"/>
-              </a:solidFill>
-              <a:tailEnd type="triangle"/>
-            </a:ln>
-          </p:spPr>
-          <p:style>
-            <a:lnRef idx="1">
-              <a:schemeClr val="accent1"/>
-            </a:lnRef>
-            <a:fillRef idx="0">
-              <a:schemeClr val="accent1"/>
-            </a:fillRef>
-            <a:effectRef idx="0">
-              <a:schemeClr val="accent1"/>
-            </a:effectRef>
-            <a:fontRef idx="minor">
-              <a:schemeClr val="tx1"/>
-            </a:fontRef>
-          </p:style>
-        </p:cxnSp>
-        <p:cxnSp>
-          <p:nvCxnSpPr>
-            <p:cNvPr id="69" name="直線矢印コネクタ 68">
-              <a:extLst>
-                <a:ext uri="{FF2B5EF4-FFF2-40B4-BE49-F238E27FC236}">
-                  <a16:creationId xmlns:a16="http://schemas.microsoft.com/office/drawing/2014/main" id="{FC5C08CD-25DF-C090-2808-E280331BF0BC}"/>
-                </a:ext>
-              </a:extLst>
-            </p:cNvPr>
-            <p:cNvCxnSpPr>
-              <a:cxnSpLocks/>
-              <a:stCxn id="38" idx="2"/>
-              <a:endCxn id="32" idx="3"/>
-            </p:cNvCxnSpPr>
-            <p:nvPr/>
-          </p:nvCxnSpPr>
-          <p:spPr>
-            <a:xfrm flipH="1">
-              <a:off x="1789067" y="5042764"/>
-              <a:ext cx="1539154" cy="796177"/>
-            </a:xfrm>
-            <a:prstGeom prst="straightConnector1">
-              <a:avLst/>
-            </a:prstGeom>
-            <a:ln>
-              <a:solidFill>
-                <a:schemeClr val="tx1"/>
-              </a:solidFill>
-              <a:tailEnd type="triangle"/>
-            </a:ln>
-          </p:spPr>
-          <p:style>
-            <a:lnRef idx="1">
-              <a:schemeClr val="accent1"/>
-            </a:lnRef>
-            <a:fillRef idx="0">
-              <a:schemeClr val="accent1"/>
-            </a:fillRef>
-            <a:effectRef idx="0">
-              <a:schemeClr val="accent1"/>
-            </a:effectRef>
-            <a:fontRef idx="minor">
-              <a:schemeClr val="tx1"/>
-            </a:fontRef>
-          </p:style>
-        </p:cxnSp>
-        <p:cxnSp>
-          <p:nvCxnSpPr>
-            <p:cNvPr id="72" name="直線矢印コネクタ 71">
-              <a:extLst>
-                <a:ext uri="{FF2B5EF4-FFF2-40B4-BE49-F238E27FC236}">
-                  <a16:creationId xmlns:a16="http://schemas.microsoft.com/office/drawing/2014/main" id="{580E66CF-7B43-CF48-889E-B0DF2AB21868}"/>
-                </a:ext>
-              </a:extLst>
-            </p:cNvPr>
-            <p:cNvCxnSpPr>
-              <a:cxnSpLocks/>
-              <a:stCxn id="38" idx="2"/>
-              <a:endCxn id="33" idx="0"/>
-            </p:cNvCxnSpPr>
-            <p:nvPr/>
-          </p:nvCxnSpPr>
-          <p:spPr>
-            <a:xfrm>
-              <a:off x="3328221" y="5042764"/>
-              <a:ext cx="101591" cy="604988"/>
-            </a:xfrm>
-            <a:prstGeom prst="straightConnector1">
-              <a:avLst/>
-            </a:prstGeom>
-            <a:ln>
-              <a:solidFill>
-                <a:schemeClr val="tx1"/>
-              </a:solidFill>
-              <a:tailEnd type="triangle"/>
-            </a:ln>
-          </p:spPr>
-          <p:style>
-            <a:lnRef idx="1">
-              <a:schemeClr val="accent1"/>
-            </a:lnRef>
-            <a:fillRef idx="0">
-              <a:schemeClr val="accent1"/>
-            </a:fillRef>
-            <a:effectRef idx="0">
-              <a:schemeClr val="accent1"/>
-            </a:effectRef>
-            <a:fontRef idx="minor">
-              <a:schemeClr val="tx1"/>
-            </a:fontRef>
-          </p:style>
-        </p:cxnSp>
-        <p:cxnSp>
-          <p:nvCxnSpPr>
-            <p:cNvPr id="75" name="直線矢印コネクタ 74">
-              <a:extLst>
-                <a:ext uri="{FF2B5EF4-FFF2-40B4-BE49-F238E27FC236}">
-                  <a16:creationId xmlns:a16="http://schemas.microsoft.com/office/drawing/2014/main" id="{EC137388-4BA5-3853-92F9-9677337FD7A6}"/>
-                </a:ext>
-              </a:extLst>
-            </p:cNvPr>
-            <p:cNvCxnSpPr>
-              <a:cxnSpLocks/>
-              <a:stCxn id="29" idx="2"/>
-              <a:endCxn id="32" idx="0"/>
-            </p:cNvCxnSpPr>
-            <p:nvPr/>
-          </p:nvCxnSpPr>
-          <p:spPr>
-            <a:xfrm>
-              <a:off x="1586653" y="5330572"/>
-              <a:ext cx="4414" cy="310369"/>
-            </a:xfrm>
-            <a:prstGeom prst="straightConnector1">
-              <a:avLst/>
-            </a:prstGeom>
-            <a:ln>
-              <a:solidFill>
-                <a:schemeClr val="tx1"/>
-              </a:solidFill>
-              <a:tailEnd type="triangle"/>
-            </a:ln>
-          </p:spPr>
-          <p:style>
-            <a:lnRef idx="1">
-              <a:schemeClr val="accent1"/>
-            </a:lnRef>
-            <a:fillRef idx="0">
-              <a:schemeClr val="accent1"/>
-            </a:fillRef>
-            <a:effectRef idx="0">
-              <a:schemeClr val="accent1"/>
-            </a:effectRef>
-            <a:fontRef idx="minor">
-              <a:schemeClr val="tx1"/>
-            </a:fontRef>
-          </p:style>
-        </p:cxnSp>
-      </p:grpSp>
-      <p:sp>
-        <p:nvSpPr>
-          <p:cNvPr id="9" name="テキスト ボックス 13">
-            <a:extLst>
-              <a:ext uri="{FF2B5EF4-FFF2-40B4-BE49-F238E27FC236}">
-                <a16:creationId xmlns:a16="http://schemas.microsoft.com/office/drawing/2014/main" id="{EB64A71B-5205-8993-BA81-780AC51793F6}"/>
-              </a:ext>
-            </a:extLst>
-          </p:cNvPr>
-          <p:cNvSpPr txBox="1"/>
-          <p:nvPr/>
+          <p:cNvSpPr>
+            <a:spLocks noGrp="1"/>
+          </p:cNvSpPr>
+          <p:nvPr>
+            <p:ph idx="1"/>
+          </p:nvPr>
         </p:nvSpPr>
         <p:spPr>
           <a:xfrm>
-            <a:off x="335799" y="908465"/>
-            <a:ext cx="3103778" cy="400110"/>
+            <a:off x="173993" y="810867"/>
+            <a:ext cx="6110264" cy="1125509"/>
           </a:xfrm>
-          <a:prstGeom prst="rect">
-            <a:avLst/>
-          </a:prstGeom>
-          <a:noFill/>
-          <a:ln>
-            <a:noFill/>
-          </a:ln>
         </p:spPr>
         <p:txBody>
-          <a:bodyPr wrap="square" lIns="91440" tIns="45720" rIns="91440" bIns="45720" anchor="t">
-            <a:spAutoFit/>
-          </a:bodyPr>
-          <a:lstStyle>
-            <a:defPPr>
-              <a:defRPr lang="ja-JP"/>
-            </a:defPPr>
-            <a:lvl1pPr marL="0" algn="l" defTabSz="914400" rtl="0" eaLnBrk="1" latinLnBrk="0" hangingPunct="1">
-              <a:defRPr kumimoji="1" sz="1800" kern="1200">
-                <a:solidFill>
-                  <a:schemeClr val="tx1"/>
-                </a:solidFill>
-                <a:latin typeface="+mn-lt"/>
-                <a:ea typeface="+mn-ea"/>
-                <a:cs typeface="+mn-cs"/>
-              </a:defRPr>
-            </a:lvl1pPr>
-            <a:lvl2pPr marL="457200" algn="l" defTabSz="914400" rtl="0" eaLnBrk="1" latinLnBrk="0" hangingPunct="1">
-              <a:defRPr kumimoji="1" sz="1800" kern="1200">
-                <a:solidFill>
-                  <a:schemeClr val="tx1"/>
-                </a:solidFill>
-                <a:latin typeface="+mn-lt"/>
-                <a:ea typeface="+mn-ea"/>
-                <a:cs typeface="+mn-cs"/>
-              </a:defRPr>
-            </a:lvl2pPr>
-            <a:lvl3pPr marL="914400" algn="l" defTabSz="914400" rtl="0" eaLnBrk="1" latinLnBrk="0" hangingPunct="1">
-              <a:defRPr kumimoji="1" sz="1800" kern="1200">
-                <a:solidFill>
-                  <a:schemeClr val="tx1"/>
-                </a:solidFill>
-                <a:latin typeface="+mn-lt"/>
-                <a:ea typeface="+mn-ea"/>
-                <a:cs typeface="+mn-cs"/>
-              </a:defRPr>
-            </a:lvl3pPr>
-            <a:lvl4pPr marL="1371600" algn="l" defTabSz="914400" rtl="0" eaLnBrk="1" latinLnBrk="0" hangingPunct="1">
-              <a:defRPr kumimoji="1" sz="1800" kern="1200">
-                <a:solidFill>
-                  <a:schemeClr val="tx1"/>
-                </a:solidFill>
-                <a:latin typeface="+mn-lt"/>
-                <a:ea typeface="+mn-ea"/>
-                <a:cs typeface="+mn-cs"/>
-              </a:defRPr>
-            </a:lvl4pPr>
-            <a:lvl5pPr marL="1828800" algn="l" defTabSz="914400" rtl="0" eaLnBrk="1" latinLnBrk="0" hangingPunct="1">
-              <a:defRPr kumimoji="1" sz="1800" kern="1200">
-                <a:solidFill>
-                  <a:schemeClr val="tx1"/>
-                </a:solidFill>
-                <a:latin typeface="+mn-lt"/>
-                <a:ea typeface="+mn-ea"/>
-                <a:cs typeface="+mn-cs"/>
-              </a:defRPr>
-            </a:lvl5pPr>
-            <a:lvl6pPr marL="2286000" algn="l" defTabSz="914400" rtl="0" eaLnBrk="1" latinLnBrk="0" hangingPunct="1">
-              <a:defRPr kumimoji="1" sz="1800" kern="1200">
-                <a:solidFill>
-                  <a:schemeClr val="tx1"/>
-                </a:solidFill>
-                <a:latin typeface="+mn-lt"/>
-                <a:ea typeface="+mn-ea"/>
-                <a:cs typeface="+mn-cs"/>
-              </a:defRPr>
-            </a:lvl6pPr>
-            <a:lvl7pPr marL="2743200" algn="l" defTabSz="914400" rtl="0" eaLnBrk="1" latinLnBrk="0" hangingPunct="1">
-              <a:defRPr kumimoji="1" sz="1800" kern="1200">
-                <a:solidFill>
-                  <a:schemeClr val="tx1"/>
-                </a:solidFill>
-                <a:latin typeface="+mn-lt"/>
-                <a:ea typeface="+mn-ea"/>
-                <a:cs typeface="+mn-cs"/>
-              </a:defRPr>
-            </a:lvl7pPr>
-            <a:lvl8pPr marL="3200400" algn="l" defTabSz="914400" rtl="0" eaLnBrk="1" latinLnBrk="0" hangingPunct="1">
-              <a:defRPr kumimoji="1" sz="1800" kern="1200">
-                <a:solidFill>
-                  <a:schemeClr val="tx1"/>
-                </a:solidFill>
-                <a:latin typeface="+mn-lt"/>
-                <a:ea typeface="+mn-ea"/>
-                <a:cs typeface="+mn-cs"/>
-              </a:defRPr>
-            </a:lvl8pPr>
-            <a:lvl9pPr marL="3657600" algn="l" defTabSz="914400" rtl="0" eaLnBrk="1" latinLnBrk="0" hangingPunct="1">
-              <a:defRPr kumimoji="1" sz="1800" kern="1200">
-                <a:solidFill>
-                  <a:schemeClr val="tx1"/>
-                </a:solidFill>
-                <a:latin typeface="+mn-lt"/>
-                <a:ea typeface="+mn-ea"/>
-                <a:cs typeface="+mn-cs"/>
-              </a:defRPr>
-            </a:lvl9pPr>
-          </a:lstStyle>
+          <a:bodyPr/>
+          <a:lstStyle/>
           <a:p>
             <a:pPr>
               <a:lnSpc>
@@ -12178,141 +7544,11 @@
               </a:spcAft>
             </a:pPr>
             <a:r>
-              <a:rPr lang="ja-JP" altLang="en-US" sz="2000" b="1">
-                <a:solidFill>
-                  <a:srgbClr val="0070C0"/>
-                </a:solidFill>
-                <a:ea typeface="游ゴシック"/>
-              </a:rPr>
-              <a:t>システム構成図</a:t>
-            </a:r>
-          </a:p>
-        </p:txBody>
-      </p:sp>
-      <p:sp>
-        <p:nvSpPr>
-          <p:cNvPr id="10" name="テキスト ボックス 13">
-            <a:extLst>
-              <a:ext uri="{FF2B5EF4-FFF2-40B4-BE49-F238E27FC236}">
-                <a16:creationId xmlns:a16="http://schemas.microsoft.com/office/drawing/2014/main" id="{D222F15B-D3DE-AB5D-8FF5-65C3E12E6DD0}"/>
-              </a:ext>
-            </a:extLst>
-          </p:cNvPr>
-          <p:cNvSpPr txBox="1"/>
-          <p:nvPr/>
-        </p:nvSpPr>
-        <p:spPr>
-          <a:xfrm>
-            <a:off x="5388777" y="908465"/>
-            <a:ext cx="4600756" cy="400110"/>
-          </a:xfrm>
-          <a:prstGeom prst="rect">
-            <a:avLst/>
-          </a:prstGeom>
-          <a:noFill/>
-          <a:ln>
-            <a:noFill/>
-          </a:ln>
-        </p:spPr>
-        <p:txBody>
-          <a:bodyPr wrap="square" lIns="91440" tIns="45720" rIns="91440" bIns="45720" anchor="t">
-            <a:spAutoFit/>
-          </a:bodyPr>
-          <a:lstStyle>
-            <a:defPPr>
-              <a:defRPr lang="ja-JP"/>
-            </a:defPPr>
-            <a:lvl1pPr marL="0" algn="l" defTabSz="914400" rtl="0" eaLnBrk="1" latinLnBrk="0" hangingPunct="1">
-              <a:defRPr kumimoji="1" sz="1800" kern="1200">
-                <a:solidFill>
-                  <a:schemeClr val="tx1"/>
-                </a:solidFill>
-                <a:latin typeface="+mn-lt"/>
-                <a:ea typeface="+mn-ea"/>
-                <a:cs typeface="+mn-cs"/>
-              </a:defRPr>
-            </a:lvl1pPr>
-            <a:lvl2pPr marL="457200" algn="l" defTabSz="914400" rtl="0" eaLnBrk="1" latinLnBrk="0" hangingPunct="1">
-              <a:defRPr kumimoji="1" sz="1800" kern="1200">
-                <a:solidFill>
-                  <a:schemeClr val="tx1"/>
-                </a:solidFill>
-                <a:latin typeface="+mn-lt"/>
-                <a:ea typeface="+mn-ea"/>
-                <a:cs typeface="+mn-cs"/>
-              </a:defRPr>
-            </a:lvl2pPr>
-            <a:lvl3pPr marL="914400" algn="l" defTabSz="914400" rtl="0" eaLnBrk="1" latinLnBrk="0" hangingPunct="1">
-              <a:defRPr kumimoji="1" sz="1800" kern="1200">
-                <a:solidFill>
-                  <a:schemeClr val="tx1"/>
-                </a:solidFill>
-                <a:latin typeface="+mn-lt"/>
-                <a:ea typeface="+mn-ea"/>
-                <a:cs typeface="+mn-cs"/>
-              </a:defRPr>
-            </a:lvl3pPr>
-            <a:lvl4pPr marL="1371600" algn="l" defTabSz="914400" rtl="0" eaLnBrk="1" latinLnBrk="0" hangingPunct="1">
-              <a:defRPr kumimoji="1" sz="1800" kern="1200">
-                <a:solidFill>
-                  <a:schemeClr val="tx1"/>
-                </a:solidFill>
-                <a:latin typeface="+mn-lt"/>
-                <a:ea typeface="+mn-ea"/>
-                <a:cs typeface="+mn-cs"/>
-              </a:defRPr>
-            </a:lvl4pPr>
-            <a:lvl5pPr marL="1828800" algn="l" defTabSz="914400" rtl="0" eaLnBrk="1" latinLnBrk="0" hangingPunct="1">
-              <a:defRPr kumimoji="1" sz="1800" kern="1200">
-                <a:solidFill>
-                  <a:schemeClr val="tx1"/>
-                </a:solidFill>
-                <a:latin typeface="+mn-lt"/>
-                <a:ea typeface="+mn-ea"/>
-                <a:cs typeface="+mn-cs"/>
-              </a:defRPr>
-            </a:lvl5pPr>
-            <a:lvl6pPr marL="2286000" algn="l" defTabSz="914400" rtl="0" eaLnBrk="1" latinLnBrk="0" hangingPunct="1">
-              <a:defRPr kumimoji="1" sz="1800" kern="1200">
-                <a:solidFill>
-                  <a:schemeClr val="tx1"/>
-                </a:solidFill>
-                <a:latin typeface="+mn-lt"/>
-                <a:ea typeface="+mn-ea"/>
-                <a:cs typeface="+mn-cs"/>
-              </a:defRPr>
-            </a:lvl6pPr>
-            <a:lvl7pPr marL="2743200" algn="l" defTabSz="914400" rtl="0" eaLnBrk="1" latinLnBrk="0" hangingPunct="1">
-              <a:defRPr kumimoji="1" sz="1800" kern="1200">
-                <a:solidFill>
-                  <a:schemeClr val="tx1"/>
-                </a:solidFill>
-                <a:latin typeface="+mn-lt"/>
-                <a:ea typeface="+mn-ea"/>
-                <a:cs typeface="+mn-cs"/>
-              </a:defRPr>
-            </a:lvl7pPr>
-            <a:lvl8pPr marL="3200400" algn="l" defTabSz="914400" rtl="0" eaLnBrk="1" latinLnBrk="0" hangingPunct="1">
-              <a:defRPr kumimoji="1" sz="1800" kern="1200">
-                <a:solidFill>
-                  <a:schemeClr val="tx1"/>
-                </a:solidFill>
-                <a:latin typeface="+mn-lt"/>
-                <a:ea typeface="+mn-ea"/>
-                <a:cs typeface="+mn-cs"/>
-              </a:defRPr>
-            </a:lvl8pPr>
-            <a:lvl9pPr marL="3657600" algn="l" defTabSz="914400" rtl="0" eaLnBrk="1" latinLnBrk="0" hangingPunct="1">
-              <a:defRPr kumimoji="1" sz="1800" kern="1200">
-                <a:solidFill>
-                  <a:schemeClr val="tx1"/>
-                </a:solidFill>
-                <a:latin typeface="+mn-lt"/>
-                <a:ea typeface="+mn-ea"/>
-                <a:cs typeface="+mn-cs"/>
-              </a:defRPr>
-            </a:lvl9pPr>
-          </a:lstStyle>
+              <a:rPr lang="ja-JP" altLang="en-US" sz="1600" dirty="0"/>
+              <a:t>■ 問い合わせ内容</a:t>
+            </a:r>
+            <a:endParaRPr lang="en-US" altLang="ja-JP" sz="1600" dirty="0"/>
+          </a:p>
           <a:p>
             <a:pPr>
               <a:lnSpc>
@@ -12322,142 +7558,8 @@
                 <a:spcPts val="0"/>
               </a:spcAft>
             </a:pPr>
-            <a:r>
-              <a:rPr lang="ja-JP" altLang="en-US" sz="2000" b="1">
-                <a:solidFill>
-                  <a:srgbClr val="0070C0"/>
-                </a:solidFill>
-                <a:ea typeface="游ゴシック"/>
-              </a:rPr>
-              <a:t>AWSを使用した環境構築</a:t>
-            </a:r>
-          </a:p>
-        </p:txBody>
-      </p:sp>
-      <p:sp>
-        <p:nvSpPr>
-          <p:cNvPr id="26" name="テキスト ボックス 13">
-            <a:extLst>
-              <a:ext uri="{FF2B5EF4-FFF2-40B4-BE49-F238E27FC236}">
-                <a16:creationId xmlns:a16="http://schemas.microsoft.com/office/drawing/2014/main" id="{BA4540EE-F73F-2231-F339-E04EC22A543A}"/>
-              </a:ext>
-            </a:extLst>
-          </p:cNvPr>
-          <p:cNvSpPr txBox="1"/>
-          <p:nvPr/>
-        </p:nvSpPr>
-        <p:spPr>
-          <a:xfrm>
-            <a:off x="5432012" y="1387952"/>
-            <a:ext cx="2017524" cy="338554"/>
-          </a:xfrm>
-          <a:prstGeom prst="rect">
-            <a:avLst/>
-          </a:prstGeom>
-          <a:noFill/>
-          <a:ln>
-            <a:noFill/>
-          </a:ln>
-        </p:spPr>
-        <p:txBody>
-          <a:bodyPr wrap="square" lIns="91440" tIns="45720" rIns="91440" bIns="45720" anchor="t">
-            <a:spAutoFit/>
-          </a:bodyPr>
-          <a:lstStyle>
-            <a:defPPr>
-              <a:defRPr lang="ja-JP"/>
-            </a:defPPr>
-            <a:lvl1pPr marL="0" algn="l" defTabSz="914400" rtl="0" eaLnBrk="1" latinLnBrk="0" hangingPunct="1">
-              <a:defRPr kumimoji="1" sz="1800" kern="1200">
-                <a:solidFill>
-                  <a:schemeClr val="tx1"/>
-                </a:solidFill>
-                <a:latin typeface="+mn-lt"/>
-                <a:ea typeface="+mn-ea"/>
-                <a:cs typeface="+mn-cs"/>
-              </a:defRPr>
-            </a:lvl1pPr>
-            <a:lvl2pPr marL="457200" algn="l" defTabSz="914400" rtl="0" eaLnBrk="1" latinLnBrk="0" hangingPunct="1">
-              <a:defRPr kumimoji="1" sz="1800" kern="1200">
-                <a:solidFill>
-                  <a:schemeClr val="tx1"/>
-                </a:solidFill>
-                <a:latin typeface="+mn-lt"/>
-                <a:ea typeface="+mn-ea"/>
-                <a:cs typeface="+mn-cs"/>
-              </a:defRPr>
-            </a:lvl2pPr>
-            <a:lvl3pPr marL="914400" algn="l" defTabSz="914400" rtl="0" eaLnBrk="1" latinLnBrk="0" hangingPunct="1">
-              <a:defRPr kumimoji="1" sz="1800" kern="1200">
-                <a:solidFill>
-                  <a:schemeClr val="tx1"/>
-                </a:solidFill>
-                <a:latin typeface="+mn-lt"/>
-                <a:ea typeface="+mn-ea"/>
-                <a:cs typeface="+mn-cs"/>
-              </a:defRPr>
-            </a:lvl3pPr>
-            <a:lvl4pPr marL="1371600" algn="l" defTabSz="914400" rtl="0" eaLnBrk="1" latinLnBrk="0" hangingPunct="1">
-              <a:defRPr kumimoji="1" sz="1800" kern="1200">
-                <a:solidFill>
-                  <a:schemeClr val="tx1"/>
-                </a:solidFill>
-                <a:latin typeface="+mn-lt"/>
-                <a:ea typeface="+mn-ea"/>
-                <a:cs typeface="+mn-cs"/>
-              </a:defRPr>
-            </a:lvl4pPr>
-            <a:lvl5pPr marL="1828800" algn="l" defTabSz="914400" rtl="0" eaLnBrk="1" latinLnBrk="0" hangingPunct="1">
-              <a:defRPr kumimoji="1" sz="1800" kern="1200">
-                <a:solidFill>
-                  <a:schemeClr val="tx1"/>
-                </a:solidFill>
-                <a:latin typeface="+mn-lt"/>
-                <a:ea typeface="+mn-ea"/>
-                <a:cs typeface="+mn-cs"/>
-              </a:defRPr>
-            </a:lvl5pPr>
-            <a:lvl6pPr marL="2286000" algn="l" defTabSz="914400" rtl="0" eaLnBrk="1" latinLnBrk="0" hangingPunct="1">
-              <a:defRPr kumimoji="1" sz="1800" kern="1200">
-                <a:solidFill>
-                  <a:schemeClr val="tx1"/>
-                </a:solidFill>
-                <a:latin typeface="+mn-lt"/>
-                <a:ea typeface="+mn-ea"/>
-                <a:cs typeface="+mn-cs"/>
-              </a:defRPr>
-            </a:lvl6pPr>
-            <a:lvl7pPr marL="2743200" algn="l" defTabSz="914400" rtl="0" eaLnBrk="1" latinLnBrk="0" hangingPunct="1">
-              <a:defRPr kumimoji="1" sz="1800" kern="1200">
-                <a:solidFill>
-                  <a:schemeClr val="tx1"/>
-                </a:solidFill>
-                <a:latin typeface="+mn-lt"/>
-                <a:ea typeface="+mn-ea"/>
-                <a:cs typeface="+mn-cs"/>
-              </a:defRPr>
-            </a:lvl7pPr>
-            <a:lvl8pPr marL="3200400" algn="l" defTabSz="914400" rtl="0" eaLnBrk="1" latinLnBrk="0" hangingPunct="1">
-              <a:defRPr kumimoji="1" sz="1800" kern="1200">
-                <a:solidFill>
-                  <a:schemeClr val="tx1"/>
-                </a:solidFill>
-                <a:latin typeface="+mn-lt"/>
-                <a:ea typeface="+mn-ea"/>
-                <a:cs typeface="+mn-cs"/>
-              </a:defRPr>
-            </a:lvl8pPr>
-            <a:lvl9pPr marL="3657600" algn="l" defTabSz="914400" rtl="0" eaLnBrk="1" latinLnBrk="0" hangingPunct="1">
-              <a:defRPr kumimoji="1" sz="1800" kern="1200">
-                <a:solidFill>
-                  <a:schemeClr val="tx1"/>
-                </a:solidFill>
-                <a:latin typeface="+mn-lt"/>
-                <a:ea typeface="+mn-ea"/>
-                <a:cs typeface="+mn-cs"/>
-              </a:defRPr>
-            </a:lvl9pPr>
-          </a:lstStyle>
+            <a:endParaRPr lang="ja-JP" altLang="en-US" sz="1600" dirty="0"/>
+          </a:p>
           <a:p>
             <a:pPr>
               <a:lnSpc>
@@ -12468,148 +7570,22 @@
               </a:spcAft>
             </a:pPr>
             <a:r>
-              <a:rPr lang="ja-JP" sz="1600" b="1">
-                <a:solidFill>
-                  <a:srgbClr val="000000"/>
-                </a:solidFill>
-                <a:ea typeface="+mn-lt"/>
-                <a:cs typeface="+mn-lt"/>
-              </a:rPr>
-              <a:t>目的</a:t>
-            </a:r>
-            <a:endParaRPr lang="en-US" altLang="ja-JP" sz="1600" b="1">
-              <a:solidFill>
-                <a:srgbClr val="000000"/>
-              </a:solidFill>
-              <a:ea typeface="游ゴシック"/>
-            </a:endParaRPr>
-          </a:p>
-        </p:txBody>
-      </p:sp>
-      <p:sp>
-        <p:nvSpPr>
-          <p:cNvPr id="30" name="テキスト ボックス 13">
-            <a:extLst>
-              <a:ext uri="{FF2B5EF4-FFF2-40B4-BE49-F238E27FC236}">
-                <a16:creationId xmlns:a16="http://schemas.microsoft.com/office/drawing/2014/main" id="{AC9B9669-4698-1875-2E15-F6BEF10F3BA9}"/>
-              </a:ext>
-            </a:extLst>
-          </p:cNvPr>
-          <p:cNvSpPr txBox="1"/>
-          <p:nvPr/>
-        </p:nvSpPr>
-        <p:spPr>
-          <a:xfrm>
-            <a:off x="5421202" y="1853113"/>
-            <a:ext cx="2017524" cy="338554"/>
-          </a:xfrm>
-          <a:prstGeom prst="rect">
-            <a:avLst/>
-          </a:prstGeom>
-          <a:noFill/>
-          <a:ln>
-            <a:noFill/>
-          </a:ln>
-        </p:spPr>
-        <p:txBody>
-          <a:bodyPr wrap="square" lIns="91440" tIns="45720" rIns="91440" bIns="45720" anchor="t">
-            <a:spAutoFit/>
-          </a:bodyPr>
-          <a:lstStyle>
-            <a:defPPr>
-              <a:defRPr lang="ja-JP"/>
-            </a:defPPr>
-            <a:lvl1pPr marL="0" algn="l" defTabSz="914400" rtl="0" eaLnBrk="1" latinLnBrk="0" hangingPunct="1">
-              <a:defRPr kumimoji="1" sz="1800" kern="1200">
-                <a:solidFill>
-                  <a:schemeClr val="tx1"/>
-                </a:solidFill>
-                <a:latin typeface="+mn-lt"/>
-                <a:ea typeface="+mn-ea"/>
-                <a:cs typeface="+mn-cs"/>
-              </a:defRPr>
-            </a:lvl1pPr>
-            <a:lvl2pPr marL="457200" algn="l" defTabSz="914400" rtl="0" eaLnBrk="1" latinLnBrk="0" hangingPunct="1">
-              <a:defRPr kumimoji="1" sz="1800" kern="1200">
-                <a:solidFill>
-                  <a:schemeClr val="tx1"/>
-                </a:solidFill>
-                <a:latin typeface="+mn-lt"/>
-                <a:ea typeface="+mn-ea"/>
-                <a:cs typeface="+mn-cs"/>
-              </a:defRPr>
-            </a:lvl2pPr>
-            <a:lvl3pPr marL="914400" algn="l" defTabSz="914400" rtl="0" eaLnBrk="1" latinLnBrk="0" hangingPunct="1">
-              <a:defRPr kumimoji="1" sz="1800" kern="1200">
-                <a:solidFill>
-                  <a:schemeClr val="tx1"/>
-                </a:solidFill>
-                <a:latin typeface="+mn-lt"/>
-                <a:ea typeface="+mn-ea"/>
-                <a:cs typeface="+mn-cs"/>
-              </a:defRPr>
-            </a:lvl3pPr>
-            <a:lvl4pPr marL="1371600" algn="l" defTabSz="914400" rtl="0" eaLnBrk="1" latinLnBrk="0" hangingPunct="1">
-              <a:defRPr kumimoji="1" sz="1800" kern="1200">
-                <a:solidFill>
-                  <a:schemeClr val="tx1"/>
-                </a:solidFill>
-                <a:latin typeface="+mn-lt"/>
-                <a:ea typeface="+mn-ea"/>
-                <a:cs typeface="+mn-cs"/>
-              </a:defRPr>
-            </a:lvl4pPr>
-            <a:lvl5pPr marL="1828800" algn="l" defTabSz="914400" rtl="0" eaLnBrk="1" latinLnBrk="0" hangingPunct="1">
-              <a:defRPr kumimoji="1" sz="1800" kern="1200">
-                <a:solidFill>
-                  <a:schemeClr val="tx1"/>
-                </a:solidFill>
-                <a:latin typeface="+mn-lt"/>
-                <a:ea typeface="+mn-ea"/>
-                <a:cs typeface="+mn-cs"/>
-              </a:defRPr>
-            </a:lvl5pPr>
-            <a:lvl6pPr marL="2286000" algn="l" defTabSz="914400" rtl="0" eaLnBrk="1" latinLnBrk="0" hangingPunct="1">
-              <a:defRPr kumimoji="1" sz="1800" kern="1200">
-                <a:solidFill>
-                  <a:schemeClr val="tx1"/>
-                </a:solidFill>
-                <a:latin typeface="+mn-lt"/>
-                <a:ea typeface="+mn-ea"/>
-                <a:cs typeface="+mn-cs"/>
-              </a:defRPr>
-            </a:lvl6pPr>
-            <a:lvl7pPr marL="2743200" algn="l" defTabSz="914400" rtl="0" eaLnBrk="1" latinLnBrk="0" hangingPunct="1">
-              <a:defRPr kumimoji="1" sz="1800" kern="1200">
-                <a:solidFill>
-                  <a:schemeClr val="tx1"/>
-                </a:solidFill>
-                <a:latin typeface="+mn-lt"/>
-                <a:ea typeface="+mn-ea"/>
-                <a:cs typeface="+mn-cs"/>
-              </a:defRPr>
-            </a:lvl7pPr>
-            <a:lvl8pPr marL="3200400" algn="l" defTabSz="914400" rtl="0" eaLnBrk="1" latinLnBrk="0" hangingPunct="1">
-              <a:defRPr kumimoji="1" sz="1800" kern="1200">
-                <a:solidFill>
-                  <a:schemeClr val="tx1"/>
-                </a:solidFill>
-                <a:latin typeface="+mn-lt"/>
-                <a:ea typeface="+mn-ea"/>
-                <a:cs typeface="+mn-cs"/>
-              </a:defRPr>
-            </a:lvl8pPr>
-            <a:lvl9pPr marL="3657600" algn="l" defTabSz="914400" rtl="0" eaLnBrk="1" latinLnBrk="0" hangingPunct="1">
-              <a:defRPr kumimoji="1" sz="1800" kern="1200">
-                <a:solidFill>
-                  <a:schemeClr val="tx1"/>
-                </a:solidFill>
-                <a:latin typeface="+mn-lt"/>
-                <a:ea typeface="+mn-ea"/>
-                <a:cs typeface="+mn-cs"/>
-              </a:defRPr>
-            </a:lvl9pPr>
-          </a:lstStyle>
+              <a:rPr lang="en-US" altLang="ja-JP" sz="1200" dirty="0"/>
+              <a:t>- </a:t>
+            </a:r>
+            <a:r>
+              <a:rPr lang="ja-JP" altLang="en-US" sz="1200" dirty="0"/>
+              <a:t>検証環境で </a:t>
+            </a:r>
+            <a:r>
+              <a:rPr lang="en-US" altLang="ja-JP" sz="1200" dirty="0"/>
+              <a:t>S3 </a:t>
+            </a:r>
+            <a:r>
+              <a:rPr lang="ja-JP" altLang="en-US" sz="1200" dirty="0"/>
+              <a:t>アップロードを禁止したい</a:t>
+            </a:r>
+          </a:p>
           <a:p>
             <a:pPr>
               <a:lnSpc>
@@ -12620,148 +7596,30 @@
               </a:spcAft>
             </a:pPr>
             <a:r>
-              <a:rPr lang="ja-JP" altLang="en-US" sz="1600" b="1">
-                <a:solidFill>
-                  <a:srgbClr val="000000"/>
-                </a:solidFill>
-                <a:ea typeface="+mn-lt"/>
-                <a:cs typeface="+mn-lt"/>
-              </a:rPr>
-              <a:t>使用技術</a:t>
-            </a:r>
-            <a:endParaRPr lang="en-US" altLang="ja-JP" sz="1600" b="1">
-              <a:solidFill>
-                <a:srgbClr val="000000"/>
-              </a:solidFill>
-              <a:ea typeface="游ゴシック"/>
-            </a:endParaRPr>
-          </a:p>
-        </p:txBody>
-      </p:sp>
-      <p:sp>
-        <p:nvSpPr>
-          <p:cNvPr id="39" name="テキスト ボックス 13">
-            <a:extLst>
-              <a:ext uri="{FF2B5EF4-FFF2-40B4-BE49-F238E27FC236}">
-                <a16:creationId xmlns:a16="http://schemas.microsoft.com/office/drawing/2014/main" id="{E05D2B82-33F1-63EA-314E-9E5EE294E9E1}"/>
-              </a:ext>
-            </a:extLst>
-          </p:cNvPr>
-          <p:cNvSpPr txBox="1"/>
-          <p:nvPr/>
-        </p:nvSpPr>
-        <p:spPr>
-          <a:xfrm>
-            <a:off x="5410394" y="2372974"/>
-            <a:ext cx="2017524" cy="338554"/>
-          </a:xfrm>
-          <a:prstGeom prst="rect">
-            <a:avLst/>
-          </a:prstGeom>
-          <a:noFill/>
-          <a:ln>
-            <a:noFill/>
-          </a:ln>
-        </p:spPr>
-        <p:txBody>
-          <a:bodyPr wrap="square" lIns="91440" tIns="45720" rIns="91440" bIns="45720" anchor="t">
-            <a:spAutoFit/>
-          </a:bodyPr>
-          <a:lstStyle>
-            <a:defPPr>
-              <a:defRPr lang="ja-JP"/>
-            </a:defPPr>
-            <a:lvl1pPr marL="0" algn="l" defTabSz="914400" rtl="0" eaLnBrk="1" latinLnBrk="0" hangingPunct="1">
-              <a:defRPr kumimoji="1" sz="1800" kern="1200">
-                <a:solidFill>
-                  <a:schemeClr val="tx1"/>
-                </a:solidFill>
-                <a:latin typeface="+mn-lt"/>
-                <a:ea typeface="+mn-ea"/>
-                <a:cs typeface="+mn-cs"/>
-              </a:defRPr>
-            </a:lvl1pPr>
-            <a:lvl2pPr marL="457200" algn="l" defTabSz="914400" rtl="0" eaLnBrk="1" latinLnBrk="0" hangingPunct="1">
-              <a:defRPr kumimoji="1" sz="1800" kern="1200">
-                <a:solidFill>
-                  <a:schemeClr val="tx1"/>
-                </a:solidFill>
-                <a:latin typeface="+mn-lt"/>
-                <a:ea typeface="+mn-ea"/>
-                <a:cs typeface="+mn-cs"/>
-              </a:defRPr>
-            </a:lvl2pPr>
-            <a:lvl3pPr marL="914400" algn="l" defTabSz="914400" rtl="0" eaLnBrk="1" latinLnBrk="0" hangingPunct="1">
-              <a:defRPr kumimoji="1" sz="1800" kern="1200">
-                <a:solidFill>
-                  <a:schemeClr val="tx1"/>
-                </a:solidFill>
-                <a:latin typeface="+mn-lt"/>
-                <a:ea typeface="+mn-ea"/>
-                <a:cs typeface="+mn-cs"/>
-              </a:defRPr>
-            </a:lvl3pPr>
-            <a:lvl4pPr marL="1371600" algn="l" defTabSz="914400" rtl="0" eaLnBrk="1" latinLnBrk="0" hangingPunct="1">
-              <a:defRPr kumimoji="1" sz="1800" kern="1200">
-                <a:solidFill>
-                  <a:schemeClr val="tx1"/>
-                </a:solidFill>
-                <a:latin typeface="+mn-lt"/>
-                <a:ea typeface="+mn-ea"/>
-                <a:cs typeface="+mn-cs"/>
-              </a:defRPr>
-            </a:lvl4pPr>
-            <a:lvl5pPr marL="1828800" algn="l" defTabSz="914400" rtl="0" eaLnBrk="1" latinLnBrk="0" hangingPunct="1">
-              <a:defRPr kumimoji="1" sz="1800" kern="1200">
-                <a:solidFill>
-                  <a:schemeClr val="tx1"/>
-                </a:solidFill>
-                <a:latin typeface="+mn-lt"/>
-                <a:ea typeface="+mn-ea"/>
-                <a:cs typeface="+mn-cs"/>
-              </a:defRPr>
-            </a:lvl5pPr>
-            <a:lvl6pPr marL="2286000" algn="l" defTabSz="914400" rtl="0" eaLnBrk="1" latinLnBrk="0" hangingPunct="1">
-              <a:defRPr kumimoji="1" sz="1800" kern="1200">
-                <a:solidFill>
-                  <a:schemeClr val="tx1"/>
-                </a:solidFill>
-                <a:latin typeface="+mn-lt"/>
-                <a:ea typeface="+mn-ea"/>
-                <a:cs typeface="+mn-cs"/>
-              </a:defRPr>
-            </a:lvl6pPr>
-            <a:lvl7pPr marL="2743200" algn="l" defTabSz="914400" rtl="0" eaLnBrk="1" latinLnBrk="0" hangingPunct="1">
-              <a:defRPr kumimoji="1" sz="1800" kern="1200">
-                <a:solidFill>
-                  <a:schemeClr val="tx1"/>
-                </a:solidFill>
-                <a:latin typeface="+mn-lt"/>
-                <a:ea typeface="+mn-ea"/>
-                <a:cs typeface="+mn-cs"/>
-              </a:defRPr>
-            </a:lvl7pPr>
-            <a:lvl8pPr marL="3200400" algn="l" defTabSz="914400" rtl="0" eaLnBrk="1" latinLnBrk="0" hangingPunct="1">
-              <a:defRPr kumimoji="1" sz="1800" kern="1200">
-                <a:solidFill>
-                  <a:schemeClr val="tx1"/>
-                </a:solidFill>
-                <a:latin typeface="+mn-lt"/>
-                <a:ea typeface="+mn-ea"/>
-                <a:cs typeface="+mn-cs"/>
-              </a:defRPr>
-            </a:lvl8pPr>
-            <a:lvl9pPr marL="3657600" algn="l" defTabSz="914400" rtl="0" eaLnBrk="1" latinLnBrk="0" hangingPunct="1">
-              <a:defRPr kumimoji="1" sz="1800" kern="1200">
-                <a:solidFill>
-                  <a:schemeClr val="tx1"/>
-                </a:solidFill>
-                <a:latin typeface="+mn-lt"/>
-                <a:ea typeface="+mn-ea"/>
-                <a:cs typeface="+mn-cs"/>
-              </a:defRPr>
-            </a:lvl9pPr>
-          </a:lstStyle>
+              <a:rPr lang="en-US" altLang="ja-JP" sz="1200" dirty="0"/>
+              <a:t>- </a:t>
+            </a:r>
+            <a:r>
+              <a:rPr lang="en-US" altLang="ja-JP" sz="1200" dirty="0" err="1"/>
+              <a:t>ReadOnlyAccess</a:t>
+            </a:r>
+            <a:r>
+              <a:rPr lang="en-US" altLang="ja-JP" sz="1200" dirty="0"/>
+              <a:t> </a:t>
+            </a:r>
+            <a:r>
+              <a:rPr lang="ja-JP" altLang="en-US" sz="1200" dirty="0"/>
+              <a:t>や </a:t>
+            </a:r>
+            <a:r>
+              <a:rPr lang="en-US" altLang="ja-JP" sz="1200" dirty="0"/>
+              <a:t>Admin + S3ReadOnlyAccess </a:t>
+            </a:r>
+            <a:r>
+              <a:rPr lang="ja-JP" altLang="en-US" sz="1200" dirty="0"/>
+              <a:t>の挙動確認</a:t>
+            </a:r>
+          </a:p>
           <a:p>
             <a:pPr>
               <a:lnSpc>
@@ -12772,108 +7630,164 @@
               </a:spcAft>
             </a:pPr>
             <a:r>
-              <a:rPr lang="ja-JP" sz="1600" b="1">
-                <a:solidFill>
-                  <a:srgbClr val="000000"/>
-                </a:solidFill>
-                <a:ea typeface="+mn-lt"/>
-                <a:cs typeface="+mn-lt"/>
-              </a:rPr>
-              <a:t>構成図の説明</a:t>
-            </a:r>
-            <a:endParaRPr lang="en-US" altLang="ja-JP" sz="1600" b="1">
-              <a:solidFill>
-                <a:srgbClr val="000000"/>
-              </a:solidFill>
-              <a:ea typeface="游ゴシック"/>
-            </a:endParaRPr>
+              <a:rPr lang="en-US" altLang="ja-JP" sz="1200" dirty="0"/>
+              <a:t>- </a:t>
+            </a:r>
+            <a:r>
+              <a:rPr lang="en-US" altLang="ja-JP" sz="1200" dirty="0" err="1"/>
+              <a:t>AdministratorAccess</a:t>
+            </a:r>
+            <a:r>
+              <a:rPr lang="ja-JP" altLang="en-US" sz="1200" dirty="0"/>
+              <a:t>＋</a:t>
+            </a:r>
+            <a:r>
+              <a:rPr lang="en-US" altLang="ja-JP" sz="1200" dirty="0"/>
+              <a:t>S3ReadOnlyAccess </a:t>
+            </a:r>
+            <a:r>
+              <a:rPr lang="ja-JP" altLang="en-US" sz="1200" dirty="0"/>
+              <a:t>の組み合わせの可否を確認したい</a:t>
+            </a:r>
           </a:p>
         </p:txBody>
       </p:sp>
       <p:sp>
         <p:nvSpPr>
-          <p:cNvPr id="42" name="テキスト ボックス 13">
+          <p:cNvPr id="19" name="コンテンツ プレースホルダー 10">
             <a:extLst>
               <a:ext uri="{FF2B5EF4-FFF2-40B4-BE49-F238E27FC236}">
-                <a16:creationId xmlns:a16="http://schemas.microsoft.com/office/drawing/2014/main" id="{52713E81-00F2-26E8-E0EF-643D1F35D492}"/>
+                <a16:creationId xmlns:a16="http://schemas.microsoft.com/office/drawing/2014/main" id="{C9AE140D-EA00-DF4A-CDF3-B3F0EBAF0F9B}"/>
               </a:ext>
             </a:extLst>
           </p:cNvPr>
-          <p:cNvSpPr txBox="1"/>
+          <p:cNvSpPr txBox="1">
+            <a:spLocks/>
+          </p:cNvSpPr>
           <p:nvPr/>
         </p:nvSpPr>
         <p:spPr>
           <a:xfrm>
-            <a:off x="5404987" y="3378957"/>
-            <a:ext cx="4222460" cy="338554"/>
+            <a:off x="165029" y="2184530"/>
+            <a:ext cx="5760642" cy="4279023"/>
           </a:xfrm>
           <a:prstGeom prst="rect">
             <a:avLst/>
           </a:prstGeom>
-          <a:noFill/>
-          <a:ln>
-            <a:noFill/>
-          </a:ln>
         </p:spPr>
         <p:txBody>
-          <a:bodyPr wrap="square" lIns="91440" tIns="45720" rIns="91440" bIns="45720" anchor="t">
-            <a:spAutoFit/>
+          <a:bodyPr vert="horz" lIns="0" tIns="0" rIns="0" bIns="0" rtlCol="0">
+            <a:noAutofit/>
           </a:bodyPr>
           <a:lstStyle>
-            <a:defPPr>
-              <a:defRPr lang="ja-JP"/>
-            </a:defPPr>
-            <a:lvl1pPr marL="0" algn="l" defTabSz="914400" rtl="0" eaLnBrk="1" latinLnBrk="0" hangingPunct="1">
-              <a:defRPr kumimoji="1" sz="1800" kern="1200">
-                <a:solidFill>
-                  <a:schemeClr val="tx1"/>
-                </a:solidFill>
-                <a:latin typeface="+mn-lt"/>
+            <a:lvl1pPr marL="0" indent="0" algn="l" defTabSz="914400" rtl="0" eaLnBrk="1" latinLnBrk="0" hangingPunct="1">
+              <a:lnSpc>
+                <a:spcPts val="3200"/>
+              </a:lnSpc>
+              <a:spcBef>
+                <a:spcPts val="0"/>
+              </a:spcBef>
+              <a:spcAft>
+                <a:spcPts val="800"/>
+              </a:spcAft>
+              <a:buFont typeface="Arial" panose="020B0604020202020204" pitchFamily="34" charset="0"/>
+              <a:buNone/>
+              <a:defRPr kumimoji="1" sz="3200" b="1" kern="1200">
+                <a:solidFill>
+                  <a:schemeClr val="tx1"/>
+                </a:solidFill>
+                <a:latin typeface="+mn-ea"/>
                 <a:ea typeface="+mn-ea"/>
                 <a:cs typeface="+mn-cs"/>
               </a:defRPr>
             </a:lvl1pPr>
-            <a:lvl2pPr marL="457200" algn="l" defTabSz="914400" rtl="0" eaLnBrk="1" latinLnBrk="0" hangingPunct="1">
-              <a:defRPr kumimoji="1" sz="1800" kern="1200">
-                <a:solidFill>
-                  <a:schemeClr val="tx1"/>
-                </a:solidFill>
-                <a:latin typeface="+mn-lt"/>
+            <a:lvl2pPr marL="685800" indent="-228600" algn="l" defTabSz="914400" rtl="0" eaLnBrk="1" latinLnBrk="0" hangingPunct="1">
+              <a:lnSpc>
+                <a:spcPts val="2800"/>
+              </a:lnSpc>
+              <a:spcBef>
+                <a:spcPts val="0"/>
+              </a:spcBef>
+              <a:spcAft>
+                <a:spcPts val="0"/>
+              </a:spcAft>
+              <a:buFont typeface="Arial" panose="020B0604020202020204" pitchFamily="34" charset="0"/>
+              <a:buChar char="•"/>
+              <a:defRPr kumimoji="1" sz="2000" b="1" kern="1200">
+                <a:solidFill>
+                  <a:schemeClr val="tx1"/>
+                </a:solidFill>
+                <a:latin typeface="+mn-ea"/>
                 <a:ea typeface="+mn-ea"/>
                 <a:cs typeface="+mn-cs"/>
               </a:defRPr>
             </a:lvl2pPr>
-            <a:lvl3pPr marL="914400" algn="l" defTabSz="914400" rtl="0" eaLnBrk="1" latinLnBrk="0" hangingPunct="1">
-              <a:defRPr kumimoji="1" sz="1800" kern="1200">
-                <a:solidFill>
-                  <a:schemeClr val="tx1"/>
-                </a:solidFill>
-                <a:latin typeface="+mn-lt"/>
+            <a:lvl3pPr marL="1143000" indent="-228600" algn="l" defTabSz="914400" rtl="0" eaLnBrk="1" latinLnBrk="0" hangingPunct="1">
+              <a:lnSpc>
+                <a:spcPts val="2400"/>
+              </a:lnSpc>
+              <a:spcBef>
+                <a:spcPts val="0"/>
+              </a:spcBef>
+              <a:spcAft>
+                <a:spcPts val="0"/>
+              </a:spcAft>
+              <a:buFont typeface="Arial" panose="020B0604020202020204" pitchFamily="34" charset="0"/>
+              <a:buChar char="•"/>
+              <a:defRPr kumimoji="1" sz="1800" kern="1200">
+                <a:solidFill>
+                  <a:schemeClr val="tx1"/>
+                </a:solidFill>
+                <a:latin typeface="+mn-ea"/>
                 <a:ea typeface="+mn-ea"/>
                 <a:cs typeface="+mn-cs"/>
               </a:defRPr>
             </a:lvl3pPr>
-            <a:lvl4pPr marL="1371600" algn="l" defTabSz="914400" rtl="0" eaLnBrk="1" latinLnBrk="0" hangingPunct="1">
-              <a:defRPr kumimoji="1" sz="1800" kern="1200">
-                <a:solidFill>
-                  <a:schemeClr val="tx1"/>
-                </a:solidFill>
-                <a:latin typeface="+mn-lt"/>
+            <a:lvl4pPr marL="1600200" indent="-228600" algn="l" defTabSz="914400" rtl="0" eaLnBrk="1" latinLnBrk="0" hangingPunct="1">
+              <a:lnSpc>
+                <a:spcPts val="2400"/>
+              </a:lnSpc>
+              <a:spcBef>
+                <a:spcPts val="0"/>
+              </a:spcBef>
+              <a:buFont typeface="Arial" panose="020B0604020202020204" pitchFamily="34" charset="0"/>
+              <a:buChar char="•"/>
+              <a:defRPr kumimoji="1" sz="1600" kern="1200">
+                <a:solidFill>
+                  <a:schemeClr val="tx1"/>
+                </a:solidFill>
+                <a:latin typeface="+mn-ea"/>
                 <a:ea typeface="+mn-ea"/>
                 <a:cs typeface="+mn-cs"/>
               </a:defRPr>
             </a:lvl4pPr>
-            <a:lvl5pPr marL="1828800" algn="l" defTabSz="914400" rtl="0" eaLnBrk="1" latinLnBrk="0" hangingPunct="1">
-              <a:defRPr kumimoji="1" sz="1800" kern="1200">
-                <a:solidFill>
-                  <a:schemeClr val="tx1"/>
-                </a:solidFill>
-                <a:latin typeface="+mn-lt"/>
+            <a:lvl5pPr marL="2057400" indent="-228600" algn="l" defTabSz="914400" rtl="0" eaLnBrk="1" latinLnBrk="0" hangingPunct="1">
+              <a:lnSpc>
+                <a:spcPts val="2000"/>
+              </a:lnSpc>
+              <a:spcBef>
+                <a:spcPts val="0"/>
+              </a:spcBef>
+              <a:buFont typeface="Arial" panose="020B0604020202020204" pitchFamily="34" charset="0"/>
+              <a:buChar char="•"/>
+              <a:defRPr kumimoji="1" sz="1400" kern="1200">
+                <a:solidFill>
+                  <a:schemeClr val="tx1"/>
+                </a:solidFill>
+                <a:latin typeface="+mn-ea"/>
                 <a:ea typeface="+mn-ea"/>
                 <a:cs typeface="+mn-cs"/>
               </a:defRPr>
             </a:lvl5pPr>
-            <a:lvl6pPr marL="2286000" algn="l" defTabSz="914400" rtl="0" eaLnBrk="1" latinLnBrk="0" hangingPunct="1">
+            <a:lvl6pPr marL="2514600" indent="-228600" algn="l" defTabSz="914400" rtl="0" eaLnBrk="1" latinLnBrk="0" hangingPunct="1">
+              <a:lnSpc>
+                <a:spcPct val="90000"/>
+              </a:lnSpc>
+              <a:spcBef>
+                <a:spcPts val="500"/>
+              </a:spcBef>
+              <a:buFont typeface="Arial" panose="020B0604020202020204" pitchFamily="34" charset="0"/>
+              <a:buChar char="•"/>
               <a:defRPr kumimoji="1" sz="1800" kern="1200">
                 <a:solidFill>
                   <a:schemeClr val="tx1"/>
@@ -12883,7 +7797,15 @@
                 <a:cs typeface="+mn-cs"/>
               </a:defRPr>
             </a:lvl6pPr>
-            <a:lvl7pPr marL="2743200" algn="l" defTabSz="914400" rtl="0" eaLnBrk="1" latinLnBrk="0" hangingPunct="1">
+            <a:lvl7pPr marL="2971800" indent="-228600" algn="l" defTabSz="914400" rtl="0" eaLnBrk="1" latinLnBrk="0" hangingPunct="1">
+              <a:lnSpc>
+                <a:spcPct val="90000"/>
+              </a:lnSpc>
+              <a:spcBef>
+                <a:spcPts val="500"/>
+              </a:spcBef>
+              <a:buFont typeface="Arial" panose="020B0604020202020204" pitchFamily="34" charset="0"/>
+              <a:buChar char="•"/>
               <a:defRPr kumimoji="1" sz="1800" kern="1200">
                 <a:solidFill>
                   <a:schemeClr val="tx1"/>
@@ -12893,7 +7815,15 @@
                 <a:cs typeface="+mn-cs"/>
               </a:defRPr>
             </a:lvl7pPr>
-            <a:lvl8pPr marL="3200400" algn="l" defTabSz="914400" rtl="0" eaLnBrk="1" latinLnBrk="0" hangingPunct="1">
+            <a:lvl8pPr marL="3429000" indent="-228600" algn="l" defTabSz="914400" rtl="0" eaLnBrk="1" latinLnBrk="0" hangingPunct="1">
+              <a:lnSpc>
+                <a:spcPct val="90000"/>
+              </a:lnSpc>
+              <a:spcBef>
+                <a:spcPts val="500"/>
+              </a:spcBef>
+              <a:buFont typeface="Arial" panose="020B0604020202020204" pitchFamily="34" charset="0"/>
+              <a:buChar char="•"/>
               <a:defRPr kumimoji="1" sz="1800" kern="1200">
                 <a:solidFill>
                   <a:schemeClr val="tx1"/>
@@ -12903,7 +7833,15 @@
                 <a:cs typeface="+mn-cs"/>
               </a:defRPr>
             </a:lvl8pPr>
-            <a:lvl9pPr marL="3657600" algn="l" defTabSz="914400" rtl="0" eaLnBrk="1" latinLnBrk="0" hangingPunct="1">
+            <a:lvl9pPr marL="3886200" indent="-228600" algn="l" defTabSz="914400" rtl="0" eaLnBrk="1" latinLnBrk="0" hangingPunct="1">
+              <a:lnSpc>
+                <a:spcPct val="90000"/>
+              </a:lnSpc>
+              <a:spcBef>
+                <a:spcPts val="500"/>
+              </a:spcBef>
+              <a:buFont typeface="Arial" panose="020B0604020202020204" pitchFamily="34" charset="0"/>
+              <a:buChar char="•"/>
               <a:defRPr kumimoji="1" sz="1800" kern="1200">
                 <a:solidFill>
                   <a:schemeClr val="tx1"/>
@@ -12915,109 +7853,609 @@
             </a:lvl9pPr>
           </a:lstStyle>
           <a:p>
-            <a:r>
-              <a:rPr lang="ja-JP" altLang="en-US" sz="1600" b="1">
-                <a:solidFill>
-                  <a:srgbClr val="000000"/>
-                </a:solidFill>
-                <a:ea typeface="+mn-lt"/>
-                <a:cs typeface="+mn-lt"/>
-              </a:rPr>
-              <a:t>このシステム構成を選択した理由</a:t>
-            </a:r>
-            <a:endParaRPr lang="en-US" altLang="ja-JP" sz="1600" b="1">
-              <a:solidFill>
-                <a:srgbClr val="000000"/>
-              </a:solidFill>
-              <a:ea typeface="游ゴシック"/>
-            </a:endParaRPr>
+            <a:pPr>
+              <a:lnSpc>
+                <a:spcPct val="100000"/>
+              </a:lnSpc>
+              <a:spcAft>
+                <a:spcPts val="0"/>
+              </a:spcAft>
+            </a:pPr>
+            <a:r>
+              <a:rPr lang="ja-JP" altLang="en-US" sz="1600" dirty="0"/>
+              <a:t>■ 調査結果及び回答（公式ドキュメント準拠）</a:t>
+            </a:r>
+            <a:endParaRPr lang="en-US" altLang="ja-JP" sz="1600" dirty="0"/>
+          </a:p>
+          <a:p>
+            <a:pPr>
+              <a:lnSpc>
+                <a:spcPct val="100000"/>
+              </a:lnSpc>
+              <a:spcAft>
+                <a:spcPts val="0"/>
+              </a:spcAft>
+            </a:pPr>
+            <a:endParaRPr lang="en-US" altLang="ja-JP" sz="1600" dirty="0"/>
+          </a:p>
+          <a:p>
+            <a:pPr>
+              <a:lnSpc>
+                <a:spcPct val="100000"/>
+              </a:lnSpc>
+              <a:spcAft>
+                <a:spcPts val="0"/>
+              </a:spcAft>
+            </a:pPr>
+            <a:r>
+              <a:rPr lang="ja-JP" altLang="en-US" sz="1200" dirty="0"/>
+              <a:t>① </a:t>
+            </a:r>
+            <a:r>
+              <a:rPr lang="en-US" altLang="ja-JP" sz="1200" dirty="0" err="1"/>
+              <a:t>ReadOnlyAccess</a:t>
+            </a:r>
+            <a:r>
+              <a:rPr lang="en-US" altLang="ja-JP" sz="1200" dirty="0"/>
+              <a:t> </a:t>
+            </a:r>
+            <a:r>
+              <a:rPr lang="ja-JP" altLang="en-US" sz="1200" dirty="0"/>
+              <a:t>＋ </a:t>
+            </a:r>
+            <a:r>
+              <a:rPr lang="en-US" altLang="ja-JP" sz="1200" dirty="0"/>
+              <a:t>IAM </a:t>
+            </a:r>
+            <a:r>
+              <a:rPr lang="ja-JP" altLang="en-US" sz="1200" dirty="0"/>
+              <a:t>制限ポリシー</a:t>
+            </a:r>
+          </a:p>
+          <a:p>
+            <a:pPr>
+              <a:lnSpc>
+                <a:spcPct val="100000"/>
+              </a:lnSpc>
+              <a:spcAft>
+                <a:spcPts val="0"/>
+              </a:spcAft>
+            </a:pPr>
+            <a:r>
+              <a:rPr lang="en-US" altLang="ja-JP" sz="1200" dirty="0"/>
+              <a:t>AWS</a:t>
+            </a:r>
+            <a:r>
+              <a:rPr lang="ja-JP" altLang="en-US" sz="1200" dirty="0"/>
+              <a:t>公式のポリシー評価ロジック</a:t>
+            </a:r>
+          </a:p>
+          <a:p>
+            <a:pPr>
+              <a:lnSpc>
+                <a:spcPct val="100000"/>
+              </a:lnSpc>
+              <a:spcAft>
+                <a:spcPts val="0"/>
+              </a:spcAft>
+            </a:pPr>
+            <a:r>
+              <a:rPr lang="ja-JP" altLang="en-US" sz="1200" dirty="0"/>
+              <a:t>「明示的 </a:t>
+            </a:r>
+            <a:r>
+              <a:rPr lang="en-US" altLang="ja-JP" sz="1200" dirty="0"/>
+              <a:t>Deny </a:t>
+            </a:r>
+            <a:r>
+              <a:rPr lang="ja-JP" altLang="en-US" sz="1200" dirty="0"/>
+              <a:t>＞ </a:t>
+            </a:r>
+            <a:r>
+              <a:rPr lang="en-US" altLang="ja-JP" sz="1200" dirty="0"/>
+              <a:t>Allow </a:t>
+            </a:r>
+            <a:r>
+              <a:rPr lang="ja-JP" altLang="en-US" sz="1200" dirty="0"/>
+              <a:t>＞ 暗黙的 </a:t>
+            </a:r>
+            <a:r>
+              <a:rPr lang="en-US" altLang="ja-JP" sz="1200" dirty="0"/>
+              <a:t>Deny</a:t>
+            </a:r>
+            <a:r>
+              <a:rPr lang="ja-JP" altLang="en-US" sz="1200" dirty="0"/>
+              <a:t>」</a:t>
+            </a:r>
+          </a:p>
+          <a:p>
+            <a:pPr>
+              <a:lnSpc>
+                <a:spcPct val="100000"/>
+              </a:lnSpc>
+              <a:spcAft>
+                <a:spcPts val="0"/>
+              </a:spcAft>
+            </a:pPr>
+            <a:r>
+              <a:rPr lang="ja-JP" altLang="en-US" sz="1200" dirty="0"/>
+              <a:t>に基づき回答。</a:t>
+            </a:r>
+          </a:p>
+          <a:p>
+            <a:pPr>
+              <a:lnSpc>
+                <a:spcPct val="100000"/>
+              </a:lnSpc>
+              <a:spcAft>
+                <a:spcPts val="0"/>
+              </a:spcAft>
+            </a:pPr>
+            <a:endParaRPr lang="ja-JP" altLang="en-US" sz="1200" dirty="0"/>
+          </a:p>
+          <a:p>
+            <a:pPr>
+              <a:lnSpc>
+                <a:spcPct val="100000"/>
+              </a:lnSpc>
+              <a:spcAft>
+                <a:spcPts val="0"/>
+              </a:spcAft>
+            </a:pPr>
+            <a:r>
+              <a:rPr lang="en-US" altLang="ja-JP" sz="1200" dirty="0" err="1"/>
+              <a:t>ReadOnlyAccess</a:t>
+            </a:r>
+            <a:r>
+              <a:rPr lang="en-US" altLang="ja-JP" sz="1200" dirty="0"/>
+              <a:t> </a:t>
+            </a:r>
+            <a:r>
+              <a:rPr lang="ja-JP" altLang="en-US" sz="1200" dirty="0"/>
+              <a:t>と </a:t>
+            </a:r>
+            <a:r>
+              <a:rPr lang="en-US" altLang="ja-JP" sz="1200" dirty="0"/>
+              <a:t>IAM </a:t>
+            </a:r>
+            <a:r>
+              <a:rPr lang="ja-JP" altLang="en-US" sz="1200" dirty="0"/>
+              <a:t>制限ポリシーでは</a:t>
+            </a:r>
+          </a:p>
+          <a:p>
+            <a:pPr>
+              <a:lnSpc>
+                <a:spcPct val="100000"/>
+              </a:lnSpc>
+              <a:spcAft>
+                <a:spcPts val="0"/>
+              </a:spcAft>
+            </a:pPr>
+            <a:r>
+              <a:rPr lang="en-US" altLang="ja-JP" sz="1200" dirty="0"/>
+              <a:t>S3 </a:t>
+            </a:r>
+            <a:r>
+              <a:rPr lang="ja-JP" altLang="en-US" sz="1200" dirty="0"/>
+              <a:t>アップロードは暗黙的 </a:t>
+            </a:r>
+            <a:r>
+              <a:rPr lang="en-US" altLang="ja-JP" sz="1200" dirty="0"/>
+              <a:t>Deny → </a:t>
+            </a:r>
+            <a:r>
+              <a:rPr lang="ja-JP" altLang="en-US" sz="1200" dirty="0"/>
+              <a:t>アップロード不可</a:t>
+            </a:r>
+          </a:p>
+          <a:p>
+            <a:pPr>
+              <a:lnSpc>
+                <a:spcPct val="100000"/>
+              </a:lnSpc>
+              <a:spcAft>
+                <a:spcPts val="0"/>
+              </a:spcAft>
+            </a:pPr>
+            <a:r>
+              <a:rPr lang="ja-JP" altLang="en-US" sz="1200" dirty="0"/>
+              <a:t>お客様の認識は正しいと確認</a:t>
+            </a:r>
+          </a:p>
+          <a:p>
+            <a:pPr>
+              <a:lnSpc>
+                <a:spcPct val="100000"/>
+              </a:lnSpc>
+              <a:spcAft>
+                <a:spcPts val="0"/>
+              </a:spcAft>
+            </a:pPr>
+            <a:endParaRPr lang="en-US" altLang="ja-JP" sz="1200" dirty="0"/>
+          </a:p>
+          <a:p>
+            <a:pPr>
+              <a:lnSpc>
+                <a:spcPct val="100000"/>
+              </a:lnSpc>
+              <a:spcAft>
+                <a:spcPts val="0"/>
+              </a:spcAft>
+            </a:pPr>
+            <a:r>
+              <a:rPr lang="ja-JP" altLang="en-US" sz="1200" dirty="0"/>
+              <a:t>② </a:t>
+            </a:r>
+            <a:r>
+              <a:rPr lang="en-US" altLang="ja-JP" sz="1200" dirty="0" err="1"/>
+              <a:t>AdministratorAccess</a:t>
+            </a:r>
+            <a:r>
+              <a:rPr lang="en-US" altLang="ja-JP" sz="1200" dirty="0"/>
+              <a:t> </a:t>
+            </a:r>
+            <a:r>
+              <a:rPr lang="ja-JP" altLang="en-US" sz="1200" dirty="0"/>
+              <a:t>＋ </a:t>
+            </a:r>
+            <a:r>
+              <a:rPr lang="en-US" altLang="ja-JP" sz="1200" dirty="0"/>
+              <a:t>S3ReadOnlyAccess</a:t>
+            </a:r>
+          </a:p>
+          <a:p>
+            <a:pPr>
+              <a:lnSpc>
+                <a:spcPct val="100000"/>
+              </a:lnSpc>
+              <a:spcAft>
+                <a:spcPts val="0"/>
+              </a:spcAft>
+            </a:pPr>
+            <a:r>
+              <a:rPr lang="en-US" altLang="ja-JP" sz="1200" dirty="0" err="1"/>
+              <a:t>AdministratorAccess</a:t>
+            </a:r>
+            <a:r>
+              <a:rPr lang="en-US" altLang="ja-JP" sz="1200" dirty="0"/>
+              <a:t> </a:t>
+            </a:r>
+            <a:r>
+              <a:rPr lang="ja-JP" altLang="en-US" sz="1200" dirty="0"/>
+              <a:t>に 明示的 </a:t>
+            </a:r>
+            <a:r>
+              <a:rPr lang="en-US" altLang="ja-JP" sz="1200" dirty="0"/>
+              <a:t>Deny </a:t>
+            </a:r>
+            <a:r>
+              <a:rPr lang="ja-JP" altLang="en-US" sz="1200" dirty="0"/>
+              <a:t>が無い場合、アップロードは許可される</a:t>
+            </a:r>
+          </a:p>
+          <a:p>
+            <a:pPr>
+              <a:lnSpc>
+                <a:spcPct val="100000"/>
+              </a:lnSpc>
+              <a:spcAft>
+                <a:spcPts val="0"/>
+              </a:spcAft>
+            </a:pPr>
+            <a:r>
+              <a:rPr lang="en-US" altLang="ja-JP" sz="1200" dirty="0"/>
+              <a:t>S3ReadOnlyAccess </a:t>
+            </a:r>
+            <a:r>
+              <a:rPr lang="ja-JP" altLang="en-US" sz="1200" dirty="0"/>
+              <a:t>は「追加の許可を増やす」だけで</a:t>
+            </a:r>
+          </a:p>
+          <a:p>
+            <a:pPr>
+              <a:lnSpc>
+                <a:spcPct val="100000"/>
+              </a:lnSpc>
+              <a:spcAft>
+                <a:spcPts val="0"/>
+              </a:spcAft>
+            </a:pPr>
+            <a:r>
+              <a:rPr lang="en-US" altLang="ja-JP" sz="1200" dirty="0"/>
+              <a:t>Admin </a:t>
+            </a:r>
+            <a:r>
+              <a:rPr lang="ja-JP" altLang="en-US" sz="1200" dirty="0"/>
+              <a:t>の権限を制限するものではない</a:t>
+            </a:r>
+          </a:p>
+          <a:p>
+            <a:pPr>
+              <a:lnSpc>
+                <a:spcPct val="100000"/>
+              </a:lnSpc>
+              <a:spcAft>
+                <a:spcPts val="0"/>
+              </a:spcAft>
+            </a:pPr>
+            <a:endParaRPr lang="en-US" altLang="ja-JP" sz="1200" dirty="0"/>
+          </a:p>
+          <a:p>
+            <a:pPr>
+              <a:lnSpc>
+                <a:spcPct val="100000"/>
+              </a:lnSpc>
+              <a:spcAft>
+                <a:spcPts val="0"/>
+              </a:spcAft>
+            </a:pPr>
+            <a:r>
+              <a:rPr lang="ja-JP" altLang="en-US" sz="1200" dirty="0"/>
+              <a:t>③ </a:t>
+            </a:r>
+            <a:r>
+              <a:rPr lang="en-US" altLang="ja-JP" sz="1200" dirty="0"/>
+              <a:t>S3 </a:t>
+            </a:r>
+            <a:r>
+              <a:rPr lang="ja-JP" altLang="en-US" sz="1200" dirty="0"/>
+              <a:t>アップロード禁止を確実に行う方法</a:t>
+            </a:r>
+          </a:p>
+          <a:p>
+            <a:pPr>
+              <a:lnSpc>
+                <a:spcPct val="100000"/>
+              </a:lnSpc>
+              <a:spcAft>
+                <a:spcPts val="0"/>
+              </a:spcAft>
+            </a:pPr>
+            <a:r>
+              <a:rPr lang="ja-JP" altLang="en-US" sz="1200" dirty="0"/>
+              <a:t>推奨構成：</a:t>
+            </a:r>
+          </a:p>
+          <a:p>
+            <a:pPr>
+              <a:lnSpc>
+                <a:spcPct val="100000"/>
+              </a:lnSpc>
+              <a:spcAft>
+                <a:spcPts val="0"/>
+              </a:spcAft>
+            </a:pPr>
+            <a:endParaRPr lang="ja-JP" altLang="en-US" sz="1200" dirty="0"/>
+          </a:p>
+          <a:p>
+            <a:pPr>
+              <a:lnSpc>
+                <a:spcPct val="100000"/>
+              </a:lnSpc>
+              <a:spcAft>
+                <a:spcPts val="0"/>
+              </a:spcAft>
+            </a:pPr>
+            <a:r>
+              <a:rPr lang="en-US" altLang="ja-JP" sz="1200" dirty="0" err="1"/>
+              <a:t>AdministratorAccess</a:t>
+            </a:r>
+            <a:r>
+              <a:rPr lang="en-US" altLang="ja-JP" sz="1200" dirty="0"/>
+              <a:t> </a:t>
+            </a:r>
+            <a:r>
+              <a:rPr lang="ja-JP" altLang="en-US" sz="1200" dirty="0"/>
+              <a:t>または </a:t>
+            </a:r>
+            <a:r>
+              <a:rPr lang="en-US" altLang="ja-JP" sz="1200" dirty="0" err="1"/>
+              <a:t>PowerUserAccess</a:t>
+            </a:r>
+            <a:endParaRPr lang="en-US" altLang="ja-JP" sz="1200" dirty="0"/>
+          </a:p>
+          <a:p>
+            <a:pPr>
+              <a:lnSpc>
+                <a:spcPct val="100000"/>
+              </a:lnSpc>
+              <a:spcAft>
+                <a:spcPts val="0"/>
+              </a:spcAft>
+            </a:pPr>
+            <a:r>
+              <a:rPr lang="ja-JP" altLang="en-US" sz="1200" dirty="0"/>
+              <a:t>＋ アップロード操作（</a:t>
+            </a:r>
+            <a:r>
+              <a:rPr lang="en-US" altLang="ja-JP" sz="1200" dirty="0"/>
+              <a:t>s3:PutObject </a:t>
+            </a:r>
+            <a:r>
+              <a:rPr lang="ja-JP" altLang="en-US" sz="1200" dirty="0"/>
+              <a:t>など）を 明示的 </a:t>
+            </a:r>
+            <a:r>
+              <a:rPr lang="en-US" altLang="ja-JP" sz="1200" dirty="0"/>
+              <a:t>Deny </a:t>
+            </a:r>
+            <a:r>
+              <a:rPr lang="ja-JP" altLang="en-US" sz="1200" dirty="0"/>
+              <a:t>するカスタムポリシー</a:t>
+            </a:r>
+          </a:p>
+          <a:p>
+            <a:pPr>
+              <a:lnSpc>
+                <a:spcPct val="100000"/>
+              </a:lnSpc>
+              <a:spcAft>
+                <a:spcPts val="0"/>
+              </a:spcAft>
+            </a:pPr>
+            <a:r>
+              <a:rPr lang="ja-JP" altLang="en-US" sz="1200" dirty="0"/>
+              <a:t>→ 明示的 </a:t>
+            </a:r>
+            <a:r>
+              <a:rPr lang="en-US" altLang="ja-JP" sz="1200" dirty="0"/>
+              <a:t>Deny </a:t>
+            </a:r>
+            <a:r>
+              <a:rPr lang="ja-JP" altLang="en-US" sz="1200" dirty="0"/>
+              <a:t>が最優先で評価されるため、アップロード禁止が確実。</a:t>
+            </a:r>
+          </a:p>
+          <a:p>
+            <a:pPr>
+              <a:lnSpc>
+                <a:spcPct val="100000"/>
+              </a:lnSpc>
+              <a:spcAft>
+                <a:spcPts val="0"/>
+              </a:spcAft>
+            </a:pPr>
+            <a:endParaRPr lang="ja-JP" altLang="en-US" sz="1600" dirty="0"/>
           </a:p>
         </p:txBody>
       </p:sp>
       <p:sp>
         <p:nvSpPr>
-          <p:cNvPr id="43" name="テキスト ボックス 13">
+          <p:cNvPr id="20" name="コンテンツ プレースホルダー 10">
             <a:extLst>
               <a:ext uri="{FF2B5EF4-FFF2-40B4-BE49-F238E27FC236}">
-                <a16:creationId xmlns:a16="http://schemas.microsoft.com/office/drawing/2014/main" id="{A4D2A253-9BD9-74B9-ADB9-8B3925231FA8}"/>
+                <a16:creationId xmlns:a16="http://schemas.microsoft.com/office/drawing/2014/main" id="{44F025D2-B710-5A2A-2006-C6236A2E66A9}"/>
               </a:ext>
             </a:extLst>
           </p:cNvPr>
-          <p:cNvSpPr txBox="1"/>
+          <p:cNvSpPr txBox="1">
+            <a:spLocks/>
+          </p:cNvSpPr>
           <p:nvPr/>
         </p:nvSpPr>
         <p:spPr>
           <a:xfrm>
-            <a:off x="5399583" y="5426771"/>
-            <a:ext cx="2017524" cy="338554"/>
+            <a:off x="6024285" y="810867"/>
+            <a:ext cx="6110264" cy="1125509"/>
           </a:xfrm>
           <a:prstGeom prst="rect">
             <a:avLst/>
           </a:prstGeom>
-          <a:noFill/>
-          <a:ln>
-            <a:noFill/>
-          </a:ln>
         </p:spPr>
         <p:txBody>
-          <a:bodyPr wrap="square" lIns="91440" tIns="45720" rIns="91440" bIns="45720" anchor="t">
-            <a:spAutoFit/>
+          <a:bodyPr vert="horz" lIns="0" tIns="0" rIns="0" bIns="0" rtlCol="0">
+            <a:noAutofit/>
           </a:bodyPr>
           <a:lstStyle>
-            <a:defPPr>
-              <a:defRPr lang="ja-JP"/>
-            </a:defPPr>
-            <a:lvl1pPr marL="0" algn="l" defTabSz="914400" rtl="0" eaLnBrk="1" latinLnBrk="0" hangingPunct="1">
-              <a:defRPr kumimoji="1" sz="1800" kern="1200">
-                <a:solidFill>
-                  <a:schemeClr val="tx1"/>
-                </a:solidFill>
-                <a:latin typeface="+mn-lt"/>
+            <a:lvl1pPr marL="0" indent="0" algn="l" defTabSz="914400" rtl="0" eaLnBrk="1" latinLnBrk="0" hangingPunct="1">
+              <a:lnSpc>
+                <a:spcPts val="3200"/>
+              </a:lnSpc>
+              <a:spcBef>
+                <a:spcPts val="0"/>
+              </a:spcBef>
+              <a:spcAft>
+                <a:spcPts val="800"/>
+              </a:spcAft>
+              <a:buFont typeface="Arial" panose="020B0604020202020204" pitchFamily="34" charset="0"/>
+              <a:buNone/>
+              <a:defRPr kumimoji="1" sz="3200" b="1" kern="1200">
+                <a:solidFill>
+                  <a:schemeClr val="tx1"/>
+                </a:solidFill>
+                <a:latin typeface="+mn-ea"/>
                 <a:ea typeface="+mn-ea"/>
                 <a:cs typeface="+mn-cs"/>
               </a:defRPr>
             </a:lvl1pPr>
-            <a:lvl2pPr marL="457200" algn="l" defTabSz="914400" rtl="0" eaLnBrk="1" latinLnBrk="0" hangingPunct="1">
-              <a:defRPr kumimoji="1" sz="1800" kern="1200">
-                <a:solidFill>
-                  <a:schemeClr val="tx1"/>
-                </a:solidFill>
-                <a:latin typeface="+mn-lt"/>
+            <a:lvl2pPr marL="685800" indent="-228600" algn="l" defTabSz="914400" rtl="0" eaLnBrk="1" latinLnBrk="0" hangingPunct="1">
+              <a:lnSpc>
+                <a:spcPts val="2800"/>
+              </a:lnSpc>
+              <a:spcBef>
+                <a:spcPts val="0"/>
+              </a:spcBef>
+              <a:spcAft>
+                <a:spcPts val="0"/>
+              </a:spcAft>
+              <a:buFont typeface="Arial" panose="020B0604020202020204" pitchFamily="34" charset="0"/>
+              <a:buChar char="•"/>
+              <a:defRPr kumimoji="1" sz="2000" b="1" kern="1200">
+                <a:solidFill>
+                  <a:schemeClr val="tx1"/>
+                </a:solidFill>
+                <a:latin typeface="+mn-ea"/>
                 <a:ea typeface="+mn-ea"/>
                 <a:cs typeface="+mn-cs"/>
               </a:defRPr>
             </a:lvl2pPr>
-            <a:lvl3pPr marL="914400" algn="l" defTabSz="914400" rtl="0" eaLnBrk="1" latinLnBrk="0" hangingPunct="1">
-              <a:defRPr kumimoji="1" sz="1800" kern="1200">
-                <a:solidFill>
-                  <a:schemeClr val="tx1"/>
-                </a:solidFill>
-                <a:latin typeface="+mn-lt"/>
+            <a:lvl3pPr marL="1143000" indent="-228600" algn="l" defTabSz="914400" rtl="0" eaLnBrk="1" latinLnBrk="0" hangingPunct="1">
+              <a:lnSpc>
+                <a:spcPts val="2400"/>
+              </a:lnSpc>
+              <a:spcBef>
+                <a:spcPts val="0"/>
+              </a:spcBef>
+              <a:spcAft>
+                <a:spcPts val="0"/>
+              </a:spcAft>
+              <a:buFont typeface="Arial" panose="020B0604020202020204" pitchFamily="34" charset="0"/>
+              <a:buChar char="•"/>
+              <a:defRPr kumimoji="1" sz="1800" kern="1200">
+                <a:solidFill>
+                  <a:schemeClr val="tx1"/>
+                </a:solidFill>
+                <a:latin typeface="+mn-ea"/>
                 <a:ea typeface="+mn-ea"/>
                 <a:cs typeface="+mn-cs"/>
               </a:defRPr>
             </a:lvl3pPr>
-            <a:lvl4pPr marL="1371600" algn="l" defTabSz="914400" rtl="0" eaLnBrk="1" latinLnBrk="0" hangingPunct="1">
-              <a:defRPr kumimoji="1" sz="1800" kern="1200">
-                <a:solidFill>
-                  <a:schemeClr val="tx1"/>
-                </a:solidFill>
-                <a:latin typeface="+mn-lt"/>
+            <a:lvl4pPr marL="1600200" indent="-228600" algn="l" defTabSz="914400" rtl="0" eaLnBrk="1" latinLnBrk="0" hangingPunct="1">
+              <a:lnSpc>
+                <a:spcPts val="2400"/>
+              </a:lnSpc>
+              <a:spcBef>
+                <a:spcPts val="0"/>
+              </a:spcBef>
+              <a:buFont typeface="Arial" panose="020B0604020202020204" pitchFamily="34" charset="0"/>
+              <a:buChar char="•"/>
+              <a:defRPr kumimoji="1" sz="1600" kern="1200">
+                <a:solidFill>
+                  <a:schemeClr val="tx1"/>
+                </a:solidFill>
+                <a:latin typeface="+mn-ea"/>
                 <a:ea typeface="+mn-ea"/>
                 <a:cs typeface="+mn-cs"/>
               </a:defRPr>
             </a:lvl4pPr>
-            <a:lvl5pPr marL="1828800" algn="l" defTabSz="914400" rtl="0" eaLnBrk="1" latinLnBrk="0" hangingPunct="1">
-              <a:defRPr kumimoji="1" sz="1800" kern="1200">
-                <a:solidFill>
-                  <a:schemeClr val="tx1"/>
-                </a:solidFill>
-                <a:latin typeface="+mn-lt"/>
+            <a:lvl5pPr marL="2057400" indent="-228600" algn="l" defTabSz="914400" rtl="0" eaLnBrk="1" latinLnBrk="0" hangingPunct="1">
+              <a:lnSpc>
+                <a:spcPts val="2000"/>
+              </a:lnSpc>
+              <a:spcBef>
+                <a:spcPts val="0"/>
+              </a:spcBef>
+              <a:buFont typeface="Arial" panose="020B0604020202020204" pitchFamily="34" charset="0"/>
+              <a:buChar char="•"/>
+              <a:defRPr kumimoji="1" sz="1400" kern="1200">
+                <a:solidFill>
+                  <a:schemeClr val="tx1"/>
+                </a:solidFill>
+                <a:latin typeface="+mn-ea"/>
                 <a:ea typeface="+mn-ea"/>
                 <a:cs typeface="+mn-cs"/>
               </a:defRPr>
             </a:lvl5pPr>
-            <a:lvl6pPr marL="2286000" algn="l" defTabSz="914400" rtl="0" eaLnBrk="1" latinLnBrk="0" hangingPunct="1">
+            <a:lvl6pPr marL="2514600" indent="-228600" algn="l" defTabSz="914400" rtl="0" eaLnBrk="1" latinLnBrk="0" hangingPunct="1">
+              <a:lnSpc>
+                <a:spcPct val="90000"/>
+              </a:lnSpc>
+              <a:spcBef>
+                <a:spcPts val="500"/>
+              </a:spcBef>
+              <a:buFont typeface="Arial" panose="020B0604020202020204" pitchFamily="34" charset="0"/>
+              <a:buChar char="•"/>
               <a:defRPr kumimoji="1" sz="1800" kern="1200">
                 <a:solidFill>
                   <a:schemeClr val="tx1"/>
@@ -13027,7 +8465,15 @@
                 <a:cs typeface="+mn-cs"/>
               </a:defRPr>
             </a:lvl6pPr>
-            <a:lvl7pPr marL="2743200" algn="l" defTabSz="914400" rtl="0" eaLnBrk="1" latinLnBrk="0" hangingPunct="1">
+            <a:lvl7pPr marL="2971800" indent="-228600" algn="l" defTabSz="914400" rtl="0" eaLnBrk="1" latinLnBrk="0" hangingPunct="1">
+              <a:lnSpc>
+                <a:spcPct val="90000"/>
+              </a:lnSpc>
+              <a:spcBef>
+                <a:spcPts val="500"/>
+              </a:spcBef>
+              <a:buFont typeface="Arial" panose="020B0604020202020204" pitchFamily="34" charset="0"/>
+              <a:buChar char="•"/>
               <a:defRPr kumimoji="1" sz="1800" kern="1200">
                 <a:solidFill>
                   <a:schemeClr val="tx1"/>
@@ -13037,7 +8483,15 @@
                 <a:cs typeface="+mn-cs"/>
               </a:defRPr>
             </a:lvl7pPr>
-            <a:lvl8pPr marL="3200400" algn="l" defTabSz="914400" rtl="0" eaLnBrk="1" latinLnBrk="0" hangingPunct="1">
+            <a:lvl8pPr marL="3429000" indent="-228600" algn="l" defTabSz="914400" rtl="0" eaLnBrk="1" latinLnBrk="0" hangingPunct="1">
+              <a:lnSpc>
+                <a:spcPct val="90000"/>
+              </a:lnSpc>
+              <a:spcBef>
+                <a:spcPts val="500"/>
+              </a:spcBef>
+              <a:buFont typeface="Arial" panose="020B0604020202020204" pitchFamily="34" charset="0"/>
+              <a:buChar char="•"/>
               <a:defRPr kumimoji="1" sz="1800" kern="1200">
                 <a:solidFill>
                   <a:schemeClr val="tx1"/>
@@ -13047,7 +8501,15 @@
                 <a:cs typeface="+mn-cs"/>
               </a:defRPr>
             </a:lvl8pPr>
-            <a:lvl9pPr marL="3657600" algn="l" defTabSz="914400" rtl="0" eaLnBrk="1" latinLnBrk="0" hangingPunct="1">
+            <a:lvl9pPr marL="3886200" indent="-228600" algn="l" defTabSz="914400" rtl="0" eaLnBrk="1" latinLnBrk="0" hangingPunct="1">
+              <a:lnSpc>
+                <a:spcPct val="90000"/>
+              </a:lnSpc>
+              <a:spcBef>
+                <a:spcPts val="500"/>
+              </a:spcBef>
+              <a:buFont typeface="Arial" panose="020B0604020202020204" pitchFamily="34" charset="0"/>
+              <a:buChar char="•"/>
               <a:defRPr kumimoji="1" sz="1800" kern="1200">
                 <a:solidFill>
                   <a:schemeClr val="tx1"/>
@@ -13059,109 +8521,199 @@
             </a:lvl9pPr>
           </a:lstStyle>
           <a:p>
-            <a:r>
-              <a:rPr lang="ja-JP" sz="1600" b="1">
-                <a:solidFill>
-                  <a:srgbClr val="000000"/>
-                </a:solidFill>
-                <a:ea typeface="+mn-lt"/>
-                <a:cs typeface="+mn-lt"/>
-              </a:rPr>
-              <a:t>成果</a:t>
-            </a:r>
-            <a:endParaRPr lang="en-US" altLang="ja-JP" sz="1600" b="1">
-              <a:solidFill>
-                <a:srgbClr val="000000"/>
-              </a:solidFill>
-              <a:ea typeface="游ゴシック"/>
-            </a:endParaRPr>
+            <a:pPr>
+              <a:lnSpc>
+                <a:spcPct val="100000"/>
+              </a:lnSpc>
+              <a:spcAft>
+                <a:spcPts val="0"/>
+              </a:spcAft>
+            </a:pPr>
+            <a:r>
+              <a:rPr lang="ja-JP" altLang="en-US" sz="1600" dirty="0"/>
+              <a:t>■最終結論（お客様側）</a:t>
+            </a:r>
+            <a:endParaRPr lang="en-US" altLang="ja-JP" sz="1600" dirty="0"/>
+          </a:p>
+          <a:p>
+            <a:pPr>
+              <a:lnSpc>
+                <a:spcPct val="100000"/>
+              </a:lnSpc>
+              <a:spcAft>
+                <a:spcPts val="0"/>
+              </a:spcAft>
+            </a:pPr>
+            <a:endParaRPr lang="ja-JP" altLang="en-US" sz="1600" dirty="0"/>
+          </a:p>
+          <a:p>
+            <a:pPr>
+              <a:lnSpc>
+                <a:spcPct val="100000"/>
+              </a:lnSpc>
+              <a:spcAft>
+                <a:spcPts val="0"/>
+              </a:spcAft>
+            </a:pPr>
+            <a:r>
+              <a:rPr lang="ja-JP" altLang="en-US" sz="1200" dirty="0"/>
+              <a:t>「</a:t>
+            </a:r>
+            <a:r>
+              <a:rPr lang="en-US" altLang="ja-JP" sz="1200" dirty="0" err="1"/>
+              <a:t>PowerUserAccess</a:t>
+            </a:r>
+            <a:r>
+              <a:rPr lang="ja-JP" altLang="en-US" sz="1200" dirty="0"/>
+              <a:t>＋</a:t>
+            </a:r>
+            <a:r>
+              <a:rPr lang="en-US" altLang="ja-JP" sz="1200" dirty="0"/>
+              <a:t>S3</a:t>
+            </a:r>
+            <a:r>
+              <a:rPr lang="ja-JP" altLang="en-US" sz="1200" dirty="0"/>
+              <a:t>アップロード禁止のカスタムポリシー」で対応する方針とするとのことで問い合わせクローズ。</a:t>
+            </a:r>
           </a:p>
         </p:txBody>
       </p:sp>
       <p:sp>
         <p:nvSpPr>
-          <p:cNvPr id="48" name="テキスト ボックス 13">
+          <p:cNvPr id="56" name="コンテンツ プレースホルダー 10">
             <a:extLst>
               <a:ext uri="{FF2B5EF4-FFF2-40B4-BE49-F238E27FC236}">
-                <a16:creationId xmlns:a16="http://schemas.microsoft.com/office/drawing/2014/main" id="{7B50D39F-238F-68E1-23E2-46D6A7A52A34}"/>
+                <a16:creationId xmlns:a16="http://schemas.microsoft.com/office/drawing/2014/main" id="{F1750309-F865-9E21-4A06-8CFA2603653D}"/>
               </a:ext>
             </a:extLst>
           </p:cNvPr>
-          <p:cNvSpPr txBox="1"/>
+          <p:cNvSpPr txBox="1">
+            <a:spLocks/>
+          </p:cNvSpPr>
           <p:nvPr/>
         </p:nvSpPr>
         <p:spPr>
           <a:xfrm>
-            <a:off x="6795069" y="1374112"/>
-            <a:ext cx="5173478" cy="461665"/>
+            <a:off x="6024285" y="2115548"/>
+            <a:ext cx="5760642" cy="4279023"/>
           </a:xfrm>
           <a:prstGeom prst="rect">
             <a:avLst/>
           </a:prstGeom>
-          <a:noFill/>
-          <a:ln>
-            <a:noFill/>
-          </a:ln>
         </p:spPr>
         <p:txBody>
-          <a:bodyPr wrap="square" lIns="91440" tIns="45720" rIns="91440" bIns="45720" anchor="t">
-            <a:spAutoFit/>
+          <a:bodyPr vert="horz" lIns="0" tIns="0" rIns="0" bIns="0" rtlCol="0">
+            <a:noAutofit/>
           </a:bodyPr>
           <a:lstStyle>
-            <a:defPPr>
-              <a:defRPr lang="ja-JP"/>
-            </a:defPPr>
-            <a:lvl1pPr marL="0" algn="l" defTabSz="914400" rtl="0" eaLnBrk="1" latinLnBrk="0" hangingPunct="1">
-              <a:defRPr kumimoji="1" sz="1800" kern="1200">
-                <a:solidFill>
-                  <a:schemeClr val="tx1"/>
-                </a:solidFill>
-                <a:latin typeface="+mn-lt"/>
+            <a:lvl1pPr marL="0" indent="0" algn="l" defTabSz="914400" rtl="0" eaLnBrk="1" latinLnBrk="0" hangingPunct="1">
+              <a:lnSpc>
+                <a:spcPts val="3200"/>
+              </a:lnSpc>
+              <a:spcBef>
+                <a:spcPts val="0"/>
+              </a:spcBef>
+              <a:spcAft>
+                <a:spcPts val="800"/>
+              </a:spcAft>
+              <a:buFont typeface="Arial" panose="020B0604020202020204" pitchFamily="34" charset="0"/>
+              <a:buNone/>
+              <a:defRPr kumimoji="1" sz="3200" b="1" kern="1200">
+                <a:solidFill>
+                  <a:schemeClr val="tx1"/>
+                </a:solidFill>
+                <a:latin typeface="+mn-ea"/>
                 <a:ea typeface="+mn-ea"/>
                 <a:cs typeface="+mn-cs"/>
               </a:defRPr>
             </a:lvl1pPr>
-            <a:lvl2pPr marL="457200" algn="l" defTabSz="914400" rtl="0" eaLnBrk="1" latinLnBrk="0" hangingPunct="1">
-              <a:defRPr kumimoji="1" sz="1800" kern="1200">
-                <a:solidFill>
-                  <a:schemeClr val="tx1"/>
-                </a:solidFill>
-                <a:latin typeface="+mn-lt"/>
+            <a:lvl2pPr marL="685800" indent="-228600" algn="l" defTabSz="914400" rtl="0" eaLnBrk="1" latinLnBrk="0" hangingPunct="1">
+              <a:lnSpc>
+                <a:spcPts val="2800"/>
+              </a:lnSpc>
+              <a:spcBef>
+                <a:spcPts val="0"/>
+              </a:spcBef>
+              <a:spcAft>
+                <a:spcPts val="0"/>
+              </a:spcAft>
+              <a:buFont typeface="Arial" panose="020B0604020202020204" pitchFamily="34" charset="0"/>
+              <a:buChar char="•"/>
+              <a:defRPr kumimoji="1" sz="2000" b="1" kern="1200">
+                <a:solidFill>
+                  <a:schemeClr val="tx1"/>
+                </a:solidFill>
+                <a:latin typeface="+mn-ea"/>
                 <a:ea typeface="+mn-ea"/>
                 <a:cs typeface="+mn-cs"/>
               </a:defRPr>
             </a:lvl2pPr>
-            <a:lvl3pPr marL="914400" algn="l" defTabSz="914400" rtl="0" eaLnBrk="1" latinLnBrk="0" hangingPunct="1">
-              <a:defRPr kumimoji="1" sz="1800" kern="1200">
-                <a:solidFill>
-                  <a:schemeClr val="tx1"/>
-                </a:solidFill>
-                <a:latin typeface="+mn-lt"/>
+            <a:lvl3pPr marL="1143000" indent="-228600" algn="l" defTabSz="914400" rtl="0" eaLnBrk="1" latinLnBrk="0" hangingPunct="1">
+              <a:lnSpc>
+                <a:spcPts val="2400"/>
+              </a:lnSpc>
+              <a:spcBef>
+                <a:spcPts val="0"/>
+              </a:spcBef>
+              <a:spcAft>
+                <a:spcPts val="0"/>
+              </a:spcAft>
+              <a:buFont typeface="Arial" panose="020B0604020202020204" pitchFamily="34" charset="0"/>
+              <a:buChar char="•"/>
+              <a:defRPr kumimoji="1" sz="1800" kern="1200">
+                <a:solidFill>
+                  <a:schemeClr val="tx1"/>
+                </a:solidFill>
+                <a:latin typeface="+mn-ea"/>
                 <a:ea typeface="+mn-ea"/>
                 <a:cs typeface="+mn-cs"/>
               </a:defRPr>
             </a:lvl3pPr>
-            <a:lvl4pPr marL="1371600" algn="l" defTabSz="914400" rtl="0" eaLnBrk="1" latinLnBrk="0" hangingPunct="1">
-              <a:defRPr kumimoji="1" sz="1800" kern="1200">
-                <a:solidFill>
-                  <a:schemeClr val="tx1"/>
-                </a:solidFill>
-                <a:latin typeface="+mn-lt"/>
+            <a:lvl4pPr marL="1600200" indent="-228600" algn="l" defTabSz="914400" rtl="0" eaLnBrk="1" latinLnBrk="0" hangingPunct="1">
+              <a:lnSpc>
+                <a:spcPts val="2400"/>
+              </a:lnSpc>
+              <a:spcBef>
+                <a:spcPts val="0"/>
+              </a:spcBef>
+              <a:buFont typeface="Arial" panose="020B0604020202020204" pitchFamily="34" charset="0"/>
+              <a:buChar char="•"/>
+              <a:defRPr kumimoji="1" sz="1600" kern="1200">
+                <a:solidFill>
+                  <a:schemeClr val="tx1"/>
+                </a:solidFill>
+                <a:latin typeface="+mn-ea"/>
                 <a:ea typeface="+mn-ea"/>
                 <a:cs typeface="+mn-cs"/>
               </a:defRPr>
             </a:lvl4pPr>
-            <a:lvl5pPr marL="1828800" algn="l" defTabSz="914400" rtl="0" eaLnBrk="1" latinLnBrk="0" hangingPunct="1">
-              <a:defRPr kumimoji="1" sz="1800" kern="1200">
-                <a:solidFill>
-                  <a:schemeClr val="tx1"/>
-                </a:solidFill>
-                <a:latin typeface="+mn-lt"/>
+            <a:lvl5pPr marL="2057400" indent="-228600" algn="l" defTabSz="914400" rtl="0" eaLnBrk="1" latinLnBrk="0" hangingPunct="1">
+              <a:lnSpc>
+                <a:spcPts val="2000"/>
+              </a:lnSpc>
+              <a:spcBef>
+                <a:spcPts val="0"/>
+              </a:spcBef>
+              <a:buFont typeface="Arial" panose="020B0604020202020204" pitchFamily="34" charset="0"/>
+              <a:buChar char="•"/>
+              <a:defRPr kumimoji="1" sz="1400" kern="1200">
+                <a:solidFill>
+                  <a:schemeClr val="tx1"/>
+                </a:solidFill>
+                <a:latin typeface="+mn-ea"/>
                 <a:ea typeface="+mn-ea"/>
                 <a:cs typeface="+mn-cs"/>
               </a:defRPr>
             </a:lvl5pPr>
-            <a:lvl6pPr marL="2286000" algn="l" defTabSz="914400" rtl="0" eaLnBrk="1" latinLnBrk="0" hangingPunct="1">
+            <a:lvl6pPr marL="2514600" indent="-228600" algn="l" defTabSz="914400" rtl="0" eaLnBrk="1" latinLnBrk="0" hangingPunct="1">
+              <a:lnSpc>
+                <a:spcPct val="90000"/>
+              </a:lnSpc>
+              <a:spcBef>
+                <a:spcPts val="500"/>
+              </a:spcBef>
+              <a:buFont typeface="Arial" panose="020B0604020202020204" pitchFamily="34" charset="0"/>
+              <a:buChar char="•"/>
               <a:defRPr kumimoji="1" sz="1800" kern="1200">
                 <a:solidFill>
                   <a:schemeClr val="tx1"/>
@@ -13171,7 +8723,15 @@
                 <a:cs typeface="+mn-cs"/>
               </a:defRPr>
             </a:lvl6pPr>
-            <a:lvl7pPr marL="2743200" algn="l" defTabSz="914400" rtl="0" eaLnBrk="1" latinLnBrk="0" hangingPunct="1">
+            <a:lvl7pPr marL="2971800" indent="-228600" algn="l" defTabSz="914400" rtl="0" eaLnBrk="1" latinLnBrk="0" hangingPunct="1">
+              <a:lnSpc>
+                <a:spcPct val="90000"/>
+              </a:lnSpc>
+              <a:spcBef>
+                <a:spcPts val="500"/>
+              </a:spcBef>
+              <a:buFont typeface="Arial" panose="020B0604020202020204" pitchFamily="34" charset="0"/>
+              <a:buChar char="•"/>
               <a:defRPr kumimoji="1" sz="1800" kern="1200">
                 <a:solidFill>
                   <a:schemeClr val="tx1"/>
@@ -13181,7 +8741,15 @@
                 <a:cs typeface="+mn-cs"/>
               </a:defRPr>
             </a:lvl7pPr>
-            <a:lvl8pPr marL="3200400" algn="l" defTabSz="914400" rtl="0" eaLnBrk="1" latinLnBrk="0" hangingPunct="1">
+            <a:lvl8pPr marL="3429000" indent="-228600" algn="l" defTabSz="914400" rtl="0" eaLnBrk="1" latinLnBrk="0" hangingPunct="1">
+              <a:lnSpc>
+                <a:spcPct val="90000"/>
+              </a:lnSpc>
+              <a:spcBef>
+                <a:spcPts val="500"/>
+              </a:spcBef>
+              <a:buFont typeface="Arial" panose="020B0604020202020204" pitchFamily="34" charset="0"/>
+              <a:buChar char="•"/>
               <a:defRPr kumimoji="1" sz="1800" kern="1200">
                 <a:solidFill>
                   <a:schemeClr val="tx1"/>
@@ -13191,7 +8759,15 @@
                 <a:cs typeface="+mn-cs"/>
               </a:defRPr>
             </a:lvl8pPr>
-            <a:lvl9pPr marL="3657600" algn="l" defTabSz="914400" rtl="0" eaLnBrk="1" latinLnBrk="0" hangingPunct="1">
+            <a:lvl9pPr marL="3886200" indent="-228600" algn="l" defTabSz="914400" rtl="0" eaLnBrk="1" latinLnBrk="0" hangingPunct="1">
+              <a:lnSpc>
+                <a:spcPct val="90000"/>
+              </a:lnSpc>
+              <a:spcBef>
+                <a:spcPts val="500"/>
+              </a:spcBef>
+              <a:buFont typeface="Arial" panose="020B0604020202020204" pitchFamily="34" charset="0"/>
+              <a:buChar char="•"/>
               <a:defRPr kumimoji="1" sz="1800" kern="1200">
                 <a:solidFill>
                   <a:schemeClr val="tx1"/>
@@ -13203,1615 +8779,264 @@
             </a:lvl9pPr>
           </a:lstStyle>
           <a:p>
-            <a:r>
-              <a:rPr lang="ja-JP" altLang="en-US" sz="1200">
-                <a:solidFill>
-                  <a:srgbClr val="000000"/>
-                </a:solidFill>
-                <a:ea typeface="+mn-lt"/>
-                <a:cs typeface="+mn-lt"/>
-              </a:rPr>
-              <a:t>金融取引システムの構築 </a:t>
-            </a:r>
-            <a:endParaRPr lang="en-US" altLang="ja-JP" sz="1200" b="1">
-              <a:solidFill>
-                <a:srgbClr val="000000"/>
-              </a:solidFill>
-              <a:ea typeface="+mn-lt"/>
-              <a:cs typeface="+mn-lt"/>
-            </a:endParaRPr>
-          </a:p>
-          <a:p>
-            <a:r>
-              <a:rPr lang="ja-JP" altLang="en-US" sz="1200">
-                <a:solidFill>
-                  <a:srgbClr val="000000"/>
-                </a:solidFill>
-                <a:ea typeface="+mn-lt"/>
-                <a:cs typeface="+mn-lt"/>
-              </a:rPr>
-              <a:t>～高可用性と拡張性を備えた</a:t>
-            </a:r>
-            <a:r>
-              <a:rPr lang="en-US" altLang="ja-JP" sz="1200">
-                <a:solidFill>
-                  <a:srgbClr val="000000"/>
-                </a:solidFill>
-                <a:ea typeface="+mn-lt"/>
-                <a:cs typeface="+mn-lt"/>
-              </a:rPr>
-              <a:t>Web</a:t>
-            </a:r>
-            <a:r>
-              <a:rPr lang="ja-JP" altLang="en-US" sz="1200">
-                <a:solidFill>
-                  <a:srgbClr val="000000"/>
-                </a:solidFill>
-                <a:ea typeface="+mn-lt"/>
-                <a:cs typeface="+mn-lt"/>
-              </a:rPr>
-              <a:t>アプリケーション基盤の構築～</a:t>
-            </a:r>
-            <a:endParaRPr lang="en-US" altLang="ja-JP" sz="1200" b="1">
-              <a:solidFill>
-                <a:srgbClr val="000000"/>
-              </a:solidFill>
-              <a:ea typeface="游ゴシック"/>
-            </a:endParaRPr>
+            <a:pPr>
+              <a:lnSpc>
+                <a:spcPct val="100000"/>
+              </a:lnSpc>
+              <a:spcAft>
+                <a:spcPts val="0"/>
+              </a:spcAft>
+            </a:pPr>
+            <a:r>
+              <a:rPr lang="ja-JP" altLang="en-US" sz="1600" dirty="0"/>
+              <a:t>■参考資料（</a:t>
+            </a:r>
+            <a:r>
+              <a:rPr lang="en-US" altLang="ja-JP" sz="1600" dirty="0"/>
+              <a:t>AWS</a:t>
+            </a:r>
+            <a:r>
+              <a:rPr lang="ja-JP" altLang="en-US" sz="1600" dirty="0"/>
+              <a:t>公式ドキュメント）</a:t>
+            </a:r>
+            <a:endParaRPr lang="en-US" altLang="ja-JP" sz="1600" dirty="0"/>
+          </a:p>
+          <a:p>
+            <a:pPr>
+              <a:lnSpc>
+                <a:spcPct val="100000"/>
+              </a:lnSpc>
+              <a:spcAft>
+                <a:spcPts val="0"/>
+              </a:spcAft>
+            </a:pPr>
+            <a:endParaRPr lang="en-US" altLang="ja-JP" sz="1600" dirty="0"/>
+          </a:p>
+          <a:p>
+            <a:pPr>
+              <a:lnSpc>
+                <a:spcPct val="100000"/>
+              </a:lnSpc>
+              <a:spcAft>
+                <a:spcPts val="0"/>
+              </a:spcAft>
+            </a:pPr>
+            <a:r>
+              <a:rPr lang="ja-JP" altLang="en-US" sz="1200" dirty="0"/>
+              <a:t>■ </a:t>
+            </a:r>
+            <a:r>
+              <a:rPr lang="en-US" altLang="ja-JP" sz="1200" dirty="0"/>
+              <a:t>IAM </a:t>
+            </a:r>
+            <a:r>
+              <a:rPr lang="ja-JP" altLang="en-US" sz="1200" dirty="0"/>
+              <a:t>ポリシー関連</a:t>
+            </a:r>
+            <a:endParaRPr lang="en-US" altLang="ja-JP" sz="1200" dirty="0"/>
+          </a:p>
+          <a:p>
+            <a:pPr>
+              <a:lnSpc>
+                <a:spcPct val="100000"/>
+              </a:lnSpc>
+              <a:spcAft>
+                <a:spcPts val="0"/>
+              </a:spcAft>
+            </a:pPr>
+            <a:endParaRPr lang="ja-JP" altLang="en-US" sz="1200" dirty="0"/>
+          </a:p>
+          <a:p>
+            <a:pPr>
+              <a:lnSpc>
+                <a:spcPct val="100000"/>
+              </a:lnSpc>
+              <a:spcAft>
+                <a:spcPts val="0"/>
+              </a:spcAft>
+            </a:pPr>
+            <a:r>
+              <a:rPr lang="en-US" altLang="ja-JP" sz="1200" dirty="0"/>
+              <a:t>[1] </a:t>
+            </a:r>
+            <a:r>
+              <a:rPr lang="ja-JP" altLang="en-US" sz="1200" dirty="0"/>
+              <a:t>ポリシーの評価論理</a:t>
+            </a:r>
+          </a:p>
+          <a:p>
+            <a:pPr>
+              <a:lnSpc>
+                <a:spcPct val="100000"/>
+              </a:lnSpc>
+              <a:spcAft>
+                <a:spcPts val="0"/>
+              </a:spcAft>
+            </a:pPr>
+            <a:r>
+              <a:rPr lang="en-US" altLang="ja-JP" sz="1200" dirty="0"/>
+              <a:t>https://docs.aws.amazon.com/ja_jp/IAM/latest/UserGuide/reference_policies_evaluation-logic.html</a:t>
+            </a:r>
+          </a:p>
+          <a:p>
+            <a:pPr>
+              <a:lnSpc>
+                <a:spcPct val="100000"/>
+              </a:lnSpc>
+              <a:spcAft>
+                <a:spcPts val="0"/>
+              </a:spcAft>
+            </a:pPr>
+            <a:endParaRPr lang="en-US" altLang="ja-JP" sz="1200" dirty="0"/>
+          </a:p>
+          <a:p>
+            <a:pPr>
+              <a:lnSpc>
+                <a:spcPct val="100000"/>
+              </a:lnSpc>
+              <a:spcAft>
+                <a:spcPts val="0"/>
+              </a:spcAft>
+            </a:pPr>
+            <a:r>
+              <a:rPr lang="en-US" altLang="ja-JP" sz="1200" dirty="0"/>
+              <a:t>[2] </a:t>
+            </a:r>
+            <a:r>
+              <a:rPr lang="en-US" altLang="ja-JP" sz="1200" dirty="0" err="1"/>
+              <a:t>PowerUserAccess</a:t>
+            </a:r>
+            <a:endParaRPr lang="en-US" altLang="ja-JP" sz="1200" dirty="0"/>
+          </a:p>
+          <a:p>
+            <a:pPr>
+              <a:lnSpc>
+                <a:spcPct val="100000"/>
+              </a:lnSpc>
+              <a:spcAft>
+                <a:spcPts val="0"/>
+              </a:spcAft>
+            </a:pPr>
+            <a:r>
+              <a:rPr lang="en-US" altLang="ja-JP" sz="1200" dirty="0"/>
+              <a:t>https://docs.aws.amazon.com/ja_jp/aws-managed-policy/latest/reference/PowerUserAccess.html</a:t>
+            </a:r>
+          </a:p>
+          <a:p>
+            <a:pPr>
+              <a:lnSpc>
+                <a:spcPct val="100000"/>
+              </a:lnSpc>
+              <a:spcAft>
+                <a:spcPts val="0"/>
+              </a:spcAft>
+            </a:pPr>
+            <a:endParaRPr lang="en-US" altLang="ja-JP" sz="1200" dirty="0"/>
+          </a:p>
+          <a:p>
+            <a:pPr>
+              <a:lnSpc>
+                <a:spcPct val="100000"/>
+              </a:lnSpc>
+              <a:spcAft>
+                <a:spcPts val="0"/>
+              </a:spcAft>
+            </a:pPr>
+            <a:r>
+              <a:rPr lang="en-US" altLang="ja-JP" sz="1200" dirty="0"/>
+              <a:t>■ S3 / </a:t>
+            </a:r>
+            <a:r>
+              <a:rPr lang="ja-JP" altLang="en-US" sz="1200" dirty="0"/>
+              <a:t>アクセス権限関連</a:t>
+            </a:r>
+            <a:endParaRPr lang="en-US" altLang="ja-JP" sz="1200" dirty="0"/>
+          </a:p>
+          <a:p>
+            <a:pPr>
+              <a:lnSpc>
+                <a:spcPct val="100000"/>
+              </a:lnSpc>
+              <a:spcAft>
+                <a:spcPts val="0"/>
+              </a:spcAft>
+            </a:pPr>
+            <a:endParaRPr lang="ja-JP" altLang="en-US" sz="1200" dirty="0"/>
+          </a:p>
+          <a:p>
+            <a:pPr>
+              <a:lnSpc>
+                <a:spcPct val="100000"/>
+              </a:lnSpc>
+              <a:spcAft>
+                <a:spcPts val="0"/>
+              </a:spcAft>
+            </a:pPr>
+            <a:r>
+              <a:rPr lang="en-US" altLang="ja-JP" sz="1200" dirty="0"/>
+              <a:t>[1] AmazonS3ReadOnlyAccess</a:t>
+            </a:r>
+          </a:p>
+          <a:p>
+            <a:pPr>
+              <a:lnSpc>
+                <a:spcPct val="100000"/>
+              </a:lnSpc>
+              <a:spcAft>
+                <a:spcPts val="0"/>
+              </a:spcAft>
+            </a:pPr>
+            <a:r>
+              <a:rPr lang="en-US" altLang="ja-JP" sz="1200" dirty="0"/>
+              <a:t>https://docs.aws.amazon.com/ja_jp/aws-managed-policy/latest/reference/AmazonS3ReadOnlyAccess.html</a:t>
+            </a:r>
+          </a:p>
+          <a:p>
+            <a:pPr>
+              <a:lnSpc>
+                <a:spcPct val="100000"/>
+              </a:lnSpc>
+              <a:spcAft>
+                <a:spcPts val="0"/>
+              </a:spcAft>
+            </a:pPr>
+            <a:endParaRPr lang="en-US" altLang="ja-JP" sz="1200" dirty="0"/>
+          </a:p>
+          <a:p>
+            <a:pPr>
+              <a:lnSpc>
+                <a:spcPct val="100000"/>
+              </a:lnSpc>
+              <a:spcAft>
+                <a:spcPts val="0"/>
+              </a:spcAft>
+            </a:pPr>
+            <a:r>
+              <a:rPr lang="en-US" altLang="ja-JP" sz="1200" dirty="0"/>
+              <a:t>[2] </a:t>
+            </a:r>
+            <a:r>
+              <a:rPr lang="ja-JP" altLang="en-US" sz="1200" dirty="0"/>
+              <a:t>明示的な拒否と暗黙的な拒否の違い</a:t>
+            </a:r>
+          </a:p>
+          <a:p>
+            <a:pPr>
+              <a:lnSpc>
+                <a:spcPct val="100000"/>
+              </a:lnSpc>
+              <a:spcAft>
+                <a:spcPts val="0"/>
+              </a:spcAft>
+            </a:pPr>
+            <a:r>
+              <a:rPr lang="en-US" altLang="ja-JP" sz="1200" dirty="0"/>
+              <a:t>https://docs.aws.amazon.com/ja_jp/IAM/latest/UserGuide/reference_policies_evaluation-logic_AccessPolicyLanguage_Interplay.html</a:t>
+            </a:r>
+            <a:endParaRPr lang="ja-JP" altLang="en-US" sz="1600" dirty="0"/>
           </a:p>
         </p:txBody>
       </p:sp>
-      <p:sp>
-        <p:nvSpPr>
-          <p:cNvPr id="49" name="テキスト ボックス 13">
-            <a:extLst>
-              <a:ext uri="{FF2B5EF4-FFF2-40B4-BE49-F238E27FC236}">
-                <a16:creationId xmlns:a16="http://schemas.microsoft.com/office/drawing/2014/main" id="{A482A3B0-50D9-890E-DA1A-1054D460C359}"/>
-              </a:ext>
-            </a:extLst>
-          </p:cNvPr>
-          <p:cNvSpPr txBox="1"/>
-          <p:nvPr/>
-        </p:nvSpPr>
-        <p:spPr>
-          <a:xfrm>
-            <a:off x="6795069" y="1853113"/>
-            <a:ext cx="4935822" cy="461665"/>
-          </a:xfrm>
-          <a:prstGeom prst="rect">
-            <a:avLst/>
-          </a:prstGeom>
-          <a:noFill/>
-          <a:ln>
-            <a:noFill/>
-          </a:ln>
-        </p:spPr>
-        <p:txBody>
-          <a:bodyPr wrap="square" lIns="91440" tIns="45720" rIns="91440" bIns="45720" anchor="t">
-            <a:spAutoFit/>
-          </a:bodyPr>
-          <a:lstStyle>
-            <a:defPPr>
-              <a:defRPr lang="ja-JP"/>
-            </a:defPPr>
-            <a:lvl1pPr marL="0" algn="l" defTabSz="914400" rtl="0" eaLnBrk="1" latinLnBrk="0" hangingPunct="1">
-              <a:defRPr kumimoji="1" sz="1800" kern="1200">
-                <a:solidFill>
-                  <a:schemeClr val="tx1"/>
-                </a:solidFill>
-                <a:latin typeface="+mn-lt"/>
-                <a:ea typeface="+mn-ea"/>
-                <a:cs typeface="+mn-cs"/>
-              </a:defRPr>
-            </a:lvl1pPr>
-            <a:lvl2pPr marL="457200" algn="l" defTabSz="914400" rtl="0" eaLnBrk="1" latinLnBrk="0" hangingPunct="1">
-              <a:defRPr kumimoji="1" sz="1800" kern="1200">
-                <a:solidFill>
-                  <a:schemeClr val="tx1"/>
-                </a:solidFill>
-                <a:latin typeface="+mn-lt"/>
-                <a:ea typeface="+mn-ea"/>
-                <a:cs typeface="+mn-cs"/>
-              </a:defRPr>
-            </a:lvl2pPr>
-            <a:lvl3pPr marL="914400" algn="l" defTabSz="914400" rtl="0" eaLnBrk="1" latinLnBrk="0" hangingPunct="1">
-              <a:defRPr kumimoji="1" sz="1800" kern="1200">
-                <a:solidFill>
-                  <a:schemeClr val="tx1"/>
-                </a:solidFill>
-                <a:latin typeface="+mn-lt"/>
-                <a:ea typeface="+mn-ea"/>
-                <a:cs typeface="+mn-cs"/>
-              </a:defRPr>
-            </a:lvl3pPr>
-            <a:lvl4pPr marL="1371600" algn="l" defTabSz="914400" rtl="0" eaLnBrk="1" latinLnBrk="0" hangingPunct="1">
-              <a:defRPr kumimoji="1" sz="1800" kern="1200">
-                <a:solidFill>
-                  <a:schemeClr val="tx1"/>
-                </a:solidFill>
-                <a:latin typeface="+mn-lt"/>
-                <a:ea typeface="+mn-ea"/>
-                <a:cs typeface="+mn-cs"/>
-              </a:defRPr>
-            </a:lvl4pPr>
-            <a:lvl5pPr marL="1828800" algn="l" defTabSz="914400" rtl="0" eaLnBrk="1" latinLnBrk="0" hangingPunct="1">
-              <a:defRPr kumimoji="1" sz="1800" kern="1200">
-                <a:solidFill>
-                  <a:schemeClr val="tx1"/>
-                </a:solidFill>
-                <a:latin typeface="+mn-lt"/>
-                <a:ea typeface="+mn-ea"/>
-                <a:cs typeface="+mn-cs"/>
-              </a:defRPr>
-            </a:lvl5pPr>
-            <a:lvl6pPr marL="2286000" algn="l" defTabSz="914400" rtl="0" eaLnBrk="1" latinLnBrk="0" hangingPunct="1">
-              <a:defRPr kumimoji="1" sz="1800" kern="1200">
-                <a:solidFill>
-                  <a:schemeClr val="tx1"/>
-                </a:solidFill>
-                <a:latin typeface="+mn-lt"/>
-                <a:ea typeface="+mn-ea"/>
-                <a:cs typeface="+mn-cs"/>
-              </a:defRPr>
-            </a:lvl6pPr>
-            <a:lvl7pPr marL="2743200" algn="l" defTabSz="914400" rtl="0" eaLnBrk="1" latinLnBrk="0" hangingPunct="1">
-              <a:defRPr kumimoji="1" sz="1800" kern="1200">
-                <a:solidFill>
-                  <a:schemeClr val="tx1"/>
-                </a:solidFill>
-                <a:latin typeface="+mn-lt"/>
-                <a:ea typeface="+mn-ea"/>
-                <a:cs typeface="+mn-cs"/>
-              </a:defRPr>
-            </a:lvl7pPr>
-            <a:lvl8pPr marL="3200400" algn="l" defTabSz="914400" rtl="0" eaLnBrk="1" latinLnBrk="0" hangingPunct="1">
-              <a:defRPr kumimoji="1" sz="1800" kern="1200">
-                <a:solidFill>
-                  <a:schemeClr val="tx1"/>
-                </a:solidFill>
-                <a:latin typeface="+mn-lt"/>
-                <a:ea typeface="+mn-ea"/>
-                <a:cs typeface="+mn-cs"/>
-              </a:defRPr>
-            </a:lvl8pPr>
-            <a:lvl9pPr marL="3657600" algn="l" defTabSz="914400" rtl="0" eaLnBrk="1" latinLnBrk="0" hangingPunct="1">
-              <a:defRPr kumimoji="1" sz="1800" kern="1200">
-                <a:solidFill>
-                  <a:schemeClr val="tx1"/>
-                </a:solidFill>
-                <a:latin typeface="+mn-lt"/>
-                <a:ea typeface="+mn-ea"/>
-                <a:cs typeface="+mn-cs"/>
-              </a:defRPr>
-            </a:lvl9pPr>
-          </a:lstStyle>
-          <a:p>
-            <a:r>
-              <a:rPr lang="ja-JP" sz="1200">
-                <a:solidFill>
-                  <a:srgbClr val="000000"/>
-                </a:solidFill>
-                <a:ea typeface="+mn-lt"/>
-                <a:cs typeface="+mn-lt"/>
-              </a:rPr>
-              <a:t>Route 53、CloudFront、ALB、EC2 Instance、RDS Multi-AZ、ElastiCache、S3、CloudWatch</a:t>
-            </a:r>
-            <a:endParaRPr lang="en-US" altLang="ja-JP" sz="1200" b="1">
-              <a:solidFill>
-                <a:srgbClr val="000000"/>
-              </a:solidFill>
-              <a:ea typeface="游ゴシック"/>
-            </a:endParaRPr>
-          </a:p>
-        </p:txBody>
-      </p:sp>
-      <p:sp>
-        <p:nvSpPr>
-          <p:cNvPr id="50" name="テキスト ボックス 13">
-            <a:extLst>
-              <a:ext uri="{FF2B5EF4-FFF2-40B4-BE49-F238E27FC236}">
-                <a16:creationId xmlns:a16="http://schemas.microsoft.com/office/drawing/2014/main" id="{1F313D3E-D173-2DB1-6994-E7BEC075A6AD}"/>
-              </a:ext>
-            </a:extLst>
-          </p:cNvPr>
-          <p:cNvSpPr txBox="1"/>
-          <p:nvPr/>
-        </p:nvSpPr>
-        <p:spPr>
-          <a:xfrm>
-            <a:off x="6795069" y="2343441"/>
-            <a:ext cx="5309972" cy="646331"/>
-          </a:xfrm>
-          <a:prstGeom prst="rect">
-            <a:avLst/>
-          </a:prstGeom>
-          <a:noFill/>
-          <a:ln>
-            <a:noFill/>
-          </a:ln>
-        </p:spPr>
-        <p:txBody>
-          <a:bodyPr wrap="square" lIns="91440" tIns="45720" rIns="91440" bIns="45720" anchor="t">
-            <a:spAutoFit/>
-          </a:bodyPr>
-          <a:lstStyle>
-            <a:defPPr>
-              <a:defRPr lang="ja-JP"/>
-            </a:defPPr>
-            <a:lvl1pPr marL="0" algn="l" defTabSz="914400" rtl="0" eaLnBrk="1" latinLnBrk="0" hangingPunct="1">
-              <a:defRPr kumimoji="1" sz="1800" kern="1200">
-                <a:solidFill>
-                  <a:schemeClr val="tx1"/>
-                </a:solidFill>
-                <a:latin typeface="+mn-lt"/>
-                <a:ea typeface="+mn-ea"/>
-                <a:cs typeface="+mn-cs"/>
-              </a:defRPr>
-            </a:lvl1pPr>
-            <a:lvl2pPr marL="457200" algn="l" defTabSz="914400" rtl="0" eaLnBrk="1" latinLnBrk="0" hangingPunct="1">
-              <a:defRPr kumimoji="1" sz="1800" kern="1200">
-                <a:solidFill>
-                  <a:schemeClr val="tx1"/>
-                </a:solidFill>
-                <a:latin typeface="+mn-lt"/>
-                <a:ea typeface="+mn-ea"/>
-                <a:cs typeface="+mn-cs"/>
-              </a:defRPr>
-            </a:lvl2pPr>
-            <a:lvl3pPr marL="914400" algn="l" defTabSz="914400" rtl="0" eaLnBrk="1" latinLnBrk="0" hangingPunct="1">
-              <a:defRPr kumimoji="1" sz="1800" kern="1200">
-                <a:solidFill>
-                  <a:schemeClr val="tx1"/>
-                </a:solidFill>
-                <a:latin typeface="+mn-lt"/>
-                <a:ea typeface="+mn-ea"/>
-                <a:cs typeface="+mn-cs"/>
-              </a:defRPr>
-            </a:lvl3pPr>
-            <a:lvl4pPr marL="1371600" algn="l" defTabSz="914400" rtl="0" eaLnBrk="1" latinLnBrk="0" hangingPunct="1">
-              <a:defRPr kumimoji="1" sz="1800" kern="1200">
-                <a:solidFill>
-                  <a:schemeClr val="tx1"/>
-                </a:solidFill>
-                <a:latin typeface="+mn-lt"/>
-                <a:ea typeface="+mn-ea"/>
-                <a:cs typeface="+mn-cs"/>
-              </a:defRPr>
-            </a:lvl4pPr>
-            <a:lvl5pPr marL="1828800" algn="l" defTabSz="914400" rtl="0" eaLnBrk="1" latinLnBrk="0" hangingPunct="1">
-              <a:defRPr kumimoji="1" sz="1800" kern="1200">
-                <a:solidFill>
-                  <a:schemeClr val="tx1"/>
-                </a:solidFill>
-                <a:latin typeface="+mn-lt"/>
-                <a:ea typeface="+mn-ea"/>
-                <a:cs typeface="+mn-cs"/>
-              </a:defRPr>
-            </a:lvl5pPr>
-            <a:lvl6pPr marL="2286000" algn="l" defTabSz="914400" rtl="0" eaLnBrk="1" latinLnBrk="0" hangingPunct="1">
-              <a:defRPr kumimoji="1" sz="1800" kern="1200">
-                <a:solidFill>
-                  <a:schemeClr val="tx1"/>
-                </a:solidFill>
-                <a:latin typeface="+mn-lt"/>
-                <a:ea typeface="+mn-ea"/>
-                <a:cs typeface="+mn-cs"/>
-              </a:defRPr>
-            </a:lvl6pPr>
-            <a:lvl7pPr marL="2743200" algn="l" defTabSz="914400" rtl="0" eaLnBrk="1" latinLnBrk="0" hangingPunct="1">
-              <a:defRPr kumimoji="1" sz="1800" kern="1200">
-                <a:solidFill>
-                  <a:schemeClr val="tx1"/>
-                </a:solidFill>
-                <a:latin typeface="+mn-lt"/>
-                <a:ea typeface="+mn-ea"/>
-                <a:cs typeface="+mn-cs"/>
-              </a:defRPr>
-            </a:lvl7pPr>
-            <a:lvl8pPr marL="3200400" algn="l" defTabSz="914400" rtl="0" eaLnBrk="1" latinLnBrk="0" hangingPunct="1">
-              <a:defRPr kumimoji="1" sz="1800" kern="1200">
-                <a:solidFill>
-                  <a:schemeClr val="tx1"/>
-                </a:solidFill>
-                <a:latin typeface="+mn-lt"/>
-                <a:ea typeface="+mn-ea"/>
-                <a:cs typeface="+mn-cs"/>
-              </a:defRPr>
-            </a:lvl8pPr>
-            <a:lvl9pPr marL="3657600" algn="l" defTabSz="914400" rtl="0" eaLnBrk="1" latinLnBrk="0" hangingPunct="1">
-              <a:defRPr kumimoji="1" sz="1800" kern="1200">
-                <a:solidFill>
-                  <a:schemeClr val="tx1"/>
-                </a:solidFill>
-                <a:latin typeface="+mn-lt"/>
-                <a:ea typeface="+mn-ea"/>
-                <a:cs typeface="+mn-cs"/>
-              </a:defRPr>
-            </a:lvl9pPr>
-          </a:lstStyle>
-          <a:p>
-            <a:r>
-              <a:rPr lang="ja-JP" altLang="en-US" sz="1200">
-                <a:solidFill>
-                  <a:srgbClr val="000000"/>
-                </a:solidFill>
-                <a:ea typeface="+mn-lt"/>
-                <a:cs typeface="+mn-lt"/>
-              </a:rPr>
-              <a:t>・ユーザーからのリクエストは</a:t>
-            </a:r>
-            <a:r>
-              <a:rPr lang="en-US" altLang="ja-JP" sz="1200">
-                <a:solidFill>
-                  <a:srgbClr val="000000"/>
-                </a:solidFill>
-                <a:ea typeface="+mn-lt"/>
-                <a:cs typeface="+mn-lt"/>
-              </a:rPr>
-              <a:t>Route</a:t>
-            </a:r>
-            <a:r>
-              <a:rPr lang="ja-JP" altLang="en-US" sz="1200">
-                <a:solidFill>
-                  <a:srgbClr val="000000"/>
-                </a:solidFill>
-                <a:ea typeface="+mn-lt"/>
-                <a:cs typeface="+mn-lt"/>
-              </a:rPr>
-              <a:t> </a:t>
-            </a:r>
-            <a:r>
-              <a:rPr lang="en-US" altLang="ja-JP" sz="1200">
-                <a:solidFill>
-                  <a:srgbClr val="000000"/>
-                </a:solidFill>
-                <a:ea typeface="+mn-lt"/>
-                <a:cs typeface="+mn-lt"/>
-              </a:rPr>
-              <a:t>53</a:t>
-            </a:r>
-            <a:r>
-              <a:rPr lang="ja-JP" altLang="en-US" sz="1200">
-                <a:solidFill>
-                  <a:srgbClr val="000000"/>
-                </a:solidFill>
-                <a:ea typeface="+mn-lt"/>
-                <a:cs typeface="+mn-lt"/>
-              </a:rPr>
-              <a:t>を経由して</a:t>
-            </a:r>
-            <a:r>
-              <a:rPr lang="en-US" altLang="ja-JP" sz="1200">
-                <a:solidFill>
-                  <a:srgbClr val="000000"/>
-                </a:solidFill>
-                <a:ea typeface="+mn-lt"/>
-                <a:cs typeface="+mn-lt"/>
-              </a:rPr>
-              <a:t>CloudFront</a:t>
-            </a:r>
-            <a:r>
-              <a:rPr lang="ja-JP" altLang="en-US" sz="1200">
-                <a:solidFill>
-                  <a:srgbClr val="000000"/>
-                </a:solidFill>
-                <a:ea typeface="+mn-lt"/>
-                <a:cs typeface="+mn-lt"/>
-              </a:rPr>
-              <a:t>に到達</a:t>
-            </a:r>
-            <a:endParaRPr lang="en-US" altLang="ja-JP" sz="1200" b="1">
-              <a:solidFill>
-                <a:srgbClr val="000000"/>
-              </a:solidFill>
-              <a:ea typeface="+mn-lt"/>
-              <a:cs typeface="+mn-lt"/>
-            </a:endParaRPr>
-          </a:p>
-          <a:p>
-            <a:r>
-              <a:rPr lang="ja-JP" altLang="en-US" sz="1200">
-                <a:solidFill>
-                  <a:srgbClr val="000000"/>
-                </a:solidFill>
-                <a:ea typeface="+mn-lt"/>
-                <a:cs typeface="+mn-lt"/>
-              </a:rPr>
-              <a:t>・静的コンテンツは</a:t>
-            </a:r>
-            <a:r>
-              <a:rPr lang="en-US" altLang="ja-JP" sz="1200">
-                <a:solidFill>
-                  <a:srgbClr val="000000"/>
-                </a:solidFill>
-                <a:ea typeface="+mn-lt"/>
-                <a:cs typeface="+mn-lt"/>
-              </a:rPr>
-              <a:t>S3</a:t>
-            </a:r>
-            <a:r>
-              <a:rPr lang="ja-JP" altLang="en-US" sz="1200">
-                <a:solidFill>
-                  <a:srgbClr val="000000"/>
-                </a:solidFill>
-                <a:ea typeface="+mn-lt"/>
-                <a:cs typeface="+mn-lt"/>
-              </a:rPr>
-              <a:t>から、動的コンテンツは</a:t>
-            </a:r>
-            <a:r>
-              <a:rPr lang="en-US" altLang="ja-JP" sz="1200">
-                <a:solidFill>
-                  <a:srgbClr val="000000"/>
-                </a:solidFill>
-                <a:ea typeface="+mn-lt"/>
-                <a:cs typeface="+mn-lt"/>
-              </a:rPr>
-              <a:t>EC2</a:t>
-            </a:r>
-            <a:r>
-              <a:rPr lang="ja-JP" altLang="en-US" sz="1200">
-                <a:solidFill>
-                  <a:srgbClr val="000000"/>
-                </a:solidFill>
-                <a:ea typeface="+mn-lt"/>
-                <a:cs typeface="+mn-lt"/>
-              </a:rPr>
-              <a:t>インスタンスから提供</a:t>
-            </a:r>
-            <a:endParaRPr lang="en-US" altLang="ja-JP" sz="1200" b="1">
-              <a:solidFill>
-                <a:srgbClr val="000000"/>
-              </a:solidFill>
-              <a:ea typeface="+mn-lt"/>
-              <a:cs typeface="+mn-lt"/>
-            </a:endParaRPr>
-          </a:p>
-          <a:p>
-            <a:r>
-              <a:rPr lang="ja-JP" altLang="en-US" sz="1200">
-                <a:solidFill>
-                  <a:srgbClr val="000000"/>
-                </a:solidFill>
-                <a:ea typeface="+mn-lt"/>
-                <a:cs typeface="+mn-lt"/>
-              </a:rPr>
-              <a:t>・システム全体の監視には</a:t>
-            </a:r>
-            <a:r>
-              <a:rPr lang="en-US" altLang="ja-JP" sz="1200">
-                <a:solidFill>
-                  <a:srgbClr val="000000"/>
-                </a:solidFill>
-                <a:ea typeface="+mn-lt"/>
-                <a:cs typeface="+mn-lt"/>
-              </a:rPr>
-              <a:t>CloudWatch</a:t>
-            </a:r>
-            <a:r>
-              <a:rPr lang="ja-JP" altLang="en-US" sz="1200">
-                <a:solidFill>
-                  <a:srgbClr val="000000"/>
-                </a:solidFill>
-                <a:ea typeface="+mn-lt"/>
-                <a:cs typeface="+mn-lt"/>
-              </a:rPr>
-              <a:t>を使用 </a:t>
-            </a:r>
-            <a:endParaRPr lang="en-US" altLang="ja-JP" sz="1200" b="1">
-              <a:solidFill>
-                <a:srgbClr val="000000"/>
-              </a:solidFill>
-              <a:ea typeface="游ゴシック"/>
-            </a:endParaRPr>
-          </a:p>
-        </p:txBody>
-      </p:sp>
-      <p:sp>
-        <p:nvSpPr>
-          <p:cNvPr id="51" name="テキスト ボックス 13">
-            <a:extLst>
-              <a:ext uri="{FF2B5EF4-FFF2-40B4-BE49-F238E27FC236}">
-                <a16:creationId xmlns:a16="http://schemas.microsoft.com/office/drawing/2014/main" id="{AE9CBE89-C1BC-7435-1E7E-53F3FBDC41F9}"/>
-              </a:ext>
-            </a:extLst>
-          </p:cNvPr>
-          <p:cNvSpPr txBox="1"/>
-          <p:nvPr/>
-        </p:nvSpPr>
-        <p:spPr>
-          <a:xfrm>
-            <a:off x="5404987" y="3728653"/>
-            <a:ext cx="6600858" cy="1569660"/>
-          </a:xfrm>
-          <a:prstGeom prst="rect">
-            <a:avLst/>
-          </a:prstGeom>
-          <a:noFill/>
-          <a:ln>
-            <a:noFill/>
-          </a:ln>
-        </p:spPr>
-        <p:txBody>
-          <a:bodyPr wrap="square" lIns="91440" tIns="45720" rIns="91440" bIns="45720" anchor="t">
-            <a:spAutoFit/>
-          </a:bodyPr>
-          <a:lstStyle>
-            <a:defPPr>
-              <a:defRPr lang="ja-JP"/>
-            </a:defPPr>
-            <a:lvl1pPr marL="0" algn="l" defTabSz="914400" rtl="0" eaLnBrk="1" latinLnBrk="0" hangingPunct="1">
-              <a:defRPr kumimoji="1" sz="1800" kern="1200">
-                <a:solidFill>
-                  <a:schemeClr val="tx1"/>
-                </a:solidFill>
-                <a:latin typeface="+mn-lt"/>
-                <a:ea typeface="+mn-ea"/>
-                <a:cs typeface="+mn-cs"/>
-              </a:defRPr>
-            </a:lvl1pPr>
-            <a:lvl2pPr marL="457200" algn="l" defTabSz="914400" rtl="0" eaLnBrk="1" latinLnBrk="0" hangingPunct="1">
-              <a:defRPr kumimoji="1" sz="1800" kern="1200">
-                <a:solidFill>
-                  <a:schemeClr val="tx1"/>
-                </a:solidFill>
-                <a:latin typeface="+mn-lt"/>
-                <a:ea typeface="+mn-ea"/>
-                <a:cs typeface="+mn-cs"/>
-              </a:defRPr>
-            </a:lvl2pPr>
-            <a:lvl3pPr marL="914400" algn="l" defTabSz="914400" rtl="0" eaLnBrk="1" latinLnBrk="0" hangingPunct="1">
-              <a:defRPr kumimoji="1" sz="1800" kern="1200">
-                <a:solidFill>
-                  <a:schemeClr val="tx1"/>
-                </a:solidFill>
-                <a:latin typeface="+mn-lt"/>
-                <a:ea typeface="+mn-ea"/>
-                <a:cs typeface="+mn-cs"/>
-              </a:defRPr>
-            </a:lvl3pPr>
-            <a:lvl4pPr marL="1371600" algn="l" defTabSz="914400" rtl="0" eaLnBrk="1" latinLnBrk="0" hangingPunct="1">
-              <a:defRPr kumimoji="1" sz="1800" kern="1200">
-                <a:solidFill>
-                  <a:schemeClr val="tx1"/>
-                </a:solidFill>
-                <a:latin typeface="+mn-lt"/>
-                <a:ea typeface="+mn-ea"/>
-                <a:cs typeface="+mn-cs"/>
-              </a:defRPr>
-            </a:lvl4pPr>
-            <a:lvl5pPr marL="1828800" algn="l" defTabSz="914400" rtl="0" eaLnBrk="1" latinLnBrk="0" hangingPunct="1">
-              <a:defRPr kumimoji="1" sz="1800" kern="1200">
-                <a:solidFill>
-                  <a:schemeClr val="tx1"/>
-                </a:solidFill>
-                <a:latin typeface="+mn-lt"/>
-                <a:ea typeface="+mn-ea"/>
-                <a:cs typeface="+mn-cs"/>
-              </a:defRPr>
-            </a:lvl5pPr>
-            <a:lvl6pPr marL="2286000" algn="l" defTabSz="914400" rtl="0" eaLnBrk="1" latinLnBrk="0" hangingPunct="1">
-              <a:defRPr kumimoji="1" sz="1800" kern="1200">
-                <a:solidFill>
-                  <a:schemeClr val="tx1"/>
-                </a:solidFill>
-                <a:latin typeface="+mn-lt"/>
-                <a:ea typeface="+mn-ea"/>
-                <a:cs typeface="+mn-cs"/>
-              </a:defRPr>
-            </a:lvl6pPr>
-            <a:lvl7pPr marL="2743200" algn="l" defTabSz="914400" rtl="0" eaLnBrk="1" latinLnBrk="0" hangingPunct="1">
-              <a:defRPr kumimoji="1" sz="1800" kern="1200">
-                <a:solidFill>
-                  <a:schemeClr val="tx1"/>
-                </a:solidFill>
-                <a:latin typeface="+mn-lt"/>
-                <a:ea typeface="+mn-ea"/>
-                <a:cs typeface="+mn-cs"/>
-              </a:defRPr>
-            </a:lvl7pPr>
-            <a:lvl8pPr marL="3200400" algn="l" defTabSz="914400" rtl="0" eaLnBrk="1" latinLnBrk="0" hangingPunct="1">
-              <a:defRPr kumimoji="1" sz="1800" kern="1200">
-                <a:solidFill>
-                  <a:schemeClr val="tx1"/>
-                </a:solidFill>
-                <a:latin typeface="+mn-lt"/>
-                <a:ea typeface="+mn-ea"/>
-                <a:cs typeface="+mn-cs"/>
-              </a:defRPr>
-            </a:lvl8pPr>
-            <a:lvl9pPr marL="3657600" algn="l" defTabSz="914400" rtl="0" eaLnBrk="1" latinLnBrk="0" hangingPunct="1">
-              <a:defRPr kumimoji="1" sz="1800" kern="1200">
-                <a:solidFill>
-                  <a:schemeClr val="tx1"/>
-                </a:solidFill>
-                <a:latin typeface="+mn-lt"/>
-                <a:ea typeface="+mn-ea"/>
-                <a:cs typeface="+mn-cs"/>
-              </a:defRPr>
-            </a:lvl9pPr>
-          </a:lstStyle>
-          <a:p>
-            <a:r>
-              <a:rPr lang="ja-JP" sz="1200">
-                <a:solidFill>
-                  <a:srgbClr val="000000"/>
-                </a:solidFill>
-                <a:latin typeface="Arial"/>
-                <a:ea typeface="+mn-lt"/>
-                <a:cs typeface="Arial"/>
-              </a:rPr>
-              <a:t>・高可用性：マルチ</a:t>
-            </a:r>
-            <a:r>
-              <a:rPr lang="en-US" altLang="ja-JP" sz="1200">
-                <a:solidFill>
-                  <a:srgbClr val="000000"/>
-                </a:solidFill>
-                <a:latin typeface="Arial"/>
-                <a:ea typeface="+mn-lt"/>
-                <a:cs typeface="Arial"/>
-              </a:rPr>
-              <a:t>AZ</a:t>
-            </a:r>
-            <a:r>
-              <a:rPr lang="ja-JP" sz="1200">
-                <a:solidFill>
-                  <a:srgbClr val="000000"/>
-                </a:solidFill>
-                <a:latin typeface="Arial"/>
-                <a:ea typeface="+mn-lt"/>
-                <a:cs typeface="Arial"/>
-              </a:rPr>
-              <a:t>デプロイメントによる地理的冗長性と</a:t>
-            </a:r>
-            <a:r>
-              <a:rPr lang="en-US" altLang="ja-JP" sz="1200">
-                <a:solidFill>
-                  <a:srgbClr val="000000"/>
-                </a:solidFill>
-                <a:latin typeface="Arial"/>
-                <a:ea typeface="+mn-lt"/>
-                <a:cs typeface="Arial"/>
-              </a:rPr>
-              <a:t>Auto Scaling</a:t>
-            </a:r>
-            <a:r>
-              <a:rPr lang="ja-JP" sz="1200">
-                <a:solidFill>
-                  <a:srgbClr val="000000"/>
-                </a:solidFill>
-                <a:latin typeface="Arial"/>
-                <a:ea typeface="+mn-lt"/>
-                <a:cs typeface="Arial"/>
-              </a:rPr>
-              <a:t>による負荷に応じた自動スケーリングを実現し、システムの可用性を大幅に向上</a:t>
-            </a:r>
-            <a:endParaRPr lang="en-US" altLang="ja-JP" sz="1200">
-              <a:solidFill>
-                <a:srgbClr val="000000"/>
-              </a:solidFill>
-              <a:latin typeface="Arial"/>
-              <a:ea typeface="+mn-lt"/>
-              <a:cs typeface="Arial"/>
-            </a:endParaRPr>
-          </a:p>
-          <a:p>
-            <a:r>
-              <a:rPr lang="ja-JP" altLang="en-US" sz="1200">
-                <a:solidFill>
-                  <a:srgbClr val="000000"/>
-                </a:solidFill>
-                <a:latin typeface="Arial"/>
-                <a:ea typeface="+mn-lt"/>
-                <a:cs typeface="Arial"/>
-              </a:rPr>
-              <a:t>・</a:t>
-            </a:r>
-            <a:r>
-              <a:rPr lang="ja-JP" sz="1200">
-                <a:solidFill>
-                  <a:srgbClr val="000000"/>
-                </a:solidFill>
-                <a:latin typeface="Arial"/>
-                <a:ea typeface="+mn-lt"/>
-                <a:cs typeface="Arial"/>
-              </a:rPr>
-              <a:t>スケーラビリティ：</a:t>
-            </a:r>
-            <a:r>
-              <a:rPr lang="en-US" altLang="ja-JP" sz="1200">
-                <a:solidFill>
-                  <a:srgbClr val="000000"/>
-                </a:solidFill>
-                <a:latin typeface="Arial"/>
-                <a:ea typeface="+mn-lt"/>
-                <a:cs typeface="Arial"/>
-              </a:rPr>
-              <a:t>EC2 Auto Scaling Group</a:t>
-            </a:r>
-            <a:r>
-              <a:rPr lang="ja-JP" sz="1200">
-                <a:solidFill>
-                  <a:srgbClr val="000000"/>
-                </a:solidFill>
-                <a:latin typeface="Arial"/>
-                <a:ea typeface="+mn-lt"/>
-                <a:cs typeface="Arial"/>
-              </a:rPr>
-              <a:t>で計算リソースを動的に調整し、</a:t>
-            </a:r>
-            <a:r>
-              <a:rPr lang="en-US" altLang="ja-JP" sz="1200">
-                <a:solidFill>
-                  <a:srgbClr val="000000"/>
-                </a:solidFill>
-                <a:latin typeface="Arial"/>
-                <a:ea typeface="+mn-lt"/>
-                <a:cs typeface="Arial"/>
-              </a:rPr>
-              <a:t>RDS</a:t>
-            </a:r>
-            <a:r>
-              <a:rPr lang="ja-JP" sz="1200">
-                <a:solidFill>
-                  <a:srgbClr val="000000"/>
-                </a:solidFill>
-                <a:latin typeface="Arial"/>
-                <a:ea typeface="+mn-lt"/>
-                <a:cs typeface="Arial"/>
-              </a:rPr>
-              <a:t>読み取りレプリカでデータベースの負荷を分散。急激なトラフィック増加にも柔軟に対応</a:t>
-            </a:r>
-            <a:endParaRPr lang="en-US" altLang="ja-JP" sz="1200">
-              <a:solidFill>
-                <a:srgbClr val="000000"/>
-              </a:solidFill>
-              <a:latin typeface="Arial"/>
-              <a:ea typeface="+mn-lt"/>
-              <a:cs typeface="Arial"/>
-            </a:endParaRPr>
-          </a:p>
-          <a:p>
-            <a:r>
-              <a:rPr lang="ja-JP" altLang="en-US" sz="1200">
-                <a:solidFill>
-                  <a:srgbClr val="000000"/>
-                </a:solidFill>
-                <a:latin typeface="Arial"/>
-                <a:ea typeface="+mn-lt"/>
-                <a:cs typeface="Arial"/>
-              </a:rPr>
-              <a:t>・</a:t>
-            </a:r>
-            <a:r>
-              <a:rPr lang="ja-JP" sz="1200">
-                <a:solidFill>
-                  <a:srgbClr val="000000"/>
-                </a:solidFill>
-                <a:latin typeface="Arial"/>
-                <a:ea typeface="+mn-lt"/>
-                <a:cs typeface="Arial"/>
-              </a:rPr>
-              <a:t>パフォーマンス：</a:t>
-            </a:r>
-            <a:r>
-              <a:rPr lang="en-US" sz="1200">
-                <a:solidFill>
-                  <a:srgbClr val="000000"/>
-                </a:solidFill>
-                <a:latin typeface="Arial"/>
-                <a:ea typeface="+mn-lt"/>
-                <a:cs typeface="Arial"/>
-              </a:rPr>
-              <a:t>CloudFront</a:t>
-            </a:r>
-            <a:r>
-              <a:rPr lang="ja-JP" sz="1200">
-                <a:solidFill>
-                  <a:srgbClr val="000000"/>
-                </a:solidFill>
-                <a:latin typeface="Arial"/>
-                <a:ea typeface="+mn-lt"/>
-                <a:cs typeface="Arial"/>
-              </a:rPr>
-              <a:t>によるコンテンツのグローバル配信と</a:t>
-            </a:r>
-            <a:r>
-              <a:rPr lang="en-US" altLang="ja-JP" sz="1200" err="1">
-                <a:solidFill>
-                  <a:srgbClr val="000000"/>
-                </a:solidFill>
-                <a:latin typeface="Arial"/>
-                <a:ea typeface="+mn-lt"/>
-                <a:cs typeface="Arial"/>
-              </a:rPr>
-              <a:t>ElastiCache</a:t>
-            </a:r>
-            <a:r>
-              <a:rPr lang="ja-JP" sz="1200">
-                <a:solidFill>
-                  <a:srgbClr val="000000"/>
-                </a:solidFill>
-                <a:latin typeface="Arial"/>
-                <a:ea typeface="+mn-lt"/>
-                <a:cs typeface="Arial"/>
-              </a:rPr>
-              <a:t>によるデータのインメモリキャッシュで、ユーザーへの応答時間を大幅に短縮</a:t>
-            </a:r>
-          </a:p>
-          <a:p>
-            <a:r>
-              <a:rPr lang="ja-JP" sz="1200">
-                <a:solidFill>
-                  <a:srgbClr val="000000"/>
-                </a:solidFill>
-                <a:latin typeface="Arial"/>
-                <a:ea typeface="+mn-lt"/>
-                <a:cs typeface="Arial"/>
-              </a:rPr>
-              <a:t>・セキュリティ：</a:t>
-            </a:r>
-            <a:r>
-              <a:rPr lang="en-US" altLang="ja-JP" sz="1200">
-                <a:solidFill>
-                  <a:srgbClr val="000000"/>
-                </a:solidFill>
-                <a:latin typeface="Arial"/>
-                <a:ea typeface="+mn-lt"/>
-                <a:cs typeface="Arial"/>
-              </a:rPr>
-              <a:t>VPC</a:t>
-            </a:r>
-            <a:r>
-              <a:rPr lang="ja-JP" sz="1200">
-                <a:solidFill>
-                  <a:srgbClr val="000000"/>
-                </a:solidFill>
-                <a:latin typeface="Arial"/>
-                <a:ea typeface="+mn-lt"/>
-                <a:cs typeface="Arial"/>
-              </a:rPr>
-              <a:t>でネットワークを隔離し、</a:t>
-            </a:r>
-            <a:r>
-              <a:rPr lang="en-US" altLang="ja-JP" sz="1200">
-                <a:solidFill>
-                  <a:srgbClr val="000000"/>
-                </a:solidFill>
-                <a:latin typeface="Arial"/>
-                <a:ea typeface="+mn-lt"/>
-                <a:cs typeface="Arial"/>
-              </a:rPr>
-              <a:t>Security Groups</a:t>
-            </a:r>
-            <a:r>
-              <a:rPr lang="ja-JP" sz="1200">
-                <a:solidFill>
-                  <a:srgbClr val="000000"/>
-                </a:solidFill>
-                <a:latin typeface="Arial"/>
-                <a:ea typeface="+mn-lt"/>
-                <a:cs typeface="Arial"/>
-              </a:rPr>
-              <a:t>で通信を制御、</a:t>
-            </a:r>
-            <a:r>
-              <a:rPr lang="en-US" altLang="ja-JP" sz="1200">
-                <a:solidFill>
-                  <a:srgbClr val="000000"/>
-                </a:solidFill>
-                <a:latin typeface="Arial"/>
-                <a:ea typeface="+mn-lt"/>
-                <a:cs typeface="Arial"/>
-              </a:rPr>
-              <a:t>WAF</a:t>
-            </a:r>
-            <a:r>
-              <a:rPr lang="ja-JP" sz="1200">
-                <a:solidFill>
-                  <a:srgbClr val="000000"/>
-                </a:solidFill>
-                <a:latin typeface="Arial"/>
-                <a:ea typeface="+mn-lt"/>
-                <a:cs typeface="Arial"/>
-              </a:rPr>
-              <a:t>で </a:t>
-            </a:r>
-            <a:r>
-              <a:rPr lang="en-US" altLang="ja-JP" sz="1200">
-                <a:solidFill>
-                  <a:srgbClr val="000000"/>
-                </a:solidFill>
-                <a:latin typeface="Arial"/>
-                <a:ea typeface="+mn-lt"/>
-                <a:cs typeface="Arial"/>
-              </a:rPr>
-              <a:t>Web </a:t>
-            </a:r>
-            <a:r>
-              <a:rPr lang="ja-JP" sz="1200">
-                <a:solidFill>
-                  <a:srgbClr val="000000"/>
-                </a:solidFill>
-                <a:latin typeface="Arial"/>
-                <a:ea typeface="+mn-lt"/>
-                <a:cs typeface="Arial"/>
-              </a:rPr>
-              <a:t>アプリケーションを保護する多層防御戦略を採用</a:t>
-            </a:r>
-            <a:endParaRPr lang="en-US" altLang="ja-JP" sz="1200">
-              <a:solidFill>
-                <a:srgbClr val="000000"/>
-              </a:solidFill>
-              <a:latin typeface="Arial"/>
-              <a:ea typeface="+mn-lt"/>
-              <a:cs typeface="Arial"/>
-            </a:endParaRPr>
-          </a:p>
-        </p:txBody>
-      </p:sp>
-      <p:sp>
-        <p:nvSpPr>
-          <p:cNvPr id="52" name="テキスト ボックス 13">
-            <a:extLst>
-              <a:ext uri="{FF2B5EF4-FFF2-40B4-BE49-F238E27FC236}">
-                <a16:creationId xmlns:a16="http://schemas.microsoft.com/office/drawing/2014/main" id="{A12F9465-5134-F5EA-7178-08E2851976EB}"/>
-              </a:ext>
-            </a:extLst>
-          </p:cNvPr>
-          <p:cNvSpPr txBox="1"/>
-          <p:nvPr/>
-        </p:nvSpPr>
-        <p:spPr>
-          <a:xfrm>
-            <a:off x="5399583" y="5761837"/>
-            <a:ext cx="6103140" cy="830997"/>
-          </a:xfrm>
-          <a:prstGeom prst="rect">
-            <a:avLst/>
-          </a:prstGeom>
-          <a:noFill/>
-          <a:ln>
-            <a:noFill/>
-          </a:ln>
-        </p:spPr>
-        <p:txBody>
-          <a:bodyPr wrap="square" lIns="91440" tIns="45720" rIns="91440" bIns="45720" anchor="t">
-            <a:spAutoFit/>
-          </a:bodyPr>
-          <a:lstStyle>
-            <a:defPPr>
-              <a:defRPr lang="ja-JP"/>
-            </a:defPPr>
-            <a:lvl1pPr marL="0" algn="l" defTabSz="914400" rtl="0" eaLnBrk="1" latinLnBrk="0" hangingPunct="1">
-              <a:defRPr kumimoji="1" sz="1800" kern="1200">
-                <a:solidFill>
-                  <a:schemeClr val="tx1"/>
-                </a:solidFill>
-                <a:latin typeface="+mn-lt"/>
-                <a:ea typeface="+mn-ea"/>
-                <a:cs typeface="+mn-cs"/>
-              </a:defRPr>
-            </a:lvl1pPr>
-            <a:lvl2pPr marL="457200" algn="l" defTabSz="914400" rtl="0" eaLnBrk="1" latinLnBrk="0" hangingPunct="1">
-              <a:defRPr kumimoji="1" sz="1800" kern="1200">
-                <a:solidFill>
-                  <a:schemeClr val="tx1"/>
-                </a:solidFill>
-                <a:latin typeface="+mn-lt"/>
-                <a:ea typeface="+mn-ea"/>
-                <a:cs typeface="+mn-cs"/>
-              </a:defRPr>
-            </a:lvl2pPr>
-            <a:lvl3pPr marL="914400" algn="l" defTabSz="914400" rtl="0" eaLnBrk="1" latinLnBrk="0" hangingPunct="1">
-              <a:defRPr kumimoji="1" sz="1800" kern="1200">
-                <a:solidFill>
-                  <a:schemeClr val="tx1"/>
-                </a:solidFill>
-                <a:latin typeface="+mn-lt"/>
-                <a:ea typeface="+mn-ea"/>
-                <a:cs typeface="+mn-cs"/>
-              </a:defRPr>
-            </a:lvl3pPr>
-            <a:lvl4pPr marL="1371600" algn="l" defTabSz="914400" rtl="0" eaLnBrk="1" latinLnBrk="0" hangingPunct="1">
-              <a:defRPr kumimoji="1" sz="1800" kern="1200">
-                <a:solidFill>
-                  <a:schemeClr val="tx1"/>
-                </a:solidFill>
-                <a:latin typeface="+mn-lt"/>
-                <a:ea typeface="+mn-ea"/>
-                <a:cs typeface="+mn-cs"/>
-              </a:defRPr>
-            </a:lvl4pPr>
-            <a:lvl5pPr marL="1828800" algn="l" defTabSz="914400" rtl="0" eaLnBrk="1" latinLnBrk="0" hangingPunct="1">
-              <a:defRPr kumimoji="1" sz="1800" kern="1200">
-                <a:solidFill>
-                  <a:schemeClr val="tx1"/>
-                </a:solidFill>
-                <a:latin typeface="+mn-lt"/>
-                <a:ea typeface="+mn-ea"/>
-                <a:cs typeface="+mn-cs"/>
-              </a:defRPr>
-            </a:lvl5pPr>
-            <a:lvl6pPr marL="2286000" algn="l" defTabSz="914400" rtl="0" eaLnBrk="1" latinLnBrk="0" hangingPunct="1">
-              <a:defRPr kumimoji="1" sz="1800" kern="1200">
-                <a:solidFill>
-                  <a:schemeClr val="tx1"/>
-                </a:solidFill>
-                <a:latin typeface="+mn-lt"/>
-                <a:ea typeface="+mn-ea"/>
-                <a:cs typeface="+mn-cs"/>
-              </a:defRPr>
-            </a:lvl6pPr>
-            <a:lvl7pPr marL="2743200" algn="l" defTabSz="914400" rtl="0" eaLnBrk="1" latinLnBrk="0" hangingPunct="1">
-              <a:defRPr kumimoji="1" sz="1800" kern="1200">
-                <a:solidFill>
-                  <a:schemeClr val="tx1"/>
-                </a:solidFill>
-                <a:latin typeface="+mn-lt"/>
-                <a:ea typeface="+mn-ea"/>
-                <a:cs typeface="+mn-cs"/>
-              </a:defRPr>
-            </a:lvl7pPr>
-            <a:lvl8pPr marL="3200400" algn="l" defTabSz="914400" rtl="0" eaLnBrk="1" latinLnBrk="0" hangingPunct="1">
-              <a:defRPr kumimoji="1" sz="1800" kern="1200">
-                <a:solidFill>
-                  <a:schemeClr val="tx1"/>
-                </a:solidFill>
-                <a:latin typeface="+mn-lt"/>
-                <a:ea typeface="+mn-ea"/>
-                <a:cs typeface="+mn-cs"/>
-              </a:defRPr>
-            </a:lvl8pPr>
-            <a:lvl9pPr marL="3657600" algn="l" defTabSz="914400" rtl="0" eaLnBrk="1" latinLnBrk="0" hangingPunct="1">
-              <a:defRPr kumimoji="1" sz="1800" kern="1200">
-                <a:solidFill>
-                  <a:schemeClr val="tx1"/>
-                </a:solidFill>
-                <a:latin typeface="+mn-lt"/>
-                <a:ea typeface="+mn-ea"/>
-                <a:cs typeface="+mn-cs"/>
-              </a:defRPr>
-            </a:lvl9pPr>
-          </a:lstStyle>
-          <a:p>
-            <a:r>
-              <a:rPr lang="ja-JP" altLang="en-US" sz="1200">
-                <a:solidFill>
-                  <a:srgbClr val="000000"/>
-                </a:solidFill>
-                <a:latin typeface="Arial"/>
-                <a:ea typeface="+mn-lt"/>
-                <a:cs typeface="Arial"/>
-              </a:rPr>
-              <a:t>・全てのバージョ</a:t>
-            </a:r>
-            <a:r>
-              <a:rPr lang="ja-JP" sz="1200">
-                <a:solidFill>
-                  <a:srgbClr val="000000"/>
-                </a:solidFill>
-                <a:latin typeface="Arial"/>
-                <a:ea typeface="+mn-lt"/>
-                <a:cs typeface="Arial"/>
-              </a:rPr>
-              <a:t>ン</a:t>
-            </a:r>
-            <a:r>
-              <a:rPr lang="ja-JP" altLang="en-US" sz="1200">
-                <a:solidFill>
-                  <a:srgbClr val="000000"/>
-                </a:solidFill>
-                <a:latin typeface="Arial"/>
-                <a:ea typeface="+mn-lt"/>
-                <a:cs typeface="Arial"/>
-              </a:rPr>
-              <a:t>管</a:t>
-            </a:r>
-            <a:r>
-              <a:rPr lang="ja-JP" sz="1200">
-                <a:solidFill>
-                  <a:srgbClr val="000000"/>
-                </a:solidFill>
-                <a:latin typeface="Arial"/>
-                <a:ea typeface="+mn-lt"/>
-                <a:cs typeface="Arial"/>
-              </a:rPr>
-              <a:t>理を</a:t>
-            </a:r>
-            <a:r>
-              <a:rPr lang="ja-JP" altLang="en-US" sz="1200">
-                <a:solidFill>
-                  <a:srgbClr val="000000"/>
-                </a:solidFill>
-                <a:latin typeface="Arial"/>
-                <a:ea typeface="+mn-lt"/>
-                <a:cs typeface="Arial"/>
-              </a:rPr>
-              <a:t> </a:t>
-            </a:r>
-            <a:r>
-              <a:rPr lang="en-US" altLang="ja-JP" sz="1200">
-                <a:solidFill>
-                  <a:srgbClr val="000000"/>
-                </a:solidFill>
-                <a:latin typeface="Arial"/>
-                <a:ea typeface="+mn-lt"/>
-                <a:cs typeface="Arial"/>
-              </a:rPr>
-              <a:t>Git </a:t>
-            </a:r>
-            <a:r>
-              <a:rPr lang="ja-JP" altLang="en-US" sz="1200">
-                <a:solidFill>
-                  <a:srgbClr val="000000"/>
-                </a:solidFill>
-                <a:latin typeface="Arial"/>
-                <a:ea typeface="+mn-lt"/>
-                <a:cs typeface="Arial"/>
-              </a:rPr>
-              <a:t>で管理</a:t>
-            </a:r>
-            <a:r>
-              <a:rPr lang="ja-JP" sz="1200">
-                <a:solidFill>
-                  <a:srgbClr val="000000"/>
-                </a:solidFill>
-                <a:latin typeface="Arial"/>
-                <a:ea typeface="+mn-lt"/>
-                <a:cs typeface="Arial"/>
-              </a:rPr>
-              <a:t>し、</a:t>
-            </a:r>
-            <a:r>
-              <a:rPr lang="ja-JP" altLang="en-US" sz="1200">
-                <a:solidFill>
-                  <a:srgbClr val="000000"/>
-                </a:solidFill>
-                <a:latin typeface="Arial"/>
-                <a:ea typeface="+mn-lt"/>
-                <a:cs typeface="Arial"/>
-              </a:rPr>
-              <a:t>環境</a:t>
-            </a:r>
-            <a:r>
-              <a:rPr lang="ja-JP" sz="1200">
-                <a:solidFill>
-                  <a:srgbClr val="000000"/>
-                </a:solidFill>
-                <a:latin typeface="Arial"/>
-                <a:ea typeface="+mn-lt"/>
-                <a:cs typeface="Arial"/>
-              </a:rPr>
-              <a:t>の</a:t>
-            </a:r>
-            <a:r>
-              <a:rPr lang="ja-JP" altLang="en-US" sz="1200">
-                <a:solidFill>
-                  <a:srgbClr val="000000"/>
-                </a:solidFill>
-                <a:latin typeface="Arial"/>
-                <a:ea typeface="+mn-lt"/>
-                <a:cs typeface="Arial"/>
-              </a:rPr>
-              <a:t>完全な再現</a:t>
-            </a:r>
-            <a:r>
-              <a:rPr lang="ja-JP" sz="1200">
-                <a:solidFill>
-                  <a:srgbClr val="000000"/>
-                </a:solidFill>
-                <a:latin typeface="Arial"/>
-                <a:ea typeface="+mn-lt"/>
-                <a:cs typeface="Arial"/>
-              </a:rPr>
-              <a:t>を</a:t>
-            </a:r>
-            <a:r>
-              <a:rPr lang="ja-JP" altLang="en-US" sz="1200">
-                <a:solidFill>
-                  <a:srgbClr val="000000"/>
-                </a:solidFill>
-                <a:latin typeface="Arial"/>
-                <a:ea typeface="+mn-lt"/>
-                <a:cs typeface="Arial"/>
-              </a:rPr>
-              <a:t>実現</a:t>
-            </a:r>
-            <a:endParaRPr lang="en-US" sz="1200">
-              <a:solidFill>
-                <a:srgbClr val="000000"/>
-              </a:solidFill>
-              <a:latin typeface="Arial"/>
-              <a:ea typeface="+mn-lt"/>
-              <a:cs typeface="Arial"/>
-            </a:endParaRPr>
-          </a:p>
-          <a:p>
-            <a:r>
-              <a:rPr lang="ja-JP" altLang="en-US" sz="1200">
-                <a:solidFill>
-                  <a:srgbClr val="000000"/>
-                </a:solidFill>
-                <a:latin typeface="Arial"/>
-                <a:ea typeface="+mn-lt"/>
-                <a:cs typeface="Arial"/>
-              </a:rPr>
-              <a:t>・自動化されたデプロイプロセ</a:t>
-            </a:r>
-            <a:r>
-              <a:rPr lang="ja-JP" sz="1200">
-                <a:solidFill>
-                  <a:srgbClr val="000000"/>
-                </a:solidFill>
-                <a:latin typeface="Arial"/>
-                <a:ea typeface="+mn-lt"/>
-                <a:cs typeface="Arial"/>
-              </a:rPr>
-              <a:t>スに</a:t>
-            </a:r>
-            <a:r>
-              <a:rPr lang="ja-JP" altLang="en-US" sz="1200">
-                <a:solidFill>
-                  <a:srgbClr val="000000"/>
-                </a:solidFill>
-                <a:latin typeface="Arial"/>
-                <a:ea typeface="+mn-lt"/>
-                <a:cs typeface="Arial"/>
-              </a:rPr>
-              <a:t>よ</a:t>
-            </a:r>
-            <a:r>
-              <a:rPr lang="ja-JP" sz="1200">
-                <a:solidFill>
-                  <a:srgbClr val="000000"/>
-                </a:solidFill>
-                <a:latin typeface="Arial"/>
-                <a:ea typeface="+mn-lt"/>
-                <a:cs typeface="Arial"/>
-              </a:rPr>
-              <a:t>り</a:t>
-            </a:r>
-            <a:r>
-              <a:rPr lang="ja-JP" altLang="en-US" sz="1200">
-                <a:solidFill>
-                  <a:srgbClr val="000000"/>
-                </a:solidFill>
-                <a:latin typeface="Arial"/>
-                <a:ea typeface="+mn-lt"/>
-                <a:cs typeface="Arial"/>
-              </a:rPr>
-              <a:t>、手動操作</a:t>
-            </a:r>
-            <a:r>
-              <a:rPr lang="ja-JP" sz="1200">
-                <a:solidFill>
-                  <a:srgbClr val="000000"/>
-                </a:solidFill>
-                <a:latin typeface="Arial"/>
-                <a:ea typeface="+mn-lt"/>
-                <a:cs typeface="Arial"/>
-              </a:rPr>
-              <a:t>を</a:t>
-            </a:r>
-            <a:r>
-              <a:rPr lang="ja-JP" altLang="en-US" sz="1200">
-                <a:solidFill>
-                  <a:srgbClr val="000000"/>
-                </a:solidFill>
-                <a:latin typeface="Arial"/>
-                <a:ea typeface="+mn-lt"/>
-                <a:cs typeface="Arial"/>
-              </a:rPr>
-              <a:t>最小限</a:t>
-            </a:r>
-            <a:r>
-              <a:rPr lang="ja-JP" sz="1200">
-                <a:solidFill>
-                  <a:srgbClr val="000000"/>
-                </a:solidFill>
-                <a:latin typeface="Arial"/>
-                <a:ea typeface="+mn-lt"/>
-                <a:cs typeface="Arial"/>
-              </a:rPr>
-              <a:t>に</a:t>
-            </a:r>
-            <a:r>
-              <a:rPr lang="ja-JP" altLang="en-US" sz="1200">
-                <a:solidFill>
-                  <a:srgbClr val="000000"/>
-                </a:solidFill>
-                <a:latin typeface="Arial"/>
-                <a:ea typeface="+mn-lt"/>
-                <a:cs typeface="Arial"/>
-              </a:rPr>
-              <a:t>抑制</a:t>
-            </a:r>
-            <a:endParaRPr lang="en-US" sz="1200">
-              <a:solidFill>
-                <a:srgbClr val="000000"/>
-              </a:solidFill>
-              <a:latin typeface="Arial"/>
-              <a:ea typeface="+mn-lt"/>
-              <a:cs typeface="Arial"/>
-            </a:endParaRPr>
-          </a:p>
-          <a:p>
-            <a:r>
-              <a:rPr lang="ja-JP" sz="1200">
-                <a:solidFill>
-                  <a:srgbClr val="000000"/>
-                </a:solidFill>
-                <a:latin typeface="Arial"/>
-                <a:ea typeface="+mn-lt"/>
-                <a:cs typeface="Arial"/>
-              </a:rPr>
-              <a:t>・コー</a:t>
-            </a:r>
-            <a:r>
-              <a:rPr lang="ja-JP" altLang="en-US" sz="1200">
-                <a:solidFill>
-                  <a:srgbClr val="000000"/>
-                </a:solidFill>
-                <a:latin typeface="Arial"/>
-                <a:ea typeface="+mn-lt"/>
-                <a:cs typeface="Arial"/>
-              </a:rPr>
-              <a:t>ド化</a:t>
-            </a:r>
-            <a:r>
-              <a:rPr lang="ja-JP" sz="1200">
-                <a:solidFill>
-                  <a:srgbClr val="000000"/>
-                </a:solidFill>
-                <a:latin typeface="Arial"/>
-                <a:ea typeface="+mn-lt"/>
-                <a:cs typeface="Arial"/>
-              </a:rPr>
-              <a:t>によ</a:t>
-            </a:r>
-            <a:r>
-              <a:rPr lang="ja-JP" altLang="en-US" sz="1200">
-                <a:solidFill>
-                  <a:srgbClr val="000000"/>
-                </a:solidFill>
-                <a:latin typeface="Arial"/>
-                <a:ea typeface="+mn-lt"/>
-                <a:cs typeface="Arial"/>
-              </a:rPr>
-              <a:t>り設定ミス</a:t>
-            </a:r>
-            <a:r>
-              <a:rPr lang="ja-JP" sz="1200">
-                <a:solidFill>
-                  <a:srgbClr val="000000"/>
-                </a:solidFill>
-                <a:latin typeface="Arial"/>
-                <a:ea typeface="+mn-lt"/>
-                <a:cs typeface="Arial"/>
-              </a:rPr>
-              <a:t>を</a:t>
-            </a:r>
-            <a:r>
-              <a:rPr lang="ja-JP" altLang="en-US" sz="1200">
-                <a:solidFill>
-                  <a:srgbClr val="000000"/>
-                </a:solidFill>
-                <a:latin typeface="Arial"/>
-                <a:ea typeface="+mn-lt"/>
-                <a:cs typeface="Arial"/>
-              </a:rPr>
-              <a:t>事前</a:t>
-            </a:r>
-            <a:r>
-              <a:rPr lang="ja-JP" sz="1200">
-                <a:solidFill>
-                  <a:srgbClr val="000000"/>
-                </a:solidFill>
-                <a:latin typeface="Arial"/>
-                <a:ea typeface="+mn-lt"/>
-                <a:cs typeface="Arial"/>
-              </a:rPr>
-              <a:t>に</a:t>
-            </a:r>
-            <a:r>
-              <a:rPr lang="ja-JP" altLang="en-US" sz="1200">
-                <a:solidFill>
-                  <a:srgbClr val="000000"/>
-                </a:solidFill>
-                <a:latin typeface="Arial"/>
-                <a:ea typeface="+mn-lt"/>
-                <a:cs typeface="Arial"/>
-              </a:rPr>
-              <a:t>検出</a:t>
-            </a:r>
-            <a:r>
-              <a:rPr lang="ja-JP" sz="1200">
-                <a:solidFill>
-                  <a:srgbClr val="000000"/>
-                </a:solidFill>
-                <a:latin typeface="Arial"/>
-                <a:ea typeface="+mn-lt"/>
-                <a:cs typeface="Arial"/>
-              </a:rPr>
-              <a:t>し、</a:t>
-            </a:r>
-            <a:r>
-              <a:rPr lang="ja-JP" altLang="en-US" sz="1200">
-                <a:solidFill>
-                  <a:srgbClr val="000000"/>
-                </a:solidFill>
-                <a:latin typeface="Arial"/>
-                <a:ea typeface="+mn-lt"/>
-                <a:cs typeface="Arial"/>
-              </a:rPr>
-              <a:t>本番環境</a:t>
-            </a:r>
-            <a:r>
-              <a:rPr lang="ja-JP" sz="1200">
-                <a:solidFill>
-                  <a:srgbClr val="000000"/>
-                </a:solidFill>
-                <a:latin typeface="Arial"/>
-                <a:ea typeface="+mn-lt"/>
-                <a:cs typeface="Arial"/>
-              </a:rPr>
-              <a:t>で</a:t>
-            </a:r>
-            <a:r>
-              <a:rPr lang="ja-JP" altLang="en-US" sz="1200">
-                <a:solidFill>
-                  <a:srgbClr val="000000"/>
-                </a:solidFill>
-                <a:latin typeface="Arial"/>
-                <a:ea typeface="+mn-lt"/>
-                <a:cs typeface="Arial"/>
-              </a:rPr>
-              <a:t>の問題</a:t>
-            </a:r>
-            <a:r>
-              <a:rPr lang="ja-JP" sz="1200">
-                <a:solidFill>
-                  <a:srgbClr val="000000"/>
-                </a:solidFill>
-                <a:latin typeface="Arial"/>
-                <a:ea typeface="+mn-lt"/>
-                <a:cs typeface="Arial"/>
-              </a:rPr>
-              <a:t>を</a:t>
-            </a:r>
-            <a:r>
-              <a:rPr lang="ja-JP" altLang="en-US" sz="1200">
-                <a:solidFill>
-                  <a:srgbClr val="000000"/>
-                </a:solidFill>
-                <a:latin typeface="Arial"/>
-                <a:ea typeface="+mn-lt"/>
-                <a:cs typeface="Arial"/>
-              </a:rPr>
-              <a:t>低減</a:t>
-            </a:r>
-          </a:p>
-          <a:p>
-            <a:r>
-              <a:rPr lang="ja-JP" altLang="en-US" sz="1200">
-                <a:solidFill>
-                  <a:srgbClr val="000000"/>
-                </a:solidFill>
-                <a:latin typeface="Arial"/>
-                <a:ea typeface="+mn-lt"/>
-                <a:cs typeface="Arial"/>
-              </a:rPr>
-              <a:t>・同一の</a:t>
-            </a:r>
-            <a:r>
-              <a:rPr lang="en-US" altLang="ja-JP" sz="1200">
-                <a:solidFill>
-                  <a:srgbClr val="000000"/>
-                </a:solidFill>
-                <a:latin typeface="Arial"/>
-                <a:ea typeface="+mn-lt"/>
-                <a:cs typeface="Arial"/>
-              </a:rPr>
-              <a:t>Terraform</a:t>
-            </a:r>
-            <a:r>
-              <a:rPr lang="ja-JP" sz="1200">
-                <a:solidFill>
-                  <a:srgbClr val="000000"/>
-                </a:solidFill>
-                <a:latin typeface="Arial"/>
-                <a:ea typeface="+mn-lt"/>
-                <a:cs typeface="Arial"/>
-              </a:rPr>
-              <a:t>コードを使用し、</a:t>
-            </a:r>
-            <a:r>
-              <a:rPr lang="ja-JP" altLang="en-US" sz="1200">
-                <a:solidFill>
-                  <a:srgbClr val="000000"/>
-                </a:solidFill>
-                <a:latin typeface="Arial"/>
-                <a:ea typeface="+mn-lt"/>
-                <a:cs typeface="Arial"/>
-              </a:rPr>
-              <a:t>複数環境</a:t>
-            </a:r>
-            <a:r>
-              <a:rPr lang="ja-JP" sz="1200">
-                <a:solidFill>
-                  <a:srgbClr val="000000"/>
-                </a:solidFill>
-                <a:latin typeface="Arial"/>
-                <a:ea typeface="+mn-lt"/>
-                <a:cs typeface="Arial"/>
-              </a:rPr>
-              <a:t>の</a:t>
-            </a:r>
-            <a:r>
-              <a:rPr lang="ja-JP" altLang="en-US" sz="1200">
-                <a:solidFill>
-                  <a:srgbClr val="000000"/>
-                </a:solidFill>
-                <a:latin typeface="Arial"/>
-                <a:ea typeface="+mn-lt"/>
-                <a:cs typeface="Arial"/>
-              </a:rPr>
-              <a:t>一貫性確保</a:t>
-            </a:r>
-            <a:endParaRPr lang="en-US" altLang="ja-JP" sz="1200">
-              <a:solidFill>
-                <a:srgbClr val="000000"/>
-              </a:solidFill>
-              <a:latin typeface="Arial"/>
-              <a:ea typeface="+mn-lt"/>
-              <a:cs typeface="Arial"/>
-            </a:endParaRPr>
-          </a:p>
-        </p:txBody>
-      </p:sp>
-      <p:cxnSp>
-        <p:nvCxnSpPr>
-          <p:cNvPr id="7" name="直線矢印コネクタ 6">
-            <a:extLst>
-              <a:ext uri="{FF2B5EF4-FFF2-40B4-BE49-F238E27FC236}">
-                <a16:creationId xmlns:a16="http://schemas.microsoft.com/office/drawing/2014/main" id="{5BD1AE64-094F-1C11-829B-76E24AE4268B}"/>
-              </a:ext>
-            </a:extLst>
-          </p:cNvPr>
-          <p:cNvCxnSpPr/>
-          <p:nvPr/>
-        </p:nvCxnSpPr>
-        <p:spPr>
-          <a:xfrm>
-            <a:off x="5429303" y="3179400"/>
-            <a:ext cx="6329190" cy="5235"/>
-          </a:xfrm>
-          <a:prstGeom prst="straightConnector1">
-            <a:avLst/>
-          </a:prstGeom>
-          <a:ln w="12700">
-            <a:solidFill>
-              <a:schemeClr val="bg2"/>
-            </a:solidFill>
-          </a:ln>
-        </p:spPr>
-        <p:style>
-          <a:lnRef idx="1">
-            <a:schemeClr val="accent1"/>
-          </a:lnRef>
-          <a:fillRef idx="0">
-            <a:schemeClr val="accent1"/>
-          </a:fillRef>
-          <a:effectRef idx="0">
-            <a:schemeClr val="accent1"/>
-          </a:effectRef>
-          <a:fontRef idx="minor">
-            <a:schemeClr val="tx1"/>
-          </a:fontRef>
-        </p:style>
-      </p:cxnSp>
     </p:spTree>
     <p:extLst>
       <p:ext uri="{BB962C8B-B14F-4D97-AF65-F5344CB8AC3E}">
@@ -14930,7 +9155,7 @@
         <p:spPr>
           <a:xfrm>
             <a:off x="335360" y="1822360"/>
-            <a:ext cx="6674153" cy="2031325"/>
+            <a:ext cx="6674153" cy="369332"/>
           </a:xfrm>
           <a:prstGeom prst="rect">
             <a:avLst/>
@@ -14942,80 +9167,6 @@
             <a:spAutoFit/>
           </a:bodyPr>
           <a:lstStyle/>
-          <a:p>
-            <a:r>
-              <a:rPr lang="ja-JP" altLang="en-US" dirty="0">
-                <a:ea typeface="游ゴシック"/>
-              </a:rPr>
-              <a:t>・クラウドインフラエンジニアとしての実務経験を積む</a:t>
-            </a:r>
-            <a:endParaRPr lang="en-US" altLang="ja-JP" dirty="0">
-              <a:ea typeface="游ゴシック"/>
-            </a:endParaRPr>
-          </a:p>
-          <a:p>
-            <a:endParaRPr lang="ja-JP" altLang="en-US" dirty="0"/>
-          </a:p>
-          <a:p>
-            <a:r>
-              <a:rPr lang="ja-JP" altLang="en-US" dirty="0">
-                <a:ea typeface="游ゴシック"/>
-              </a:rPr>
-              <a:t>・コンテナ技術（</a:t>
-            </a:r>
-            <a:r>
-              <a:rPr lang="en-US" altLang="ja-JP" dirty="0">
-                <a:ea typeface="游ゴシック"/>
-              </a:rPr>
-              <a:t>Docker</a:t>
-            </a:r>
-            <a:r>
-              <a:rPr lang="ja-JP" altLang="en-US" dirty="0">
-                <a:ea typeface="游ゴシック"/>
-              </a:rPr>
-              <a:t>、</a:t>
-            </a:r>
-            <a:r>
-              <a:rPr lang="en-US" altLang="ja-JP" dirty="0">
-                <a:ea typeface="游ゴシック"/>
-              </a:rPr>
-              <a:t>Kubernetes</a:t>
-            </a:r>
-            <a:r>
-              <a:rPr lang="ja-JP" altLang="en-US" dirty="0">
-                <a:ea typeface="游ゴシック"/>
-              </a:rPr>
-              <a:t>）の習得</a:t>
-            </a:r>
-            <a:endParaRPr lang="en-US" altLang="ja-JP" dirty="0">
-              <a:ea typeface="游ゴシック" panose="020B0400000000000000" pitchFamily="34" charset="-128"/>
-            </a:endParaRPr>
-          </a:p>
-          <a:p>
-            <a:endParaRPr lang="ja-JP" altLang="en-US" dirty="0"/>
-          </a:p>
-          <a:p>
-            <a:r>
-              <a:rPr lang="en-US" altLang="ja-JP" dirty="0">
-                <a:ea typeface="游ゴシック"/>
-              </a:rPr>
-              <a:t>・CI/CD</a:t>
-            </a:r>
-            <a:r>
-              <a:rPr lang="ja-JP" altLang="en-US" dirty="0">
-                <a:ea typeface="游ゴシック"/>
-              </a:rPr>
-              <a:t>パイプラインの構築スキルの習得</a:t>
-            </a:r>
-            <a:endParaRPr lang="en-US" altLang="ja-JP" dirty="0">
-              <a:ea typeface="游ゴシック" panose="020B0400000000000000" pitchFamily="34" charset="-128"/>
-            </a:endParaRPr>
-          </a:p>
-          <a:p>
-            <a:endParaRPr lang="en-US" altLang="ja-JP" dirty="0">
-              <a:ea typeface="游ゴシック"/>
-            </a:endParaRPr>
-          </a:p>
           <a:p>
             <a:r>
               <a:rPr lang="ja-JP" altLang="en-US" dirty="0">
@@ -15811,16 +9962,6 @@
 </file>
 
 <file path=customXml/item2.xml><?xml version="1.0" encoding="utf-8"?>
-<p:properties xmlns:p="http://schemas.microsoft.com/office/2006/metadata/properties" xmlns:xsi="http://www.w3.org/2001/XMLSchema-instance" xmlns:pc="http://schemas.microsoft.com/office/infopath/2007/PartnerControls">
-  <documentManagement>
-    <lcf76f155ced4ddcb4097134ff3c332f xmlns="5d5e86c2-1981-49c0-a4c5-18f5e325411d">
-      <Terms xmlns="http://schemas.microsoft.com/office/infopath/2007/PartnerControls"/>
-    </lcf76f155ced4ddcb4097134ff3c332f>
-  </documentManagement>
-</p:properties>
-</file>
-
-<file path=customXml/item3.xml><?xml version="1.0" encoding="utf-8"?>
 <ct:contentTypeSchema xmlns:ct="http://schemas.microsoft.com/office/2006/metadata/contentType" xmlns:ma="http://schemas.microsoft.com/office/2006/metadata/properties/metaAttributes" ct:_="" ma:_="" ma:contentTypeName="ドキュメント" ma:contentTypeID="0x01010050778A40BB97904D942255E2E155F7D0" ma:contentTypeVersion="14" ma:contentTypeDescription="新しいドキュメントを作成します。" ma:contentTypeScope="" ma:versionID="69a6922dbfd1ab1826ad37d50c30c63c">
   <xsd:schema xmlns:xsd="http://www.w3.org/2001/XMLSchema" xmlns:xs="http://www.w3.org/2001/XMLSchema" xmlns:p="http://schemas.microsoft.com/office/2006/metadata/properties" xmlns:ns2="5d5e86c2-1981-49c0-a4c5-18f5e325411d" xmlns:ns3="3f560f56-3566-4265-8616-bf2c1da3872b" targetNamespace="http://schemas.microsoft.com/office/2006/metadata/properties" ma:root="true" ma:fieldsID="3fe0b2f1430f4c41453b7d9b1b5c55c1" ns2:_="" ns3:_="">
     <xsd:import namespace="5d5e86c2-1981-49c0-a4c5-18f5e325411d"/>
@@ -16037,6 +10178,16 @@
 </ct:contentTypeSchema>
 </file>
 
+<file path=customXml/item3.xml><?xml version="1.0" encoding="utf-8"?>
+<p:properties xmlns:p="http://schemas.microsoft.com/office/2006/metadata/properties" xmlns:xsi="http://www.w3.org/2001/XMLSchema-instance" xmlns:pc="http://schemas.microsoft.com/office/infopath/2007/PartnerControls">
+  <documentManagement>
+    <lcf76f155ced4ddcb4097134ff3c332f xmlns="5d5e86c2-1981-49c0-a4c5-18f5e325411d">
+      <Terms xmlns="http://schemas.microsoft.com/office/infopath/2007/PartnerControls"/>
+    </lcf76f155ced4ddcb4097134ff3c332f>
+  </documentManagement>
+</p:properties>
+</file>
+
 <file path=customXml/itemProps1.xml><?xml version="1.0" encoding="utf-8"?>
 <ds:datastoreItem xmlns:ds="http://schemas.openxmlformats.org/officeDocument/2006/customXml" ds:itemID="{EC315674-D7B8-47E2-BC37-5670892D3199}">
   <ds:schemaRefs>
@@ -16046,16 +10197,6 @@
 </file>
 
 <file path=customXml/itemProps2.xml><?xml version="1.0" encoding="utf-8"?>
-<ds:datastoreItem xmlns:ds="http://schemas.openxmlformats.org/officeDocument/2006/customXml" ds:itemID="{06C0FC12-A96B-4033-90DC-496C404C70D1}">
-  <ds:schemaRefs>
-    <ds:schemaRef ds:uri="http://schemas.microsoft.com/office/2006/metadata/properties"/>
-    <ds:schemaRef ds:uri="http://schemas.microsoft.com/office/infopath/2007/PartnerControls"/>
-    <ds:schemaRef ds:uri="5d5e86c2-1981-49c0-a4c5-18f5e325411d"/>
-  </ds:schemaRefs>
-</ds:datastoreItem>
-</file>
-
-<file path=customXml/itemProps3.xml><?xml version="1.0" encoding="utf-8"?>
 <ds:datastoreItem xmlns:ds="http://schemas.openxmlformats.org/officeDocument/2006/customXml" ds:itemID="{3185AFE0-2C0D-480C-9101-310C580611BE}">
   <ds:schemaRefs>
     <ds:schemaRef ds:uri="http://schemas.microsoft.com/office/2006/metadata/contentType"/>
@@ -16072,4 +10213,14 @@
     <ds:schemaRef ds:uri="http://schemas.microsoft.com/internal/obd"/>
   </ds:schemaRefs>
 </ds:datastoreItem>
+</file>
+
+<file path=customXml/itemProps3.xml><?xml version="1.0" encoding="utf-8"?>
+<ds:datastoreItem xmlns:ds="http://schemas.openxmlformats.org/officeDocument/2006/customXml" ds:itemID="{06C0FC12-A96B-4033-90DC-496C404C70D1}">
+  <ds:schemaRefs>
+    <ds:schemaRef ds:uri="http://schemas.microsoft.com/office/2006/metadata/properties"/>
+    <ds:schemaRef ds:uri="http://schemas.microsoft.com/office/infopath/2007/PartnerControls"/>
+    <ds:schemaRef ds:uri="5d5e86c2-1981-49c0-a4c5-18f5e325411d"/>
+  </ds:schemaRefs>
+</ds:datastoreItem>
 </file>
--- a/ポートフォリオ_秋池.pptx
+++ b/ポートフォリオ_秋池.pptx
@@ -212,7 +212,7 @@
           <a:p>
             <a:fld id="{7DBB8152-7813-4DD7-8C30-6943339385CA}" type="datetimeFigureOut">
               <a:rPr kumimoji="1" lang="ja-JP" altLang="en-US" smtClean="0"/>
-              <a:t>2025/11/26</a:t>
+              <a:t>2026/3/23</a:t>
             </a:fld>
             <a:endParaRPr kumimoji="1" lang="ja-JP" altLang="en-US"/>
           </a:p>
@@ -941,7 +941,7 @@
           <a:p>
             <a:fld id="{48522A55-22D5-47DA-B376-12D74840BD06}" type="datetime1">
               <a:rPr kumimoji="1" lang="ja-JP" altLang="en-US" smtClean="0"/>
-              <a:t>2025/11/26</a:t>
+              <a:t>2026/3/23</a:t>
             </a:fld>
             <a:endParaRPr kumimoji="1" lang="ja-JP" altLang="en-US"/>
           </a:p>
@@ -1136,7 +1136,7 @@
           <a:p>
             <a:fld id="{E1847F1A-3080-4AE7-9245-F405EDE1DDF3}" type="datetime1">
               <a:rPr lang="ja-JP" altLang="en-US" smtClean="0"/>
-              <a:t>2025/11/26</a:t>
+              <a:t>2026/3/23</a:t>
             </a:fld>
             <a:endParaRPr lang="ja-JP" altLang="en-US"/>
           </a:p>
@@ -1506,7 +1506,7 @@
           <a:p>
             <a:fld id="{F1FA71E0-FC87-437A-9C14-FB30BE460721}" type="datetime1">
               <a:rPr lang="ja-JP" altLang="en-US" smtClean="0"/>
-              <a:t>2025/11/26</a:t>
+              <a:t>2026/3/23</a:t>
             </a:fld>
             <a:endParaRPr lang="ja-JP" altLang="en-US"/>
           </a:p>
@@ -2513,7 +2513,7 @@
                   <a:latin typeface="游ゴシック"/>
                   <a:ea typeface="游ゴシック"/>
                 </a:rPr>
-                <a:t>5</a:t>
+                <a:t>6</a:t>
               </a:r>
               <a:r>
                 <a:rPr lang="ja-JP" altLang="en-US" sz="1800" b="0" dirty="0">
@@ -2527,7 +2527,7 @@
                   <a:latin typeface="游ゴシック"/>
                   <a:ea typeface="游ゴシック"/>
                 </a:rPr>
-                <a:t>11</a:t>
+                <a:t>03</a:t>
               </a:r>
               <a:r>
                 <a:rPr lang="ja-JP" altLang="en-US" sz="1800" b="0" dirty="0">
@@ -2541,7 +2541,7 @@
                   <a:latin typeface="游ゴシック"/>
                   <a:ea typeface="游ゴシック"/>
                 </a:rPr>
-                <a:t>26</a:t>
+                <a:t>23</a:t>
               </a:r>
               <a:r>
                 <a:rPr lang="ja-JP" altLang="en-US" sz="1800" b="0" dirty="0">
@@ -2610,29 +2610,23 @@
             <p:ph type="title"/>
           </p:nvPr>
         </p:nvSpPr>
-        <p:spPr/>
+        <p:spPr>
+          <a:xfrm>
+            <a:off x="335360" y="116632"/>
+            <a:ext cx="2786663" cy="468054"/>
+          </a:xfrm>
+        </p:spPr>
         <p:txBody>
           <a:bodyPr/>
           <a:lstStyle/>
           <a:p>
             <a:r>
-              <a:rPr kumimoji="1" lang="ja-JP" altLang="en-US">
+              <a:rPr kumimoji="1" lang="ja-JP" altLang="en-US" dirty="0">
                 <a:latin typeface="游ゴシック"/>
                 <a:ea typeface="游ゴシック"/>
               </a:rPr>
-              <a:t>プロフィール・</a:t>
-            </a:r>
-            <a:r>
-              <a:rPr lang="ja-JP" altLang="en-US">
-                <a:latin typeface="游ゴシック"/>
-                <a:ea typeface="游ゴシック"/>
-              </a:rPr>
-              <a:t>自己PR</a:t>
-            </a:r>
-            <a:endParaRPr kumimoji="1" lang="ja-JP" altLang="en-US">
-              <a:latin typeface="游ゴシック"/>
-              <a:ea typeface="游ゴシック"/>
-            </a:endParaRPr>
+              <a:t>プロフィール</a:t>
+            </a:r>
           </a:p>
         </p:txBody>
       </p:sp>
@@ -2680,7 +2674,7 @@
         </p:nvSpPr>
         <p:spPr>
           <a:xfrm>
-            <a:off x="562974" y="3474000"/>
+            <a:off x="236398" y="802194"/>
             <a:ext cx="827205" cy="369332"/>
           </a:xfrm>
           <a:prstGeom prst="rect">
@@ -2792,7 +2786,7 @@
           </a:lstStyle>
           <a:p>
             <a:r>
-              <a:rPr lang="ja-JP" altLang="en-US" b="1">
+              <a:rPr lang="ja-JP" altLang="en-US" b="1" dirty="0">
                 <a:solidFill>
                   <a:srgbClr val="000000"/>
                 </a:solidFill>
@@ -2800,7 +2794,7 @@
               </a:rPr>
               <a:t>氏名</a:t>
             </a:r>
-            <a:endParaRPr lang="en-US" altLang="ja-JP" b="1">
+            <a:endParaRPr lang="en-US" altLang="ja-JP" b="1" dirty="0">
               <a:solidFill>
                 <a:srgbClr val="000000"/>
               </a:solidFill>
@@ -2823,7 +2817,7 @@
         </p:nvSpPr>
         <p:spPr>
           <a:xfrm>
-            <a:off x="1786466" y="3474000"/>
+            <a:off x="1356156" y="802194"/>
             <a:ext cx="2303949" cy="369332"/>
           </a:xfrm>
           <a:prstGeom prst="rect">
@@ -2966,7 +2960,7 @@
         </p:nvSpPr>
         <p:spPr>
           <a:xfrm>
-            <a:off x="562974" y="4134798"/>
+            <a:off x="236398" y="1402102"/>
             <a:ext cx="827205" cy="369332"/>
           </a:xfrm>
           <a:prstGeom prst="rect">
@@ -3078,7 +3072,7 @@
           </a:lstStyle>
           <a:p>
             <a:r>
-              <a:rPr lang="ja-JP" altLang="en-US" b="1">
+              <a:rPr lang="ja-JP" altLang="en-US" b="1" dirty="0">
                 <a:solidFill>
                   <a:srgbClr val="000000"/>
                 </a:solidFill>
@@ -3086,7 +3080,7 @@
               </a:rPr>
               <a:t>略歴</a:t>
             </a:r>
-            <a:endParaRPr lang="en-US" altLang="ja-JP" b="1">
+            <a:endParaRPr lang="en-US" altLang="ja-JP" b="1" dirty="0">
               <a:solidFill>
                 <a:srgbClr val="000000"/>
               </a:solidFill>
@@ -3109,8 +3103,8 @@
         </p:nvSpPr>
         <p:spPr>
           <a:xfrm>
-            <a:off x="1756932" y="4140704"/>
-            <a:ext cx="3562132" cy="646331"/>
+            <a:off x="1356156" y="1402102"/>
+            <a:ext cx="3986858" cy="3046988"/>
           </a:xfrm>
           <a:prstGeom prst="rect">
             <a:avLst/>
@@ -3221,16 +3215,58 @@
           </a:lstStyle>
           <a:p>
             <a:r>
-              <a:rPr lang="ja-JP" dirty="0">
+              <a:rPr lang="en-US" altLang="ja-JP" sz="1600" dirty="0">
                 <a:solidFill>
                   <a:srgbClr val="000000"/>
                 </a:solidFill>
                 <a:ea typeface="+mn-lt"/>
                 <a:cs typeface="+mn-lt"/>
               </a:rPr>
-              <a:t>クラウドインフラエンジニア</a:t>
-            </a:r>
-            <a:endParaRPr lang="en-US" altLang="ja-JP" dirty="0">
+              <a:t>2016</a:t>
+            </a:r>
+            <a:r>
+              <a:rPr lang="ja-JP" altLang="en-US" sz="1600" dirty="0">
+                <a:solidFill>
+                  <a:srgbClr val="000000"/>
+                </a:solidFill>
+                <a:ea typeface="+mn-lt"/>
+                <a:cs typeface="+mn-lt"/>
+              </a:rPr>
+              <a:t>年</a:t>
+            </a:r>
+            <a:r>
+              <a:rPr lang="en-US" altLang="ja-JP" sz="1600" dirty="0">
+                <a:solidFill>
+                  <a:srgbClr val="000000"/>
+                </a:solidFill>
+                <a:ea typeface="+mn-lt"/>
+                <a:cs typeface="+mn-lt"/>
+              </a:rPr>
+              <a:t> 5</a:t>
+            </a:r>
+            <a:r>
+              <a:rPr lang="ja-JP" altLang="en-US" sz="1600" dirty="0">
+                <a:solidFill>
+                  <a:srgbClr val="000000"/>
+                </a:solidFill>
+                <a:ea typeface="+mn-lt"/>
+                <a:cs typeface="+mn-lt"/>
+              </a:rPr>
+              <a:t>月　</a:t>
+            </a:r>
+            <a:r>
+              <a:rPr lang="ja-JP" altLang="en-US" sz="1600" dirty="0"/>
+              <a:t>監視・運用オペレーターとして</a:t>
+            </a:r>
+            <a:r>
+              <a:rPr lang="en-US" altLang="ja-JP" sz="1600" dirty="0"/>
+              <a:t>IT</a:t>
+            </a:r>
+            <a:r>
+              <a:rPr lang="ja-JP" altLang="en-US" sz="1600" dirty="0"/>
+              <a:t>業界に従事</a:t>
+            </a:r>
+            <a:endParaRPr lang="ja-JP" altLang="en-US" sz="1600" dirty="0">
               <a:solidFill>
                 <a:srgbClr val="000000"/>
               </a:solidFill>
@@ -3239,17 +3275,7 @@
             </a:endParaRPr>
           </a:p>
           <a:p>
-            <a:r>
-              <a:rPr lang="ja-JP" dirty="0">
-                <a:solidFill>
-                  <a:srgbClr val="000000"/>
-                </a:solidFill>
-                <a:ea typeface="+mn-lt"/>
-                <a:cs typeface="+mn-lt"/>
-              </a:rPr>
-              <a:t>としてキャリアをスタート</a:t>
-            </a:r>
-            <a:endParaRPr lang="en-US" altLang="ja-JP" dirty="0">
+            <a:endParaRPr lang="en-US" altLang="ja-JP" sz="1600" dirty="0">
               <a:solidFill>
                 <a:srgbClr val="000000"/>
               </a:solidFill>
@@ -3257,92 +3283,217 @@
               <a:cs typeface="+mn-lt"/>
             </a:endParaRPr>
           </a:p>
-        </p:txBody>
-      </p:sp>
-      <p:sp>
-        <p:nvSpPr>
-          <p:cNvPr id="6" name="楕円 5">
-            <a:extLst>
-              <a:ext uri="{FF2B5EF4-FFF2-40B4-BE49-F238E27FC236}">
-                <a16:creationId xmlns:a16="http://schemas.microsoft.com/office/drawing/2014/main" id="{589D4676-136F-1972-F2AE-3A241BEE7C90}"/>
-              </a:ext>
-            </a:extLst>
-          </p:cNvPr>
-          <p:cNvSpPr/>
-          <p:nvPr/>
-        </p:nvSpPr>
-        <p:spPr>
-          <a:xfrm>
-            <a:off x="490039" y="876152"/>
-            <a:ext cx="1837068" cy="1813442"/>
-          </a:xfrm>
-          <a:prstGeom prst="ellipse">
-            <a:avLst/>
-          </a:prstGeom>
-          <a:solidFill>
-            <a:schemeClr val="bg2"/>
-          </a:solidFill>
-          <a:ln>
-            <a:noFill/>
-          </a:ln>
-        </p:spPr>
-        <p:style>
-          <a:lnRef idx="2">
-            <a:schemeClr val="accent1">
-              <a:shade val="15000"/>
-            </a:schemeClr>
-          </a:lnRef>
-          <a:fillRef idx="1">
-            <a:schemeClr val="accent1"/>
-          </a:fillRef>
-          <a:effectRef idx="0">
-            <a:schemeClr val="accent1"/>
-          </a:effectRef>
-          <a:fontRef idx="minor">
-            <a:schemeClr val="lt1"/>
-          </a:fontRef>
-        </p:style>
-        <p:txBody>
-          <a:bodyPr lIns="0" tIns="0" rIns="0" bIns="0" rtlCol="0" anchor="ctr"/>
-          <a:lstStyle/>
-          <a:p>
-            <a:pPr algn="ctr"/>
-            <a:r>
-              <a:rPr lang="ja-JP" altLang="en-US" sz="1400">
-                <a:solidFill>
-                  <a:srgbClr val="595959"/>
-                </a:solidFill>
-                <a:latin typeface="游ゴシック"/>
-                <a:ea typeface="游ゴシック"/>
-              </a:rPr>
-              <a:t>プロフィール</a:t>
-            </a:r>
-          </a:p>
-          <a:p>
-            <a:pPr algn="ctr"/>
-            <a:r>
-              <a:rPr lang="ja-JP" altLang="en-US" sz="1400">
-                <a:solidFill>
-                  <a:srgbClr val="595959"/>
-                </a:solidFill>
-                <a:latin typeface="游ゴシック"/>
-                <a:ea typeface="游ゴシック"/>
-              </a:rPr>
-              <a:t>写真や</a:t>
-            </a:r>
-          </a:p>
-          <a:p>
-            <a:pPr algn="ctr"/>
-            <a:r>
-              <a:rPr lang="ja-JP" altLang="en-US" sz="1400">
-                <a:solidFill>
-                  <a:srgbClr val="595959"/>
-                </a:solidFill>
-                <a:latin typeface="游ゴシック"/>
-                <a:ea typeface="游ゴシック"/>
-              </a:rPr>
-              <a:t>アイコン</a:t>
-            </a:r>
+          <a:p>
+            <a:r>
+              <a:rPr lang="en-US" altLang="ja-JP" sz="1600" dirty="0">
+                <a:solidFill>
+                  <a:srgbClr val="000000"/>
+                </a:solidFill>
+                <a:ea typeface="+mn-lt"/>
+                <a:cs typeface="+mn-lt"/>
+              </a:rPr>
+              <a:t>2017</a:t>
+            </a:r>
+            <a:r>
+              <a:rPr lang="ja-JP" altLang="en-US" sz="1600" dirty="0">
+                <a:solidFill>
+                  <a:srgbClr val="000000"/>
+                </a:solidFill>
+                <a:ea typeface="+mn-lt"/>
+                <a:cs typeface="+mn-lt"/>
+              </a:rPr>
+              <a:t>年</a:t>
+            </a:r>
+            <a:r>
+              <a:rPr lang="en-US" altLang="ja-JP" sz="1600" dirty="0">
+                <a:solidFill>
+                  <a:srgbClr val="000000"/>
+                </a:solidFill>
+                <a:ea typeface="+mn-lt"/>
+                <a:cs typeface="+mn-lt"/>
+              </a:rPr>
+              <a:t>6</a:t>
+            </a:r>
+            <a:r>
+              <a:rPr lang="ja-JP" altLang="en-US" sz="1600" dirty="0">
+                <a:solidFill>
+                  <a:srgbClr val="000000"/>
+                </a:solidFill>
+                <a:ea typeface="+mn-lt"/>
+                <a:cs typeface="+mn-lt"/>
+              </a:rPr>
+              <a:t>月 </a:t>
+            </a:r>
+            <a:r>
+              <a:rPr lang="en-US" altLang="ja-JP" sz="1600" dirty="0">
+                <a:solidFill>
+                  <a:srgbClr val="000000"/>
+                </a:solidFill>
+                <a:ea typeface="+mn-lt"/>
+                <a:cs typeface="+mn-lt"/>
+              </a:rPr>
+              <a:t>~</a:t>
+            </a:r>
+            <a:r>
+              <a:rPr lang="ja-JP" altLang="en-US" sz="1600" dirty="0">
+                <a:solidFill>
+                  <a:srgbClr val="000000"/>
+                </a:solidFill>
+                <a:ea typeface="+mn-lt"/>
+                <a:cs typeface="+mn-lt"/>
+              </a:rPr>
+              <a:t> </a:t>
+            </a:r>
+            <a:r>
+              <a:rPr lang="en-US" altLang="ja-JP" sz="1600" dirty="0">
+                <a:solidFill>
+                  <a:srgbClr val="000000"/>
+                </a:solidFill>
+                <a:ea typeface="+mn-lt"/>
+                <a:cs typeface="+mn-lt"/>
+              </a:rPr>
+              <a:t>2023</a:t>
+            </a:r>
+            <a:r>
+              <a:rPr lang="ja-JP" altLang="en-US" sz="1600" dirty="0">
+                <a:solidFill>
+                  <a:srgbClr val="000000"/>
+                </a:solidFill>
+                <a:ea typeface="+mn-lt"/>
+                <a:cs typeface="+mn-lt"/>
+              </a:rPr>
+              <a:t>年</a:t>
+            </a:r>
+            <a:r>
+              <a:rPr lang="en-US" altLang="ja-JP" sz="1600" dirty="0">
+                <a:solidFill>
+                  <a:srgbClr val="000000"/>
+                </a:solidFill>
+                <a:ea typeface="+mn-lt"/>
+                <a:cs typeface="+mn-lt"/>
+              </a:rPr>
+              <a:t>2</a:t>
+            </a:r>
+            <a:r>
+              <a:rPr lang="ja-JP" altLang="en-US" sz="1600" dirty="0">
+                <a:solidFill>
+                  <a:srgbClr val="000000"/>
+                </a:solidFill>
+                <a:ea typeface="+mn-lt"/>
+                <a:cs typeface="+mn-lt"/>
+              </a:rPr>
+              <a:t>月　</a:t>
+            </a:r>
+            <a:r>
+              <a:rPr lang="ja-JP" altLang="en-US" sz="1600" dirty="0"/>
+              <a:t>インフラ運用・保守エンジニアとしてオンプレミス／プライベートクラウド／</a:t>
+            </a:r>
+            <a:r>
+              <a:rPr lang="en-US" altLang="ja-JP" sz="1600" dirty="0"/>
+              <a:t>AWS</a:t>
+            </a:r>
+            <a:r>
+              <a:rPr lang="ja-JP" altLang="en-US" sz="1600" dirty="0"/>
+              <a:t>環境における障害対応、運用保守業務を担当</a:t>
+            </a:r>
+            <a:endParaRPr lang="ja-JP" altLang="en-US" sz="1600" dirty="0">
+              <a:solidFill>
+                <a:srgbClr val="000000"/>
+              </a:solidFill>
+              <a:ea typeface="+mn-lt"/>
+              <a:cs typeface="+mn-lt"/>
+            </a:endParaRPr>
+          </a:p>
+          <a:p>
+            <a:endParaRPr lang="ja-JP" altLang="en-US" sz="1600" dirty="0">
+              <a:solidFill>
+                <a:srgbClr val="000000"/>
+              </a:solidFill>
+              <a:ea typeface="+mn-lt"/>
+              <a:cs typeface="+mn-lt"/>
+            </a:endParaRPr>
+          </a:p>
+          <a:p>
+            <a:r>
+              <a:rPr lang="en-US" altLang="ja-JP" sz="1600" dirty="0">
+                <a:solidFill>
+                  <a:srgbClr val="000000"/>
+                </a:solidFill>
+                <a:ea typeface="+mn-lt"/>
+                <a:cs typeface="+mn-lt"/>
+              </a:rPr>
+              <a:t>2023</a:t>
+            </a:r>
+            <a:r>
+              <a:rPr lang="ja-JP" altLang="en-US" sz="1600" dirty="0">
+                <a:solidFill>
+                  <a:srgbClr val="000000"/>
+                </a:solidFill>
+                <a:ea typeface="+mn-lt"/>
+                <a:cs typeface="+mn-lt"/>
+              </a:rPr>
+              <a:t>年 </a:t>
+            </a:r>
+            <a:r>
+              <a:rPr lang="en-US" altLang="ja-JP" sz="1600" dirty="0">
+                <a:solidFill>
+                  <a:srgbClr val="000000"/>
+                </a:solidFill>
+                <a:ea typeface="+mn-lt"/>
+                <a:cs typeface="+mn-lt"/>
+              </a:rPr>
+              <a:t>~ </a:t>
+            </a:r>
+            <a:r>
+              <a:rPr lang="ja-JP" altLang="en-US" sz="1600" dirty="0">
+                <a:solidFill>
+                  <a:srgbClr val="000000"/>
+                </a:solidFill>
+                <a:ea typeface="+mn-lt"/>
+                <a:cs typeface="+mn-lt"/>
+              </a:rPr>
+              <a:t>現在　</a:t>
+            </a:r>
+            <a:r>
+              <a:rPr lang="en-US" altLang="ja-JP" sz="1600" dirty="0">
+                <a:solidFill>
+                  <a:srgbClr val="000000"/>
+                </a:solidFill>
+                <a:ea typeface="+mn-lt"/>
+                <a:cs typeface="+mn-lt"/>
+              </a:rPr>
+              <a:t>A</a:t>
+            </a:r>
+            <a:r>
+              <a:rPr lang="en-US" altLang="ja-JP" sz="1600" dirty="0"/>
+              <a:t>WS</a:t>
+            </a:r>
+            <a:r>
+              <a:rPr lang="ja-JP" altLang="en-US" sz="1600" dirty="0"/>
+              <a:t>リセラー企業にてテクニカルサポートを担当</a:t>
+            </a:r>
+            <a:br>
+              <a:rPr lang="ja-JP" altLang="en-US" sz="1600" dirty="0"/>
+            </a:br>
+            <a:r>
+              <a:rPr lang="ja-JP" altLang="en-US" sz="1600" dirty="0"/>
+              <a:t>法人顧客向け</a:t>
+            </a:r>
+            <a:r>
+              <a:rPr lang="en-US" altLang="ja-JP" sz="1600" dirty="0"/>
+              <a:t>AWS</a:t>
+            </a:r>
+            <a:r>
+              <a:rPr lang="ja-JP" altLang="en-US" sz="1600" dirty="0"/>
+              <a:t>技術問い合わせ対応およびトラブルシューティングに従事</a:t>
+            </a:r>
+            <a:endParaRPr lang="en-US" altLang="ja-JP" sz="1600" dirty="0">
+              <a:solidFill>
+                <a:srgbClr val="000000"/>
+              </a:solidFill>
+              <a:ea typeface="+mn-lt"/>
+              <a:cs typeface="+mn-lt"/>
+            </a:endParaRPr>
           </a:p>
         </p:txBody>
       </p:sp>
@@ -3360,7 +3511,7 @@
         </p:nvSpPr>
         <p:spPr>
           <a:xfrm>
-            <a:off x="562974" y="5074588"/>
+            <a:off x="134983" y="4739628"/>
             <a:ext cx="1156864" cy="646331"/>
           </a:xfrm>
           <a:prstGeom prst="rect">
@@ -3472,7 +3623,7 @@
           </a:lstStyle>
           <a:p>
             <a:r>
-              <a:rPr lang="ja-JP" altLang="en-US" b="1">
+              <a:rPr lang="ja-JP" altLang="en-US" b="1" dirty="0">
                 <a:solidFill>
                   <a:srgbClr val="000000"/>
                 </a:solidFill>
@@ -3480,11 +3631,11 @@
               </a:rPr>
               <a:t>強み/</a:t>
             </a:r>
-            <a:endParaRPr lang="ja-JP"/>
-          </a:p>
-          <a:p>
-            <a:r>
-              <a:rPr lang="ja-JP" altLang="en-US" b="1">
+            <a:endParaRPr lang="ja-JP" dirty="0"/>
+          </a:p>
+          <a:p>
+            <a:r>
+              <a:rPr lang="ja-JP" altLang="en-US" b="1" dirty="0">
                 <a:solidFill>
                   <a:srgbClr val="000000"/>
                 </a:solidFill>
@@ -3492,7 +3643,7 @@
               </a:rPr>
               <a:t>専門分野</a:t>
             </a:r>
-            <a:endParaRPr lang="ja-JP"/>
+            <a:endParaRPr lang="ja-JP" dirty="0"/>
           </a:p>
         </p:txBody>
       </p:sp>
@@ -3510,8 +3661,8 @@
         </p:nvSpPr>
         <p:spPr>
           <a:xfrm>
-            <a:off x="1731923" y="5104122"/>
-            <a:ext cx="3961921" cy="646331"/>
+            <a:off x="1291847" y="4739628"/>
+            <a:ext cx="3961921" cy="1077218"/>
           </a:xfrm>
           <a:prstGeom prst="rect">
             <a:avLst/>
@@ -3622,26 +3773,86 @@
           </a:lstStyle>
           <a:p>
             <a:r>
-              <a:rPr lang="en-US" altLang="ja-JP" dirty="0">
+              <a:rPr lang="ja-JP" altLang="en-US" sz="1600" dirty="0">
                 <a:solidFill>
                   <a:srgbClr val="000000"/>
                 </a:solidFill>
                 <a:ea typeface="+mn-lt"/>
                 <a:cs typeface="+mn-lt"/>
               </a:rPr>
-              <a:t>AWS</a:t>
-            </a:r>
-            <a:r>
-              <a:rPr lang="ja-JP" altLang="en-US" dirty="0">
+              <a:t>・障害対応／トラブルシューティング</a:t>
+            </a:r>
+            <a:endParaRPr lang="en-US" altLang="ja-JP" sz="1600" dirty="0">
+              <a:solidFill>
+                <a:srgbClr val="000000"/>
+              </a:solidFill>
+              <a:ea typeface="+mn-lt"/>
+              <a:cs typeface="+mn-lt"/>
+            </a:endParaRPr>
+          </a:p>
+          <a:p>
+            <a:r>
+              <a:rPr lang="ja-JP" altLang="en-US" sz="1600" dirty="0">
                 <a:solidFill>
                   <a:srgbClr val="000000"/>
                 </a:solidFill>
                 <a:ea typeface="+mn-lt"/>
                 <a:cs typeface="+mn-lt"/>
               </a:rPr>
-              <a:t>に関する技術サポートとトラブルシューティング</a:t>
-            </a:r>
-            <a:endParaRPr lang="en-US" altLang="ja-JP" dirty="0">
+              <a:t>・ログ解析／原因切り分け</a:t>
+            </a:r>
+            <a:endParaRPr lang="en-US" altLang="ja-JP" sz="1600" dirty="0">
+              <a:solidFill>
+                <a:srgbClr val="000000"/>
+              </a:solidFill>
+              <a:ea typeface="+mn-lt"/>
+              <a:cs typeface="+mn-lt"/>
+            </a:endParaRPr>
+          </a:p>
+          <a:p>
+            <a:r>
+              <a:rPr lang="ja-JP" altLang="en-US" sz="1600" dirty="0">
+                <a:solidFill>
+                  <a:srgbClr val="000000"/>
+                </a:solidFill>
+                <a:ea typeface="+mn-lt"/>
+                <a:cs typeface="+mn-lt"/>
+              </a:rPr>
+              <a:t>・顧客対応品質改善、ナレッジ整備</a:t>
+            </a:r>
+          </a:p>
+          <a:p>
+            <a:r>
+              <a:rPr lang="ja-JP" altLang="en-US" sz="1600" dirty="0">
+                <a:solidFill>
+                  <a:srgbClr val="000000"/>
+                </a:solidFill>
+                <a:ea typeface="+mn-lt"/>
+                <a:cs typeface="+mn-lt"/>
+              </a:rPr>
+              <a:t>・</a:t>
+            </a:r>
+            <a:r>
+              <a:rPr lang="en-US" altLang="ja-JP" sz="1600" dirty="0">
+                <a:solidFill>
+                  <a:srgbClr val="000000"/>
+                </a:solidFill>
+                <a:ea typeface="+mn-lt"/>
+                <a:cs typeface="+mn-lt"/>
+              </a:rPr>
+              <a:t>AWS</a:t>
+            </a:r>
+            <a:r>
+              <a:rPr lang="ja-JP" altLang="en-US" sz="1600" dirty="0">
+                <a:solidFill>
+                  <a:srgbClr val="000000"/>
+                </a:solidFill>
+                <a:ea typeface="+mn-lt"/>
+                <a:cs typeface="+mn-lt"/>
+              </a:rPr>
+              <a:t>法人向けテクニカルサポート</a:t>
+            </a:r>
+            <a:endParaRPr lang="en-US" altLang="ja-JP" sz="1600" dirty="0">
               <a:solidFill>
                 <a:srgbClr val="000000"/>
               </a:solidFill>
@@ -3665,7 +3876,7 @@
         </p:nvSpPr>
         <p:spPr>
           <a:xfrm>
-            <a:off x="6077505" y="1173341"/>
+            <a:off x="5527209" y="1145480"/>
             <a:ext cx="29238" cy="5037558"/>
           </a:xfrm>
           <a:prstGeom prst="rect">
@@ -3813,8 +4024,8 @@
         </p:nvSpPr>
         <p:spPr>
           <a:xfrm>
-            <a:off x="6407163" y="2277197"/>
-            <a:ext cx="5363495" cy="3416320"/>
+            <a:off x="5740642" y="802194"/>
+            <a:ext cx="6283190" cy="5478423"/>
           </a:xfrm>
           <a:prstGeom prst="rect">
             <a:avLst/>
@@ -3922,220 +4133,290 @@
           </a:lstStyle>
           <a:p>
             <a:r>
-              <a:rPr lang="en-US" altLang="ja-JP" dirty="0">
+              <a:rPr lang="en-US" altLang="ja-JP" sz="1400" dirty="0">
                 <a:ea typeface="游ゴシック"/>
               </a:rPr>
               <a:t>AWS</a:t>
             </a:r>
             <a:r>
-              <a:rPr lang="ja-JP" altLang="en-US" dirty="0">
+              <a:rPr lang="ja-JP" altLang="en-US" sz="1400" dirty="0">
                 <a:ea typeface="游ゴシック"/>
               </a:rPr>
-              <a:t>テクニカルサポートとしての実務経験を通じて、クラウドインフラの設計・構築・運用に関する確かな知識と対応力を身につけました。</a:t>
-            </a:r>
-            <a:endParaRPr lang="en-US" altLang="ja-JP" dirty="0">
+              <a:t>テクニカルサポートとしての実務経験を通じて、クラウドインフラの設計・構築・運用に関する知識と、実運用に即した対応力を身につけました。</a:t>
+            </a:r>
+            <a:endParaRPr lang="en-US" altLang="ja-JP" sz="1400" dirty="0">
               <a:ea typeface="游ゴシック"/>
             </a:endParaRPr>
           </a:p>
           <a:p>
-            <a:endParaRPr lang="en-US" altLang="ja-JP" dirty="0">
+            <a:endParaRPr lang="en-US" altLang="ja-JP" sz="1400" dirty="0">
               <a:ea typeface="游ゴシック"/>
             </a:endParaRPr>
           </a:p>
           <a:p>
             <a:r>
-              <a:rPr lang="ja-JP" altLang="en-US" dirty="0">
+              <a:rPr lang="ja-JP" altLang="en-US" sz="1400" dirty="0">
                 <a:ea typeface="游ゴシック"/>
               </a:rPr>
-              <a:t>特に、主要</a:t>
-            </a:r>
-            <a:r>
-              <a:rPr lang="en-US" altLang="ja-JP" dirty="0">
+              <a:t>これまで </a:t>
+            </a:r>
+            <a:r>
+              <a:rPr lang="en-US" altLang="ja-JP" sz="1400" dirty="0">
                 <a:ea typeface="游ゴシック"/>
               </a:rPr>
+              <a:t>EC2</a:t>
+            </a:r>
+            <a:r>
+              <a:rPr lang="ja-JP" altLang="en-US" sz="1400" dirty="0">
+                <a:ea typeface="游ゴシック"/>
+              </a:rPr>
+              <a:t>・</a:t>
+            </a:r>
+            <a:r>
+              <a:rPr lang="en-US" altLang="ja-JP" sz="1400" dirty="0">
+                <a:ea typeface="游ゴシック"/>
+              </a:rPr>
+              <a:t>VPC</a:t>
+            </a:r>
+            <a:r>
+              <a:rPr lang="ja-JP" altLang="en-US" sz="1400" dirty="0">
+                <a:ea typeface="游ゴシック"/>
+              </a:rPr>
+              <a:t>・</a:t>
+            </a:r>
+            <a:r>
+              <a:rPr lang="en-US" altLang="ja-JP" sz="1400" dirty="0">
+                <a:ea typeface="游ゴシック"/>
+              </a:rPr>
+              <a:t>S3</a:t>
+            </a:r>
+            <a:r>
+              <a:rPr lang="ja-JP" altLang="en-US" sz="1400" dirty="0">
+                <a:ea typeface="游ゴシック"/>
+              </a:rPr>
+              <a:t>・</a:t>
+            </a:r>
+            <a:r>
+              <a:rPr lang="en-US" altLang="ja-JP" sz="1400" dirty="0">
+                <a:ea typeface="游ゴシック"/>
+              </a:rPr>
+              <a:t>RDS </a:t>
+            </a:r>
+            <a:r>
+              <a:rPr lang="ja-JP" altLang="en-US" sz="1400" dirty="0">
+                <a:ea typeface="游ゴシック"/>
+              </a:rPr>
+              <a:t>など主要</a:t>
+            </a:r>
+            <a:r>
+              <a:rPr lang="en-US" altLang="ja-JP" sz="1400" dirty="0">
+                <a:ea typeface="游ゴシック"/>
+              </a:rPr>
               <a:t>AWS</a:t>
             </a:r>
             <a:r>
-              <a:rPr lang="ja-JP" altLang="en-US" dirty="0">
+              <a:rPr lang="ja-JP" altLang="en-US" sz="1400" dirty="0">
                 <a:ea typeface="游ゴシック"/>
               </a:rPr>
-              <a:t>サービスのトラブルシューティングや課題解決を得意としており、お客様環境の安定稼働に貢献してきました。</a:t>
-            </a:r>
-            <a:endParaRPr lang="en-US" altLang="ja-JP" dirty="0">
+              <a:t>サービスに関する問い合わせ対応を担当し、週あたり</a:t>
+            </a:r>
+            <a:r>
+              <a:rPr lang="en-US" altLang="ja-JP" sz="1400" dirty="0">
+                <a:ea typeface="游ゴシック"/>
+              </a:rPr>
+              <a:t>5〜15</a:t>
+            </a:r>
+            <a:r>
+              <a:rPr lang="ja-JP" altLang="en-US" sz="1400" dirty="0">
+                <a:ea typeface="游ゴシック"/>
+              </a:rPr>
+              <a:t>件、年間約</a:t>
+            </a:r>
+            <a:r>
+              <a:rPr lang="en-US" altLang="ja-JP" sz="1400" dirty="0">
+                <a:ea typeface="游ゴシック"/>
+              </a:rPr>
+              <a:t>500</a:t>
+            </a:r>
+            <a:r>
+              <a:rPr lang="ja-JP" altLang="en-US" sz="1400" dirty="0">
+                <a:ea typeface="游ゴシック"/>
+              </a:rPr>
+              <a:t>件規模の技術問い合わせに対応してきました。</a:t>
+            </a:r>
+          </a:p>
+          <a:p>
+            <a:r>
+              <a:rPr lang="ja-JP" altLang="en-US" sz="1400" dirty="0">
+                <a:ea typeface="游ゴシック"/>
+              </a:rPr>
+              <a:t>障害調査や仕様確認では、</a:t>
+            </a:r>
+            <a:r>
+              <a:rPr lang="en-US" altLang="ja-JP" sz="1400" dirty="0">
+                <a:ea typeface="游ゴシック"/>
+              </a:rPr>
+              <a:t>AWS</a:t>
+            </a:r>
+            <a:r>
+              <a:rPr lang="ja-JP" altLang="en-US" sz="1400" dirty="0">
+                <a:ea typeface="游ゴシック"/>
+              </a:rPr>
+              <a:t>公式ドキュメントやベストプラクティスを根拠とした切り分けを徹底し、迅速なケースクローズとお客様環境の安定稼働に貢献してきました。</a:t>
+            </a:r>
+          </a:p>
+          <a:p>
+            <a:r>
+              <a:rPr lang="ja-JP" altLang="en-US" sz="1400" dirty="0">
+                <a:ea typeface="游ゴシック"/>
+              </a:rPr>
+              <a:t>また、問い合わせ対応においては、平均解決日数（平均 </a:t>
+            </a:r>
+            <a:r>
+              <a:rPr lang="en-US" altLang="ja-JP" sz="1400" dirty="0">
+                <a:ea typeface="游ゴシック"/>
+              </a:rPr>
+              <a:t>xx</a:t>
+            </a:r>
+            <a:r>
+              <a:rPr lang="ja-JP" altLang="en-US" sz="1400" dirty="0">
+                <a:ea typeface="游ゴシック"/>
+              </a:rPr>
+              <a:t>日）および対応ターン数の短縮を実現し、チームとして</a:t>
+            </a:r>
+            <a:r>
+              <a:rPr lang="en-US" altLang="ja-JP" sz="1400" dirty="0">
+                <a:ea typeface="游ゴシック"/>
+              </a:rPr>
+              <a:t>AWS</a:t>
+            </a:r>
+            <a:r>
+              <a:rPr lang="ja-JP" altLang="en-US" sz="1400" dirty="0">
+                <a:ea typeface="游ゴシック"/>
+              </a:rPr>
+              <a:t>より品質面での評価をいただきました。</a:t>
+            </a:r>
+            <a:endParaRPr lang="en-US" altLang="ja-JP" sz="1400" dirty="0">
               <a:ea typeface="游ゴシック"/>
             </a:endParaRPr>
           </a:p>
           <a:p>
-            <a:endParaRPr lang="en-US" altLang="ja-JP" dirty="0">
+            <a:endParaRPr lang="en-US" altLang="ja-JP" sz="1400" dirty="0">
               <a:ea typeface="游ゴシック"/>
             </a:endParaRPr>
           </a:p>
           <a:p>
             <a:r>
-              <a:rPr lang="en-US" altLang="ja-JP" dirty="0">
+              <a:rPr lang="ja-JP" altLang="en-US" sz="1400" dirty="0">
                 <a:ea typeface="游ゴシック"/>
               </a:rPr>
+              <a:t>上記の通り、少ないターン数での早期解決を常に意識しています。</a:t>
+            </a:r>
+          </a:p>
+          <a:p>
+            <a:r>
+              <a:rPr lang="ja-JP" altLang="en-US" sz="1400" dirty="0">
+                <a:ea typeface="游ゴシック"/>
+              </a:rPr>
+              <a:t>初期ヒアリングの段階で構成情報・再現条件・影響範囲を具体的に整理することで不要な往復確認を削減し、お客様の調査負担軽減と早期の意思決定を支援してきました。</a:t>
+            </a:r>
+          </a:p>
+          <a:p>
+            <a:r>
+              <a:rPr lang="ja-JP" altLang="en-US" sz="1400" dirty="0">
+                <a:ea typeface="游ゴシック"/>
+              </a:rPr>
+              <a:t>また、技術的な回答では背景や理由を噛み砕いて説明することを心がけ、お客様が安心して設計・運用判断を行える状態の実現に努めています。</a:t>
+            </a:r>
+            <a:endParaRPr lang="en-US" altLang="ja-JP" sz="1400" dirty="0">
+              <a:ea typeface="游ゴシック"/>
+            </a:endParaRPr>
+          </a:p>
+          <a:p>
+            <a:endParaRPr lang="en-US" altLang="ja-JP" sz="1400" dirty="0">
+              <a:ea typeface="游ゴシック"/>
+            </a:endParaRPr>
+          </a:p>
+          <a:p>
+            <a:r>
+              <a:rPr lang="en-US" altLang="ja-JP" sz="1400" dirty="0"/>
               <a:t>CLF</a:t>
             </a:r>
             <a:r>
-              <a:rPr lang="ja-JP" altLang="en-US" dirty="0">
-                <a:ea typeface="游ゴシック"/>
-              </a:rPr>
+              <a:rPr lang="ja-JP" altLang="en-US" sz="1400" dirty="0"/>
               <a:t>・</a:t>
             </a:r>
             <a:r>
-              <a:rPr lang="en-US" altLang="ja-JP" dirty="0">
-                <a:ea typeface="游ゴシック"/>
-              </a:rPr>
+              <a:rPr lang="en-US" altLang="ja-JP" sz="1400" dirty="0"/>
               <a:t>SAA</a:t>
             </a:r>
             <a:r>
-              <a:rPr lang="ja-JP" altLang="en-US" dirty="0">
-                <a:ea typeface="游ゴシック"/>
-              </a:rPr>
-              <a:t>資格に基づく体系的な知識と、日々の問い合わせ対応で培った分析力・コミュニケーション力を活かし、技術的な問題を迅速かつ丁寧に解決できることが強みです。</a:t>
-            </a:r>
+              <a:rPr lang="ja-JP" altLang="en-US" sz="1400" dirty="0"/>
+              <a:t>資格で得た体系的な知識と、実案件対応で培った分析力・コミュニケーション力を活かし、技術的な課題に対して正確かつ丁寧な対応を心がけてきました。</a:t>
+            </a:r>
+            <a:br>
+              <a:rPr lang="ja-JP" altLang="en-US" sz="1400" dirty="0"/>
+            </a:br>
+            <a:r>
+              <a:rPr lang="ja-JP" altLang="en-US" sz="1400" dirty="0"/>
+              <a:t>その結果、問い合わせ初期段階での認識齟齬防止や効率的な切り分けを実現し、不要な往復確認の削減とお客様の迅速な意思決定を支援しています。</a:t>
+            </a:r>
+            <a:endParaRPr lang="ja-JP" altLang="en-US" sz="1400" dirty="0">
+              <a:ea typeface="游ゴシック"/>
+            </a:endParaRPr>
           </a:p>
         </p:txBody>
       </p:sp>
       <p:sp>
         <p:nvSpPr>
-          <p:cNvPr id="26" name="テキスト ボックス 13">
+          <p:cNvPr id="5" name="タイトル 1">
             <a:extLst>
               <a:ext uri="{FF2B5EF4-FFF2-40B4-BE49-F238E27FC236}">
-                <a16:creationId xmlns:a16="http://schemas.microsoft.com/office/drawing/2014/main" id="{268F7B78-021D-A448-508A-9A150C7A4123}"/>
+                <a16:creationId xmlns:a16="http://schemas.microsoft.com/office/drawing/2014/main" id="{4A2C74B5-D3E2-8AD8-966B-559EDC1B4BB9}"/>
               </a:ext>
             </a:extLst>
           </p:cNvPr>
-          <p:cNvSpPr txBox="1"/>
+          <p:cNvSpPr txBox="1">
+            <a:spLocks/>
+          </p:cNvSpPr>
           <p:nvPr/>
         </p:nvSpPr>
         <p:spPr>
           <a:xfrm>
-            <a:off x="6525854" y="1535797"/>
-            <a:ext cx="3103778" cy="400110"/>
+            <a:off x="5823937" y="116632"/>
+            <a:ext cx="2786663" cy="468054"/>
           </a:xfrm>
           <a:prstGeom prst="rect">
             <a:avLst/>
           </a:prstGeom>
-          <a:noFill/>
-          <a:ln>
-            <a:noFill/>
-          </a:ln>
         </p:spPr>
         <p:txBody>
-          <a:bodyPr wrap="square" lIns="91440" tIns="45720" rIns="91440" bIns="45720" anchor="t">
-            <a:spAutoFit/>
+          <a:bodyPr vert="horz" lIns="0" tIns="0" rIns="0" bIns="0" rtlCol="0" anchor="ctr" anchorCtr="0">
+            <a:normAutofit/>
           </a:bodyPr>
           <a:lstStyle>
-            <a:defPPr>
-              <a:defRPr lang="ja-JP"/>
-            </a:defPPr>
-            <a:lvl1pPr marL="0" algn="l" defTabSz="914400" rtl="0" eaLnBrk="1" latinLnBrk="0" hangingPunct="1">
-              <a:defRPr kumimoji="1" sz="1800" kern="1200">
-                <a:solidFill>
-                  <a:schemeClr val="tx1"/>
-                </a:solidFill>
-                <a:latin typeface="+mn-lt"/>
-                <a:ea typeface="+mn-ea"/>
-                <a:cs typeface="+mn-cs"/>
+            <a:lvl1pPr algn="l" defTabSz="914400" rtl="0" eaLnBrk="1" latinLnBrk="0" hangingPunct="1">
+              <a:lnSpc>
+                <a:spcPct val="90000"/>
+              </a:lnSpc>
+              <a:spcBef>
+                <a:spcPct val="0"/>
+              </a:spcBef>
+              <a:buNone/>
+              <a:defRPr kumimoji="1" sz="2000" b="1" kern="1200">
+                <a:solidFill>
+                  <a:srgbClr val="0A0045"/>
+                </a:solidFill>
+                <a:latin typeface="+mn-ea"/>
+                <a:ea typeface="+mn-ea"/>
+                <a:cs typeface="+mj-cs"/>
               </a:defRPr>
             </a:lvl1pPr>
-            <a:lvl2pPr marL="457200" algn="l" defTabSz="914400" rtl="0" eaLnBrk="1" latinLnBrk="0" hangingPunct="1">
-              <a:defRPr kumimoji="1" sz="1800" kern="1200">
-                <a:solidFill>
-                  <a:schemeClr val="tx1"/>
-                </a:solidFill>
-                <a:latin typeface="+mn-lt"/>
-                <a:ea typeface="+mn-ea"/>
-                <a:cs typeface="+mn-cs"/>
-              </a:defRPr>
-            </a:lvl2pPr>
-            <a:lvl3pPr marL="914400" algn="l" defTabSz="914400" rtl="0" eaLnBrk="1" latinLnBrk="0" hangingPunct="1">
-              <a:defRPr kumimoji="1" sz="1800" kern="1200">
-                <a:solidFill>
-                  <a:schemeClr val="tx1"/>
-                </a:solidFill>
-                <a:latin typeface="+mn-lt"/>
-                <a:ea typeface="+mn-ea"/>
-                <a:cs typeface="+mn-cs"/>
-              </a:defRPr>
-            </a:lvl3pPr>
-            <a:lvl4pPr marL="1371600" algn="l" defTabSz="914400" rtl="0" eaLnBrk="1" latinLnBrk="0" hangingPunct="1">
-              <a:defRPr kumimoji="1" sz="1800" kern="1200">
-                <a:solidFill>
-                  <a:schemeClr val="tx1"/>
-                </a:solidFill>
-                <a:latin typeface="+mn-lt"/>
-                <a:ea typeface="+mn-ea"/>
-                <a:cs typeface="+mn-cs"/>
-              </a:defRPr>
-            </a:lvl4pPr>
-            <a:lvl5pPr marL="1828800" algn="l" defTabSz="914400" rtl="0" eaLnBrk="1" latinLnBrk="0" hangingPunct="1">
-              <a:defRPr kumimoji="1" sz="1800" kern="1200">
-                <a:solidFill>
-                  <a:schemeClr val="tx1"/>
-                </a:solidFill>
-                <a:latin typeface="+mn-lt"/>
-                <a:ea typeface="+mn-ea"/>
-                <a:cs typeface="+mn-cs"/>
-              </a:defRPr>
-            </a:lvl5pPr>
-            <a:lvl6pPr marL="2286000" algn="l" defTabSz="914400" rtl="0" eaLnBrk="1" latinLnBrk="0" hangingPunct="1">
-              <a:defRPr kumimoji="1" sz="1800" kern="1200">
-                <a:solidFill>
-                  <a:schemeClr val="tx1"/>
-                </a:solidFill>
-                <a:latin typeface="+mn-lt"/>
-                <a:ea typeface="+mn-ea"/>
-                <a:cs typeface="+mn-cs"/>
-              </a:defRPr>
-            </a:lvl6pPr>
-            <a:lvl7pPr marL="2743200" algn="l" defTabSz="914400" rtl="0" eaLnBrk="1" latinLnBrk="0" hangingPunct="1">
-              <a:defRPr kumimoji="1" sz="1800" kern="1200">
-                <a:solidFill>
-                  <a:schemeClr val="tx1"/>
-                </a:solidFill>
-                <a:latin typeface="+mn-lt"/>
-                <a:ea typeface="+mn-ea"/>
-                <a:cs typeface="+mn-cs"/>
-              </a:defRPr>
-            </a:lvl7pPr>
-            <a:lvl8pPr marL="3200400" algn="l" defTabSz="914400" rtl="0" eaLnBrk="1" latinLnBrk="0" hangingPunct="1">
-              <a:defRPr kumimoji="1" sz="1800" kern="1200">
-                <a:solidFill>
-                  <a:schemeClr val="tx1"/>
-                </a:solidFill>
-                <a:latin typeface="+mn-lt"/>
-                <a:ea typeface="+mn-ea"/>
-                <a:cs typeface="+mn-cs"/>
-              </a:defRPr>
-            </a:lvl8pPr>
-            <a:lvl9pPr marL="3657600" algn="l" defTabSz="914400" rtl="0" eaLnBrk="1" latinLnBrk="0" hangingPunct="1">
-              <a:defRPr kumimoji="1" sz="1800" kern="1200">
-                <a:solidFill>
-                  <a:schemeClr val="tx1"/>
-                </a:solidFill>
-                <a:latin typeface="+mn-lt"/>
-                <a:ea typeface="+mn-ea"/>
-                <a:cs typeface="+mn-cs"/>
-              </a:defRPr>
-            </a:lvl9pPr>
           </a:lstStyle>
           <a:p>
-            <a:pPr>
-              <a:lnSpc>
-                <a:spcPct val="100000"/>
-              </a:lnSpc>
-              <a:spcAft>
-                <a:spcPts val="0"/>
-              </a:spcAft>
-            </a:pPr>
-            <a:r>
-              <a:rPr lang="ja-JP" altLang="en-US" sz="2000" b="1">
-                <a:solidFill>
-                  <a:srgbClr val="0070C0"/>
-                </a:solidFill>
+            <a:r>
+              <a:rPr lang="ja-JP" altLang="en-US" dirty="0">
+                <a:latin typeface="游ゴシック"/>
                 <a:ea typeface="游ゴシック"/>
               </a:rPr>
               <a:t>自己PR</a:t>
@@ -6455,7 +6736,7 @@
           </a:lstStyle>
           <a:p>
             <a:r>
-              <a:rPr lang="en-US" sz="1400">
+              <a:rPr lang="en-US" sz="1400" dirty="0">
                 <a:solidFill>
                   <a:srgbClr val="000000"/>
                 </a:solidFill>
@@ -6466,7 +6747,7 @@
               <a:t>・EC2</a:t>
             </a:r>
             <a:r>
-              <a:rPr lang="ja-JP" sz="1400">
+              <a:rPr lang="ja-JP" sz="1400" dirty="0">
                 <a:solidFill>
                   <a:srgbClr val="000000"/>
                 </a:solidFill>
@@ -6477,7 +6758,7 @@
               <a:t>、</a:t>
             </a:r>
             <a:r>
-              <a:rPr lang="en-US" sz="1400">
+              <a:rPr lang="en-US" sz="1400" dirty="0">
                 <a:solidFill>
                   <a:srgbClr val="000000"/>
                 </a:solidFill>
@@ -6488,7 +6769,7 @@
               <a:t>S3</a:t>
             </a:r>
             <a:r>
-              <a:rPr lang="ja-JP" sz="1400">
+              <a:rPr lang="ja-JP" sz="1400" dirty="0">
                 <a:solidFill>
                   <a:srgbClr val="000000"/>
                 </a:solidFill>
@@ -6499,7 +6780,7 @@
               <a:t>、</a:t>
             </a:r>
             <a:r>
-              <a:rPr lang="en-US" sz="1400">
+              <a:rPr lang="en-US" sz="1400" dirty="0">
                 <a:solidFill>
                   <a:srgbClr val="000000"/>
                 </a:solidFill>
@@ -6510,7 +6791,7 @@
               <a:t>RDS</a:t>
             </a:r>
             <a:r>
-              <a:rPr lang="ja-JP" sz="1400">
+              <a:rPr lang="ja-JP" sz="1400" dirty="0">
                 <a:solidFill>
                   <a:srgbClr val="000000"/>
                 </a:solidFill>
@@ -6521,7 +6802,7 @@
               <a:t>、</a:t>
             </a:r>
             <a:r>
-              <a:rPr lang="en-US" sz="1400">
+              <a:rPr lang="en-US" sz="1400" dirty="0">
                 <a:solidFill>
                   <a:srgbClr val="000000"/>
                 </a:solidFill>
@@ -6532,7 +6813,7 @@
               <a:t>VPC</a:t>
             </a:r>
             <a:r>
-              <a:rPr lang="ja-JP" sz="1400">
+              <a:rPr lang="ja-JP" sz="1400" dirty="0">
                 <a:solidFill>
                   <a:srgbClr val="000000"/>
                 </a:solidFill>
@@ -6540,9 +6821,31 @@
                 <a:ea typeface="游ゴシック"/>
                 <a:cs typeface="Arial"/>
               </a:rPr>
-              <a:t>などの主要サービスの特徴と使用シーンを理解し、適切なサービス選択できるようになりました</a:t>
-            </a:r>
-            <a:endParaRPr lang="en-US" sz="1400">
+              <a:t>などの主要サービスの特徴と使用シーンを理解し、適切なサービス選択</a:t>
+            </a:r>
+            <a:r>
+              <a:rPr lang="ja-JP" altLang="en-US" sz="1400" dirty="0">
+                <a:solidFill>
+                  <a:srgbClr val="000000"/>
+                </a:solidFill>
+                <a:latin typeface="Arial"/>
+                <a:ea typeface="游ゴシック"/>
+                <a:cs typeface="Arial"/>
+              </a:rPr>
+              <a:t>が</a:t>
+            </a:r>
+            <a:r>
+              <a:rPr lang="ja-JP" sz="1400" dirty="0">
+                <a:solidFill>
+                  <a:srgbClr val="000000"/>
+                </a:solidFill>
+                <a:latin typeface="Arial"/>
+                <a:ea typeface="游ゴシック"/>
+                <a:cs typeface="Arial"/>
+              </a:rPr>
+              <a:t>できるようになりました</a:t>
+            </a:r>
+            <a:endParaRPr lang="en-US" sz="1400" dirty="0">
               <a:solidFill>
                 <a:srgbClr val="000000"/>
               </a:solidFill>
@@ -6553,7 +6856,7 @@
           </a:p>
           <a:p>
             <a:r>
-              <a:rPr lang="ja-JP" sz="1400">
+              <a:rPr lang="ja-JP" sz="1400" dirty="0">
                 <a:solidFill>
                   <a:srgbClr val="000000"/>
                 </a:solidFill>
@@ -6563,7 +6866,7 @@
               </a:rPr>
               <a:t>・クラウドベースのソリューションの基本的なアーキテクチャ設計ができるようになりました</a:t>
             </a:r>
-            <a:endParaRPr lang="en-US" sz="1400">
+            <a:endParaRPr lang="en-US" sz="1400" dirty="0">
               <a:solidFill>
                 <a:srgbClr val="000000"/>
               </a:solidFill>
@@ -6574,7 +6877,7 @@
           </a:p>
           <a:p>
             <a:r>
-              <a:rPr lang="en-US" sz="1400">
+              <a:rPr lang="en-US" sz="1400" dirty="0">
                 <a:solidFill>
                   <a:srgbClr val="000000"/>
                 </a:solidFill>
@@ -6585,7 +6888,7 @@
               <a:t>・AWS</a:t>
             </a:r>
             <a:r>
-              <a:rPr lang="ja-JP" sz="1400">
+              <a:rPr lang="ja-JP" sz="1400" dirty="0">
                 <a:solidFill>
                   <a:srgbClr val="000000"/>
                 </a:solidFill>
@@ -6596,7 +6899,7 @@
               <a:t>の共有責任モデルを理解し、セキュアなクラウド環境の設計と運用に貢献できま</a:t>
             </a:r>
             <a:r>
-              <a:rPr lang="ja-JP" altLang="en-US" sz="1400">
+              <a:rPr lang="ja-JP" altLang="en-US" sz="1400" dirty="0">
                 <a:solidFill>
                   <a:srgbClr val="000000"/>
                 </a:solidFill>
@@ -6606,7 +6909,7 @@
               </a:rPr>
               <a:t>す</a:t>
             </a:r>
-            <a:endParaRPr lang="ja-JP" sz="1400">
+            <a:endParaRPr lang="ja-JP" sz="1400" dirty="0">
               <a:solidFill>
                 <a:srgbClr val="000000"/>
               </a:solidFill>
@@ -7527,8 +7830,8 @@
         </p:nvSpPr>
         <p:spPr>
           <a:xfrm>
-            <a:off x="173993" y="810867"/>
-            <a:ext cx="6110264" cy="1125509"/>
+            <a:off x="165029" y="720218"/>
+            <a:ext cx="6110264" cy="977954"/>
           </a:xfrm>
         </p:spPr>
         <p:txBody>
@@ -7544,10 +7847,10 @@
               </a:spcAft>
             </a:pPr>
             <a:r>
-              <a:rPr lang="ja-JP" altLang="en-US" sz="1600" dirty="0"/>
+              <a:rPr lang="ja-JP" altLang="en-US" sz="1400" dirty="0"/>
               <a:t>■ 問い合わせ内容</a:t>
             </a:r>
-            <a:endParaRPr lang="en-US" altLang="ja-JP" sz="1600" dirty="0"/>
+            <a:endParaRPr lang="en-US" altLang="ja-JP" sz="1400" dirty="0"/>
           </a:p>
           <a:p>
             <a:pPr>
@@ -7558,7 +7861,7 @@
                 <a:spcPts val="0"/>
               </a:spcAft>
             </a:pPr>
-            <a:endParaRPr lang="ja-JP" altLang="en-US" sz="1600" dirty="0"/>
+            <a:endParaRPr lang="en-US" altLang="ja-JP" sz="900" dirty="0"/>
           </a:p>
           <a:p>
             <a:pPr>
@@ -7570,19 +7873,19 @@
               </a:spcAft>
             </a:pPr>
             <a:r>
-              <a:rPr lang="en-US" altLang="ja-JP" sz="1200" dirty="0"/>
+              <a:rPr lang="en-US" altLang="ja-JP" sz="1100" dirty="0"/>
               <a:t>- </a:t>
             </a:r>
             <a:r>
-              <a:rPr lang="ja-JP" altLang="en-US" sz="1200" dirty="0"/>
+              <a:rPr lang="ja-JP" altLang="en-US" sz="1100" dirty="0"/>
               <a:t>検証環境で </a:t>
             </a:r>
             <a:r>
-              <a:rPr lang="en-US" altLang="ja-JP" sz="1200" dirty="0"/>
+              <a:rPr lang="en-US" altLang="ja-JP" sz="1100" dirty="0"/>
               <a:t>S3 </a:t>
             </a:r>
             <a:r>
-              <a:rPr lang="ja-JP" altLang="en-US" sz="1200" dirty="0"/>
+              <a:rPr lang="ja-JP" altLang="en-US" sz="1100" dirty="0"/>
               <a:t>アップロードを禁止したい</a:t>
             </a:r>
           </a:p>
@@ -7596,27 +7899,31 @@
               </a:spcAft>
             </a:pPr>
             <a:r>
-              <a:rPr lang="en-US" altLang="ja-JP" sz="1200" dirty="0"/>
+              <a:rPr lang="en-US" altLang="ja-JP" sz="1100" dirty="0"/>
               <a:t>- </a:t>
             </a:r>
             <a:r>
-              <a:rPr lang="en-US" altLang="ja-JP" sz="1200" dirty="0" err="1"/>
+              <a:rPr lang="en-US" altLang="ja-JP" sz="1100" dirty="0" err="1"/>
               <a:t>ReadOnlyAccess</a:t>
             </a:r>
             <a:r>
-              <a:rPr lang="en-US" altLang="ja-JP" sz="1200" dirty="0"/>
+              <a:rPr lang="en-US" altLang="ja-JP" sz="1100" dirty="0"/>
               <a:t> </a:t>
             </a:r>
             <a:r>
-              <a:rPr lang="ja-JP" altLang="en-US" sz="1200" dirty="0"/>
+              <a:rPr lang="ja-JP" altLang="en-US" sz="1100" dirty="0"/>
               <a:t>や </a:t>
             </a:r>
             <a:r>
-              <a:rPr lang="en-US" altLang="ja-JP" sz="1200" dirty="0"/>
-              <a:t>Admin + S3ReadOnlyAccess </a:t>
-            </a:r>
-            <a:r>
-              <a:rPr lang="ja-JP" altLang="en-US" sz="1200" dirty="0"/>
+              <a:rPr lang="en-US" altLang="ja-JP" sz="1100" dirty="0" err="1"/>
+              <a:t>AdministratorAccess</a:t>
+            </a:r>
+            <a:r>
+              <a:rPr lang="en-US" altLang="ja-JP" sz="1100" dirty="0"/>
+              <a:t> + S3ReadOnlyAccess </a:t>
+            </a:r>
+            <a:r>
+              <a:rPr lang="ja-JP" altLang="en-US" sz="1100" dirty="0"/>
               <a:t>の挙動確認</a:t>
             </a:r>
           </a:p>
@@ -7630,23 +7937,23 @@
               </a:spcAft>
             </a:pPr>
             <a:r>
-              <a:rPr lang="en-US" altLang="ja-JP" sz="1200" dirty="0"/>
+              <a:rPr lang="en-US" altLang="ja-JP" sz="1100" dirty="0"/>
               <a:t>- </a:t>
             </a:r>
             <a:r>
-              <a:rPr lang="en-US" altLang="ja-JP" sz="1200" dirty="0" err="1"/>
+              <a:rPr lang="en-US" altLang="ja-JP" sz="1100" dirty="0" err="1"/>
               <a:t>AdministratorAccess</a:t>
             </a:r>
             <a:r>
-              <a:rPr lang="ja-JP" altLang="en-US" sz="1200" dirty="0"/>
+              <a:rPr lang="ja-JP" altLang="en-US" sz="1100" dirty="0"/>
               <a:t>＋</a:t>
             </a:r>
             <a:r>
-              <a:rPr lang="en-US" altLang="ja-JP" sz="1200" dirty="0"/>
+              <a:rPr lang="en-US" altLang="ja-JP" sz="1100" dirty="0"/>
               <a:t>S3ReadOnlyAccess </a:t>
             </a:r>
             <a:r>
-              <a:rPr lang="ja-JP" altLang="en-US" sz="1200" dirty="0"/>
+              <a:rPr lang="ja-JP" altLang="en-US" sz="1100" dirty="0"/>
               <a:t>の組み合わせの可否を確認したい</a:t>
             </a:r>
           </a:p>
@@ -7668,7 +7975,7 @@
         </p:nvSpPr>
         <p:spPr>
           <a:xfrm>
-            <a:off x="165029" y="2184530"/>
+            <a:off x="165029" y="2204125"/>
             <a:ext cx="5760642" cy="4279023"/>
           </a:xfrm>
           <a:prstGeom prst="rect">
@@ -7862,10 +8169,10 @@
               </a:spcAft>
             </a:pPr>
             <a:r>
-              <a:rPr lang="ja-JP" altLang="en-US" sz="1600" dirty="0"/>
+              <a:rPr lang="ja-JP" altLang="en-US" sz="1400" dirty="0"/>
               <a:t>■ 調査結果及び回答（公式ドキュメント準拠）</a:t>
             </a:r>
-            <a:endParaRPr lang="en-US" altLang="ja-JP" sz="1600" dirty="0"/>
+            <a:endParaRPr lang="en-US" altLang="ja-JP" sz="1400" dirty="0"/>
           </a:p>
           <a:p>
             <a:pPr>
@@ -7876,7 +8183,7 @@
                 <a:spcPts val="0"/>
               </a:spcAft>
             </a:pPr>
-            <a:endParaRPr lang="en-US" altLang="ja-JP" sz="1600" dirty="0"/>
+            <a:endParaRPr lang="en-US" altLang="ja-JP" sz="900" dirty="0"/>
           </a:p>
           <a:p>
             <a:pPr>
@@ -7888,27 +8195,27 @@
               </a:spcAft>
             </a:pPr>
             <a:r>
-              <a:rPr lang="ja-JP" altLang="en-US" sz="1200" dirty="0"/>
+              <a:rPr lang="ja-JP" altLang="en-US" sz="1100" dirty="0"/>
               <a:t>① </a:t>
             </a:r>
             <a:r>
-              <a:rPr lang="en-US" altLang="ja-JP" sz="1200" dirty="0" err="1"/>
+              <a:rPr lang="en-US" altLang="ja-JP" sz="1100" dirty="0" err="1"/>
               <a:t>ReadOnlyAccess</a:t>
             </a:r>
             <a:r>
-              <a:rPr lang="en-US" altLang="ja-JP" sz="1200" dirty="0"/>
+              <a:rPr lang="en-US" altLang="ja-JP" sz="1100" dirty="0"/>
               <a:t> </a:t>
             </a:r>
             <a:r>
-              <a:rPr lang="ja-JP" altLang="en-US" sz="1200" dirty="0"/>
+              <a:rPr lang="ja-JP" altLang="en-US" sz="1100" dirty="0"/>
               <a:t>＋ </a:t>
             </a:r>
             <a:r>
-              <a:rPr lang="en-US" altLang="ja-JP" sz="1200" dirty="0"/>
+              <a:rPr lang="en-US" altLang="ja-JP" sz="1100" dirty="0"/>
               <a:t>IAM </a:t>
             </a:r>
             <a:r>
-              <a:rPr lang="ja-JP" altLang="en-US" sz="1200" dirty="0"/>
+              <a:rPr lang="ja-JP" altLang="en-US" sz="1100" dirty="0"/>
               <a:t>制限ポリシー</a:t>
             </a:r>
           </a:p>
@@ -7922,11 +8229,11 @@
               </a:spcAft>
             </a:pPr>
             <a:r>
-              <a:rPr lang="en-US" altLang="ja-JP" sz="1200" dirty="0"/>
+              <a:rPr lang="en-US" altLang="ja-JP" sz="1100" dirty="0"/>
               <a:t>AWS</a:t>
             </a:r>
             <a:r>
-              <a:rPr lang="ja-JP" altLang="en-US" sz="1200" dirty="0"/>
+              <a:rPr lang="ja-JP" altLang="en-US" sz="1100" dirty="0"/>
               <a:t>公式のポリシー評価ロジック</a:t>
             </a:r>
           </a:p>
@@ -7940,31 +8247,31 @@
               </a:spcAft>
             </a:pPr>
             <a:r>
-              <a:rPr lang="ja-JP" altLang="en-US" sz="1200" dirty="0"/>
+              <a:rPr lang="ja-JP" altLang="en-US" sz="1100" dirty="0"/>
               <a:t>「明示的 </a:t>
             </a:r>
             <a:r>
-              <a:rPr lang="en-US" altLang="ja-JP" sz="1200" dirty="0"/>
+              <a:rPr lang="en-US" altLang="ja-JP" sz="1100" dirty="0"/>
               <a:t>Deny </a:t>
             </a:r>
             <a:r>
-              <a:rPr lang="ja-JP" altLang="en-US" sz="1200" dirty="0"/>
+              <a:rPr lang="ja-JP" altLang="en-US" sz="1100" dirty="0"/>
               <a:t>＞ </a:t>
             </a:r>
             <a:r>
-              <a:rPr lang="en-US" altLang="ja-JP" sz="1200" dirty="0"/>
+              <a:rPr lang="en-US" altLang="ja-JP" sz="1100" dirty="0"/>
               <a:t>Allow </a:t>
             </a:r>
             <a:r>
-              <a:rPr lang="ja-JP" altLang="en-US" sz="1200" dirty="0"/>
+              <a:rPr lang="ja-JP" altLang="en-US" sz="1100" dirty="0"/>
               <a:t>＞ 暗黙的 </a:t>
             </a:r>
             <a:r>
-              <a:rPr lang="en-US" altLang="ja-JP" sz="1200" dirty="0"/>
+              <a:rPr lang="en-US" altLang="ja-JP" sz="1100" dirty="0"/>
               <a:t>Deny</a:t>
             </a:r>
             <a:r>
-              <a:rPr lang="ja-JP" altLang="en-US" sz="1200" dirty="0"/>
+              <a:rPr lang="ja-JP" altLang="en-US" sz="1100" dirty="0"/>
               <a:t>」</a:t>
             </a:r>
           </a:p>
@@ -7978,7 +8285,7 @@
               </a:spcAft>
             </a:pPr>
             <a:r>
-              <a:rPr lang="ja-JP" altLang="en-US" sz="1200" dirty="0"/>
+              <a:rPr lang="ja-JP" altLang="en-US" sz="1100" dirty="0"/>
               <a:t>に基づき回答。</a:t>
             </a:r>
           </a:p>
@@ -7991,7 +8298,7 @@
                 <a:spcPts val="0"/>
               </a:spcAft>
             </a:pPr>
-            <a:endParaRPr lang="ja-JP" altLang="en-US" sz="1200" dirty="0"/>
+            <a:endParaRPr lang="ja-JP" altLang="en-US" sz="1100" dirty="0"/>
           </a:p>
           <a:p>
             <a:pPr>
@@ -8003,23 +8310,23 @@
               </a:spcAft>
             </a:pPr>
             <a:r>
-              <a:rPr lang="en-US" altLang="ja-JP" sz="1200" dirty="0" err="1"/>
+              <a:rPr lang="en-US" altLang="ja-JP" sz="1100" dirty="0" err="1"/>
               <a:t>ReadOnlyAccess</a:t>
             </a:r>
             <a:r>
-              <a:rPr lang="en-US" altLang="ja-JP" sz="1200" dirty="0"/>
+              <a:rPr lang="en-US" altLang="ja-JP" sz="1100" dirty="0"/>
               <a:t> </a:t>
             </a:r>
             <a:r>
-              <a:rPr lang="ja-JP" altLang="en-US" sz="1200" dirty="0"/>
+              <a:rPr lang="ja-JP" altLang="en-US" sz="1100" dirty="0"/>
               <a:t>と </a:t>
             </a:r>
             <a:r>
-              <a:rPr lang="en-US" altLang="ja-JP" sz="1200" dirty="0"/>
+              <a:rPr lang="en-US" altLang="ja-JP" sz="1100" dirty="0"/>
               <a:t>IAM </a:t>
             </a:r>
             <a:r>
-              <a:rPr lang="ja-JP" altLang="en-US" sz="1200" dirty="0"/>
+              <a:rPr lang="ja-JP" altLang="en-US" sz="1100" dirty="0"/>
               <a:t>制限ポリシーでは</a:t>
             </a:r>
           </a:p>
@@ -8033,19 +8340,19 @@
               </a:spcAft>
             </a:pPr>
             <a:r>
-              <a:rPr lang="en-US" altLang="ja-JP" sz="1200" dirty="0"/>
+              <a:rPr lang="en-US" altLang="ja-JP" sz="1100" dirty="0"/>
               <a:t>S3 </a:t>
             </a:r>
             <a:r>
-              <a:rPr lang="ja-JP" altLang="en-US" sz="1200" dirty="0"/>
+              <a:rPr lang="ja-JP" altLang="en-US" sz="1100" dirty="0"/>
               <a:t>アップロードは暗黙的 </a:t>
             </a:r>
             <a:r>
-              <a:rPr lang="en-US" altLang="ja-JP" sz="1200" dirty="0"/>
+              <a:rPr lang="en-US" altLang="ja-JP" sz="1100" dirty="0"/>
               <a:t>Deny → </a:t>
             </a:r>
             <a:r>
-              <a:rPr lang="ja-JP" altLang="en-US" sz="1200" dirty="0"/>
+              <a:rPr lang="ja-JP" altLang="en-US" sz="1100" dirty="0"/>
               <a:t>アップロード不可</a:t>
             </a:r>
           </a:p>
@@ -8059,7 +8366,7 @@
               </a:spcAft>
             </a:pPr>
             <a:r>
-              <a:rPr lang="ja-JP" altLang="en-US" sz="1200" dirty="0"/>
+              <a:rPr lang="ja-JP" altLang="en-US" sz="1100" dirty="0"/>
               <a:t>お客様の認識は正しいと確認</a:t>
             </a:r>
           </a:p>
@@ -8072,7 +8379,7 @@
                 <a:spcPts val="0"/>
               </a:spcAft>
             </a:pPr>
-            <a:endParaRPr lang="en-US" altLang="ja-JP" sz="1200" dirty="0"/>
+            <a:endParaRPr lang="en-US" altLang="ja-JP" sz="1100" dirty="0"/>
           </a:p>
           <a:p>
             <a:pPr>
@@ -8084,23 +8391,23 @@
               </a:spcAft>
             </a:pPr>
             <a:r>
-              <a:rPr lang="ja-JP" altLang="en-US" sz="1200" dirty="0"/>
+              <a:rPr lang="ja-JP" altLang="en-US" sz="1100" dirty="0"/>
               <a:t>② </a:t>
             </a:r>
             <a:r>
-              <a:rPr lang="en-US" altLang="ja-JP" sz="1200" dirty="0" err="1"/>
+              <a:rPr lang="en-US" altLang="ja-JP" sz="1100" dirty="0" err="1"/>
               <a:t>AdministratorAccess</a:t>
             </a:r>
             <a:r>
-              <a:rPr lang="en-US" altLang="ja-JP" sz="1200" dirty="0"/>
+              <a:rPr lang="en-US" altLang="ja-JP" sz="1100" dirty="0"/>
               <a:t> </a:t>
             </a:r>
             <a:r>
-              <a:rPr lang="ja-JP" altLang="en-US" sz="1200" dirty="0"/>
+              <a:rPr lang="ja-JP" altLang="en-US" sz="1100" dirty="0"/>
               <a:t>＋ </a:t>
             </a:r>
             <a:r>
-              <a:rPr lang="en-US" altLang="ja-JP" sz="1200" dirty="0"/>
+              <a:rPr lang="en-US" altLang="ja-JP" sz="1100" dirty="0"/>
               <a:t>S3ReadOnlyAccess</a:t>
             </a:r>
           </a:p>
@@ -8114,23 +8421,23 @@
               </a:spcAft>
             </a:pPr>
             <a:r>
-              <a:rPr lang="en-US" altLang="ja-JP" sz="1200" dirty="0" err="1"/>
+              <a:rPr lang="en-US" altLang="ja-JP" sz="1100" dirty="0" err="1"/>
               <a:t>AdministratorAccess</a:t>
             </a:r>
             <a:r>
-              <a:rPr lang="en-US" altLang="ja-JP" sz="1200" dirty="0"/>
+              <a:rPr lang="en-US" altLang="ja-JP" sz="1100" dirty="0"/>
               <a:t> </a:t>
             </a:r>
             <a:r>
-              <a:rPr lang="ja-JP" altLang="en-US" sz="1200" dirty="0"/>
+              <a:rPr lang="ja-JP" altLang="en-US" sz="1100" dirty="0"/>
               <a:t>に 明示的 </a:t>
             </a:r>
             <a:r>
-              <a:rPr lang="en-US" altLang="ja-JP" sz="1200" dirty="0"/>
+              <a:rPr lang="en-US" altLang="ja-JP" sz="1100" dirty="0"/>
               <a:t>Deny </a:t>
             </a:r>
             <a:r>
-              <a:rPr lang="ja-JP" altLang="en-US" sz="1200" dirty="0"/>
+              <a:rPr lang="ja-JP" altLang="en-US" sz="1100" dirty="0"/>
               <a:t>が無い場合、アップロードは許可される</a:t>
             </a:r>
           </a:p>
@@ -8144,11 +8451,11 @@
               </a:spcAft>
             </a:pPr>
             <a:r>
-              <a:rPr lang="en-US" altLang="ja-JP" sz="1200" dirty="0"/>
+              <a:rPr lang="en-US" altLang="ja-JP" sz="1100" dirty="0"/>
               <a:t>S3ReadOnlyAccess </a:t>
             </a:r>
             <a:r>
-              <a:rPr lang="ja-JP" altLang="en-US" sz="1200" dirty="0"/>
+              <a:rPr lang="ja-JP" altLang="en-US" sz="1100" dirty="0"/>
               <a:t>は「追加の許可を増やす」だけで</a:t>
             </a:r>
           </a:p>
@@ -8162,11 +8469,11 @@
               </a:spcAft>
             </a:pPr>
             <a:r>
-              <a:rPr lang="en-US" altLang="ja-JP" sz="1200" dirty="0"/>
+              <a:rPr lang="en-US" altLang="ja-JP" sz="1100" dirty="0"/>
               <a:t>Admin </a:t>
             </a:r>
             <a:r>
-              <a:rPr lang="ja-JP" altLang="en-US" sz="1200" dirty="0"/>
+              <a:rPr lang="ja-JP" altLang="en-US" sz="1100" dirty="0"/>
               <a:t>の権限を制限するものではない</a:t>
             </a:r>
           </a:p>
@@ -8179,7 +8486,7 @@
                 <a:spcPts val="0"/>
               </a:spcAft>
             </a:pPr>
-            <a:endParaRPr lang="en-US" altLang="ja-JP" sz="1200" dirty="0"/>
+            <a:endParaRPr lang="en-US" altLang="ja-JP" sz="1100" dirty="0"/>
           </a:p>
           <a:p>
             <a:pPr>
@@ -8191,15 +8498,15 @@
               </a:spcAft>
             </a:pPr>
             <a:r>
-              <a:rPr lang="ja-JP" altLang="en-US" sz="1200" dirty="0"/>
+              <a:rPr lang="ja-JP" altLang="en-US" sz="1100" dirty="0"/>
               <a:t>③ </a:t>
             </a:r>
             <a:r>
-              <a:rPr lang="en-US" altLang="ja-JP" sz="1200" dirty="0"/>
+              <a:rPr lang="en-US" altLang="ja-JP" sz="1100" dirty="0"/>
               <a:t>S3 </a:t>
             </a:r>
             <a:r>
-              <a:rPr lang="ja-JP" altLang="en-US" sz="1200" dirty="0"/>
+              <a:rPr lang="ja-JP" altLang="en-US" sz="1100" dirty="0"/>
               <a:t>アップロード禁止を確実に行う方法</a:t>
             </a:r>
           </a:p>
@@ -8213,7 +8520,7 @@
               </a:spcAft>
             </a:pPr>
             <a:r>
-              <a:rPr lang="ja-JP" altLang="en-US" sz="1200" dirty="0"/>
+              <a:rPr lang="ja-JP" altLang="en-US" sz="1100" dirty="0"/>
               <a:t>推奨構成：</a:t>
             </a:r>
           </a:p>
@@ -8226,7 +8533,7 @@
                 <a:spcPts val="0"/>
               </a:spcAft>
             </a:pPr>
-            <a:endParaRPr lang="ja-JP" altLang="en-US" sz="1200" dirty="0"/>
+            <a:endParaRPr lang="ja-JP" altLang="en-US" sz="1100" dirty="0"/>
           </a:p>
           <a:p>
             <a:pPr>
@@ -8238,22 +8545,22 @@
               </a:spcAft>
             </a:pPr>
             <a:r>
-              <a:rPr lang="en-US" altLang="ja-JP" sz="1200" dirty="0" err="1"/>
+              <a:rPr lang="en-US" altLang="ja-JP" sz="1100" dirty="0" err="1"/>
               <a:t>AdministratorAccess</a:t>
             </a:r>
             <a:r>
-              <a:rPr lang="en-US" altLang="ja-JP" sz="1200" dirty="0"/>
+              <a:rPr lang="en-US" altLang="ja-JP" sz="1100" dirty="0"/>
               <a:t> </a:t>
             </a:r>
             <a:r>
-              <a:rPr lang="ja-JP" altLang="en-US" sz="1200" dirty="0"/>
+              <a:rPr lang="ja-JP" altLang="en-US" sz="1100" dirty="0"/>
               <a:t>または </a:t>
             </a:r>
             <a:r>
-              <a:rPr lang="en-US" altLang="ja-JP" sz="1200" dirty="0" err="1"/>
+              <a:rPr lang="en-US" altLang="ja-JP" sz="1100" dirty="0" err="1"/>
               <a:t>PowerUserAccess</a:t>
             </a:r>
-            <a:endParaRPr lang="en-US" altLang="ja-JP" sz="1200" dirty="0"/>
+            <a:endParaRPr lang="en-US" altLang="ja-JP" sz="1100" dirty="0"/>
           </a:p>
           <a:p>
             <a:pPr>
@@ -8265,23 +8572,23 @@
               </a:spcAft>
             </a:pPr>
             <a:r>
-              <a:rPr lang="ja-JP" altLang="en-US" sz="1200" dirty="0"/>
+              <a:rPr lang="ja-JP" altLang="en-US" sz="1100" dirty="0"/>
               <a:t>＋ アップロード操作（</a:t>
             </a:r>
             <a:r>
-              <a:rPr lang="en-US" altLang="ja-JP" sz="1200" dirty="0"/>
+              <a:rPr lang="en-US" altLang="ja-JP" sz="1100" dirty="0"/>
               <a:t>s3:PutObject </a:t>
             </a:r>
             <a:r>
-              <a:rPr lang="ja-JP" altLang="en-US" sz="1200" dirty="0"/>
+              <a:rPr lang="ja-JP" altLang="en-US" sz="1100" dirty="0"/>
               <a:t>など）を 明示的 </a:t>
             </a:r>
             <a:r>
-              <a:rPr lang="en-US" altLang="ja-JP" sz="1200" dirty="0"/>
+              <a:rPr lang="en-US" altLang="ja-JP" sz="1100" dirty="0"/>
               <a:t>Deny </a:t>
             </a:r>
             <a:r>
-              <a:rPr lang="ja-JP" altLang="en-US" sz="1200" dirty="0"/>
+              <a:rPr lang="ja-JP" altLang="en-US" sz="1100" dirty="0"/>
               <a:t>するカスタムポリシー</a:t>
             </a:r>
           </a:p>
@@ -8295,15 +8602,15 @@
               </a:spcAft>
             </a:pPr>
             <a:r>
-              <a:rPr lang="ja-JP" altLang="en-US" sz="1200" dirty="0"/>
+              <a:rPr lang="ja-JP" altLang="en-US" sz="1100" dirty="0"/>
               <a:t>→ 明示的 </a:t>
             </a:r>
             <a:r>
-              <a:rPr lang="en-US" altLang="ja-JP" sz="1200" dirty="0"/>
+              <a:rPr lang="en-US" altLang="ja-JP" sz="1100" dirty="0"/>
               <a:t>Deny </a:t>
             </a:r>
             <a:r>
-              <a:rPr lang="ja-JP" altLang="en-US" sz="1200" dirty="0"/>
+              <a:rPr lang="ja-JP" altLang="en-US" sz="1100" dirty="0"/>
               <a:t>が最優先で評価されるため、アップロード禁止が確実。</a:t>
             </a:r>
           </a:p>
@@ -8336,8 +8643,8 @@
         </p:nvSpPr>
         <p:spPr>
           <a:xfrm>
-            <a:off x="6024285" y="810867"/>
-            <a:ext cx="6110264" cy="1125509"/>
+            <a:off x="5834885" y="5513476"/>
+            <a:ext cx="6110264" cy="858642"/>
           </a:xfrm>
           <a:prstGeom prst="rect">
             <a:avLst/>
@@ -8530,10 +8837,10 @@
               </a:spcAft>
             </a:pPr>
             <a:r>
-              <a:rPr lang="ja-JP" altLang="en-US" sz="1600" dirty="0"/>
+              <a:rPr lang="ja-JP" altLang="en-US" sz="1400" dirty="0"/>
               <a:t>■最終結論（お客様側）</a:t>
             </a:r>
-            <a:endParaRPr lang="en-US" altLang="ja-JP" sz="1600" dirty="0"/>
+            <a:endParaRPr lang="en-US" altLang="ja-JP" sz="1400" dirty="0"/>
           </a:p>
           <a:p>
             <a:pPr>
@@ -8544,7 +8851,7 @@
                 <a:spcPts val="0"/>
               </a:spcAft>
             </a:pPr>
-            <a:endParaRPr lang="ja-JP" altLang="en-US" sz="1600" dirty="0"/>
+            <a:endParaRPr lang="ja-JP" altLang="en-US" sz="900" dirty="0"/>
           </a:p>
           <a:p>
             <a:pPr>
@@ -8556,23 +8863,23 @@
               </a:spcAft>
             </a:pPr>
             <a:r>
-              <a:rPr lang="ja-JP" altLang="en-US" sz="1200" dirty="0"/>
+              <a:rPr lang="ja-JP" altLang="en-US" sz="1100" dirty="0"/>
               <a:t>「</a:t>
             </a:r>
             <a:r>
-              <a:rPr lang="en-US" altLang="ja-JP" sz="1200" dirty="0" err="1"/>
+              <a:rPr lang="en-US" altLang="ja-JP" sz="1100" dirty="0" err="1"/>
               <a:t>PowerUserAccess</a:t>
             </a:r>
             <a:r>
-              <a:rPr lang="ja-JP" altLang="en-US" sz="1200" dirty="0"/>
+              <a:rPr lang="ja-JP" altLang="en-US" sz="1100" dirty="0"/>
               <a:t>＋</a:t>
             </a:r>
             <a:r>
-              <a:rPr lang="en-US" altLang="ja-JP" sz="1200" dirty="0"/>
+              <a:rPr lang="en-US" altLang="ja-JP" sz="1100" dirty="0"/>
               <a:t>S3</a:t>
             </a:r>
             <a:r>
-              <a:rPr lang="ja-JP" altLang="en-US" sz="1200" dirty="0"/>
+              <a:rPr lang="ja-JP" altLang="en-US" sz="1100" dirty="0"/>
               <a:t>アップロード禁止のカスタムポリシー」で対応する方針とするとのことで問い合わせクローズ。</a:t>
             </a:r>
           </a:p>
@@ -8580,10 +8887,10 @@
       </p:sp>
       <p:sp>
         <p:nvSpPr>
-          <p:cNvPr id="56" name="コンテンツ プレースホルダー 10">
+          <p:cNvPr id="3" name="コンテンツ プレースホルダー 10">
             <a:extLst>
               <a:ext uri="{FF2B5EF4-FFF2-40B4-BE49-F238E27FC236}">
-                <a16:creationId xmlns:a16="http://schemas.microsoft.com/office/drawing/2014/main" id="{F1750309-F865-9E21-4A06-8CFA2603653D}"/>
+                <a16:creationId xmlns:a16="http://schemas.microsoft.com/office/drawing/2014/main" id="{317204A3-4EB7-9F90-0EB9-552DD1E1EF91}"/>
               </a:ext>
             </a:extLst>
           </p:cNvPr>
@@ -8594,8 +8901,8 @@
         </p:nvSpPr>
         <p:spPr>
           <a:xfrm>
-            <a:off x="6024285" y="2115548"/>
-            <a:ext cx="5760642" cy="4279023"/>
+            <a:off x="5808754" y="695474"/>
+            <a:ext cx="6110264" cy="3650541"/>
           </a:xfrm>
           <a:prstGeom prst="rect">
             <a:avLst/>
@@ -8788,18 +9095,10 @@
               </a:spcAft>
             </a:pPr>
             <a:r>
-              <a:rPr lang="ja-JP" altLang="en-US" sz="1600" dirty="0"/>
-              <a:t>■参考資料（</a:t>
-            </a:r>
-            <a:r>
-              <a:rPr lang="en-US" altLang="ja-JP" sz="1600" dirty="0"/>
-              <a:t>AWS</a:t>
-            </a:r>
-            <a:r>
-              <a:rPr lang="ja-JP" altLang="en-US" sz="1600" dirty="0"/>
-              <a:t>公式ドキュメント）</a:t>
-            </a:r>
-            <a:endParaRPr lang="en-US" altLang="ja-JP" sz="1600" dirty="0"/>
+              <a:rPr lang="ja-JP" altLang="en-US" sz="1400" dirty="0"/>
+              <a:t>■対応時に意識した点・工夫</a:t>
+            </a:r>
+            <a:endParaRPr lang="en-US" altLang="ja-JP" sz="1400" dirty="0"/>
           </a:p>
           <a:p>
             <a:pPr>
@@ -8810,7 +9109,7 @@
                 <a:spcPts val="0"/>
               </a:spcAft>
             </a:pPr>
-            <a:endParaRPr lang="en-US" altLang="ja-JP" sz="1600" dirty="0"/>
+            <a:endParaRPr lang="ja-JP" altLang="en-US" sz="900" dirty="0"/>
           </a:p>
           <a:p>
             <a:pPr>
@@ -8822,18 +9121,10 @@
               </a:spcAft>
             </a:pPr>
             <a:r>
-              <a:rPr lang="ja-JP" altLang="en-US" sz="1200" dirty="0"/>
-              <a:t>■ </a:t>
-            </a:r>
-            <a:r>
-              <a:rPr lang="en-US" altLang="ja-JP" sz="1200" dirty="0"/>
-              <a:t>IAM </a:t>
-            </a:r>
-            <a:r>
-              <a:rPr lang="ja-JP" altLang="en-US" sz="1200" dirty="0"/>
-              <a:t>ポリシー関連</a:t>
-            </a:r>
-            <a:endParaRPr lang="en-US" altLang="ja-JP" sz="1200" dirty="0"/>
+              <a:rPr lang="ja-JP" altLang="en-US" sz="1100" dirty="0"/>
+              <a:t>① 初回ヒアリングの整理</a:t>
+            </a:r>
+            <a:endParaRPr lang="en-US" altLang="ja-JP" sz="1100" dirty="0"/>
           </a:p>
           <a:p>
             <a:pPr>
@@ -8844,7 +9135,11 @@
                 <a:spcPts val="0"/>
               </a:spcAft>
             </a:pPr>
-            <a:endParaRPr lang="ja-JP" altLang="en-US" sz="1200" dirty="0"/>
+            <a:r>
+              <a:rPr lang="ja-JP" altLang="en-US" sz="1100" dirty="0"/>
+              <a:t>　初回回答時に以下を整理して確認：</a:t>
+            </a:r>
+            <a:endParaRPr lang="en-US" altLang="ja-JP" sz="1100" dirty="0"/>
           </a:p>
           <a:p>
             <a:pPr>
@@ -8856,13 +9151,26 @@
               </a:spcAft>
             </a:pPr>
             <a:r>
-              <a:rPr lang="en-US" altLang="ja-JP" sz="1200" dirty="0"/>
-              <a:t>[1] </a:t>
-            </a:r>
-            <a:r>
-              <a:rPr lang="ja-JP" altLang="en-US" sz="1200" dirty="0"/>
-              <a:t>ポリシーの評価論理</a:t>
-            </a:r>
+              <a:rPr lang="ja-JP" altLang="en-US" sz="1100" dirty="0"/>
+              <a:t>・対象</a:t>
+            </a:r>
+            <a:r>
+              <a:rPr lang="en-US" altLang="ja-JP" sz="1100" dirty="0"/>
+              <a:t>IAM</a:t>
+            </a:r>
+            <a:r>
+              <a:rPr lang="ja-JP" altLang="en-US" sz="1100" dirty="0"/>
+              <a:t>エンティティ（</a:t>
+            </a:r>
+            <a:r>
+              <a:rPr lang="en-US" altLang="ja-JP" sz="1100" dirty="0"/>
+              <a:t>User / Role</a:t>
+            </a:r>
+            <a:r>
+              <a:rPr lang="ja-JP" altLang="en-US" sz="1100" dirty="0"/>
+              <a:t>）</a:t>
+            </a:r>
+            <a:endParaRPr lang="en-US" altLang="ja-JP" sz="1100" dirty="0"/>
           </a:p>
           <a:p>
             <a:pPr>
@@ -8874,9 +9182,18 @@
               </a:spcAft>
             </a:pPr>
             <a:r>
-              <a:rPr lang="en-US" altLang="ja-JP" sz="1200" dirty="0"/>
-              <a:t>https://docs.aws.amazon.com/ja_jp/IAM/latest/UserGuide/reference_policies_evaluation-logic.html</a:t>
-            </a:r>
+              <a:rPr lang="ja-JP" altLang="en-US" sz="1100" dirty="0"/>
+              <a:t>・想定操作（</a:t>
+            </a:r>
+            <a:r>
+              <a:rPr lang="en-US" altLang="ja-JP" sz="1100" dirty="0"/>
+              <a:t>Console / CLI</a:t>
+            </a:r>
+            <a:r>
+              <a:rPr lang="ja-JP" altLang="en-US" sz="1100" dirty="0"/>
+              <a:t>）</a:t>
+            </a:r>
+            <a:endParaRPr lang="en-US" altLang="ja-JP" sz="1100" dirty="0"/>
           </a:p>
           <a:p>
             <a:pPr>
@@ -8887,7 +9204,11 @@
                 <a:spcPts val="0"/>
               </a:spcAft>
             </a:pPr>
-            <a:endParaRPr lang="en-US" altLang="ja-JP" sz="1200" dirty="0"/>
+            <a:r>
+              <a:rPr lang="ja-JP" altLang="en-US" sz="1100" dirty="0"/>
+              <a:t>・現在アタッチされているポリシー構成</a:t>
+            </a:r>
+            <a:endParaRPr lang="en-US" altLang="ja-JP" sz="1100" dirty="0"/>
           </a:p>
           <a:p>
             <a:pPr>
@@ -8899,14 +9220,10 @@
               </a:spcAft>
             </a:pPr>
             <a:r>
-              <a:rPr lang="en-US" altLang="ja-JP" sz="1200" dirty="0"/>
-              <a:t>[2] </a:t>
-            </a:r>
-            <a:r>
-              <a:rPr lang="en-US" altLang="ja-JP" sz="1200" dirty="0" err="1"/>
-              <a:t>PowerUserAccess</a:t>
-            </a:r>
-            <a:endParaRPr lang="en-US" altLang="ja-JP" sz="1200" dirty="0"/>
+              <a:rPr lang="ja-JP" altLang="en-US" sz="1100" dirty="0"/>
+              <a:t>・禁止レベル（完全禁止か、条件付きか）</a:t>
+            </a:r>
+            <a:endParaRPr lang="en-US" altLang="ja-JP" sz="1100" dirty="0"/>
           </a:p>
           <a:p>
             <a:pPr>
@@ -8918,9 +9235,10 @@
               </a:spcAft>
             </a:pPr>
             <a:r>
-              <a:rPr lang="en-US" altLang="ja-JP" sz="1200" dirty="0"/>
-              <a:t>https://docs.aws.amazon.com/ja_jp/aws-managed-policy/latest/reference/PowerUserAccess.html</a:t>
-            </a:r>
+              <a:rPr lang="ja-JP" altLang="en-US" sz="1100" dirty="0"/>
+              <a:t>→ 追加ヒアリングの往復を削減。</a:t>
+            </a:r>
+            <a:endParaRPr lang="en-US" altLang="ja-JP" sz="1100" dirty="0"/>
           </a:p>
           <a:p>
             <a:pPr>
@@ -8931,7 +9249,7 @@
                 <a:spcPts val="0"/>
               </a:spcAft>
             </a:pPr>
-            <a:endParaRPr lang="en-US" altLang="ja-JP" sz="1200" dirty="0"/>
+            <a:endParaRPr lang="en-US" altLang="ja-JP" sz="1100" dirty="0"/>
           </a:p>
           <a:p>
             <a:pPr>
@@ -8943,14 +9261,10 @@
               </a:spcAft>
             </a:pPr>
             <a:r>
-              <a:rPr lang="en-US" altLang="ja-JP" sz="1200" dirty="0"/>
-              <a:t>■ S3 / </a:t>
-            </a:r>
-            <a:r>
-              <a:rPr lang="ja-JP" altLang="en-US" sz="1200" dirty="0"/>
-              <a:t>アクセス権限関連</a:t>
-            </a:r>
-            <a:endParaRPr lang="en-US" altLang="ja-JP" sz="1200" dirty="0"/>
+              <a:rPr lang="ja-JP" altLang="en-US" sz="1100" dirty="0"/>
+              <a:t>② 評価ロジックに基づく即時切り分け</a:t>
+            </a:r>
+            <a:endParaRPr lang="en-US" altLang="ja-JP" sz="1100" dirty="0"/>
           </a:p>
           <a:p>
             <a:pPr>
@@ -8961,7 +9275,19 @@
                 <a:spcPts val="0"/>
               </a:spcAft>
             </a:pPr>
-            <a:endParaRPr lang="ja-JP" altLang="en-US" sz="1200" dirty="0"/>
+            <a:r>
+              <a:rPr lang="ja-JP" altLang="en-US" sz="1100" dirty="0"/>
+              <a:t>・明示的 </a:t>
+            </a:r>
+            <a:r>
+              <a:rPr lang="en-US" altLang="ja-JP" sz="1100" dirty="0"/>
+              <a:t>Deny </a:t>
+            </a:r>
+            <a:r>
+              <a:rPr lang="ja-JP" altLang="en-US" sz="1100" dirty="0"/>
+              <a:t>の有無を最優先で確認。</a:t>
+            </a:r>
+            <a:endParaRPr lang="en-US" altLang="ja-JP" sz="1100" dirty="0"/>
           </a:p>
           <a:p>
             <a:pPr>
@@ -8973,9 +9299,22 @@
               </a:spcAft>
             </a:pPr>
             <a:r>
-              <a:rPr lang="en-US" altLang="ja-JP" sz="1200" dirty="0"/>
-              <a:t>[1] AmazonS3ReadOnlyAccess</a:t>
-            </a:r>
+              <a:rPr lang="ja-JP" altLang="en-US" sz="1100" dirty="0"/>
+              <a:t>・</a:t>
+            </a:r>
+            <a:r>
+              <a:rPr lang="en-US" altLang="ja-JP" sz="1100" dirty="0" err="1"/>
+              <a:t>AdministratorAccess</a:t>
+            </a:r>
+            <a:r>
+              <a:rPr lang="en-US" altLang="ja-JP" sz="1100" dirty="0"/>
+              <a:t> </a:t>
+            </a:r>
+            <a:r>
+              <a:rPr lang="ja-JP" altLang="en-US" sz="1100" dirty="0"/>
+              <a:t>の仕様を即断。</a:t>
+            </a:r>
+            <a:endParaRPr lang="en-US" altLang="ja-JP" sz="1100" dirty="0"/>
           </a:p>
           <a:p>
             <a:pPr>
@@ -8987,9 +9326,18 @@
               </a:spcAft>
             </a:pPr>
             <a:r>
-              <a:rPr lang="en-US" altLang="ja-JP" sz="1200" dirty="0"/>
-              <a:t>https://docs.aws.amazon.com/ja_jp/aws-managed-policy/latest/reference/AmazonS3ReadOnlyAccess.html</a:t>
-            </a:r>
+              <a:rPr lang="ja-JP" altLang="en-US" sz="1100" dirty="0"/>
+              <a:t>→ よくある誤認（</a:t>
+            </a:r>
+            <a:r>
+              <a:rPr lang="en-US" altLang="ja-JP" sz="1100" dirty="0" err="1"/>
+              <a:t>ReadOnly</a:t>
+            </a:r>
+            <a:r>
+              <a:rPr lang="ja-JP" altLang="en-US" sz="1100" dirty="0"/>
+              <a:t>で制限できるという誤解）を初回回答で解消。</a:t>
+            </a:r>
+            <a:endParaRPr lang="en-US" altLang="ja-JP" sz="1100" dirty="0"/>
           </a:p>
           <a:p>
             <a:pPr>
@@ -9000,7 +9348,7 @@
                 <a:spcPts val="0"/>
               </a:spcAft>
             </a:pPr>
-            <a:endParaRPr lang="en-US" altLang="ja-JP" sz="1200" dirty="0"/>
+            <a:endParaRPr lang="en-US" altLang="ja-JP" sz="1100" dirty="0"/>
           </a:p>
           <a:p>
             <a:pPr>
@@ -9012,13 +9360,26 @@
               </a:spcAft>
             </a:pPr>
             <a:r>
-              <a:rPr lang="en-US" altLang="ja-JP" sz="1200" dirty="0"/>
-              <a:t>[2] </a:t>
-            </a:r>
-            <a:r>
-              <a:rPr lang="ja-JP" altLang="en-US" sz="1200" dirty="0"/>
-              <a:t>明示的な拒否と暗黙的な拒否の違い</a:t>
-            </a:r>
+              <a:rPr lang="ja-JP" altLang="en-US" sz="1100" dirty="0"/>
+              <a:t>③ 類似</a:t>
+            </a:r>
+            <a:r>
+              <a:rPr lang="en-US" altLang="ja-JP" sz="1100" dirty="0"/>
+              <a:t>QA</a:t>
+            </a:r>
+            <a:r>
+              <a:rPr lang="ja-JP" altLang="en-US" sz="1100" dirty="0"/>
+              <a:t>の事前整理</a:t>
+            </a:r>
+            <a:r>
+              <a:rPr lang="en-US" altLang="ja-JP" sz="1100" dirty="0"/>
+              <a:t>S3</a:t>
+            </a:r>
+            <a:r>
+              <a:rPr lang="ja-JP" altLang="en-US" sz="1100" dirty="0"/>
+              <a:t>アップロード制限は頻出問い合わせのため、</a:t>
+            </a:r>
+            <a:endParaRPr lang="en-US" altLang="ja-JP" sz="1100" dirty="0"/>
           </a:p>
           <a:p>
             <a:pPr>
@@ -9030,8 +9391,379 @@
               </a:spcAft>
             </a:pPr>
             <a:r>
-              <a:rPr lang="en-US" altLang="ja-JP" sz="1200" dirty="0"/>
-              <a:t>https://docs.aws.amazon.com/ja_jp/IAM/latest/UserGuide/reference_policies_evaluation-logic_AccessPolicyLanguage_Interplay.html</a:t>
+              <a:rPr lang="ja-JP" altLang="en-US" sz="1100" dirty="0"/>
+              <a:t>・よくある誤認パターン</a:t>
+            </a:r>
+            <a:endParaRPr lang="en-US" altLang="ja-JP" sz="1100" dirty="0"/>
+          </a:p>
+          <a:p>
+            <a:pPr>
+              <a:lnSpc>
+                <a:spcPct val="100000"/>
+              </a:lnSpc>
+              <a:spcAft>
+                <a:spcPts val="0"/>
+              </a:spcAft>
+            </a:pPr>
+            <a:r>
+              <a:rPr lang="ja-JP" altLang="en-US" sz="1100" dirty="0"/>
+              <a:t>・推奨構成テンプレート</a:t>
+            </a:r>
+            <a:endParaRPr lang="en-US" altLang="ja-JP" sz="1100" dirty="0"/>
+          </a:p>
+          <a:p>
+            <a:pPr>
+              <a:lnSpc>
+                <a:spcPct val="100000"/>
+              </a:lnSpc>
+              <a:spcAft>
+                <a:spcPts val="0"/>
+              </a:spcAft>
+            </a:pPr>
+            <a:r>
+              <a:rPr lang="ja-JP" altLang="en-US" sz="1100" dirty="0"/>
+              <a:t>・公式ドキュメント</a:t>
+            </a:r>
+            <a:r>
+              <a:rPr lang="en-US" altLang="ja-JP" sz="1100" dirty="0"/>
+              <a:t>URL</a:t>
+            </a:r>
+          </a:p>
+          <a:p>
+            <a:pPr>
+              <a:lnSpc>
+                <a:spcPct val="100000"/>
+              </a:lnSpc>
+              <a:spcAft>
+                <a:spcPts val="0"/>
+              </a:spcAft>
+            </a:pPr>
+            <a:r>
+              <a:rPr lang="ja-JP" altLang="en-US" sz="1100" dirty="0"/>
+              <a:t>　を事前整理。</a:t>
+            </a:r>
+            <a:endParaRPr lang="en-US" altLang="ja-JP" sz="1100" dirty="0"/>
+          </a:p>
+          <a:p>
+            <a:pPr>
+              <a:lnSpc>
+                <a:spcPct val="100000"/>
+              </a:lnSpc>
+              <a:spcAft>
+                <a:spcPts val="0"/>
+              </a:spcAft>
+            </a:pPr>
+            <a:r>
+              <a:rPr lang="ja-JP" altLang="en-US" sz="1100" dirty="0"/>
+              <a:t>　→ 少ないターン数で具体的な対策提示が可能。</a:t>
+            </a:r>
+            <a:endParaRPr lang="en-US" altLang="ja-JP" sz="1100" dirty="0"/>
+          </a:p>
+          <a:p>
+            <a:pPr>
+              <a:lnSpc>
+                <a:spcPct val="100000"/>
+              </a:lnSpc>
+              <a:spcAft>
+                <a:spcPts val="0"/>
+              </a:spcAft>
+            </a:pPr>
+            <a:endParaRPr lang="en-US" altLang="ja-JP" sz="1100" dirty="0"/>
+          </a:p>
+        </p:txBody>
+      </p:sp>
+      <p:sp>
+        <p:nvSpPr>
+          <p:cNvPr id="5" name="コンテンツ プレースホルダー 10">
+            <a:extLst>
+              <a:ext uri="{FF2B5EF4-FFF2-40B4-BE49-F238E27FC236}">
+                <a16:creationId xmlns:a16="http://schemas.microsoft.com/office/drawing/2014/main" id="{48611DC3-90D6-2B0D-B9F9-7B1250324495}"/>
+              </a:ext>
+            </a:extLst>
+          </p:cNvPr>
+          <p:cNvSpPr txBox="1">
+            <a:spLocks/>
+          </p:cNvSpPr>
+          <p:nvPr/>
+        </p:nvSpPr>
+        <p:spPr>
+          <a:xfrm>
+            <a:off x="5840764" y="4417858"/>
+            <a:ext cx="6110264" cy="937913"/>
+          </a:xfrm>
+          <a:prstGeom prst="rect">
+            <a:avLst/>
+          </a:prstGeom>
+        </p:spPr>
+        <p:txBody>
+          <a:bodyPr vert="horz" lIns="0" tIns="0" rIns="0" bIns="0" rtlCol="0">
+            <a:noAutofit/>
+          </a:bodyPr>
+          <a:lstStyle>
+            <a:lvl1pPr marL="0" indent="0" algn="l" defTabSz="914400" rtl="0" eaLnBrk="1" latinLnBrk="0" hangingPunct="1">
+              <a:lnSpc>
+                <a:spcPts val="3200"/>
+              </a:lnSpc>
+              <a:spcBef>
+                <a:spcPts val="0"/>
+              </a:spcBef>
+              <a:spcAft>
+                <a:spcPts val="800"/>
+              </a:spcAft>
+              <a:buFont typeface="Arial" panose="020B0604020202020204" pitchFamily="34" charset="0"/>
+              <a:buNone/>
+              <a:defRPr kumimoji="1" sz="3200" b="1" kern="1200">
+                <a:solidFill>
+                  <a:schemeClr val="tx1"/>
+                </a:solidFill>
+                <a:latin typeface="+mn-ea"/>
+                <a:ea typeface="+mn-ea"/>
+                <a:cs typeface="+mn-cs"/>
+              </a:defRPr>
+            </a:lvl1pPr>
+            <a:lvl2pPr marL="685800" indent="-228600" algn="l" defTabSz="914400" rtl="0" eaLnBrk="1" latinLnBrk="0" hangingPunct="1">
+              <a:lnSpc>
+                <a:spcPts val="2800"/>
+              </a:lnSpc>
+              <a:spcBef>
+                <a:spcPts val="0"/>
+              </a:spcBef>
+              <a:spcAft>
+                <a:spcPts val="0"/>
+              </a:spcAft>
+              <a:buFont typeface="Arial" panose="020B0604020202020204" pitchFamily="34" charset="0"/>
+              <a:buChar char="•"/>
+              <a:defRPr kumimoji="1" sz="2000" b="1" kern="1200">
+                <a:solidFill>
+                  <a:schemeClr val="tx1"/>
+                </a:solidFill>
+                <a:latin typeface="+mn-ea"/>
+                <a:ea typeface="+mn-ea"/>
+                <a:cs typeface="+mn-cs"/>
+              </a:defRPr>
+            </a:lvl2pPr>
+            <a:lvl3pPr marL="1143000" indent="-228600" algn="l" defTabSz="914400" rtl="0" eaLnBrk="1" latinLnBrk="0" hangingPunct="1">
+              <a:lnSpc>
+                <a:spcPts val="2400"/>
+              </a:lnSpc>
+              <a:spcBef>
+                <a:spcPts val="0"/>
+              </a:spcBef>
+              <a:spcAft>
+                <a:spcPts val="0"/>
+              </a:spcAft>
+              <a:buFont typeface="Arial" panose="020B0604020202020204" pitchFamily="34" charset="0"/>
+              <a:buChar char="•"/>
+              <a:defRPr kumimoji="1" sz="1800" kern="1200">
+                <a:solidFill>
+                  <a:schemeClr val="tx1"/>
+                </a:solidFill>
+                <a:latin typeface="+mn-ea"/>
+                <a:ea typeface="+mn-ea"/>
+                <a:cs typeface="+mn-cs"/>
+              </a:defRPr>
+            </a:lvl3pPr>
+            <a:lvl4pPr marL="1600200" indent="-228600" algn="l" defTabSz="914400" rtl="0" eaLnBrk="1" latinLnBrk="0" hangingPunct="1">
+              <a:lnSpc>
+                <a:spcPts val="2400"/>
+              </a:lnSpc>
+              <a:spcBef>
+                <a:spcPts val="0"/>
+              </a:spcBef>
+              <a:buFont typeface="Arial" panose="020B0604020202020204" pitchFamily="34" charset="0"/>
+              <a:buChar char="•"/>
+              <a:defRPr kumimoji="1" sz="1600" kern="1200">
+                <a:solidFill>
+                  <a:schemeClr val="tx1"/>
+                </a:solidFill>
+                <a:latin typeface="+mn-ea"/>
+                <a:ea typeface="+mn-ea"/>
+                <a:cs typeface="+mn-cs"/>
+              </a:defRPr>
+            </a:lvl4pPr>
+            <a:lvl5pPr marL="2057400" indent="-228600" algn="l" defTabSz="914400" rtl="0" eaLnBrk="1" latinLnBrk="0" hangingPunct="1">
+              <a:lnSpc>
+                <a:spcPts val="2000"/>
+              </a:lnSpc>
+              <a:spcBef>
+                <a:spcPts val="0"/>
+              </a:spcBef>
+              <a:buFont typeface="Arial" panose="020B0604020202020204" pitchFamily="34" charset="0"/>
+              <a:buChar char="•"/>
+              <a:defRPr kumimoji="1" sz="1400" kern="1200">
+                <a:solidFill>
+                  <a:schemeClr val="tx1"/>
+                </a:solidFill>
+                <a:latin typeface="+mn-ea"/>
+                <a:ea typeface="+mn-ea"/>
+                <a:cs typeface="+mn-cs"/>
+              </a:defRPr>
+            </a:lvl5pPr>
+            <a:lvl6pPr marL="2514600" indent="-228600" algn="l" defTabSz="914400" rtl="0" eaLnBrk="1" latinLnBrk="0" hangingPunct="1">
+              <a:lnSpc>
+                <a:spcPct val="90000"/>
+              </a:lnSpc>
+              <a:spcBef>
+                <a:spcPts val="500"/>
+              </a:spcBef>
+              <a:buFont typeface="Arial" panose="020B0604020202020204" pitchFamily="34" charset="0"/>
+              <a:buChar char="•"/>
+              <a:defRPr kumimoji="1" sz="1800" kern="1200">
+                <a:solidFill>
+                  <a:schemeClr val="tx1"/>
+                </a:solidFill>
+                <a:latin typeface="+mn-lt"/>
+                <a:ea typeface="+mn-ea"/>
+                <a:cs typeface="+mn-cs"/>
+              </a:defRPr>
+            </a:lvl6pPr>
+            <a:lvl7pPr marL="2971800" indent="-228600" algn="l" defTabSz="914400" rtl="0" eaLnBrk="1" latinLnBrk="0" hangingPunct="1">
+              <a:lnSpc>
+                <a:spcPct val="90000"/>
+              </a:lnSpc>
+              <a:spcBef>
+                <a:spcPts val="500"/>
+              </a:spcBef>
+              <a:buFont typeface="Arial" panose="020B0604020202020204" pitchFamily="34" charset="0"/>
+              <a:buChar char="•"/>
+              <a:defRPr kumimoji="1" sz="1800" kern="1200">
+                <a:solidFill>
+                  <a:schemeClr val="tx1"/>
+                </a:solidFill>
+                <a:latin typeface="+mn-lt"/>
+                <a:ea typeface="+mn-ea"/>
+                <a:cs typeface="+mn-cs"/>
+              </a:defRPr>
+            </a:lvl7pPr>
+            <a:lvl8pPr marL="3429000" indent="-228600" algn="l" defTabSz="914400" rtl="0" eaLnBrk="1" latinLnBrk="0" hangingPunct="1">
+              <a:lnSpc>
+                <a:spcPct val="90000"/>
+              </a:lnSpc>
+              <a:spcBef>
+                <a:spcPts val="500"/>
+              </a:spcBef>
+              <a:buFont typeface="Arial" panose="020B0604020202020204" pitchFamily="34" charset="0"/>
+              <a:buChar char="•"/>
+              <a:defRPr kumimoji="1" sz="1800" kern="1200">
+                <a:solidFill>
+                  <a:schemeClr val="tx1"/>
+                </a:solidFill>
+                <a:latin typeface="+mn-lt"/>
+                <a:ea typeface="+mn-ea"/>
+                <a:cs typeface="+mn-cs"/>
+              </a:defRPr>
+            </a:lvl8pPr>
+            <a:lvl9pPr marL="3886200" indent="-228600" algn="l" defTabSz="914400" rtl="0" eaLnBrk="1" latinLnBrk="0" hangingPunct="1">
+              <a:lnSpc>
+                <a:spcPct val="90000"/>
+              </a:lnSpc>
+              <a:spcBef>
+                <a:spcPts val="500"/>
+              </a:spcBef>
+              <a:buFont typeface="Arial" panose="020B0604020202020204" pitchFamily="34" charset="0"/>
+              <a:buChar char="•"/>
+              <a:defRPr kumimoji="1" sz="1800" kern="1200">
+                <a:solidFill>
+                  <a:schemeClr val="tx1"/>
+                </a:solidFill>
+                <a:latin typeface="+mn-lt"/>
+                <a:ea typeface="+mn-ea"/>
+                <a:cs typeface="+mn-cs"/>
+              </a:defRPr>
+            </a:lvl9pPr>
+          </a:lstStyle>
+          <a:p>
+            <a:pPr>
+              <a:lnSpc>
+                <a:spcPct val="100000"/>
+              </a:lnSpc>
+              <a:spcAft>
+                <a:spcPts val="0"/>
+              </a:spcAft>
+            </a:pPr>
+            <a:r>
+              <a:rPr lang="ja-JP" altLang="en-US" sz="1400" dirty="0"/>
+              <a:t>■本対応による成果</a:t>
+            </a:r>
+            <a:endParaRPr lang="en-US" altLang="ja-JP" sz="1400" dirty="0"/>
+          </a:p>
+          <a:p>
+            <a:pPr>
+              <a:lnSpc>
+                <a:spcPct val="100000"/>
+              </a:lnSpc>
+              <a:spcAft>
+                <a:spcPts val="0"/>
+              </a:spcAft>
+            </a:pPr>
+            <a:endParaRPr lang="en-US" altLang="ja-JP" sz="900" dirty="0"/>
+          </a:p>
+          <a:p>
+            <a:pPr>
+              <a:lnSpc>
+                <a:spcPct val="100000"/>
+              </a:lnSpc>
+              <a:spcAft>
+                <a:spcPts val="0"/>
+              </a:spcAft>
+            </a:pPr>
+            <a:r>
+              <a:rPr lang="ja-JP" altLang="en-US" sz="1100" dirty="0"/>
+              <a:t>・追加ヒアリング往復を削減（通常</a:t>
+            </a:r>
+            <a:r>
+              <a:rPr lang="en-US" altLang="ja-JP" sz="1100" dirty="0"/>
+              <a:t>3〜4</a:t>
+            </a:r>
+            <a:r>
+              <a:rPr lang="ja-JP" altLang="en-US" sz="1100" dirty="0"/>
+              <a:t>往復 → </a:t>
+            </a:r>
+            <a:r>
+              <a:rPr lang="en-US" altLang="ja-JP" sz="1100" dirty="0"/>
+              <a:t>1〜2</a:t>
+            </a:r>
+            <a:r>
+              <a:rPr lang="ja-JP" altLang="en-US" sz="1100" dirty="0"/>
+              <a:t>往復）</a:t>
+            </a:r>
+            <a:endParaRPr lang="en-US" altLang="ja-JP" sz="1100" dirty="0"/>
+          </a:p>
+          <a:p>
+            <a:pPr>
+              <a:lnSpc>
+                <a:spcPct val="100000"/>
+              </a:lnSpc>
+              <a:spcAft>
+                <a:spcPts val="0"/>
+              </a:spcAft>
+            </a:pPr>
+            <a:r>
+              <a:rPr lang="ja-JP" altLang="en-US" sz="1100" dirty="0"/>
+              <a:t>・初回回答で設計方針の可否を明確化</a:t>
+            </a:r>
+            <a:endParaRPr lang="en-US" altLang="ja-JP" sz="1100" dirty="0"/>
+          </a:p>
+          <a:p>
+            <a:pPr>
+              <a:lnSpc>
+                <a:spcPct val="100000"/>
+              </a:lnSpc>
+              <a:spcAft>
+                <a:spcPts val="0"/>
+              </a:spcAft>
+            </a:pPr>
+            <a:r>
+              <a:rPr lang="ja-JP" altLang="en-US" sz="1100" dirty="0"/>
+              <a:t>・再発防止観点の</a:t>
+            </a:r>
+            <a:r>
+              <a:rPr lang="en-US" altLang="ja-JP" sz="1100" dirty="0"/>
+              <a:t>IAM</a:t>
+            </a:r>
+            <a:r>
+              <a:rPr lang="ja-JP" altLang="en-US" sz="1100" dirty="0"/>
+              <a:t>設計指針も提示</a:t>
             </a:r>
             <a:endParaRPr lang="ja-JP" altLang="en-US" sz="1600" dirty="0"/>
           </a:p>
@@ -9154,8 +9886,8 @@
         </p:nvSpPr>
         <p:spPr>
           <a:xfrm>
-            <a:off x="335360" y="1822360"/>
-            <a:ext cx="6674153" cy="369332"/>
+            <a:off x="335360" y="896775"/>
+            <a:ext cx="8906611" cy="2031325"/>
           </a:xfrm>
           <a:prstGeom prst="rect">
             <a:avLst/>
@@ -9178,174 +9910,83 @@
               <a:rPr lang="en-US" altLang="ja-JP" dirty="0">
                 <a:ea typeface="游ゴシック"/>
               </a:rPr>
-              <a:t>AWS</a:t>
+              <a:t>AWS Certified Solutions Architect – Professional </a:t>
             </a:r>
             <a:r>
               <a:rPr lang="ja-JP" altLang="en-US" dirty="0">
                 <a:ea typeface="游ゴシック"/>
               </a:rPr>
-              <a:t> </a:t>
+              <a:t>を含む各種</a:t>
             </a:r>
             <a:r>
               <a:rPr lang="en-US" altLang="ja-JP" dirty="0">
                 <a:ea typeface="游ゴシック"/>
               </a:rPr>
-              <a:t>Certified Solutions Architect – Professional</a:t>
+              <a:t>AWS</a:t>
             </a:r>
             <a:r>
               <a:rPr lang="ja-JP" altLang="en-US" dirty="0">
                 <a:ea typeface="游ゴシック"/>
               </a:rPr>
-              <a:t> 資格取得</a:t>
+              <a:t>認定資格の取得</a:t>
             </a:r>
             <a:endParaRPr lang="en-US" altLang="ja-JP" dirty="0">
               <a:ea typeface="游ゴシック"/>
             </a:endParaRPr>
           </a:p>
-        </p:txBody>
-      </p:sp>
-      <p:sp>
-        <p:nvSpPr>
-          <p:cNvPr id="5" name="テキスト ボックス 13">
-            <a:extLst>
-              <a:ext uri="{FF2B5EF4-FFF2-40B4-BE49-F238E27FC236}">
-                <a16:creationId xmlns:a16="http://schemas.microsoft.com/office/drawing/2014/main" id="{BDD4DDBA-A195-6BD5-FF9B-3368C5F825AB}"/>
-              </a:ext>
-            </a:extLst>
-          </p:cNvPr>
-          <p:cNvSpPr txBox="1"/>
-          <p:nvPr/>
-        </p:nvSpPr>
-        <p:spPr>
-          <a:xfrm>
-            <a:off x="335800" y="1108422"/>
-            <a:ext cx="3103778" cy="400110"/>
-          </a:xfrm>
-          <a:prstGeom prst="rect">
-            <a:avLst/>
-          </a:prstGeom>
-          <a:noFill/>
-          <a:ln>
-            <a:noFill/>
-          </a:ln>
-        </p:spPr>
-        <p:txBody>
-          <a:bodyPr wrap="square" lIns="91440" tIns="45720" rIns="91440" bIns="45720" anchor="t">
-            <a:spAutoFit/>
-          </a:bodyPr>
-          <a:lstStyle>
-            <a:defPPr>
-              <a:defRPr lang="ja-JP"/>
-            </a:defPPr>
-            <a:lvl1pPr marL="0" algn="l" defTabSz="914400" rtl="0" eaLnBrk="1" latinLnBrk="0" hangingPunct="1">
-              <a:defRPr kumimoji="1" sz="1800" kern="1200">
-                <a:solidFill>
-                  <a:schemeClr val="tx1"/>
-                </a:solidFill>
-                <a:latin typeface="+mn-lt"/>
-                <a:ea typeface="+mn-ea"/>
-                <a:cs typeface="+mn-cs"/>
-              </a:defRPr>
-            </a:lvl1pPr>
-            <a:lvl2pPr marL="457200" algn="l" defTabSz="914400" rtl="0" eaLnBrk="1" latinLnBrk="0" hangingPunct="1">
-              <a:defRPr kumimoji="1" sz="1800" kern="1200">
-                <a:solidFill>
-                  <a:schemeClr val="tx1"/>
-                </a:solidFill>
-                <a:latin typeface="+mn-lt"/>
-                <a:ea typeface="+mn-ea"/>
-                <a:cs typeface="+mn-cs"/>
-              </a:defRPr>
-            </a:lvl2pPr>
-            <a:lvl3pPr marL="914400" algn="l" defTabSz="914400" rtl="0" eaLnBrk="1" latinLnBrk="0" hangingPunct="1">
-              <a:defRPr kumimoji="1" sz="1800" kern="1200">
-                <a:solidFill>
-                  <a:schemeClr val="tx1"/>
-                </a:solidFill>
-                <a:latin typeface="+mn-lt"/>
-                <a:ea typeface="+mn-ea"/>
-                <a:cs typeface="+mn-cs"/>
-              </a:defRPr>
-            </a:lvl3pPr>
-            <a:lvl4pPr marL="1371600" algn="l" defTabSz="914400" rtl="0" eaLnBrk="1" latinLnBrk="0" hangingPunct="1">
-              <a:defRPr kumimoji="1" sz="1800" kern="1200">
-                <a:solidFill>
-                  <a:schemeClr val="tx1"/>
-                </a:solidFill>
-                <a:latin typeface="+mn-lt"/>
-                <a:ea typeface="+mn-ea"/>
-                <a:cs typeface="+mn-cs"/>
-              </a:defRPr>
-            </a:lvl4pPr>
-            <a:lvl5pPr marL="1828800" algn="l" defTabSz="914400" rtl="0" eaLnBrk="1" latinLnBrk="0" hangingPunct="1">
-              <a:defRPr kumimoji="1" sz="1800" kern="1200">
-                <a:solidFill>
-                  <a:schemeClr val="tx1"/>
-                </a:solidFill>
-                <a:latin typeface="+mn-lt"/>
-                <a:ea typeface="+mn-ea"/>
-                <a:cs typeface="+mn-cs"/>
-              </a:defRPr>
-            </a:lvl5pPr>
-            <a:lvl6pPr marL="2286000" algn="l" defTabSz="914400" rtl="0" eaLnBrk="1" latinLnBrk="0" hangingPunct="1">
-              <a:defRPr kumimoji="1" sz="1800" kern="1200">
-                <a:solidFill>
-                  <a:schemeClr val="tx1"/>
-                </a:solidFill>
-                <a:latin typeface="+mn-lt"/>
-                <a:ea typeface="+mn-ea"/>
-                <a:cs typeface="+mn-cs"/>
-              </a:defRPr>
-            </a:lvl6pPr>
-            <a:lvl7pPr marL="2743200" algn="l" defTabSz="914400" rtl="0" eaLnBrk="1" latinLnBrk="0" hangingPunct="1">
-              <a:defRPr kumimoji="1" sz="1800" kern="1200">
-                <a:solidFill>
-                  <a:schemeClr val="tx1"/>
-                </a:solidFill>
-                <a:latin typeface="+mn-lt"/>
-                <a:ea typeface="+mn-ea"/>
-                <a:cs typeface="+mn-cs"/>
-              </a:defRPr>
-            </a:lvl7pPr>
-            <a:lvl8pPr marL="3200400" algn="l" defTabSz="914400" rtl="0" eaLnBrk="1" latinLnBrk="0" hangingPunct="1">
-              <a:defRPr kumimoji="1" sz="1800" kern="1200">
-                <a:solidFill>
-                  <a:schemeClr val="tx1"/>
-                </a:solidFill>
-                <a:latin typeface="+mn-lt"/>
-                <a:ea typeface="+mn-ea"/>
-                <a:cs typeface="+mn-cs"/>
-              </a:defRPr>
-            </a:lvl8pPr>
-            <a:lvl9pPr marL="3657600" algn="l" defTabSz="914400" rtl="0" eaLnBrk="1" latinLnBrk="0" hangingPunct="1">
-              <a:defRPr kumimoji="1" sz="1800" kern="1200">
-                <a:solidFill>
-                  <a:schemeClr val="tx1"/>
-                </a:solidFill>
-                <a:latin typeface="+mn-lt"/>
-                <a:ea typeface="+mn-ea"/>
-                <a:cs typeface="+mn-cs"/>
-              </a:defRPr>
-            </a:lvl9pPr>
-          </a:lstStyle>
-          <a:p>
-            <a:pPr>
-              <a:lnSpc>
-                <a:spcPct val="100000"/>
-              </a:lnSpc>
-              <a:spcAft>
-                <a:spcPts val="0"/>
-              </a:spcAft>
-            </a:pPr>
-            <a:r>
-              <a:rPr lang="ja-JP" altLang="en-US" sz="2000" b="1">
-                <a:solidFill>
-                  <a:srgbClr val="0070C0"/>
-                </a:solidFill>
+          <a:p>
+            <a:r>
+              <a:rPr lang="ja-JP" altLang="en-US" dirty="0">
                 <a:ea typeface="游ゴシック"/>
               </a:rPr>
-              <a:t>今後の目標</a:t>
-            </a:r>
+              <a:t>　└ 大規模・高可用性構成の設計理解を深めるため</a:t>
+            </a:r>
+            <a:endParaRPr lang="en-US" altLang="ja-JP" dirty="0">
+              <a:ea typeface="游ゴシック"/>
+            </a:endParaRPr>
+          </a:p>
+          <a:p>
+            <a:endParaRPr lang="en-US" altLang="ja-JP" dirty="0">
+              <a:ea typeface="游ゴシック"/>
+            </a:endParaRPr>
+          </a:p>
+          <a:p>
+            <a:r>
+              <a:rPr lang="ja-JP" altLang="en-US" dirty="0">
+                <a:ea typeface="游ゴシック"/>
+              </a:rPr>
+              <a:t>・テクニカルサポート業務におけるナレッジ整備・標準化の推進</a:t>
+            </a:r>
+            <a:endParaRPr lang="en-US" altLang="ja-JP" dirty="0">
+              <a:ea typeface="游ゴシック"/>
+            </a:endParaRPr>
+          </a:p>
+          <a:p>
+            <a:r>
+              <a:rPr lang="ja-JP" altLang="en-US" dirty="0">
+                <a:ea typeface="游ゴシック"/>
+              </a:rPr>
+              <a:t>　└ 問い合わせ対応の品質向上およびチーム全体の解決スピード向上に貢献</a:t>
+            </a:r>
+            <a:endParaRPr lang="en-US" altLang="ja-JP" dirty="0">
+              <a:ea typeface="游ゴシック"/>
+            </a:endParaRPr>
+          </a:p>
+          <a:p>
+            <a:endParaRPr lang="en-US" altLang="ja-JP" dirty="0">
+              <a:ea typeface="游ゴシック"/>
+            </a:endParaRPr>
+          </a:p>
+          <a:p>
+            <a:r>
+              <a:rPr lang="ja-JP" altLang="en-US" dirty="0">
+                <a:ea typeface="游ゴシック"/>
+              </a:rPr>
+              <a:t>・将来的にはクラウドアーキテクトとして、顧客の課題解決に上流工程から関与</a:t>
+            </a:r>
+            <a:endParaRPr lang="en-US" altLang="ja-JP" dirty="0">
+              <a:ea typeface="游ゴシック"/>
+            </a:endParaRPr>
           </a:p>
         </p:txBody>
       </p:sp>
@@ -9953,15 +10594,6 @@
 </file>
 
 <file path=customXml/item1.xml><?xml version="1.0" encoding="utf-8"?>
-<?mso-contentType ?>
-<FormTemplates xmlns="http://schemas.microsoft.com/sharepoint/v3/contenttype/forms">
-  <Display>DocumentLibraryForm</Display>
-  <Edit>DocumentLibraryForm</Edit>
-  <New>DocumentLibraryForm</New>
-</FormTemplates>
-</file>
-
-<file path=customXml/item2.xml><?xml version="1.0" encoding="utf-8"?>
 <ct:contentTypeSchema xmlns:ct="http://schemas.microsoft.com/office/2006/metadata/contentType" xmlns:ma="http://schemas.microsoft.com/office/2006/metadata/properties/metaAttributes" ct:_="" ma:_="" ma:contentTypeName="ドキュメント" ma:contentTypeID="0x01010050778A40BB97904D942255E2E155F7D0" ma:contentTypeVersion="14" ma:contentTypeDescription="新しいドキュメントを作成します。" ma:contentTypeScope="" ma:versionID="69a6922dbfd1ab1826ad37d50c30c63c">
   <xsd:schema xmlns:xsd="http://www.w3.org/2001/XMLSchema" xmlns:xs="http://www.w3.org/2001/XMLSchema" xmlns:p="http://schemas.microsoft.com/office/2006/metadata/properties" xmlns:ns2="5d5e86c2-1981-49c0-a4c5-18f5e325411d" xmlns:ns3="3f560f56-3566-4265-8616-bf2c1da3872b" targetNamespace="http://schemas.microsoft.com/office/2006/metadata/properties" ma:root="true" ma:fieldsID="3fe0b2f1430f4c41453b7d9b1b5c55c1" ns2:_="" ns3:_="">
     <xsd:import namespace="5d5e86c2-1981-49c0-a4c5-18f5e325411d"/>
@@ -10178,7 +10810,7 @@
 </ct:contentTypeSchema>
 </file>
 
-<file path=customXml/item3.xml><?xml version="1.0" encoding="utf-8"?>
+<file path=customXml/item2.xml><?xml version="1.0" encoding="utf-8"?>
 <p:properties xmlns:p="http://schemas.microsoft.com/office/2006/metadata/properties" xmlns:xsi="http://www.w3.org/2001/XMLSchema-instance" xmlns:pc="http://schemas.microsoft.com/office/infopath/2007/PartnerControls">
   <documentManagement>
     <lcf76f155ced4ddcb4097134ff3c332f xmlns="5d5e86c2-1981-49c0-a4c5-18f5e325411d">
@@ -10188,15 +10820,16 @@
 </p:properties>
 </file>
 
-<file path=customXml/itemProps1.xml><?xml version="1.0" encoding="utf-8"?>
-<ds:datastoreItem xmlns:ds="http://schemas.openxmlformats.org/officeDocument/2006/customXml" ds:itemID="{EC315674-D7B8-47E2-BC37-5670892D3199}">
-  <ds:schemaRefs>
-    <ds:schemaRef ds:uri="http://schemas.microsoft.com/sharepoint/v3/contenttype/forms"/>
-  </ds:schemaRefs>
-</ds:datastoreItem>
+<file path=customXml/item3.xml><?xml version="1.0" encoding="utf-8"?>
+<?mso-contentType ?>
+<FormTemplates xmlns="http://schemas.microsoft.com/sharepoint/v3/contenttype/forms">
+  <Display>DocumentLibraryForm</Display>
+  <Edit>DocumentLibraryForm</Edit>
+  <New>DocumentLibraryForm</New>
+</FormTemplates>
 </file>
 
-<file path=customXml/itemProps2.xml><?xml version="1.0" encoding="utf-8"?>
+<file path=customXml/itemProps1.xml><?xml version="1.0" encoding="utf-8"?>
 <ds:datastoreItem xmlns:ds="http://schemas.openxmlformats.org/officeDocument/2006/customXml" ds:itemID="{3185AFE0-2C0D-480C-9101-310C580611BE}">
   <ds:schemaRefs>
     <ds:schemaRef ds:uri="http://schemas.microsoft.com/office/2006/metadata/contentType"/>
@@ -10215,7 +10848,7 @@
 </ds:datastoreItem>
 </file>
 
-<file path=customXml/itemProps3.xml><?xml version="1.0" encoding="utf-8"?>
+<file path=customXml/itemProps2.xml><?xml version="1.0" encoding="utf-8"?>
 <ds:datastoreItem xmlns:ds="http://schemas.openxmlformats.org/officeDocument/2006/customXml" ds:itemID="{06C0FC12-A96B-4033-90DC-496C404C70D1}">
   <ds:schemaRefs>
     <ds:schemaRef ds:uri="http://schemas.microsoft.com/office/2006/metadata/properties"/>
@@ -10223,4 +10856,12 @@
     <ds:schemaRef ds:uri="5d5e86c2-1981-49c0-a4c5-18f5e325411d"/>
   </ds:schemaRefs>
 </ds:datastoreItem>
+</file>
+
+<file path=customXml/itemProps3.xml><?xml version="1.0" encoding="utf-8"?>
+<ds:datastoreItem xmlns:ds="http://schemas.openxmlformats.org/officeDocument/2006/customXml" ds:itemID="{EC315674-D7B8-47E2-BC37-5670892D3199}">
+  <ds:schemaRefs>
+    <ds:schemaRef ds:uri="http://schemas.microsoft.com/sharepoint/v3/contenttype/forms"/>
+  </ds:schemaRefs>
+</ds:datastoreItem>
 </file>
--- a/ポートフォリオ_秋池.pptx
+++ b/ポートフォリオ_秋池.pptx
@@ -4270,13 +4270,19 @@
               <a:rPr lang="ja-JP" altLang="en-US" sz="1400" dirty="0">
                 <a:ea typeface="游ゴシック"/>
               </a:rPr>
-              <a:t>また、問い合わせ対応においては、平均解決日数（平均 </a:t>
+              <a:t>また、問い合わせ対応においては、平均解決</a:t>
+            </a:r>
+            <a:r>
+              <a:rPr lang="ja-JP" altLang="en-US" sz="1400">
+                <a:ea typeface="游ゴシック"/>
+              </a:rPr>
+              <a:t>日数（月平均 </a:t>
             </a:r>
             <a:r>
               <a:rPr lang="en-US" altLang="ja-JP" sz="1400" dirty="0">
                 <a:ea typeface="游ゴシック"/>
               </a:rPr>
-              <a:t>xx</a:t>
+              <a:t>10.7</a:t>
             </a:r>
             <a:r>
               <a:rPr lang="ja-JP" altLang="en-US" sz="1400" dirty="0">
@@ -10594,6 +10600,16 @@
 </file>
 
 <file path=customXml/item1.xml><?xml version="1.0" encoding="utf-8"?>
+<p:properties xmlns:p="http://schemas.microsoft.com/office/2006/metadata/properties" xmlns:xsi="http://www.w3.org/2001/XMLSchema-instance" xmlns:pc="http://schemas.microsoft.com/office/infopath/2007/PartnerControls">
+  <documentManagement>
+    <lcf76f155ced4ddcb4097134ff3c332f xmlns="5d5e86c2-1981-49c0-a4c5-18f5e325411d">
+      <Terms xmlns="http://schemas.microsoft.com/office/infopath/2007/PartnerControls"/>
+    </lcf76f155ced4ddcb4097134ff3c332f>
+  </documentManagement>
+</p:properties>
+</file>
+
+<file path=customXml/item2.xml><?xml version="1.0" encoding="utf-8"?>
 <ct:contentTypeSchema xmlns:ct="http://schemas.microsoft.com/office/2006/metadata/contentType" xmlns:ma="http://schemas.microsoft.com/office/2006/metadata/properties/metaAttributes" ct:_="" ma:_="" ma:contentTypeName="ドキュメント" ma:contentTypeID="0x01010050778A40BB97904D942255E2E155F7D0" ma:contentTypeVersion="14" ma:contentTypeDescription="新しいドキュメントを作成します。" ma:contentTypeScope="" ma:versionID="69a6922dbfd1ab1826ad37d50c30c63c">
   <xsd:schema xmlns:xsd="http://www.w3.org/2001/XMLSchema" xmlns:xs="http://www.w3.org/2001/XMLSchema" xmlns:p="http://schemas.microsoft.com/office/2006/metadata/properties" xmlns:ns2="5d5e86c2-1981-49c0-a4c5-18f5e325411d" xmlns:ns3="3f560f56-3566-4265-8616-bf2c1da3872b" targetNamespace="http://schemas.microsoft.com/office/2006/metadata/properties" ma:root="true" ma:fieldsID="3fe0b2f1430f4c41453b7d9b1b5c55c1" ns2:_="" ns3:_="">
     <xsd:import namespace="5d5e86c2-1981-49c0-a4c5-18f5e325411d"/>
@@ -10810,16 +10826,6 @@
 </ct:contentTypeSchema>
 </file>
 
-<file path=customXml/item2.xml><?xml version="1.0" encoding="utf-8"?>
-<p:properties xmlns:p="http://schemas.microsoft.com/office/2006/metadata/properties" xmlns:xsi="http://www.w3.org/2001/XMLSchema-instance" xmlns:pc="http://schemas.microsoft.com/office/infopath/2007/PartnerControls">
-  <documentManagement>
-    <lcf76f155ced4ddcb4097134ff3c332f xmlns="5d5e86c2-1981-49c0-a4c5-18f5e325411d">
-      <Terms xmlns="http://schemas.microsoft.com/office/infopath/2007/PartnerControls"/>
-    </lcf76f155ced4ddcb4097134ff3c332f>
-  </documentManagement>
-</p:properties>
-</file>
-
 <file path=customXml/item3.xml><?xml version="1.0" encoding="utf-8"?>
 <?mso-contentType ?>
 <FormTemplates xmlns="http://schemas.microsoft.com/sharepoint/v3/contenttype/forms">
@@ -10830,6 +10836,16 @@
 </file>
 
 <file path=customXml/itemProps1.xml><?xml version="1.0" encoding="utf-8"?>
+<ds:datastoreItem xmlns:ds="http://schemas.openxmlformats.org/officeDocument/2006/customXml" ds:itemID="{06C0FC12-A96B-4033-90DC-496C404C70D1}">
+  <ds:schemaRefs>
+    <ds:schemaRef ds:uri="http://schemas.microsoft.com/office/2006/metadata/properties"/>
+    <ds:schemaRef ds:uri="http://schemas.microsoft.com/office/infopath/2007/PartnerControls"/>
+    <ds:schemaRef ds:uri="5d5e86c2-1981-49c0-a4c5-18f5e325411d"/>
+  </ds:schemaRefs>
+</ds:datastoreItem>
+</file>
+
+<file path=customXml/itemProps2.xml><?xml version="1.0" encoding="utf-8"?>
 <ds:datastoreItem xmlns:ds="http://schemas.openxmlformats.org/officeDocument/2006/customXml" ds:itemID="{3185AFE0-2C0D-480C-9101-310C580611BE}">
   <ds:schemaRefs>
     <ds:schemaRef ds:uri="http://schemas.microsoft.com/office/2006/metadata/contentType"/>
@@ -10848,16 +10864,6 @@
 </ds:datastoreItem>
 </file>
 
-<file path=customXml/itemProps2.xml><?xml version="1.0" encoding="utf-8"?>
-<ds:datastoreItem xmlns:ds="http://schemas.openxmlformats.org/officeDocument/2006/customXml" ds:itemID="{06C0FC12-A96B-4033-90DC-496C404C70D1}">
-  <ds:schemaRefs>
-    <ds:schemaRef ds:uri="http://schemas.microsoft.com/office/2006/metadata/properties"/>
-    <ds:schemaRef ds:uri="http://schemas.microsoft.com/office/infopath/2007/PartnerControls"/>
-    <ds:schemaRef ds:uri="5d5e86c2-1981-49c0-a4c5-18f5e325411d"/>
-  </ds:schemaRefs>
-</ds:datastoreItem>
-</file>
-
 <file path=customXml/itemProps3.xml><?xml version="1.0" encoding="utf-8"?>
 <ds:datastoreItem xmlns:ds="http://schemas.openxmlformats.org/officeDocument/2006/customXml" ds:itemID="{EC315674-D7B8-47E2-BC37-5670892D3199}">
   <ds:schemaRefs>
